--- a/Curso Gas B/10 - UNE 60670 - Tuberias, accesorios y uniones/10 - UNE 60670 - Tuberias, accesorios y uniones - Vídeo 2.pptx
+++ b/Curso Gas B/10 - UNE 60670 - Tuberias, accesorios y uniones/10 - UNE 60670 - Tuberias, accesorios y uniones - Vídeo 2.pptx
@@ -20,6 +20,7 @@
     <p:sldId id="268" r:id="rId20"/>
     <p:sldId id="269" r:id="rId21"/>
     <p:sldId id="270" r:id="rId22"/>
+    <p:sldId id="271" r:id="rId23"/>
   </p:sldIdLst>
   <p:sldSz cx="12191695" cy="6858000" type="screen4x3"/>
   <p:notesSz cx="6858000" cy="9144000"/>
@@ -591,12 +592,12 @@
           <a:lstStyle/>
           <a:p>
             <a:r>
-              <a:t>N1: ¿La batería de contadores del portal también tiene su norma?</a:t>
-            </a:r>
-          </a:p>
-          <a:p>
-            <a:r>
-              <a:t>N2: La tiene, y hay un despiste típico que quiero que evites. Primero los soportes: la pieza que sujeta un contador. Si va dentro de vivienda o local, sigue la norma sesenta mil cuatrocientos noventa y cinco, parte uno; si va a la intemperie, la parte dos de esa misma norma. Y ahora la centralización, que es la batería de contadores del cuarto de contadores de un edificio, esos contadores puestos en fila. Aquí está la trampa: da igual que compres el módulo ya hecho de fábrica, prefabricado, o que lo montes tubo a tubo allí mismo. En los dos casos manda la misma norma, la sesenta mil cuatrocientos noventa. Mucha gente cree que solo aplica a los prefabricados, y no: aplica siempre.</a:t>
+              <a:t>N1: El contador de casa, ¿cuál de los cuatro es?</a:t>
+            </a:r>
+          </a:p>
+          <a:p>
+            <a:r>
+              <a:t>N2: El de casa de toda la vida es el de membrana, también llamado de paredes deformables: mide el gas llenando y vaciando unas cámaras, como un fuelle. Fíjate en que es el único que lleva dos normas: la europea de producto, mil trescientos cincuenta y nueve, y la española de medidas y acabado, sesenta mil quinientos diez. Los otros dos clásicos son para grandes consumos, industria y similares: el de turbina, que mide por un molinillo que gira, y el de pistones. Y la novedad de esta edición es el contador ultrasónico doméstico, que mide el gas con ultrasonidos y no tiene piezas móviles; su norma es la catorce mil doscientos treinta y seis. Un apunte de obra: el contador suele ser propiedad de la distribuidora y va precintado; romper ese precinto sin permiso es un problema serio.</a:t>
             </a:r>
           </a:p>
         </p:txBody>
@@ -666,12 +667,12 @@
           <a:lstStyle/>
           <a:p>
             <a:r>
-              <a:t>N1: ¿Qué le pido a una llave de corte para fiarme de ella?</a:t>
-            </a:r>
-          </a:p>
-          <a:p>
-            <a:r>
-              <a:t>N2: Que cierre siempre que haga falta, sobre todo el día de una avería. Empecemos por las llaves no enterrables, las normales, que van por la norma trescientos treinta y uno. Para diámetros de hasta cien, quédate con dos exigencias fijas. Una, clase de temperatura menos veinte grados: la llave tiene que poder cerrar aunque haga frío, sin agarrotarse. Dos, tiene que poder bloquearse y precintarse en posición de 'cerrado', para que tras cortar en una revisión o emergencia nadie la vuelva a abrir por error. Por encima de cien de diámetro ya no hay llave de bola pequeña normalizada; se ponen de bola grande o de mariposa. Y ojo a una diferencia que se pregunta: una cosa son las llaves no enterrables y otra las enterrables, que tienen su propia norma según sean de plástico o metálicas. No las mezcles: una llave que no cierra cuando hay una fuga no sirve absolutamente de nada.</a:t>
+              <a:t>N1: ¿La batería de contadores del portal también tiene su norma?</a:t>
+            </a:r>
+          </a:p>
+          <a:p>
+            <a:r>
+              <a:t>N2: La tiene, y hay un despiste típico que quiero que evites. Primero los soportes: la pieza que sujeta un contador. Si va dentro de vivienda o local, sigue la norma sesenta mil cuatrocientos noventa y cinco, parte uno; si va a la intemperie, la parte dos de esa misma norma. Y ahora la centralización, que es la batería de contadores del cuarto de contadores de un edificio, esos contadores puestos en fila. Aquí está la trampa: da igual que compres el módulo ya hecho de fábrica, prefabricado, o que lo montes tubo a tubo allí mismo. En los dos casos manda la misma norma, la sesenta mil cuatrocientos noventa. Mucha gente cree que solo aplica a los prefabricados, y no: aplica siempre.</a:t>
             </a:r>
           </a:p>
         </p:txBody>
@@ -741,12 +742,12 @@
           <a:lstStyle/>
           <a:p>
             <a:r>
-              <a:t>N1: El aparato se conecta con un flexible, ¿pero cualquier flexible vale?</a:t>
-            </a:r>
-          </a:p>
-          <a:p>
-            <a:r>
-              <a:t>N2: No, cada flexible tiene su tipo y su norma, y no valen los del agua ni los caseros. Primero, el aparato, la cocina o la caldera, se puede conectar de dos formas, rígida o flexible, según el tipo de aparato, y el detalle de cuál toca lo manda la parte siete. Para los envases de GLP, las bombonas, el tubo flexible que une la salida del envase con la instalación se considera parte de la propia instalación, así que también está regulado. Tienes tres familias: el flexible de goma, que la norma llama elastómero, va por la cincuenta y tres mil quinientos treinta y nueve; el flexible no metálico con armadura, más resistente, por las normas dieciséis mil cuatrocientos treinta y seis; y el flexible metálico, por la catorce mil ochocientos. Cada uno con su longitud máxima, que está en la parte siete. La idea: el flexible es parte de la instalación, no un accesorio suelto que pones a ojo.</a:t>
+              <a:t>N1: ¿Qué le pido a una llave de corte para fiarme de ella?</a:t>
+            </a:r>
+          </a:p>
+          <a:p>
+            <a:r>
+              <a:t>N2: Que cierre siempre que haga falta, sobre todo el día de una avería. Empecemos por las llaves no enterrables, las normales, que van por la norma trescientos treinta y uno. Para diámetros de hasta cien, quédate con dos exigencias fijas. Una, clase de temperatura menos veinte grados: la llave tiene que poder cerrar aunque haga frío, sin agarrotarse. Dos, tiene que poder bloquearse y precintarse en posición de 'cerrado', para que tras cortar en una revisión o emergencia nadie la vuelva a abrir por error. Por encima de cien de diámetro ya no hay llave de bola pequeña normalizada; se ponen de bola grande o de mariposa. Y ojo a una diferencia que se pregunta: una cosa son las llaves no enterrables y otra las enterrables, que tienen su propia norma según sean de plástico o metálicas. No las mezcles: una llave que no cierra cuando hay una fuga no sirve absolutamente de nada.</a:t>
             </a:r>
           </a:p>
         </p:txBody>
@@ -816,12 +817,12 @@
           <a:lstStyle/>
           <a:p>
             <a:r>
-              <a:t>N1: ¿Por qué tanto énfasis con los cero coma ochenta metros del contador?</a:t>
-            </a:r>
-          </a:p>
-          <a:p>
-            <a:r>
-              <a:t>N2: Porque es un dato que cae con número exacto, de los que valen un punto entero en el examen. El flexible que conecta el contador es de acero inoxidable corrugado con conexiones roscadas, ese tubo metálico en forma de acordeón, y va por la norma sesenta mil setecientos trece. Se considera parte de la instalación receptora, y tiene un tope claro de longitud: no puede pasar de cero coma ochenta metros, ochenta centímetros. ¿Por qué un límite? Porque un flexible largo cuelga, se mueve, sufre y acaba fallando; cuanto más corto, más seguro. Y aquí el error que buscan: no lo confundas con los flexibles que conectan un aparato o una bombona de GLP, cuyas longitudes están en la parte siete y son otras. Para el contador, la cifra mágica es cero coma ochenta metros como mucho.</a:t>
+              <a:t>N1: El aparato se conecta con un flexible, ¿pero cualquier flexible vale?</a:t>
+            </a:r>
+          </a:p>
+          <a:p>
+            <a:r>
+              <a:t>N2: No, cada flexible tiene su tipo y su norma, y no valen los del agua ni los caseros. Primero, el aparato, la cocina o la caldera, se puede conectar de dos formas, rígida o flexible, según el tipo de aparato, y el detalle de cuál toca lo manda la parte siete. Para los envases de GLP, las bombonas, el tubo flexible que une la salida del envase con la instalación se considera parte de la propia instalación, así que también está regulado. Tienes tres familias: el flexible de goma, que la norma llama elastómero, va por la cincuenta y tres mil quinientos treinta y nueve; el flexible no metálico con armadura, más resistente, por las normas dieciséis mil cuatrocientos treinta y seis; y el flexible metálico, por la catorce mil ochocientos. Cada uno con su longitud máxima, que está en la parte siete. La idea: el flexible es parte de la instalación, no un accesorio suelto que pones a ojo.</a:t>
             </a:r>
           </a:p>
         </p:txBody>
@@ -891,12 +892,12 @@
           <a:lstStyle/>
           <a:p>
             <a:r>
-              <a:t>N1: ¿Qué es una toma de presión y por qué hay dos clases?</a:t>
-            </a:r>
-          </a:p>
-          <a:p>
-            <a:r>
-              <a:t>N2: La toma de presión es el pinchazo por donde metes el manómetro para medir a qué presión va el gas. Sin ella no puedes comprobar presiones ni en la puesta en servicio ni en una revisión, así que es una pieza de trabajo diario. Su norma es la sesenta mil setecientos diecinueve, y el tipo depende de la presión del tramo, que enlaza con la escalera del principio. La regla es sencilla: hasta ciento cincuenta milibares vale la sencilla, de débil calibre, o una Peterson; por encima de ciento cincuenta milibares solo vale la Peterson, que es más robusta porque tiene que aguantar más presión. Fíjate en que ese corte, ciento cincuenta milibares, es justo el peldaño de cero coma quince bar de nuestra escalera: son la misma cifra en otras unidades. Todo encaja.</a:t>
+              <a:t>N1: ¿Por qué tanto énfasis con los cero coma ochenta metros del contador?</a:t>
+            </a:r>
+          </a:p>
+          <a:p>
+            <a:r>
+              <a:t>N2: Porque es un dato que cae con número exacto, de los que valen un punto entero en el examen. El flexible que conecta el contador es de acero inoxidable corrugado con conexiones roscadas, ese tubo metálico en forma de acordeón, y va por la norma sesenta mil setecientos trece. Se considera parte de la instalación receptora, y tiene un tope claro de longitud: no puede pasar de cero coma ochenta metros, ochenta centímetros. ¿Por qué un límite? Porque un flexible largo cuelga, se mueve, sufre y acaba fallando; cuanto más corto, más seguro. Y aquí el error que buscan: no lo confundas con los flexibles que conectan un aparato o una bombona de GLP, cuyas longitudes están en la parte siete y son otras. Para el contador, la cifra mágica es cero coma ochenta metros como mucho.</a:t>
             </a:r>
           </a:p>
         </p:txBody>
@@ -966,6 +967,81 @@
           <a:lstStyle/>
           <a:p>
             <a:r>
+              <a:t>N1: ¿Qué es una toma de presión y por qué hay dos clases?</a:t>
+            </a:r>
+          </a:p>
+          <a:p>
+            <a:r>
+              <a:t>N2: La toma de presión es el pinchazo por donde metes el manómetro para medir a qué presión va el gas. Sin ella no puedes comprobar presiones ni en la puesta en servicio ni en una revisión, así que es una pieza de trabajo diario. Su norma es la sesenta mil setecientos diecinueve, y el tipo depende de la presión del tramo, que enlaza con la escalera del principio. La regla es sencilla: hasta ciento cincuenta milibares vale la sencilla, de débil calibre, o una Peterson; por encima de ciento cincuenta milibares solo vale la Peterson, que es más robusta porque tiene que aguantar más presión. Fíjate en que ese corte, ciento cincuenta milibares, es justo el peldaño de cero coma quince bar de nuestra escalera: son la misma cifra en otras unidades. Todo encaja.</a:t>
+            </a:r>
+          </a:p>
+        </p:txBody>
+      </p:sp>
+      <p:sp>
+        <p:nvSpPr>
+          <p:cNvPr id="4" name="Slide Number Placeholder 3"/>
+          <p:cNvSpPr>
+            <a:spLocks noGrp="1"/>
+          </p:cNvSpPr>
+          <p:nvPr>
+            <p:ph type="sldNum" idx="5" sz="quarter"/>
+          </p:nvPr>
+        </p:nvSpPr>
+        <p:spPr/>
+      </p:sp>
+    </p:spTree>
+  </p:cSld>
+  <p:clrMapOvr>
+    <a:masterClrMapping/>
+  </p:clrMapOvr>
+</p:notes>
+</file>
+
+<file path=ppt/notesSlides/notesSlide16.xml><?xml version="1.0" encoding="utf-8"?>
+<p:notes xmlns:a="http://schemas.openxmlformats.org/drawingml/2006/main" xmlns:p="http://schemas.openxmlformats.org/presentationml/2006/main" xmlns:r="http://schemas.openxmlformats.org/officeDocument/2006/relationships">
+  <p:cSld>
+    <p:spTree>
+      <p:nvGrpSpPr>
+        <p:cNvPr id="1" name=""/>
+        <p:cNvGrpSpPr/>
+        <p:nvPr/>
+      </p:nvGrpSpPr>
+      <p:grpSpPr>
+        <a:xfrm>
+          <a:off x="0" y="0"/>
+          <a:ext cx="0" cy="0"/>
+          <a:chOff x="0" y="0"/>
+          <a:chExt cx="0" cy="0"/>
+        </a:xfrm>
+      </p:grpSpPr>
+      <p:sp>
+        <p:nvSpPr>
+          <p:cNvPr id="2" name="Slide Image Placeholder 1"/>
+          <p:cNvSpPr>
+            <a:spLocks noGrp="1"/>
+          </p:cNvSpPr>
+          <p:nvPr>
+            <p:ph type="sldImg" idx="2"/>
+          </p:nvPr>
+        </p:nvSpPr>
+        <p:spPr/>
+      </p:sp>
+      <p:sp>
+        <p:nvSpPr>
+          <p:cNvPr id="3" name="Notes Placeholder 2"/>
+          <p:cNvSpPr>
+            <a:spLocks noGrp="1"/>
+          </p:cNvSpPr>
+          <p:nvPr>
+            <p:ph type="body" idx="3" sz="quarter"/>
+          </p:nvPr>
+        </p:nvSpPr>
+        <p:spPr/>
+        <p:txBody>
+          <a:bodyPr/>
+          <a:lstStyle/>
+          <a:p>
+            <a:r>
               <a:t>N1: Segundo vídeo cerrado. ¿Cómo lo ordeno todo en la cabeza?</a:t>
             </a:r>
           </a:p>
@@ -1124,16 +1200,7 @@
         <p:txBody>
           <a:bodyPr/>
           <a:lstStyle/>
-          <a:p>
-            <a:r>
-              <a:t>N1: ¿Qué es eso de nombrar un tramo 'por su MOP'?</a:t>
-            </a:r>
-          </a:p>
-          <a:p>
-            <a:r>
-              <a:t>N2: Vamos despacio, que esto es la base de todo el vídeo. MOP, ya lo sabes, es la presión máxima a la que trabaja un tramo. Pues la norma agrupa las instalaciones en cinco escalones según esa presión, y a cada escalón le pone nombre por su valor de arriba. Un ejemplo lo aclara: un tramo que va de cero coma cuatro a dos bar se llama 'MOP dos', porque dos es su techo. Los cinco cortes que tienes que grabar, de mayor a menor, son cinco, dos, cero coma cuatro, cero coma quince y cero coma cero cinco bar. Imagínatelo como una escalera de cinco peldaños. ¿Por qué es tan importante? Porque casi todo lo que viene después, los reguladores, las tomas de presión, las válvulas, se elige mirando en qué peldaño estás. Sabiendo la escalera, colocas cualquier pieza.</a:t>
-            </a:r>
-          </a:p>
+          <a:p/>
         </p:txBody>
       </p:sp>
       <p:sp>
@@ -1201,12 +1268,12 @@
           <a:lstStyle/>
           <a:p>
             <a:r>
-              <a:t>N1: ¿Qué pinta un 'tallo' en la instalación?</a:t>
-            </a:r>
-          </a:p>
-          <a:p>
-            <a:r>
-              <a:t>N2: El tallo es la pieza que casa dos mundos: el tubo de plástico que viene enterrado de la calle y el tubo metálico que sube a la vista hasta el armario del contador. Es un enganche de transición. Se fabrica combinando el polietileno con el metal de destino: lo tienes en pe-cobre, pe-acero, pe-inoxidable y, novedad de esta edición, pe-multicapa. Todos según la norma sesenta mil cuatrocientos cinco. Y aquí vuelve la lección del vídeo anterior: como el polietileno no soporta el sol, la parte de plástico del tallo tiene que ir siempre protegida, enterrada o dentro de su vaina de transición, nunca al aire. Un tallo con el plástico asomando al sol es la misma fuga por rayos ultravioleta de la que ya hablamos.</a:t>
+              <a:t>N1: ¿Qué es eso de nombrar un tramo 'por su MOP'?</a:t>
+            </a:r>
+          </a:p>
+          <a:p>
+            <a:r>
+              <a:t>N2: Vamos despacio, que esto es la base de todo el vídeo. MOP, ya lo sabes, es la presión máxima a la que trabaja un tramo. Pues la norma agrupa las instalaciones en cinco escalones según esa presión, y a cada escalón le pone nombre por su valor de arriba. Un ejemplo lo aclara: un tramo que va de cero coma cuatro a dos bar se llama 'MOP dos', porque dos es su techo. Los cinco cortes que tienes que grabar, de mayor a menor, son cinco, dos, cero coma cuatro, cero coma quince y cero coma cero cinco bar. Imagínatelo como una escalera de cinco peldaños. ¿Por qué es tan importante? Porque casi todo lo que viene después, los reguladores, las tomas de presión, las válvulas, se elige mirando en qué peldaño estás. Sabiendo la escalera, colocas cualquier pieza.</a:t>
             </a:r>
           </a:p>
         </p:txBody>
@@ -1276,12 +1343,12 @@
           <a:lstStyle/>
           <a:p>
             <a:r>
-              <a:t>N1: Estación, conjunto, regulador... ¿no es todo lo mismo?</a:t>
-            </a:r>
-          </a:p>
-          <a:p>
-            <a:r>
-              <a:t>N2: Se parecen, pero conviene separarlos. Estamos en gas natural, lo que la norma llama segunda familia. La estación de regulación es la instalación grande que baja la presión de la red; va con la norma sesenta mil seiscientos veinte. El conjunto de regulación es la caja completa que te regula, y a veces también mide, el gas antes de entrar; se clasifica por la presión que le entra, su MOPe. Puede ser un conjunto de MOPe cinco, de cero coma cuatro o de cero coma quince, y cada uno tiene su norma de la serie sesenta mil cuatrocientos cuatro. Quédate con la idea general: el conjunto es la caja; dentro de esa caja está el regulador, que es la pieza concreta que baja la presión. Ahora vamos a esa pieza.</a:t>
+              <a:t>N1: ¿Qué pinta un 'tallo' en la instalación?</a:t>
+            </a:r>
+          </a:p>
+          <a:p>
+            <a:r>
+              <a:t>N2: El tallo es la pieza que casa dos mundos: el tubo de plástico que viene enterrado de la calle y el tubo metálico que sube a la vista hasta el armario del contador. Es un enganche de transición. Se fabrica combinando el polietileno con el metal de destino: lo tienes en pe-cobre, pe-acero, pe-inoxidable y, novedad de esta edición, pe-multicapa. Todos según la norma sesenta mil cuatrocientos cinco. Y aquí vuelve la lección del vídeo anterior: como el polietileno no soporta el sol, la parte de plástico del tallo tiene que ir siempre protegida, enterrada o dentro de su vaina de transición, nunca al aire. Un tallo con el plástico asomando al sol es la misma fuga por rayos ultravioleta de la que ya hablamos.</a:t>
             </a:r>
           </a:p>
         </p:txBody>
@@ -1351,12 +1418,12 @@
           <a:lstStyle/>
           <a:p>
             <a:r>
-              <a:t>N1: ¿Cómo sé qué regulador toca? Son tres normas parecidas.</a:t>
-            </a:r>
-          </a:p>
-          <a:p>
-            <a:r>
-              <a:t>N2: No memorices las normas sueltas; memoriza el escalón de presión, que es como de verdad se elige. Un regulador se define por dos datos: qué presión le entra y qué presión te da a la salida. Con eso, la chuleta es sencilla. Si entra cero coma cuatro y sale cero coma uno, es la sesenta mil cuatrocientos dos, parte uno. Si entra entre cero coma quince y cero coma cuatro y sale cero coma quince, es la misma sesenta mil cuatrocientos dos, pero parte dos. Y si entra fuerte, entre cero coma cuatro y cinco bar, y sale como mucho cero coma cuatro, es la sesenta mil cuatrocientos once. ¿Por qué importa acertar? Porque un regulador mal elegido o descalibrado le da al aparato una presión que no le toca, y eso es llama amarilla, hollín y mala combustión. Casi toda avería de gas empieza en una presión mal dada.</a:t>
+              <a:t>N1: Estación, conjunto, regulador... ¿no es todo lo mismo?</a:t>
+            </a:r>
+          </a:p>
+          <a:p>
+            <a:r>
+              <a:t>N2: Se parecen, pero conviene separarlos. Estamos en gas natural, lo que la norma llama segunda familia. La estación de regulación es la instalación grande que baja la presión de la red; va con la norma sesenta mil seiscientos veinte. El conjunto de regulación es la caja completa que te regula, y a veces también mide, el gas antes de entrar; se clasifica por la presión que le entra, su MOPe. Puede ser un conjunto de MOPe cinco, de cero coma cuatro o de cero coma quince, y cada uno tiene su norma de la serie sesenta mil cuatrocientos cuatro. Quédate con la idea general: el conjunto es la caja; dentro de esa caja está el regulador, que es la pieza concreta que baja la presión. Ahora vamos a esa pieza.</a:t>
             </a:r>
           </a:p>
         </p:txBody>
@@ -1426,12 +1493,12 @@
           <a:lstStyle/>
           <a:p>
             <a:r>
-              <a:t>N1: En butano y propano, ¿otra vez aparece lo de los 15 kilos?</a:t>
-            </a:r>
-          </a:p>
-          <a:p>
-            <a:r>
-              <a:t>N2: Sí, y no es casualidad: el envase de quince kilos es la frontera de siempre en el GLP. Estamos en tercera familia, butano y propano. Los conjuntos de regulación que trabajan a cinco bar de entrada van por la norma sesenta mil cuatrocientos cuatro, parte uno. Y los reguladores, tanto los de instalaciones grandes, red o depósito o envases de más de quince kilos, como los que se acoplan a las bombonas de quince kilos o menos, van todos a la misma norma, la dieciséis mil ciento veintinueve, que es la que juntó todas las normas viejas de reguladores de GLP. Solo hay una pieza aparte: el adaptador de salida libre, ese que rosca directo en la bombona pequeña de hasta quince kilos, que va por la norma sesenta mil cuatrocientos ocho. Resumen: casi todo GLP, dieciséis mil ciento veintinueve; el adaptador de la botella, sesenta mil cuatrocientos ocho.</a:t>
+              <a:t>N1: ¿Cómo sé qué regulador toca? Son tres normas parecidas.</a:t>
+            </a:r>
+          </a:p>
+          <a:p>
+            <a:r>
+              <a:t>N2: No memorices las normas sueltas; memoriza el escalón de presión, que es como de verdad se elige. Un regulador se define por dos datos: qué presión le entra y qué presión te da a la salida. Con eso, la chuleta es sencilla. Si entra cero coma cuatro y sale cero coma uno, es la sesenta mil cuatrocientos dos, parte uno. Si entra entre cero coma quince y cero coma cuatro y sale cero coma quince, es la misma sesenta mil cuatrocientos dos, pero parte dos. Y si entra fuerte, entre cero coma cuatro y cinco bar, y sale como mucho cero coma cuatro, es la sesenta mil cuatrocientos once. ¿Por qué importa acertar? Porque un regulador mal elegido o descalibrado le da al aparato una presión que no le toca, y eso es llama amarilla, hollín y mala combustión. Casi toda avería de gas empieza en una presión mal dada.</a:t>
             </a:r>
           </a:p>
         </p:txBody>
@@ -1501,12 +1568,12 @@
           <a:lstStyle/>
           <a:p>
             <a:r>
-              <a:t>N1: ¿Para qué dos válvulas de seguridad distintas?</a:t>
-            </a:r>
-          </a:p>
-          <a:p>
-            <a:r>
-              <a:t>N2: Porque vigilan peligros opuestos, y por eso les llamo los dos guardianes. La válvula de mínima corta el paso cuando la presión baja demasiado; y que la presión caiga de repente suele ser mala señal, indicio de una fuga aguas abajo o de que se acabó el gas. Las de caudal pequeño, hasta cuatro coma ocho metros cúbicos por hora, van por la norma sesenta mil cuatrocientos tres. La válvula de máxima hace lo contrario: corta cuando la presión sube de más, típicamente porque un regulador ha fallado. Y aquí dos detalles que caen en examen: la de máxima es siempre de rearme manual, es decir, no se rearma sola; obliga a que alguien vaya, mire por qué saltó y la reponga a mano, para que nadie ignore el problema. Y sus tornillos de tarado van precintados, para que nadie los toque. Truco de obra: si el cliente dice 'el gas se me corta solo', antes de culpar al aparato, mira si ha saltado un guardián; ahí puede estar la fuga.</a:t>
+              <a:t>N1: En butano y propano, ¿otra vez aparece lo de los 15 kilos?</a:t>
+            </a:r>
+          </a:p>
+          <a:p>
+            <a:r>
+              <a:t>N2: Sí, y no es casualidad: el envase de quince kilos es la frontera de siempre en el GLP. Estamos en tercera familia, butano y propano. Los conjuntos de regulación que trabajan a cinco bar de entrada van por la norma sesenta mil cuatrocientos cuatro, parte uno. Y los reguladores, tanto los de instalaciones grandes, red o depósito o envases de más de quince kilos, como los que se acoplan a las bombonas de quince kilos o menos, van todos a la misma norma, la dieciséis mil ciento veintinueve, que es la que juntó todas las normas viejas de reguladores de GLP. Solo hay una pieza aparte: el adaptador de salida libre, ese que rosca directo en la bombona pequeña de hasta quince kilos, que va por la norma sesenta mil cuatrocientos ocho. Resumen: casi todo GLP, dieciséis mil ciento veintinueve; el adaptador de la botella, sesenta mil cuatrocientos ocho.</a:t>
             </a:r>
           </a:p>
         </p:txBody>
@@ -1576,12 +1643,12 @@
           <a:lstStyle/>
           <a:p>
             <a:r>
-              <a:t>N1: El contador de casa, ¿cuál de los cuatro es?</a:t>
-            </a:r>
-          </a:p>
-          <a:p>
-            <a:r>
-              <a:t>N2: El de casa de toda la vida es el de membrana, también llamado de paredes deformables: mide el gas llenando y vaciando unas cámaras, como un fuelle. Fíjate en que es el único que lleva dos normas: la europea de producto, mil trescientos cincuenta y nueve, y la española de medidas y acabado, sesenta mil quinientos diez. Los otros dos clásicos son para grandes consumos, industria y similares: el de turbina, que mide por un molinillo que gira, y el de pistones. Y la novedad de esta edición es el contador ultrasónico doméstico, que mide el gas con ultrasonidos y no tiene piezas móviles; su norma es la catorce mil doscientos treinta y seis. Un apunte de obra: el contador suele ser propiedad de la distribuidora y va precintado; romper ese precinto sin permiso es un problema serio.</a:t>
+              <a:t>N1: ¿Para qué dos válvulas de seguridad distintas?</a:t>
+            </a:r>
+          </a:p>
+          <a:p>
+            <a:r>
+              <a:t>N2: Porque vigilan peligros opuestos, y por eso les llamo los dos guardianes. La válvula de mínima corta el paso cuando la presión baja demasiado; y que la presión caiga de repente suele ser mala señal, indicio de una fuga aguas abajo o de que se acabó el gas. Las de caudal pequeño, hasta cuatro coma ocho metros cúbicos por hora, van por la norma sesenta mil cuatrocientos tres. La válvula de máxima hace lo contrario: corta cuando la presión sube de más, típicamente porque un regulador ha fallado. Y aquí dos detalles que caen en examen: la de máxima es siempre de rearme manual, es decir, no se rearma sola; obliga a que alguien vaya, mire por qué saltó y la reponga a mano, para que nadie ignore el problema. Y sus tornillos de tarado van precintados, para que nadie los toque. Truco de obra: si el cliente dice 'el gas se me corta solo', antes de culpar al aparato, mira si ha saltado un guardián; ahí puede estar la fuga.</a:t>
             </a:r>
           </a:p>
         </p:txBody>
@@ -4656,7 +4723,7 @@
             <a:r>
               <a:rPr sz="1400" b="1" i="0">
                 <a:solidFill>
-                  <a:srgbClr val="CADCFC"/>
+                  <a:srgbClr val="F4A24C"/>
                 </a:solidFill>
                 <a:latin typeface="Montserrat"/>
               </a:rPr>
@@ -4667,13 +4734,57 @@
       </p:sp>
       <p:sp>
         <p:nvSpPr>
-          <p:cNvPr id="4" name="TextBox 3"/>
+          <p:cNvPr id="4" name="Rounded Rectangle 3"/>
+          <p:cNvSpPr/>
+          <p:nvPr/>
+        </p:nvSpPr>
+        <p:spPr>
+          <a:xfrm>
+            <a:off x="868680" y="2057400"/>
+            <a:ext cx="1463040" cy="82296"/>
+          </a:xfrm>
+          <a:prstGeom prst="roundRect">
+            <a:avLst/>
+          </a:prstGeom>
+          <a:solidFill>
+            <a:srgbClr val="E8801A"/>
+          </a:solidFill>
+          <a:ln>
+            <a:noFill/>
+          </a:ln>
+          <a:effectLst/>
+        </p:spPr>
+        <p:style>
+          <a:lnRef idx="1">
+            <a:schemeClr val="accent1"/>
+          </a:lnRef>
+          <a:fillRef idx="3">
+            <a:schemeClr val="accent1"/>
+          </a:fillRef>
+          <a:effectRef idx="2">
+            <a:schemeClr val="accent1"/>
+          </a:effectRef>
+          <a:fontRef idx="minor">
+            <a:schemeClr val="lt1"/>
+          </a:fontRef>
+        </p:style>
+        <p:txBody>
+          <a:bodyPr rtlCol="0" anchor="ctr"/>
+          <a:lstStyle/>
+          <a:p>
+            <a:pPr algn="ctr"/>
+          </a:p>
+        </p:txBody>
+      </p:sp>
+      <p:sp>
+        <p:nvSpPr>
+          <p:cNvPr id="5" name="TextBox 4"/>
           <p:cNvSpPr txBox="1"/>
           <p:nvPr/>
         </p:nvSpPr>
         <p:spPr>
           <a:xfrm>
-            <a:off x="822960" y="2194560"/>
+            <a:off x="822960" y="2286000"/>
             <a:ext cx="10515600" cy="2011680"/>
           </a:xfrm>
           <a:prstGeom prst="rect">
@@ -4712,7 +4823,7 @@
       </p:sp>
       <p:sp>
         <p:nvSpPr>
-          <p:cNvPr id="5" name="TextBox 4"/>
+          <p:cNvPr id="6" name="TextBox 5"/>
           <p:cNvSpPr txBox="1"/>
           <p:nvPr/>
         </p:nvSpPr>
@@ -4836,7 +4947,7 @@
                 </a:solidFill>
                 <a:latin typeface="Montserrat"/>
               </a:rPr>
-              <a:t>010 / 015</a:t>
+              <a:t>010 / 016</a:t>
             </a:r>
           </a:p>
         </p:txBody>
@@ -4884,7 +4995,7 @@
         <p:spPr>
           <a:xfrm>
             <a:off x="822960" y="457200"/>
-            <a:ext cx="8229600" cy="365760"/>
+            <a:ext cx="10058400" cy="365760"/>
           </a:xfrm>
           <a:prstGeom prst="rect">
             <a:avLst/>
@@ -4898,9 +5009,9 @@
           <a:lstStyle/>
           <a:p>
             <a:r>
-              <a:rPr sz="1200" b="1" i="0">
-                <a:solidFill>
-                  <a:srgbClr val="64748B"/>
+              <a:rPr sz="1300" b="1" i="0">
+                <a:solidFill>
+                  <a:srgbClr val="E8801A"/>
                 </a:solidFill>
                 <a:latin typeface="Montserrat"/>
               </a:rPr>
@@ -4932,26 +5043,70 @@
           <a:lstStyle/>
           <a:p>
             <a:r>
-              <a:rPr sz="2700" b="1" i="0">
+              <a:rPr sz="2800" b="1" i="0">
                 <a:solidFill>
                   <a:srgbClr val="1E2761"/>
                 </a:solidFill>
                 <a:latin typeface="Montserrat"/>
               </a:rPr>
-              <a:t>Soportes y centralización</a:t>
-            </a:r>
-          </a:p>
-        </p:txBody>
-      </p:sp>
-      <p:sp>
-        <p:nvSpPr>
-          <p:cNvPr id="7" name="TextBox 6"/>
+              <a:t>Cuatro tipos de contador</a:t>
+            </a:r>
+          </a:p>
+        </p:txBody>
+      </p:sp>
+      <p:sp>
+        <p:nvSpPr>
+          <p:cNvPr id="7" name="Rounded Rectangle 6"/>
+          <p:cNvSpPr/>
+          <p:nvPr/>
+        </p:nvSpPr>
+        <p:spPr>
+          <a:xfrm>
+            <a:off x="868680" y="1627632"/>
+            <a:ext cx="2011680" cy="73152"/>
+          </a:xfrm>
+          <a:prstGeom prst="roundRect">
+            <a:avLst/>
+          </a:prstGeom>
+          <a:solidFill>
+            <a:srgbClr val="E8801A"/>
+          </a:solidFill>
+          <a:ln>
+            <a:noFill/>
+          </a:ln>
+          <a:effectLst/>
+        </p:spPr>
+        <p:style>
+          <a:lnRef idx="1">
+            <a:schemeClr val="accent1"/>
+          </a:lnRef>
+          <a:fillRef idx="3">
+            <a:schemeClr val="accent1"/>
+          </a:fillRef>
+          <a:effectRef idx="2">
+            <a:schemeClr val="accent1"/>
+          </a:effectRef>
+          <a:fontRef idx="minor">
+            <a:schemeClr val="lt1"/>
+          </a:fontRef>
+        </p:style>
+        <p:txBody>
+          <a:bodyPr rtlCol="0" anchor="ctr"/>
+          <a:lstStyle/>
+          <a:p>
+            <a:pPr algn="ctr"/>
+          </a:p>
+        </p:txBody>
+      </p:sp>
+      <p:sp>
+        <p:nvSpPr>
+          <p:cNvPr id="8" name="TextBox 7"/>
           <p:cNvSpPr txBox="1"/>
           <p:nvPr/>
         </p:nvSpPr>
         <p:spPr>
           <a:xfrm>
-            <a:off x="822960" y="1920240"/>
+            <a:off x="822960" y="1965960"/>
             <a:ext cx="4983480" cy="4206240"/>
           </a:xfrm>
           <a:prstGeom prst="rect">
@@ -4967,17 +5122,17 @@
           <a:p>
             <a:pPr>
               <a:spcAft>
-                <a:spcPts val="1000"/>
+                <a:spcPts val="1100"/>
               </a:spcAft>
             </a:pPr>
             <a:r>
               <a:rPr sz="1600" b="1" i="0">
                 <a:solidFill>
-                  <a:srgbClr val="2E3A80"/>
-                </a:solidFill>
-                <a:latin typeface="Montserrat"/>
-              </a:rPr>
-              <a:t>•  </a:t>
+                  <a:srgbClr val="E8801A"/>
+                </a:solidFill>
+                <a:latin typeface="Montserrat"/>
+              </a:rPr>
+              <a:t>▸  </a:t>
             </a:r>
             <a:r>
               <a:rPr sz="1600" b="0" i="0">
@@ -4986,23 +5141,23 @@
                 </a:solidFill>
                 <a:latin typeface="Montserrat"/>
               </a:rPr>
-              <a:t>Soporte interior → UNE 60495-1</a:t>
+              <a:t>Membrana → UNE-EN 1359 y UNE 60510</a:t>
             </a:r>
           </a:p>
           <a:p>
             <a:pPr>
               <a:spcAft>
-                <a:spcPts val="1000"/>
+                <a:spcPts val="1100"/>
               </a:spcAft>
             </a:pPr>
             <a:r>
               <a:rPr sz="1600" b="1" i="0">
                 <a:solidFill>
-                  <a:srgbClr val="2E3A80"/>
-                </a:solidFill>
-                <a:latin typeface="Montserrat"/>
-              </a:rPr>
-              <a:t>•  </a:t>
+                  <a:srgbClr val="E8801A"/>
+                </a:solidFill>
+                <a:latin typeface="Montserrat"/>
+              </a:rPr>
+              <a:t>▸  </a:t>
             </a:r>
             <a:r>
               <a:rPr sz="1600" b="0" i="0">
@@ -5011,23 +5166,23 @@
                 </a:solidFill>
                 <a:latin typeface="Montserrat"/>
               </a:rPr>
-              <a:t>Soporte a la intemperie → UNE 60495-2</a:t>
+              <a:t>Turbina → UNE-EN 12261</a:t>
             </a:r>
           </a:p>
           <a:p>
             <a:pPr>
               <a:spcAft>
-                <a:spcPts val="1000"/>
+                <a:spcPts val="1100"/>
               </a:spcAft>
             </a:pPr>
             <a:r>
               <a:rPr sz="1600" b="1" i="0">
                 <a:solidFill>
-                  <a:srgbClr val="2E3A80"/>
-                </a:solidFill>
-                <a:latin typeface="Montserrat"/>
-              </a:rPr>
-              <a:t>•  </a:t>
+                  <a:srgbClr val="E8801A"/>
+                </a:solidFill>
+                <a:latin typeface="Montserrat"/>
+              </a:rPr>
+              <a:t>▸  </a:t>
             </a:r>
             <a:r>
               <a:rPr sz="1600" b="0" i="0">
@@ -5036,23 +5191,23 @@
                 </a:solidFill>
                 <a:latin typeface="Montserrat"/>
               </a:rPr>
-              <a:t>Batería de contadores → UNE 60490</a:t>
+              <a:t>Pistones → UNE-EN 12480</a:t>
             </a:r>
           </a:p>
           <a:p>
             <a:pPr>
               <a:spcAft>
-                <a:spcPts val="1000"/>
+                <a:spcPts val="1100"/>
               </a:spcAft>
             </a:pPr>
             <a:r>
               <a:rPr sz="1600" b="1" i="0">
                 <a:solidFill>
-                  <a:srgbClr val="2E3A80"/>
-                </a:solidFill>
-                <a:latin typeface="Montserrat"/>
-              </a:rPr>
-              <a:t>•  </a:t>
+                  <a:srgbClr val="E8801A"/>
+                </a:solidFill>
+                <a:latin typeface="Montserrat"/>
+              </a:rPr>
+              <a:t>▸  </a:t>
             </a:r>
             <a:r>
               <a:rPr sz="1600" b="0" i="0">
@@ -5061,14 +5216,14 @@
                 </a:solidFill>
                 <a:latin typeface="Montserrat"/>
               </a:rPr>
-              <a:t>Prefabricada o montada: misma norma</a:t>
-            </a:r>
-          </a:p>
-        </p:txBody>
-      </p:sp>
-      <p:sp>
-        <p:nvSpPr>
-          <p:cNvPr id="8" name="imgph" descr="IMGQ:gas meter battery cabinet building"/>
+              <a:t>Ultrasónico doméstico → UNE-EN 14236</a:t>
+            </a:r>
+          </a:p>
+        </p:txBody>
+      </p:sp>
+      <p:sp>
+        <p:nvSpPr>
+          <p:cNvPr id="9" name="imgph" descr="IMGQ:domestic gas meter diaphragm cabinet"/>
           <p:cNvSpPr/>
           <p:nvPr/>
         </p:nvSpPr>
@@ -5114,7 +5269,7 @@
       </p:sp>
       <p:sp>
         <p:nvSpPr>
-          <p:cNvPr id="9" name="TextBox 8"/>
+          <p:cNvPr id="10" name="TextBox 9"/>
           <p:cNvSpPr txBox="1"/>
           <p:nvPr/>
         </p:nvSpPr>
@@ -5154,7 +5309,7 @@
                 </a:solidFill>
                 <a:latin typeface="Montserrat"/>
               </a:rPr>
-              <a:t>gas meter battery cabinet building</a:t>
+              <a:t>domestic gas meter diaphragm cabinet</a:t>
             </a:r>
           </a:p>
         </p:txBody>
@@ -5251,7 +5406,7 @@
                 </a:solidFill>
                 <a:latin typeface="Montserrat"/>
               </a:rPr>
-              <a:t>011 / 015</a:t>
+              <a:t>011 / 016</a:t>
             </a:r>
           </a:p>
         </p:txBody>
@@ -5299,7 +5454,7 @@
         <p:spPr>
           <a:xfrm>
             <a:off x="822960" y="457200"/>
-            <a:ext cx="8229600" cy="365760"/>
+            <a:ext cx="10058400" cy="365760"/>
           </a:xfrm>
           <a:prstGeom prst="rect">
             <a:avLst/>
@@ -5313,13 +5468,13 @@
           <a:lstStyle/>
           <a:p>
             <a:r>
-              <a:rPr sz="1200" b="1" i="0">
-                <a:solidFill>
-                  <a:srgbClr val="64748B"/>
-                </a:solidFill>
-                <a:latin typeface="Montserrat"/>
-              </a:rPr>
-              <a:t>ELEMENTOS · LLAVES DE CORTE</a:t>
+              <a:rPr sz="1300" b="1" i="0">
+                <a:solidFill>
+                  <a:srgbClr val="E8801A"/>
+                </a:solidFill>
+                <a:latin typeface="Montserrat"/>
+              </a:rPr>
+              <a:t>ELEMENTOS · CONTADORES</a:t>
             </a:r>
           </a:p>
         </p:txBody>
@@ -5347,26 +5502,70 @@
           <a:lstStyle/>
           <a:p>
             <a:r>
-              <a:rPr sz="2700" b="1" i="0">
+              <a:rPr sz="2800" b="1" i="0">
                 <a:solidFill>
                   <a:srgbClr val="1E2761"/>
                 </a:solidFill>
                 <a:latin typeface="Montserrat"/>
               </a:rPr>
-              <a:t>Llaves: cerrar con seguridad</a:t>
-            </a:r>
-          </a:p>
-        </p:txBody>
-      </p:sp>
-      <p:sp>
-        <p:nvSpPr>
-          <p:cNvPr id="7" name="TextBox 6"/>
+              <a:t>Soportes y centralización</a:t>
+            </a:r>
+          </a:p>
+        </p:txBody>
+      </p:sp>
+      <p:sp>
+        <p:nvSpPr>
+          <p:cNvPr id="7" name="Rounded Rectangle 6"/>
+          <p:cNvSpPr/>
+          <p:nvPr/>
+        </p:nvSpPr>
+        <p:spPr>
+          <a:xfrm>
+            <a:off x="868680" y="1627632"/>
+            <a:ext cx="2011680" cy="73152"/>
+          </a:xfrm>
+          <a:prstGeom prst="roundRect">
+            <a:avLst/>
+          </a:prstGeom>
+          <a:solidFill>
+            <a:srgbClr val="E8801A"/>
+          </a:solidFill>
+          <a:ln>
+            <a:noFill/>
+          </a:ln>
+          <a:effectLst/>
+        </p:spPr>
+        <p:style>
+          <a:lnRef idx="1">
+            <a:schemeClr val="accent1"/>
+          </a:lnRef>
+          <a:fillRef idx="3">
+            <a:schemeClr val="accent1"/>
+          </a:fillRef>
+          <a:effectRef idx="2">
+            <a:schemeClr val="accent1"/>
+          </a:effectRef>
+          <a:fontRef idx="minor">
+            <a:schemeClr val="lt1"/>
+          </a:fontRef>
+        </p:style>
+        <p:txBody>
+          <a:bodyPr rtlCol="0" anchor="ctr"/>
+          <a:lstStyle/>
+          <a:p>
+            <a:pPr algn="ctr"/>
+          </a:p>
+        </p:txBody>
+      </p:sp>
+      <p:sp>
+        <p:nvSpPr>
+          <p:cNvPr id="8" name="TextBox 7"/>
           <p:cNvSpPr txBox="1"/>
           <p:nvPr/>
         </p:nvSpPr>
         <p:spPr>
           <a:xfrm>
-            <a:off x="822960" y="1920240"/>
+            <a:off x="822960" y="1965960"/>
             <a:ext cx="4983480" cy="4206240"/>
           </a:xfrm>
           <a:prstGeom prst="rect">
@@ -5382,17 +5581,17 @@
           <a:p>
             <a:pPr>
               <a:spcAft>
-                <a:spcPts val="1000"/>
+                <a:spcPts val="1100"/>
               </a:spcAft>
             </a:pPr>
             <a:r>
               <a:rPr sz="1600" b="1" i="0">
                 <a:solidFill>
-                  <a:srgbClr val="2E3A80"/>
-                </a:solidFill>
-                <a:latin typeface="Montserrat"/>
-              </a:rPr>
-              <a:t>•  </a:t>
+                  <a:srgbClr val="E8801A"/>
+                </a:solidFill>
+                <a:latin typeface="Montserrat"/>
+              </a:rPr>
+              <a:t>▸  </a:t>
             </a:r>
             <a:r>
               <a:rPr sz="1600" b="0" i="0">
@@ -5401,23 +5600,23 @@
                 </a:solidFill>
                 <a:latin typeface="Montserrat"/>
               </a:rPr>
-              <a:t>No enterrables → UNE-EN 331</a:t>
+              <a:t>Soporte interior → UNE 60495-1</a:t>
             </a:r>
           </a:p>
           <a:p>
             <a:pPr>
               <a:spcAft>
-                <a:spcPts val="1000"/>
+                <a:spcPts val="1100"/>
               </a:spcAft>
             </a:pPr>
             <a:r>
               <a:rPr sz="1600" b="1" i="0">
                 <a:solidFill>
-                  <a:srgbClr val="2E3A80"/>
-                </a:solidFill>
-                <a:latin typeface="Montserrat"/>
-              </a:rPr>
-              <a:t>•  </a:t>
+                  <a:srgbClr val="E8801A"/>
+                </a:solidFill>
+                <a:latin typeface="Montserrat"/>
+              </a:rPr>
+              <a:t>▸  </a:t>
             </a:r>
             <a:r>
               <a:rPr sz="1600" b="0" i="0">
@@ -5426,23 +5625,23 @@
                 </a:solidFill>
                 <a:latin typeface="Montserrat"/>
               </a:rPr>
-              <a:t>DN ≤ 100: clase de temperatura −20 °C</a:t>
+              <a:t>Soporte a la intemperie → UNE 60495-2</a:t>
             </a:r>
           </a:p>
           <a:p>
             <a:pPr>
               <a:spcAft>
-                <a:spcPts val="1000"/>
+                <a:spcPts val="1100"/>
               </a:spcAft>
             </a:pPr>
             <a:r>
               <a:rPr sz="1600" b="1" i="0">
                 <a:solidFill>
-                  <a:srgbClr val="2E3A80"/>
-                </a:solidFill>
-                <a:latin typeface="Montserrat"/>
-              </a:rPr>
-              <a:t>•  </a:t>
+                  <a:srgbClr val="E8801A"/>
+                </a:solidFill>
+                <a:latin typeface="Montserrat"/>
+              </a:rPr>
+              <a:t>▸  </a:t>
             </a:r>
             <a:r>
               <a:rPr sz="1600" b="0" i="0">
@@ -5451,23 +5650,23 @@
                 </a:solidFill>
                 <a:latin typeface="Montserrat"/>
               </a:rPr>
-              <a:t>Bloqueables y precintables en 'cerrado'</a:t>
+              <a:t>Batería de contadores → UNE 60490</a:t>
             </a:r>
           </a:p>
           <a:p>
             <a:pPr>
               <a:spcAft>
-                <a:spcPts val="1000"/>
+                <a:spcPts val="1100"/>
               </a:spcAft>
             </a:pPr>
             <a:r>
               <a:rPr sz="1600" b="1" i="0">
                 <a:solidFill>
-                  <a:srgbClr val="2E3A80"/>
-                </a:solidFill>
-                <a:latin typeface="Montserrat"/>
-              </a:rPr>
-              <a:t>•  </a:t>
+                  <a:srgbClr val="E8801A"/>
+                </a:solidFill>
+                <a:latin typeface="Montserrat"/>
+              </a:rPr>
+              <a:t>▸  </a:t>
             </a:r>
             <a:r>
               <a:rPr sz="1600" b="0" i="0">
@@ -5476,14 +5675,14 @@
                 </a:solidFill>
                 <a:latin typeface="Montserrat"/>
               </a:rPr>
-              <a:t>Enterrables: PE UNE-EN 1555-4 / metal UNE-EN 13774</a:t>
-            </a:r>
-          </a:p>
-        </p:txBody>
-      </p:sp>
-      <p:sp>
-        <p:nvSpPr>
-          <p:cNvPr id="8" name="imgph" descr="IMGQ:gas ball valve shut off yellow"/>
+              <a:t>Prefabricada o montada: misma norma</a:t>
+            </a:r>
+          </a:p>
+        </p:txBody>
+      </p:sp>
+      <p:sp>
+        <p:nvSpPr>
+          <p:cNvPr id="9" name="imgph" descr="IMGQ:gas meter battery cabinet building"/>
           <p:cNvSpPr/>
           <p:nvPr/>
         </p:nvSpPr>
@@ -5529,7 +5728,7 @@
       </p:sp>
       <p:sp>
         <p:nvSpPr>
-          <p:cNvPr id="9" name="TextBox 8"/>
+          <p:cNvPr id="10" name="TextBox 9"/>
           <p:cNvSpPr txBox="1"/>
           <p:nvPr/>
         </p:nvSpPr>
@@ -5569,7 +5768,7 @@
                 </a:solidFill>
                 <a:latin typeface="Montserrat"/>
               </a:rPr>
-              <a:t>gas ball valve shut off yellow</a:t>
+              <a:t>gas meter battery cabinet building</a:t>
             </a:r>
           </a:p>
         </p:txBody>
@@ -5666,7 +5865,7 @@
                 </a:solidFill>
                 <a:latin typeface="Montserrat"/>
               </a:rPr>
-              <a:t>012 / 015</a:t>
+              <a:t>012 / 016</a:t>
             </a:r>
           </a:p>
         </p:txBody>
@@ -5714,7 +5913,7 @@
         <p:spPr>
           <a:xfrm>
             <a:off x="822960" y="457200"/>
-            <a:ext cx="8229600" cy="365760"/>
+            <a:ext cx="10058400" cy="365760"/>
           </a:xfrm>
           <a:prstGeom prst="rect">
             <a:avLst/>
@@ -5728,13 +5927,13 @@
           <a:lstStyle/>
           <a:p>
             <a:r>
-              <a:rPr sz="1200" b="1" i="0">
-                <a:solidFill>
-                  <a:srgbClr val="64748B"/>
-                </a:solidFill>
-                <a:latin typeface="Montserrat"/>
-              </a:rPr>
-              <a:t>CONEXIONES · APARATOS Y GLP</a:t>
+              <a:rPr sz="1300" b="1" i="0">
+                <a:solidFill>
+                  <a:srgbClr val="E8801A"/>
+                </a:solidFill>
+                <a:latin typeface="Montserrat"/>
+              </a:rPr>
+              <a:t>ELEMENTOS · LLAVES DE CORTE</a:t>
             </a:r>
           </a:p>
         </p:txBody>
@@ -5762,26 +5961,70 @@
           <a:lstStyle/>
           <a:p>
             <a:r>
-              <a:rPr sz="2700" b="1" i="0">
+              <a:rPr sz="2800" b="1" i="0">
                 <a:solidFill>
                   <a:srgbClr val="1E2761"/>
                 </a:solidFill>
                 <a:latin typeface="Montserrat"/>
               </a:rPr>
-              <a:t>Conectar aparatos y bombonas</a:t>
-            </a:r>
-          </a:p>
-        </p:txBody>
-      </p:sp>
-      <p:sp>
-        <p:nvSpPr>
-          <p:cNvPr id="7" name="TextBox 6"/>
+              <a:t>Llaves: cerrar con seguridad</a:t>
+            </a:r>
+          </a:p>
+        </p:txBody>
+      </p:sp>
+      <p:sp>
+        <p:nvSpPr>
+          <p:cNvPr id="7" name="Rounded Rectangle 6"/>
+          <p:cNvSpPr/>
+          <p:nvPr/>
+        </p:nvSpPr>
+        <p:spPr>
+          <a:xfrm>
+            <a:off x="868680" y="1627632"/>
+            <a:ext cx="2011680" cy="73152"/>
+          </a:xfrm>
+          <a:prstGeom prst="roundRect">
+            <a:avLst/>
+          </a:prstGeom>
+          <a:solidFill>
+            <a:srgbClr val="E8801A"/>
+          </a:solidFill>
+          <a:ln>
+            <a:noFill/>
+          </a:ln>
+          <a:effectLst/>
+        </p:spPr>
+        <p:style>
+          <a:lnRef idx="1">
+            <a:schemeClr val="accent1"/>
+          </a:lnRef>
+          <a:fillRef idx="3">
+            <a:schemeClr val="accent1"/>
+          </a:fillRef>
+          <a:effectRef idx="2">
+            <a:schemeClr val="accent1"/>
+          </a:effectRef>
+          <a:fontRef idx="minor">
+            <a:schemeClr val="lt1"/>
+          </a:fontRef>
+        </p:style>
+        <p:txBody>
+          <a:bodyPr rtlCol="0" anchor="ctr"/>
+          <a:lstStyle/>
+          <a:p>
+            <a:pPr algn="ctr"/>
+          </a:p>
+        </p:txBody>
+      </p:sp>
+      <p:sp>
+        <p:nvSpPr>
+          <p:cNvPr id="8" name="TextBox 7"/>
           <p:cNvSpPr txBox="1"/>
           <p:nvPr/>
         </p:nvSpPr>
         <p:spPr>
           <a:xfrm>
-            <a:off x="822960" y="1920240"/>
+            <a:off x="822960" y="1965960"/>
             <a:ext cx="4983480" cy="4206240"/>
           </a:xfrm>
           <a:prstGeom prst="rect">
@@ -5797,17 +6040,17 @@
           <a:p>
             <a:pPr>
               <a:spcAft>
-                <a:spcPts val="1000"/>
+                <a:spcPts val="1100"/>
               </a:spcAft>
             </a:pPr>
             <a:r>
               <a:rPr sz="1600" b="1" i="0">
                 <a:solidFill>
-                  <a:srgbClr val="2E3A80"/>
-                </a:solidFill>
-                <a:latin typeface="Montserrat"/>
-              </a:rPr>
-              <a:t>•  </a:t>
+                  <a:srgbClr val="E8801A"/>
+                </a:solidFill>
+                <a:latin typeface="Montserrat"/>
+              </a:rPr>
+              <a:t>▸  </a:t>
             </a:r>
             <a:r>
               <a:rPr sz="1600" b="0" i="0">
@@ -5816,23 +6059,23 @@
                 </a:solidFill>
                 <a:latin typeface="Montserrat"/>
               </a:rPr>
-              <a:t>Aparatos: rígida o flexible (UNE 60670-7)</a:t>
+              <a:t>No enterrables → UNE-EN 331</a:t>
             </a:r>
           </a:p>
           <a:p>
             <a:pPr>
               <a:spcAft>
-                <a:spcPts val="1000"/>
+                <a:spcPts val="1100"/>
               </a:spcAft>
             </a:pPr>
             <a:r>
               <a:rPr sz="1600" b="1" i="0">
                 <a:solidFill>
-                  <a:srgbClr val="2E3A80"/>
-                </a:solidFill>
-                <a:latin typeface="Montserrat"/>
-              </a:rPr>
-              <a:t>•  </a:t>
+                  <a:srgbClr val="E8801A"/>
+                </a:solidFill>
+                <a:latin typeface="Montserrat"/>
+              </a:rPr>
+              <a:t>▸  </a:t>
             </a:r>
             <a:r>
               <a:rPr sz="1600" b="0" i="0">
@@ -5841,23 +6084,23 @@
                 </a:solidFill>
                 <a:latin typeface="Montserrat"/>
               </a:rPr>
-              <a:t>Flexible de elastómero → UNE 53539</a:t>
+              <a:t>DN ≤ 100: clase de temperatura −20 °C</a:t>
             </a:r>
           </a:p>
           <a:p>
             <a:pPr>
               <a:spcAft>
-                <a:spcPts val="1000"/>
+                <a:spcPts val="1100"/>
               </a:spcAft>
             </a:pPr>
             <a:r>
               <a:rPr sz="1600" b="1" i="0">
                 <a:solidFill>
-                  <a:srgbClr val="2E3A80"/>
-                </a:solidFill>
-                <a:latin typeface="Montserrat"/>
-              </a:rPr>
-              <a:t>•  </a:t>
+                  <a:srgbClr val="E8801A"/>
+                </a:solidFill>
+                <a:latin typeface="Montserrat"/>
+              </a:rPr>
+              <a:t>▸  </a:t>
             </a:r>
             <a:r>
               <a:rPr sz="1600" b="0" i="0">
@@ -5866,23 +6109,23 @@
                 </a:solidFill>
                 <a:latin typeface="Montserrat"/>
               </a:rPr>
-              <a:t>Con armadura → UNE-EN 16436</a:t>
+              <a:t>Bloqueables y precintables en 'cerrado'</a:t>
             </a:r>
           </a:p>
           <a:p>
             <a:pPr>
               <a:spcAft>
-                <a:spcPts val="1000"/>
+                <a:spcPts val="1100"/>
               </a:spcAft>
             </a:pPr>
             <a:r>
               <a:rPr sz="1600" b="1" i="0">
                 <a:solidFill>
-                  <a:srgbClr val="2E3A80"/>
-                </a:solidFill>
-                <a:latin typeface="Montserrat"/>
-              </a:rPr>
-              <a:t>•  </a:t>
+                  <a:srgbClr val="E8801A"/>
+                </a:solidFill>
+                <a:latin typeface="Montserrat"/>
+              </a:rPr>
+              <a:t>▸  </a:t>
             </a:r>
             <a:r>
               <a:rPr sz="1600" b="0" i="0">
@@ -5891,14 +6134,14 @@
                 </a:solidFill>
                 <a:latin typeface="Montserrat"/>
               </a:rPr>
-              <a:t>Metálico → UNE-EN 14800</a:t>
-            </a:r>
-          </a:p>
-        </p:txBody>
-      </p:sp>
-      <p:sp>
-        <p:nvSpPr>
-          <p:cNvPr id="8" name="imgph" descr="IMGQ:gas appliance flexible connection hose"/>
+              <a:t>Enterrables: PE UNE-EN 1555-4 / metal UNE-EN 13774</a:t>
+            </a:r>
+          </a:p>
+        </p:txBody>
+      </p:sp>
+      <p:sp>
+        <p:nvSpPr>
+          <p:cNvPr id="9" name="imgph" descr="IMGQ:gas ball valve shut off yellow"/>
           <p:cNvSpPr/>
           <p:nvPr/>
         </p:nvSpPr>
@@ -5944,7 +6187,7 @@
       </p:sp>
       <p:sp>
         <p:nvSpPr>
-          <p:cNvPr id="9" name="TextBox 8"/>
+          <p:cNvPr id="10" name="TextBox 9"/>
           <p:cNvSpPr txBox="1"/>
           <p:nvPr/>
         </p:nvSpPr>
@@ -5984,7 +6227,7 @@
                 </a:solidFill>
                 <a:latin typeface="Montserrat"/>
               </a:rPr>
-              <a:t>gas appliance flexible connection hose</a:t>
+              <a:t>gas ball valve shut off yellow</a:t>
             </a:r>
           </a:p>
         </p:txBody>
@@ -6081,7 +6324,7 @@
                 </a:solidFill>
                 <a:latin typeface="Montserrat"/>
               </a:rPr>
-              <a:t>013 / 015</a:t>
+              <a:t>013 / 016</a:t>
             </a:r>
           </a:p>
         </p:txBody>
@@ -6129,7 +6372,7 @@
         <p:spPr>
           <a:xfrm>
             <a:off x="822960" y="457200"/>
-            <a:ext cx="8229600" cy="365760"/>
+            <a:ext cx="10058400" cy="365760"/>
           </a:xfrm>
           <a:prstGeom prst="rect">
             <a:avLst/>
@@ -6143,13 +6386,13 @@
           <a:lstStyle/>
           <a:p>
             <a:r>
-              <a:rPr sz="1200" b="1" i="0">
-                <a:solidFill>
-                  <a:srgbClr val="64748B"/>
-                </a:solidFill>
-                <a:latin typeface="Montserrat"/>
-              </a:rPr>
-              <a:t>CONEXIONES · CONTADOR</a:t>
+              <a:rPr sz="1300" b="1" i="0">
+                <a:solidFill>
+                  <a:srgbClr val="E8801A"/>
+                </a:solidFill>
+                <a:latin typeface="Montserrat"/>
+              </a:rPr>
+              <a:t>CONEXIONES · APARATOS Y GLP</a:t>
             </a:r>
           </a:p>
         </p:txBody>
@@ -6177,26 +6420,70 @@
           <a:lstStyle/>
           <a:p>
             <a:r>
-              <a:rPr sz="2700" b="1" i="0">
+              <a:rPr sz="2800" b="1" i="0">
                 <a:solidFill>
                   <a:srgbClr val="1E2761"/>
                 </a:solidFill>
                 <a:latin typeface="Montserrat"/>
               </a:rPr>
-              <a:t>El flexible del contador: 0,80 m</a:t>
-            </a:r>
-          </a:p>
-        </p:txBody>
-      </p:sp>
-      <p:sp>
-        <p:nvSpPr>
-          <p:cNvPr id="7" name="TextBox 6"/>
+              <a:t>Conectar aparatos y bombonas</a:t>
+            </a:r>
+          </a:p>
+        </p:txBody>
+      </p:sp>
+      <p:sp>
+        <p:nvSpPr>
+          <p:cNvPr id="7" name="Rounded Rectangle 6"/>
+          <p:cNvSpPr/>
+          <p:nvPr/>
+        </p:nvSpPr>
+        <p:spPr>
+          <a:xfrm>
+            <a:off x="868680" y="1627632"/>
+            <a:ext cx="2011680" cy="73152"/>
+          </a:xfrm>
+          <a:prstGeom prst="roundRect">
+            <a:avLst/>
+          </a:prstGeom>
+          <a:solidFill>
+            <a:srgbClr val="E8801A"/>
+          </a:solidFill>
+          <a:ln>
+            <a:noFill/>
+          </a:ln>
+          <a:effectLst/>
+        </p:spPr>
+        <p:style>
+          <a:lnRef idx="1">
+            <a:schemeClr val="accent1"/>
+          </a:lnRef>
+          <a:fillRef idx="3">
+            <a:schemeClr val="accent1"/>
+          </a:fillRef>
+          <a:effectRef idx="2">
+            <a:schemeClr val="accent1"/>
+          </a:effectRef>
+          <a:fontRef idx="minor">
+            <a:schemeClr val="lt1"/>
+          </a:fontRef>
+        </p:style>
+        <p:txBody>
+          <a:bodyPr rtlCol="0" anchor="ctr"/>
+          <a:lstStyle/>
+          <a:p>
+            <a:pPr algn="ctr"/>
+          </a:p>
+        </p:txBody>
+      </p:sp>
+      <p:sp>
+        <p:nvSpPr>
+          <p:cNvPr id="8" name="TextBox 7"/>
           <p:cNvSpPr txBox="1"/>
           <p:nvPr/>
         </p:nvSpPr>
         <p:spPr>
           <a:xfrm>
-            <a:off x="822960" y="1920240"/>
+            <a:off x="822960" y="1965960"/>
             <a:ext cx="4983480" cy="4206240"/>
           </a:xfrm>
           <a:prstGeom prst="rect">
@@ -6212,17 +6499,17 @@
           <a:p>
             <a:pPr>
               <a:spcAft>
-                <a:spcPts val="1000"/>
+                <a:spcPts val="1100"/>
               </a:spcAft>
             </a:pPr>
             <a:r>
               <a:rPr sz="1600" b="1" i="0">
                 <a:solidFill>
-                  <a:srgbClr val="2E3A80"/>
-                </a:solidFill>
-                <a:latin typeface="Montserrat"/>
-              </a:rPr>
-              <a:t>•  </a:t>
+                  <a:srgbClr val="E8801A"/>
+                </a:solidFill>
+                <a:latin typeface="Montserrat"/>
+              </a:rPr>
+              <a:t>▸  </a:t>
             </a:r>
             <a:r>
               <a:rPr sz="1600" b="0" i="0">
@@ -6231,23 +6518,23 @@
                 </a:solidFill>
                 <a:latin typeface="Montserrat"/>
               </a:rPr>
-              <a:t>Inox corrugado con conexiones roscadas</a:t>
+              <a:t>Aparatos: rígida o flexible (UNE 60670-7)</a:t>
             </a:r>
           </a:p>
           <a:p>
             <a:pPr>
               <a:spcAft>
-                <a:spcPts val="1000"/>
+                <a:spcPts val="1100"/>
               </a:spcAft>
             </a:pPr>
             <a:r>
               <a:rPr sz="1600" b="1" i="0">
                 <a:solidFill>
-                  <a:srgbClr val="2E3A80"/>
-                </a:solidFill>
-                <a:latin typeface="Montserrat"/>
-              </a:rPr>
-              <a:t>•  </a:t>
+                  <a:srgbClr val="E8801A"/>
+                </a:solidFill>
+                <a:latin typeface="Montserrat"/>
+              </a:rPr>
+              <a:t>▸  </a:t>
             </a:r>
             <a:r>
               <a:rPr sz="1600" b="0" i="0">
@@ -6256,23 +6543,23 @@
                 </a:solidFill>
                 <a:latin typeface="Montserrat"/>
               </a:rPr>
-              <a:t>Norma UNE 60713</a:t>
+              <a:t>Flexible de elastómero → UNE 53539</a:t>
             </a:r>
           </a:p>
           <a:p>
             <a:pPr>
               <a:spcAft>
-                <a:spcPts val="1000"/>
+                <a:spcPts val="1100"/>
               </a:spcAft>
             </a:pPr>
             <a:r>
               <a:rPr sz="1600" b="1" i="0">
                 <a:solidFill>
-                  <a:srgbClr val="2E3A80"/>
-                </a:solidFill>
-                <a:latin typeface="Montserrat"/>
-              </a:rPr>
-              <a:t>•  </a:t>
+                  <a:srgbClr val="E8801A"/>
+                </a:solidFill>
+                <a:latin typeface="Montserrat"/>
+              </a:rPr>
+              <a:t>▸  </a:t>
             </a:r>
             <a:r>
               <a:rPr sz="1600" b="0" i="0">
@@ -6281,23 +6568,23 @@
                 </a:solidFill>
                 <a:latin typeface="Montserrat"/>
               </a:rPr>
-              <a:t>Longitud máxima 0,80 m</a:t>
+              <a:t>Con armadura → UNE-EN 16436</a:t>
             </a:r>
           </a:p>
           <a:p>
             <a:pPr>
               <a:spcAft>
-                <a:spcPts val="1000"/>
+                <a:spcPts val="1100"/>
               </a:spcAft>
             </a:pPr>
             <a:r>
               <a:rPr sz="1600" b="1" i="0">
                 <a:solidFill>
-                  <a:srgbClr val="2E3A80"/>
-                </a:solidFill>
-                <a:latin typeface="Montserrat"/>
-              </a:rPr>
-              <a:t>•  </a:t>
+                  <a:srgbClr val="E8801A"/>
+                </a:solidFill>
+                <a:latin typeface="Montserrat"/>
+              </a:rPr>
+              <a:t>▸  </a:t>
             </a:r>
             <a:r>
               <a:rPr sz="1600" b="0" i="0">
@@ -6306,14 +6593,14 @@
                 </a:solidFill>
                 <a:latin typeface="Montserrat"/>
               </a:rPr>
-              <a:t>No confundir con los flexibles de aparato</a:t>
-            </a:r>
-          </a:p>
-        </p:txBody>
-      </p:sp>
-      <p:sp>
-        <p:nvSpPr>
-          <p:cNvPr id="8" name="imgph" descr="IMGQ:corrugated stainless steel meter connector"/>
+              <a:t>Metálico → UNE-EN 14800</a:t>
+            </a:r>
+          </a:p>
+        </p:txBody>
+      </p:sp>
+      <p:sp>
+        <p:nvSpPr>
+          <p:cNvPr id="9" name="imgph" descr="IMGQ:gas appliance flexible connection hose"/>
           <p:cNvSpPr/>
           <p:nvPr/>
         </p:nvSpPr>
@@ -6359,7 +6646,7 @@
       </p:sp>
       <p:sp>
         <p:nvSpPr>
-          <p:cNvPr id="9" name="TextBox 8"/>
+          <p:cNvPr id="10" name="TextBox 9"/>
           <p:cNvSpPr txBox="1"/>
           <p:nvPr/>
         </p:nvSpPr>
@@ -6399,7 +6686,7 @@
                 </a:solidFill>
                 <a:latin typeface="Montserrat"/>
               </a:rPr>
-              <a:t>corrugated stainless steel meter connector</a:t>
+              <a:t>gas appliance flexible connection hose</a:t>
             </a:r>
           </a:p>
         </p:txBody>
@@ -6496,7 +6783,7 @@
                 </a:solidFill>
                 <a:latin typeface="Montserrat"/>
               </a:rPr>
-              <a:t>014 / 015</a:t>
+              <a:t>014 / 016</a:t>
             </a:r>
           </a:p>
         </p:txBody>
@@ -6544,7 +6831,7 @@
         <p:spPr>
           <a:xfrm>
             <a:off x="822960" y="457200"/>
-            <a:ext cx="8229600" cy="365760"/>
+            <a:ext cx="10058400" cy="365760"/>
           </a:xfrm>
           <a:prstGeom prst="rect">
             <a:avLst/>
@@ -6558,13 +6845,13 @@
           <a:lstStyle/>
           <a:p>
             <a:r>
-              <a:rPr sz="1200" b="1" i="0">
-                <a:solidFill>
-                  <a:srgbClr val="64748B"/>
-                </a:solidFill>
-                <a:latin typeface="Montserrat"/>
-              </a:rPr>
-              <a:t>ELEMENTOS · TOMAS DE PRESIÓN</a:t>
+              <a:rPr sz="1300" b="1" i="0">
+                <a:solidFill>
+                  <a:srgbClr val="E8801A"/>
+                </a:solidFill>
+                <a:latin typeface="Montserrat"/>
+              </a:rPr>
+              <a:t>CONEXIONES · CONTADOR</a:t>
             </a:r>
           </a:p>
         </p:txBody>
@@ -6592,26 +6879,70 @@
           <a:lstStyle/>
           <a:p>
             <a:r>
-              <a:rPr sz="2700" b="1" i="0">
+              <a:rPr sz="2800" b="1" i="0">
                 <a:solidFill>
                   <a:srgbClr val="1E2761"/>
                 </a:solidFill>
                 <a:latin typeface="Montserrat"/>
               </a:rPr>
-              <a:t>El pinchazo para medir</a:t>
-            </a:r>
-          </a:p>
-        </p:txBody>
-      </p:sp>
-      <p:sp>
-        <p:nvSpPr>
-          <p:cNvPr id="7" name="TextBox 6"/>
+              <a:t>El flexible del contador: 0,80 m</a:t>
+            </a:r>
+          </a:p>
+        </p:txBody>
+      </p:sp>
+      <p:sp>
+        <p:nvSpPr>
+          <p:cNvPr id="7" name="Rounded Rectangle 6"/>
+          <p:cNvSpPr/>
+          <p:nvPr/>
+        </p:nvSpPr>
+        <p:spPr>
+          <a:xfrm>
+            <a:off x="868680" y="1627632"/>
+            <a:ext cx="2011680" cy="73152"/>
+          </a:xfrm>
+          <a:prstGeom prst="roundRect">
+            <a:avLst/>
+          </a:prstGeom>
+          <a:solidFill>
+            <a:srgbClr val="E8801A"/>
+          </a:solidFill>
+          <a:ln>
+            <a:noFill/>
+          </a:ln>
+          <a:effectLst/>
+        </p:spPr>
+        <p:style>
+          <a:lnRef idx="1">
+            <a:schemeClr val="accent1"/>
+          </a:lnRef>
+          <a:fillRef idx="3">
+            <a:schemeClr val="accent1"/>
+          </a:fillRef>
+          <a:effectRef idx="2">
+            <a:schemeClr val="accent1"/>
+          </a:effectRef>
+          <a:fontRef idx="minor">
+            <a:schemeClr val="lt1"/>
+          </a:fontRef>
+        </p:style>
+        <p:txBody>
+          <a:bodyPr rtlCol="0" anchor="ctr"/>
+          <a:lstStyle/>
+          <a:p>
+            <a:pPr algn="ctr"/>
+          </a:p>
+        </p:txBody>
+      </p:sp>
+      <p:sp>
+        <p:nvSpPr>
+          <p:cNvPr id="8" name="TextBox 7"/>
           <p:cNvSpPr txBox="1"/>
           <p:nvPr/>
         </p:nvSpPr>
         <p:spPr>
           <a:xfrm>
-            <a:off x="822960" y="1920240"/>
+            <a:off x="822960" y="1965960"/>
             <a:ext cx="4983480" cy="4206240"/>
           </a:xfrm>
           <a:prstGeom prst="rect">
@@ -6627,17 +6958,17 @@
           <a:p>
             <a:pPr>
               <a:spcAft>
-                <a:spcPts val="1000"/>
+                <a:spcPts val="1100"/>
               </a:spcAft>
             </a:pPr>
             <a:r>
               <a:rPr sz="1600" b="1" i="0">
                 <a:solidFill>
-                  <a:srgbClr val="2E3A80"/>
-                </a:solidFill>
-                <a:latin typeface="Montserrat"/>
-              </a:rPr>
-              <a:t>•  </a:t>
+                  <a:srgbClr val="E8801A"/>
+                </a:solidFill>
+                <a:latin typeface="Montserrat"/>
+              </a:rPr>
+              <a:t>▸  </a:t>
             </a:r>
             <a:r>
               <a:rPr sz="1600" b="0" i="0">
@@ -6646,23 +6977,23 @@
                 </a:solidFill>
                 <a:latin typeface="Montserrat"/>
               </a:rPr>
-              <a:t>Depende de la MOP del tramo (UNE 60719)</a:t>
+              <a:t>Inox corrugado con conexiones roscadas</a:t>
             </a:r>
           </a:p>
           <a:p>
             <a:pPr>
               <a:spcAft>
-                <a:spcPts val="1000"/>
+                <a:spcPts val="1100"/>
               </a:spcAft>
             </a:pPr>
             <a:r>
               <a:rPr sz="1600" b="1" i="0">
                 <a:solidFill>
-                  <a:srgbClr val="2E3A80"/>
-                </a:solidFill>
-                <a:latin typeface="Montserrat"/>
-              </a:rPr>
-              <a:t>•  </a:t>
+                  <a:srgbClr val="E8801A"/>
+                </a:solidFill>
+                <a:latin typeface="Montserrat"/>
+              </a:rPr>
+              <a:t>▸  </a:t>
             </a:r>
             <a:r>
               <a:rPr sz="1600" b="0" i="0">
@@ -6671,23 +7002,23 @@
                 </a:solidFill>
                 <a:latin typeface="Montserrat"/>
               </a:rPr>
-              <a:t>≤ 150 mbar: débil calibre o Peterson</a:t>
+              <a:t>Norma UNE 60713</a:t>
             </a:r>
           </a:p>
           <a:p>
             <a:pPr>
               <a:spcAft>
-                <a:spcPts val="1000"/>
+                <a:spcPts val="1100"/>
               </a:spcAft>
             </a:pPr>
             <a:r>
               <a:rPr sz="1600" b="1" i="0">
                 <a:solidFill>
-                  <a:srgbClr val="2E3A80"/>
-                </a:solidFill>
-                <a:latin typeface="Montserrat"/>
-              </a:rPr>
-              <a:t>•  </a:t>
+                  <a:srgbClr val="E8801A"/>
+                </a:solidFill>
+                <a:latin typeface="Montserrat"/>
+              </a:rPr>
+              <a:t>▸  </a:t>
             </a:r>
             <a:r>
               <a:rPr sz="1600" b="0" i="0">
@@ -6696,23 +7027,23 @@
                 </a:solidFill>
                 <a:latin typeface="Montserrat"/>
               </a:rPr>
-              <a:t>&gt; 150 mbar: solo Peterson</a:t>
+              <a:t>Longitud máxima 0,80 m</a:t>
             </a:r>
           </a:p>
           <a:p>
             <a:pPr>
               <a:spcAft>
-                <a:spcPts val="1000"/>
+                <a:spcPts val="1100"/>
               </a:spcAft>
             </a:pPr>
             <a:r>
               <a:rPr sz="1600" b="1" i="0">
                 <a:solidFill>
-                  <a:srgbClr val="2E3A80"/>
-                </a:solidFill>
-                <a:latin typeface="Montserrat"/>
-              </a:rPr>
-              <a:t>•  </a:t>
+                  <a:srgbClr val="E8801A"/>
+                </a:solidFill>
+                <a:latin typeface="Montserrat"/>
+              </a:rPr>
+              <a:t>▸  </a:t>
             </a:r>
             <a:r>
               <a:rPr sz="1600" b="0" i="0">
@@ -6721,14 +7052,14 @@
                 </a:solidFill>
                 <a:latin typeface="Montserrat"/>
               </a:rPr>
-              <a:t>150 mbar = 0,15 bar de la escalera</a:t>
-            </a:r>
-          </a:p>
-        </p:txBody>
-      </p:sp>
-      <p:sp>
-        <p:nvSpPr>
-          <p:cNvPr id="8" name="imgph" descr="IMGQ:gas pressure test point gauge measure"/>
+              <a:t>No confundir con los flexibles de aparato</a:t>
+            </a:r>
+          </a:p>
+        </p:txBody>
+      </p:sp>
+      <p:sp>
+        <p:nvSpPr>
+          <p:cNvPr id="9" name="imgph" descr="IMGQ:corrugated stainless steel meter connector"/>
           <p:cNvSpPr/>
           <p:nvPr/>
         </p:nvSpPr>
@@ -6774,7 +7105,7 @@
       </p:sp>
       <p:sp>
         <p:nvSpPr>
-          <p:cNvPr id="9" name="TextBox 8"/>
+          <p:cNvPr id="10" name="TextBox 9"/>
           <p:cNvSpPr txBox="1"/>
           <p:nvPr/>
         </p:nvSpPr>
@@ -6814,7 +7145,7 @@
                 </a:solidFill>
                 <a:latin typeface="Montserrat"/>
               </a:rPr>
-              <a:t>gas pressure test point gauge measure</a:t>
+              <a:t>corrugated stainless steel meter connector</a:t>
             </a:r>
           </a:p>
         </p:txBody>
@@ -6852,6 +7183,465 @@
             <a:avLst/>
           </a:prstGeom>
           <a:solidFill>
+            <a:srgbClr val="FFFFFF"/>
+          </a:solidFill>
+          <a:ln>
+            <a:noFill/>
+          </a:ln>
+          <a:effectLst/>
+        </p:spPr>
+        <p:style>
+          <a:lnRef idx="1">
+            <a:schemeClr val="accent1"/>
+          </a:lnRef>
+          <a:fillRef idx="3">
+            <a:schemeClr val="accent1"/>
+          </a:fillRef>
+          <a:effectRef idx="2">
+            <a:schemeClr val="accent1"/>
+          </a:effectRef>
+          <a:fontRef idx="minor">
+            <a:schemeClr val="lt1"/>
+          </a:fontRef>
+        </p:style>
+        <p:txBody>
+          <a:bodyPr rtlCol="0" anchor="ctr"/>
+          <a:lstStyle/>
+          <a:p>
+            <a:pPr algn="ctr"/>
+          </a:p>
+        </p:txBody>
+      </p:sp>
+      <p:sp>
+        <p:nvSpPr>
+          <p:cNvPr id="3" name="TextBox 2"/>
+          <p:cNvSpPr txBox="1"/>
+          <p:nvPr/>
+        </p:nvSpPr>
+        <p:spPr>
+          <a:xfrm>
+            <a:off x="10607040" y="320040"/>
+            <a:ext cx="1371600" cy="365760"/>
+          </a:xfrm>
+          <a:prstGeom prst="rect">
+            <a:avLst/>
+          </a:prstGeom>
+          <a:noFill/>
+        </p:spPr>
+        <p:txBody>
+          <a:bodyPr wrap="square">
+            <a:spAutoFit/>
+          </a:bodyPr>
+          <a:lstStyle/>
+          <a:p>
+            <a:pPr algn="r"/>
+            <a:r>
+              <a:rPr sz="1000" b="1" i="0">
+                <a:solidFill>
+                  <a:srgbClr val="64748B"/>
+                </a:solidFill>
+                <a:latin typeface="Montserrat"/>
+              </a:rPr>
+              <a:t>015 / 016</a:t>
+            </a:r>
+          </a:p>
+        </p:txBody>
+      </p:sp>
+      <p:sp>
+        <p:nvSpPr>
+          <p:cNvPr id="4" name="TextBox 3"/>
+          <p:cNvSpPr txBox="1"/>
+          <p:nvPr/>
+        </p:nvSpPr>
+        <p:spPr>
+          <a:xfrm>
+            <a:off x="457200" y="6419088"/>
+            <a:ext cx="8229600" cy="365760"/>
+          </a:xfrm>
+          <a:prstGeom prst="rect">
+            <a:avLst/>
+          </a:prstGeom>
+          <a:noFill/>
+        </p:spPr>
+        <p:txBody>
+          <a:bodyPr wrap="square">
+            <a:spAutoFit/>
+          </a:bodyPr>
+          <a:lstStyle/>
+          <a:p>
+            <a:r>
+              <a:rPr sz="900" b="0" i="0">
+                <a:solidFill>
+                  <a:srgbClr val="64748B"/>
+                </a:solidFill>
+                <a:latin typeface="Montserrat"/>
+              </a:rPr>
+              <a:t>Curso Gas B · Tema 10 · UNE 60670-3</a:t>
+            </a:r>
+          </a:p>
+        </p:txBody>
+      </p:sp>
+      <p:sp>
+        <p:nvSpPr>
+          <p:cNvPr id="5" name="TextBox 4"/>
+          <p:cNvSpPr txBox="1"/>
+          <p:nvPr/>
+        </p:nvSpPr>
+        <p:spPr>
+          <a:xfrm>
+            <a:off x="822960" y="457200"/>
+            <a:ext cx="10058400" cy="365760"/>
+          </a:xfrm>
+          <a:prstGeom prst="rect">
+            <a:avLst/>
+          </a:prstGeom>
+          <a:noFill/>
+        </p:spPr>
+        <p:txBody>
+          <a:bodyPr wrap="square">
+            <a:spAutoFit/>
+          </a:bodyPr>
+          <a:lstStyle/>
+          <a:p>
+            <a:r>
+              <a:rPr sz="1300" b="1" i="0">
+                <a:solidFill>
+                  <a:srgbClr val="E8801A"/>
+                </a:solidFill>
+                <a:latin typeface="Montserrat"/>
+              </a:rPr>
+              <a:t>ELEMENTOS · TOMAS DE PRESIÓN</a:t>
+            </a:r>
+          </a:p>
+        </p:txBody>
+      </p:sp>
+      <p:sp>
+        <p:nvSpPr>
+          <p:cNvPr id="6" name="TextBox 5"/>
+          <p:cNvSpPr txBox="1"/>
+          <p:nvPr/>
+        </p:nvSpPr>
+        <p:spPr>
+          <a:xfrm>
+            <a:off x="822960" y="868680"/>
+            <a:ext cx="10515600" cy="914400"/>
+          </a:xfrm>
+          <a:prstGeom prst="rect">
+            <a:avLst/>
+          </a:prstGeom>
+          <a:noFill/>
+        </p:spPr>
+        <p:txBody>
+          <a:bodyPr wrap="square">
+            <a:spAutoFit/>
+          </a:bodyPr>
+          <a:lstStyle/>
+          <a:p>
+            <a:r>
+              <a:rPr sz="2800" b="1" i="0">
+                <a:solidFill>
+                  <a:srgbClr val="1E2761"/>
+                </a:solidFill>
+                <a:latin typeface="Montserrat"/>
+              </a:rPr>
+              <a:t>El pinchazo para medir</a:t>
+            </a:r>
+          </a:p>
+        </p:txBody>
+      </p:sp>
+      <p:sp>
+        <p:nvSpPr>
+          <p:cNvPr id="7" name="Rounded Rectangle 6"/>
+          <p:cNvSpPr/>
+          <p:nvPr/>
+        </p:nvSpPr>
+        <p:spPr>
+          <a:xfrm>
+            <a:off x="868680" y="1627632"/>
+            <a:ext cx="2011680" cy="73152"/>
+          </a:xfrm>
+          <a:prstGeom prst="roundRect">
+            <a:avLst/>
+          </a:prstGeom>
+          <a:solidFill>
+            <a:srgbClr val="E8801A"/>
+          </a:solidFill>
+          <a:ln>
+            <a:noFill/>
+          </a:ln>
+          <a:effectLst/>
+        </p:spPr>
+        <p:style>
+          <a:lnRef idx="1">
+            <a:schemeClr val="accent1"/>
+          </a:lnRef>
+          <a:fillRef idx="3">
+            <a:schemeClr val="accent1"/>
+          </a:fillRef>
+          <a:effectRef idx="2">
+            <a:schemeClr val="accent1"/>
+          </a:effectRef>
+          <a:fontRef idx="minor">
+            <a:schemeClr val="lt1"/>
+          </a:fontRef>
+        </p:style>
+        <p:txBody>
+          <a:bodyPr rtlCol="0" anchor="ctr"/>
+          <a:lstStyle/>
+          <a:p>
+            <a:pPr algn="ctr"/>
+          </a:p>
+        </p:txBody>
+      </p:sp>
+      <p:sp>
+        <p:nvSpPr>
+          <p:cNvPr id="8" name="TextBox 7"/>
+          <p:cNvSpPr txBox="1"/>
+          <p:nvPr/>
+        </p:nvSpPr>
+        <p:spPr>
+          <a:xfrm>
+            <a:off x="822960" y="1965960"/>
+            <a:ext cx="4983480" cy="4206240"/>
+          </a:xfrm>
+          <a:prstGeom prst="rect">
+            <a:avLst/>
+          </a:prstGeom>
+          <a:noFill/>
+        </p:spPr>
+        <p:txBody>
+          <a:bodyPr wrap="square">
+            <a:spAutoFit/>
+          </a:bodyPr>
+          <a:lstStyle/>
+          <a:p>
+            <a:pPr>
+              <a:spcAft>
+                <a:spcPts val="1100"/>
+              </a:spcAft>
+            </a:pPr>
+            <a:r>
+              <a:rPr sz="1600" b="1" i="0">
+                <a:solidFill>
+                  <a:srgbClr val="E8801A"/>
+                </a:solidFill>
+                <a:latin typeface="Montserrat"/>
+              </a:rPr>
+              <a:t>▸  </a:t>
+            </a:r>
+            <a:r>
+              <a:rPr sz="1600" b="0" i="0">
+                <a:solidFill>
+                  <a:srgbClr val="1B2330"/>
+                </a:solidFill>
+                <a:latin typeface="Montserrat"/>
+              </a:rPr>
+              <a:t>Depende de la MOP del tramo (UNE 60719)</a:t>
+            </a:r>
+          </a:p>
+          <a:p>
+            <a:pPr>
+              <a:spcAft>
+                <a:spcPts val="1100"/>
+              </a:spcAft>
+            </a:pPr>
+            <a:r>
+              <a:rPr sz="1600" b="1" i="0">
+                <a:solidFill>
+                  <a:srgbClr val="E8801A"/>
+                </a:solidFill>
+                <a:latin typeface="Montserrat"/>
+              </a:rPr>
+              <a:t>▸  </a:t>
+            </a:r>
+            <a:r>
+              <a:rPr sz="1600" b="0" i="0">
+                <a:solidFill>
+                  <a:srgbClr val="1B2330"/>
+                </a:solidFill>
+                <a:latin typeface="Montserrat"/>
+              </a:rPr>
+              <a:t>≤ 150 mbar: débil calibre o Peterson</a:t>
+            </a:r>
+          </a:p>
+          <a:p>
+            <a:pPr>
+              <a:spcAft>
+                <a:spcPts val="1100"/>
+              </a:spcAft>
+            </a:pPr>
+            <a:r>
+              <a:rPr sz="1600" b="1" i="0">
+                <a:solidFill>
+                  <a:srgbClr val="E8801A"/>
+                </a:solidFill>
+                <a:latin typeface="Montserrat"/>
+              </a:rPr>
+              <a:t>▸  </a:t>
+            </a:r>
+            <a:r>
+              <a:rPr sz="1600" b="0" i="0">
+                <a:solidFill>
+                  <a:srgbClr val="1B2330"/>
+                </a:solidFill>
+                <a:latin typeface="Montserrat"/>
+              </a:rPr>
+              <a:t>&gt; 150 mbar: solo Peterson</a:t>
+            </a:r>
+          </a:p>
+          <a:p>
+            <a:pPr>
+              <a:spcAft>
+                <a:spcPts val="1100"/>
+              </a:spcAft>
+            </a:pPr>
+            <a:r>
+              <a:rPr sz="1600" b="1" i="0">
+                <a:solidFill>
+                  <a:srgbClr val="E8801A"/>
+                </a:solidFill>
+                <a:latin typeface="Montserrat"/>
+              </a:rPr>
+              <a:t>▸  </a:t>
+            </a:r>
+            <a:r>
+              <a:rPr sz="1600" b="0" i="0">
+                <a:solidFill>
+                  <a:srgbClr val="1B2330"/>
+                </a:solidFill>
+                <a:latin typeface="Montserrat"/>
+              </a:rPr>
+              <a:t>150 mbar = 0,15 bar de la escalera</a:t>
+            </a:r>
+          </a:p>
+        </p:txBody>
+      </p:sp>
+      <p:sp>
+        <p:nvSpPr>
+          <p:cNvPr id="9" name="imgph" descr="IMGQ:gas pressure test point gauge measure"/>
+          <p:cNvSpPr/>
+          <p:nvPr/>
+        </p:nvSpPr>
+        <p:spPr>
+          <a:xfrm>
+            <a:off x="5806440" y="1051560"/>
+            <a:ext cx="5298947" cy="4629150"/>
+          </a:xfrm>
+          <a:prstGeom prst="roundRect">
+            <a:avLst/>
+          </a:prstGeom>
+          <a:solidFill>
+            <a:srgbClr val="F3F6FB"/>
+          </a:solidFill>
+          <a:ln w="12700">
+            <a:solidFill>
+              <a:srgbClr val="C7D2E6"/>
+            </a:solidFill>
+          </a:ln>
+          <a:effectLst/>
+        </p:spPr>
+        <p:style>
+          <a:lnRef idx="1">
+            <a:schemeClr val="accent1"/>
+          </a:lnRef>
+          <a:fillRef idx="3">
+            <a:schemeClr val="accent1"/>
+          </a:fillRef>
+          <a:effectRef idx="2">
+            <a:schemeClr val="accent1"/>
+          </a:effectRef>
+          <a:fontRef idx="minor">
+            <a:schemeClr val="lt1"/>
+          </a:fontRef>
+        </p:style>
+        <p:txBody>
+          <a:bodyPr rtlCol="0" anchor="ctr"/>
+          <a:lstStyle/>
+          <a:p>
+            <a:pPr algn="ctr"/>
+          </a:p>
+        </p:txBody>
+      </p:sp>
+      <p:sp>
+        <p:nvSpPr>
+          <p:cNvPr id="10" name="TextBox 9"/>
+          <p:cNvSpPr txBox="1"/>
+          <p:nvPr/>
+        </p:nvSpPr>
+        <p:spPr>
+          <a:xfrm>
+            <a:off x="6080760" y="2726055"/>
+            <a:ext cx="4750307" cy="1280160"/>
+          </a:xfrm>
+          <a:prstGeom prst="rect">
+            <a:avLst/>
+          </a:prstGeom>
+          <a:noFill/>
+        </p:spPr>
+        <p:txBody>
+          <a:bodyPr wrap="square">
+            <a:spAutoFit/>
+          </a:bodyPr>
+          <a:lstStyle/>
+          <a:p>
+            <a:pPr algn="ctr"/>
+            <a:r>
+              <a:rPr sz="1400" b="1" i="0">
+                <a:solidFill>
+                  <a:srgbClr val="64748B"/>
+                </a:solidFill>
+                <a:latin typeface="Montserrat"/>
+              </a:rPr>
+              <a:t>IMAGEN REALISTA</a:t>
+            </a:r>
+          </a:p>
+          <a:p>
+            <a:pPr algn="ctr"/>
+            <a:r>
+              <a:rPr sz="1100" b="0" i="1">
+                <a:solidFill>
+                  <a:srgbClr val="64748B"/>
+                </a:solidFill>
+                <a:latin typeface="Montserrat"/>
+              </a:rPr>
+              <a:t>gas pressure test point gauge measure</a:t>
+            </a:r>
+          </a:p>
+        </p:txBody>
+      </p:sp>
+    </p:spTree>
+  </p:cSld>
+  <p:clrMapOvr>
+    <a:masterClrMapping/>
+  </p:clrMapOvr>
+</p:sld>
+</file>
+
+<file path=ppt/slides/slide16.xml><?xml version="1.0" encoding="utf-8"?>
+<p:sld xmlns:a="http://schemas.openxmlformats.org/drawingml/2006/main" xmlns:p="http://schemas.openxmlformats.org/presentationml/2006/main" xmlns:r="http://schemas.openxmlformats.org/officeDocument/2006/relationships">
+  <p:cSld>
+    <p:spTree>
+      <p:nvGrpSpPr>
+        <p:cNvPr id="1" name=""/>
+        <p:cNvGrpSpPr/>
+        <p:nvPr/>
+      </p:nvGrpSpPr>
+      <p:grpSpPr/>
+      <p:sp>
+        <p:nvSpPr>
+          <p:cNvPr id="2" name="Rectangle 1"/>
+          <p:cNvSpPr/>
+          <p:nvPr/>
+        </p:nvSpPr>
+        <p:spPr>
+          <a:xfrm>
+            <a:off x="0" y="0"/>
+            <a:ext cx="12191695" cy="6858000"/>
+          </a:xfrm>
+          <a:prstGeom prst="rect">
+            <a:avLst/>
+          </a:prstGeom>
+          <a:solidFill>
             <a:srgbClr val="1E2761"/>
           </a:solidFill>
           <a:ln>
@@ -6906,7 +7696,7 @@
             <a:r>
               <a:rPr sz="1400" b="1" i="0">
                 <a:solidFill>
-                  <a:srgbClr val="CADCFC"/>
+                  <a:srgbClr val="F4A24C"/>
                 </a:solidFill>
                 <a:latin typeface="Montserrat"/>
               </a:rPr>
@@ -6917,13 +7707,57 @@
       </p:sp>
       <p:sp>
         <p:nvSpPr>
-          <p:cNvPr id="4" name="TextBox 3"/>
+          <p:cNvPr id="4" name="Rounded Rectangle 3"/>
+          <p:cNvSpPr/>
+          <p:nvPr/>
+        </p:nvSpPr>
+        <p:spPr>
+          <a:xfrm>
+            <a:off x="868680" y="1051560"/>
+            <a:ext cx="1463040" cy="82296"/>
+          </a:xfrm>
+          <a:prstGeom prst="roundRect">
+            <a:avLst/>
+          </a:prstGeom>
+          <a:solidFill>
+            <a:srgbClr val="E8801A"/>
+          </a:solidFill>
+          <a:ln>
+            <a:noFill/>
+          </a:ln>
+          <a:effectLst/>
+        </p:spPr>
+        <p:style>
+          <a:lnRef idx="1">
+            <a:schemeClr val="accent1"/>
+          </a:lnRef>
+          <a:fillRef idx="3">
+            <a:schemeClr val="accent1"/>
+          </a:fillRef>
+          <a:effectRef idx="2">
+            <a:schemeClr val="accent1"/>
+          </a:effectRef>
+          <a:fontRef idx="minor">
+            <a:schemeClr val="lt1"/>
+          </a:fontRef>
+        </p:style>
+        <p:txBody>
+          <a:bodyPr rtlCol="0" anchor="ctr"/>
+          <a:lstStyle/>
+          <a:p>
+            <a:pPr algn="ctr"/>
+          </a:p>
+        </p:txBody>
+      </p:sp>
+      <p:sp>
+        <p:nvSpPr>
+          <p:cNvPr id="5" name="TextBox 4"/>
           <p:cNvSpPr txBox="1"/>
           <p:nvPr/>
         </p:nvSpPr>
         <p:spPr>
           <a:xfrm>
-            <a:off x="822960" y="1143000"/>
+            <a:off x="822960" y="1234440"/>
             <a:ext cx="10515600" cy="1097280"/>
           </a:xfrm>
           <a:prstGeom prst="rect">
@@ -6951,14 +7785,14 @@
       </p:sp>
       <p:sp>
         <p:nvSpPr>
-          <p:cNvPr id="5" name="TextBox 4"/>
+          <p:cNvPr id="6" name="TextBox 5"/>
           <p:cNvSpPr txBox="1"/>
           <p:nvPr/>
         </p:nvSpPr>
         <p:spPr>
           <a:xfrm>
-            <a:off x="822960" y="2514600"/>
-            <a:ext cx="10515600" cy="2834640"/>
+            <a:off x="822960" y="2606040"/>
+            <a:ext cx="10515600" cy="2743200"/>
           </a:xfrm>
           <a:prstGeom prst="rect">
             <a:avLst/>
@@ -6979,7 +7813,7 @@
             <a:r>
               <a:rPr sz="2000" b="1" i="0">
                 <a:solidFill>
-                  <a:srgbClr val="CADCFC"/>
+                  <a:srgbClr val="F4A24C"/>
                 </a:solidFill>
                 <a:latin typeface="Montserrat"/>
               </a:rPr>
@@ -7004,7 +7838,7 @@
             <a:r>
               <a:rPr sz="2000" b="1" i="0">
                 <a:solidFill>
-                  <a:srgbClr val="CADCFC"/>
+                  <a:srgbClr val="F4A24C"/>
                 </a:solidFill>
                 <a:latin typeface="Montserrat"/>
               </a:rPr>
@@ -7029,7 +7863,7 @@
             <a:r>
               <a:rPr sz="2000" b="1" i="0">
                 <a:solidFill>
-                  <a:srgbClr val="CADCFC"/>
+                  <a:srgbClr val="F4A24C"/>
                 </a:solidFill>
                 <a:latin typeface="Montserrat"/>
               </a:rPr>
@@ -7054,7 +7888,7 @@
             <a:r>
               <a:rPr sz="2000" b="1" i="0">
                 <a:solidFill>
-                  <a:srgbClr val="CADCFC"/>
+                  <a:srgbClr val="F4A24C"/>
                 </a:solidFill>
                 <a:latin typeface="Montserrat"/>
               </a:rPr>
@@ -7074,20 +7908,20 @@
       </p:sp>
       <p:sp>
         <p:nvSpPr>
-          <p:cNvPr id="6" name="Rounded Rectangle 5"/>
+          <p:cNvPr id="7" name="Rounded Rectangle 6"/>
           <p:cNvSpPr/>
           <p:nvPr/>
         </p:nvSpPr>
         <p:spPr>
           <a:xfrm>
             <a:off x="822960" y="5532120"/>
-            <a:ext cx="10515600" cy="777240"/>
+            <a:ext cx="10515600" cy="822960"/>
           </a:xfrm>
           <a:prstGeom prst="roundRect">
             <a:avLst/>
           </a:prstGeom>
           <a:solidFill>
-            <a:srgbClr val="2E3A80"/>
+            <a:srgbClr val="E8801A"/>
           </a:solidFill>
           <a:ln>
             <a:noFill/>
@@ -7118,13 +7952,13 @@
       </p:sp>
       <p:sp>
         <p:nvSpPr>
-          <p:cNvPr id="7" name="TextBox 6"/>
+          <p:cNvPr id="8" name="TextBox 7"/>
           <p:cNvSpPr txBox="1"/>
           <p:nvPr/>
         </p:nvSpPr>
         <p:spPr>
           <a:xfrm>
-            <a:off x="1051560" y="5605272"/>
+            <a:off x="1051560" y="5623560"/>
             <a:ext cx="10058400" cy="640080"/>
           </a:xfrm>
           <a:prstGeom prst="rect">
@@ -7141,7 +7975,7 @@
             <a:r>
               <a:rPr sz="1500" b="1" i="1">
                 <a:solidFill>
-                  <a:srgbClr val="CADCFC"/>
+                  <a:srgbClr val="1E2761"/>
                 </a:solidFill>
                 <a:latin typeface="Montserrat"/>
               </a:rPr>
@@ -7242,7 +8076,7 @@
                 </a:solidFill>
                 <a:latin typeface="Montserrat"/>
               </a:rPr>
-              <a:t>002 / 015</a:t>
+              <a:t>002 / 016</a:t>
             </a:r>
           </a:p>
         </p:txBody>
@@ -7306,7 +8140,7 @@
             <a:r>
               <a:rPr sz="2700" b="1" i="0">
                 <a:solidFill>
-                  <a:srgbClr val="1E2761"/>
+                  <a:srgbClr val="E8801A"/>
                 </a:solidFill>
                 <a:latin typeface="Montserrat"/>
               </a:rPr>
@@ -7318,6 +8152,50 @@
       <p:sp>
         <p:nvSpPr>
           <p:cNvPr id="6" name="Rounded Rectangle 5"/>
+          <p:cNvSpPr/>
+          <p:nvPr/>
+        </p:nvSpPr>
+        <p:spPr>
+          <a:xfrm>
+            <a:off x="868680" y="1234440"/>
+            <a:ext cx="1463040" cy="73152"/>
+          </a:xfrm>
+          <a:prstGeom prst="roundRect">
+            <a:avLst/>
+          </a:prstGeom>
+          <a:solidFill>
+            <a:srgbClr val="1E2761"/>
+          </a:solidFill>
+          <a:ln>
+            <a:noFill/>
+          </a:ln>
+          <a:effectLst/>
+        </p:spPr>
+        <p:style>
+          <a:lnRef idx="1">
+            <a:schemeClr val="accent1"/>
+          </a:lnRef>
+          <a:fillRef idx="3">
+            <a:schemeClr val="accent1"/>
+          </a:fillRef>
+          <a:effectRef idx="2">
+            <a:schemeClr val="accent1"/>
+          </a:effectRef>
+          <a:fontRef idx="minor">
+            <a:schemeClr val="lt1"/>
+          </a:fontRef>
+        </p:style>
+        <p:txBody>
+          <a:bodyPr rtlCol="0" anchor="ctr"/>
+          <a:lstStyle/>
+          <a:p>
+            <a:pPr algn="ctr"/>
+          </a:p>
+        </p:txBody>
+      </p:sp>
+      <p:sp>
+        <p:nvSpPr>
+          <p:cNvPr id="7" name="Rounded Rectangle 6"/>
           <p:cNvSpPr/>
           <p:nvPr/>
         </p:nvSpPr>
@@ -7363,7 +8241,7 @@
       </p:sp>
       <p:sp>
         <p:nvSpPr>
-          <p:cNvPr id="7" name="TextBox 6"/>
+          <p:cNvPr id="8" name="TextBox 7"/>
           <p:cNvSpPr txBox="1"/>
           <p:nvPr/>
         </p:nvSpPr>
@@ -7398,7 +8276,7 @@
       </p:sp>
       <p:sp>
         <p:nvSpPr>
-          <p:cNvPr id="8" name="TextBox 7"/>
+          <p:cNvPr id="9" name="TextBox 8"/>
           <p:cNvSpPr txBox="1"/>
           <p:nvPr/>
         </p:nvSpPr>
@@ -7433,7 +8311,7 @@
       </p:sp>
       <p:sp>
         <p:nvSpPr>
-          <p:cNvPr id="9" name="Rounded Rectangle 8"/>
+          <p:cNvPr id="10" name="Rounded Rectangle 9"/>
           <p:cNvSpPr/>
           <p:nvPr/>
         </p:nvSpPr>
@@ -7479,7 +8357,7 @@
       </p:sp>
       <p:sp>
         <p:nvSpPr>
-          <p:cNvPr id="10" name="TextBox 9"/>
+          <p:cNvPr id="11" name="TextBox 10"/>
           <p:cNvSpPr txBox="1"/>
           <p:nvPr/>
         </p:nvSpPr>
@@ -7514,7 +8392,7 @@
       </p:sp>
       <p:sp>
         <p:nvSpPr>
-          <p:cNvPr id="11" name="TextBox 10"/>
+          <p:cNvPr id="12" name="TextBox 11"/>
           <p:cNvSpPr txBox="1"/>
           <p:nvPr/>
         </p:nvSpPr>
@@ -7549,7 +8427,7 @@
       </p:sp>
       <p:sp>
         <p:nvSpPr>
-          <p:cNvPr id="12" name="Rounded Rectangle 11"/>
+          <p:cNvPr id="13" name="Rounded Rectangle 12"/>
           <p:cNvSpPr/>
           <p:nvPr/>
         </p:nvSpPr>
@@ -7595,7 +8473,7 @@
       </p:sp>
       <p:sp>
         <p:nvSpPr>
-          <p:cNvPr id="13" name="TextBox 12"/>
+          <p:cNvPr id="14" name="TextBox 13"/>
           <p:cNvSpPr txBox="1"/>
           <p:nvPr/>
         </p:nvSpPr>
@@ -7630,7 +8508,7 @@
       </p:sp>
       <p:sp>
         <p:nvSpPr>
-          <p:cNvPr id="14" name="TextBox 13"/>
+          <p:cNvPr id="15" name="TextBox 14"/>
           <p:cNvSpPr txBox="1"/>
           <p:nvPr/>
         </p:nvSpPr>
@@ -7755,7 +8633,7 @@
                 </a:solidFill>
                 <a:latin typeface="Montserrat"/>
               </a:rPr>
-              <a:t>003 / 015</a:t>
+              <a:t>003 / 016</a:t>
             </a:r>
           </a:p>
         </p:txBody>
@@ -7802,7 +8680,7 @@
         </p:nvSpPr>
         <p:spPr>
           <a:xfrm>
-            <a:off x="822960" y="457200"/>
+            <a:off x="822960" y="502920"/>
             <a:ext cx="8229600" cy="365760"/>
           </a:xfrm>
           <a:prstGeom prst="rect">
@@ -7817,13 +8695,13 @@
           <a:lstStyle/>
           <a:p>
             <a:r>
-              <a:rPr sz="1200" b="1" i="0">
-                <a:solidFill>
-                  <a:srgbClr val="64748B"/>
-                </a:solidFill>
-                <a:latin typeface="Montserrat"/>
-              </a:rPr>
-              <a:t>DISEÑO · TRAMOS DE PRESIÓN</a:t>
+              <a:rPr sz="1300" b="1" i="0">
+                <a:solidFill>
+                  <a:srgbClr val="E8801A"/>
+                </a:solidFill>
+                <a:latin typeface="Montserrat"/>
+              </a:rPr>
+              <a:t>PARTES DE ESTE VÍDEO</a:t>
             </a:r>
           </a:p>
         </p:txBody>
@@ -7836,7 +8714,7 @@
         </p:nvSpPr>
         <p:spPr>
           <a:xfrm>
-            <a:off x="822960" y="868680"/>
+            <a:off x="822960" y="914400"/>
             <a:ext cx="10515600" cy="914400"/>
           </a:xfrm>
           <a:prstGeom prst="rect">
@@ -7857,155 +8735,30 @@
                 </a:solidFill>
                 <a:latin typeface="Montserrat"/>
               </a:rPr>
-              <a:t>La escalera de presiones</a:t>
-            </a:r>
-          </a:p>
-        </p:txBody>
-      </p:sp>
-      <p:sp>
-        <p:nvSpPr>
-          <p:cNvPr id="7" name="TextBox 6"/>
-          <p:cNvSpPr txBox="1"/>
-          <p:nvPr/>
-        </p:nvSpPr>
-        <p:spPr>
-          <a:xfrm>
-            <a:off x="822960" y="1920240"/>
-            <a:ext cx="4983480" cy="4206240"/>
-          </a:xfrm>
-          <a:prstGeom prst="rect">
-            <a:avLst/>
-          </a:prstGeom>
-          <a:noFill/>
-        </p:spPr>
-        <p:txBody>
-          <a:bodyPr wrap="square">
-            <a:spAutoFit/>
-          </a:bodyPr>
-          <a:lstStyle/>
-          <a:p>
-            <a:pPr>
-              <a:spcAft>
-                <a:spcPts val="1000"/>
-              </a:spcAft>
-            </a:pPr>
-            <a:r>
-              <a:rPr sz="1600" b="1" i="0">
-                <a:solidFill>
-                  <a:srgbClr val="2E3A80"/>
-                </a:solidFill>
-                <a:latin typeface="Montserrat"/>
-              </a:rPr>
-              <a:t>•  </a:t>
-            </a:r>
-            <a:r>
-              <a:rPr sz="1600" b="0" i="0">
-                <a:solidFill>
-                  <a:srgbClr val="1B2330"/>
-                </a:solidFill>
-                <a:latin typeface="Montserrat"/>
-              </a:rPr>
-              <a:t>Cada tramo se nombra por su MOP</a:t>
-            </a:r>
-          </a:p>
-          <a:p>
-            <a:pPr>
-              <a:spcAft>
-                <a:spcPts val="1000"/>
-              </a:spcAft>
-            </a:pPr>
-            <a:r>
-              <a:rPr sz="1600" b="1" i="0">
-                <a:solidFill>
-                  <a:srgbClr val="2E3A80"/>
-                </a:solidFill>
-                <a:latin typeface="Montserrat"/>
-              </a:rPr>
-              <a:t>•  </a:t>
-            </a:r>
-            <a:r>
-              <a:rPr sz="1600" b="0" i="0">
-                <a:solidFill>
-                  <a:srgbClr val="1B2330"/>
-                </a:solidFill>
-                <a:latin typeface="Montserrat"/>
-              </a:rPr>
-              <a:t>Cortes: 5 – 2 – 0,4 – 0,15 – 0,05 bar</a:t>
-            </a:r>
-          </a:p>
-          <a:p>
-            <a:pPr>
-              <a:spcAft>
-                <a:spcPts val="1000"/>
-              </a:spcAft>
-            </a:pPr>
-            <a:r>
-              <a:rPr sz="1600" b="1" i="0">
-                <a:solidFill>
-                  <a:srgbClr val="2E3A80"/>
-                </a:solidFill>
-                <a:latin typeface="Montserrat"/>
-              </a:rPr>
-              <a:t>•  </a:t>
-            </a:r>
-            <a:r>
-              <a:rPr sz="1600" b="0" i="0">
-                <a:solidFill>
-                  <a:srgbClr val="1B2330"/>
-                </a:solidFill>
-                <a:latin typeface="Montserrat"/>
-              </a:rPr>
-              <a:t>Se nombra por su valor superior</a:t>
-            </a:r>
-          </a:p>
-          <a:p>
-            <a:pPr>
-              <a:spcAft>
-                <a:spcPts val="1000"/>
-              </a:spcAft>
-            </a:pPr>
-            <a:r>
-              <a:rPr sz="1600" b="1" i="0">
-                <a:solidFill>
-                  <a:srgbClr val="2E3A80"/>
-                </a:solidFill>
-                <a:latin typeface="Montserrat"/>
-              </a:rPr>
-              <a:t>•  </a:t>
-            </a:r>
-            <a:r>
-              <a:rPr sz="1600" b="0" i="0">
-                <a:solidFill>
-                  <a:srgbClr val="1B2330"/>
-                </a:solidFill>
-                <a:latin typeface="Montserrat"/>
-              </a:rPr>
-              <a:t>Media Parte 3 clasifica por aquí</a:t>
-            </a:r>
-          </a:p>
-        </p:txBody>
-      </p:sp>
-      <p:sp>
-        <p:nvSpPr>
-          <p:cNvPr id="8" name="imgph" descr="IMGQ:gas pressure gauge manometer dial"/>
+              <a:t>En este vídeo</a:t>
+            </a:r>
+          </a:p>
+        </p:txBody>
+      </p:sp>
+      <p:sp>
+        <p:nvSpPr>
+          <p:cNvPr id="7" name="Rounded Rectangle 6"/>
           <p:cNvSpPr/>
           <p:nvPr/>
         </p:nvSpPr>
         <p:spPr>
           <a:xfrm>
-            <a:off x="5806440" y="1051560"/>
-            <a:ext cx="5298947" cy="4629150"/>
+            <a:off x="868680" y="1673352"/>
+            <a:ext cx="2011680" cy="73152"/>
           </a:xfrm>
           <a:prstGeom prst="roundRect">
             <a:avLst/>
           </a:prstGeom>
           <a:solidFill>
-            <a:srgbClr val="F3F6FB"/>
+            <a:srgbClr val="E8801A"/>
           </a:solidFill>
-          <a:ln w="12700">
-            <a:solidFill>
-              <a:srgbClr val="C7D2E6"/>
-            </a:solidFill>
+          <a:ln>
+            <a:noFill/>
           </a:ln>
           <a:effectLst/>
         </p:spPr>
@@ -8033,14 +8786,14 @@
       </p:sp>
       <p:sp>
         <p:nvSpPr>
-          <p:cNvPr id="9" name="TextBox 8"/>
+          <p:cNvPr id="8" name="TextBox 7"/>
           <p:cNvSpPr txBox="1"/>
           <p:nvPr/>
         </p:nvSpPr>
         <p:spPr>
           <a:xfrm>
-            <a:off x="6080760" y="2726055"/>
-            <a:ext cx="4750307" cy="1280160"/>
+            <a:off x="822960" y="2103120"/>
+            <a:ext cx="10515600" cy="4023360"/>
           </a:xfrm>
           <a:prstGeom prst="rect">
             <a:avLst/>
@@ -8053,27 +8806,128 @@
           </a:bodyPr>
           <a:lstStyle/>
           <a:p>
-            <a:pPr algn="ctr"/>
-            <a:r>
-              <a:rPr sz="1400" b="1" i="0">
-                <a:solidFill>
-                  <a:srgbClr val="64748B"/>
-                </a:solidFill>
-                <a:latin typeface="Montserrat"/>
-              </a:rPr>
-              <a:t>IMAGEN REALISTA</a:t>
-            </a:r>
-          </a:p>
-          <a:p>
-            <a:pPr algn="ctr"/>
-            <a:r>
-              <a:rPr sz="1100" b="0" i="1">
-                <a:solidFill>
-                  <a:srgbClr val="64748B"/>
-                </a:solidFill>
-                <a:latin typeface="Montserrat"/>
-              </a:rPr>
-              <a:t>gas pressure gauge manometer dial</a:t>
+            <a:pPr>
+              <a:spcAft>
+                <a:spcPts val="900"/>
+              </a:spcAft>
+            </a:pPr>
+            <a:r>
+              <a:rPr sz="1800" b="1" i="0">
+                <a:solidFill>
+                  <a:srgbClr val="E8801A"/>
+                </a:solidFill>
+                <a:latin typeface="Montserrat"/>
+              </a:rPr>
+              <a:t>01   </a:t>
+            </a:r>
+            <a:r>
+              <a:rPr sz="1700" b="0" i="0">
+                <a:solidFill>
+                  <a:srgbClr val="1B2330"/>
+                </a:solidFill>
+                <a:latin typeface="Montserrat"/>
+              </a:rPr>
+              <a:t>Diseño</a:t>
+            </a:r>
+          </a:p>
+          <a:p>
+            <a:pPr>
+              <a:spcAft>
+                <a:spcPts val="900"/>
+              </a:spcAft>
+            </a:pPr>
+            <a:r>
+              <a:rPr sz="1800" b="1" i="0">
+                <a:solidFill>
+                  <a:srgbClr val="E8801A"/>
+                </a:solidFill>
+                <a:latin typeface="Montserrat"/>
+              </a:rPr>
+              <a:t>02   </a:t>
+            </a:r>
+            <a:r>
+              <a:rPr sz="1700" b="0" i="0">
+                <a:solidFill>
+                  <a:srgbClr val="1B2330"/>
+                </a:solidFill>
+                <a:latin typeface="Montserrat"/>
+              </a:rPr>
+              <a:t>Elementos</a:t>
+            </a:r>
+          </a:p>
+          <a:p>
+            <a:pPr>
+              <a:spcAft>
+                <a:spcPts val="900"/>
+              </a:spcAft>
+            </a:pPr>
+            <a:r>
+              <a:rPr sz="1800" b="1" i="0">
+                <a:solidFill>
+                  <a:srgbClr val="E8801A"/>
+                </a:solidFill>
+                <a:latin typeface="Montserrat"/>
+              </a:rPr>
+              <a:t>03   </a:t>
+            </a:r>
+            <a:r>
+              <a:rPr sz="1700" b="0" i="0">
+                <a:solidFill>
+                  <a:srgbClr val="1B2330"/>
+                </a:solidFill>
+                <a:latin typeface="Montserrat"/>
+              </a:rPr>
+              <a:t>Regulación</a:t>
+            </a:r>
+          </a:p>
+          <a:p>
+            <a:pPr>
+              <a:spcAft>
+                <a:spcPts val="900"/>
+              </a:spcAft>
+            </a:pPr>
+            <a:r>
+              <a:rPr sz="1800" b="1" i="0">
+                <a:solidFill>
+                  <a:srgbClr val="E8801A"/>
+                </a:solidFill>
+                <a:latin typeface="Montserrat"/>
+              </a:rPr>
+              <a:t>04   </a:t>
+            </a:r>
+            <a:r>
+              <a:rPr sz="1700" b="0" i="0">
+                <a:solidFill>
+                  <a:srgbClr val="1B2330"/>
+                </a:solidFill>
+                <a:latin typeface="Montserrat"/>
+              </a:rPr>
+              <a:t>Seguridad</a:t>
+            </a:r>
+          </a:p>
+          <a:p>
+            <a:pPr>
+              <a:spcAft>
+                <a:spcPts val="900"/>
+              </a:spcAft>
+            </a:pPr>
+            <a:r>
+              <a:rPr sz="1800" b="1" i="0">
+                <a:solidFill>
+                  <a:srgbClr val="E8801A"/>
+                </a:solidFill>
+                <a:latin typeface="Montserrat"/>
+              </a:rPr>
+              <a:t>05   </a:t>
+            </a:r>
+            <a:r>
+              <a:rPr sz="1700" b="0" i="0">
+                <a:solidFill>
+                  <a:srgbClr val="1B2330"/>
+                </a:solidFill>
+                <a:latin typeface="Montserrat"/>
+              </a:rPr>
+              <a:t>Conexiones</a:t>
             </a:r>
           </a:p>
         </p:txBody>
@@ -8170,7 +9024,7 @@
                 </a:solidFill>
                 <a:latin typeface="Montserrat"/>
               </a:rPr>
-              <a:t>004 / 015</a:t>
+              <a:t>004 / 016</a:t>
             </a:r>
           </a:p>
         </p:txBody>
@@ -8218,7 +9072,7 @@
         <p:spPr>
           <a:xfrm>
             <a:off x="822960" y="457200"/>
-            <a:ext cx="8229600" cy="365760"/>
+            <a:ext cx="10058400" cy="365760"/>
           </a:xfrm>
           <a:prstGeom prst="rect">
             <a:avLst/>
@@ -8232,13 +9086,13 @@
           <a:lstStyle/>
           <a:p>
             <a:r>
-              <a:rPr sz="1200" b="1" i="0">
-                <a:solidFill>
-                  <a:srgbClr val="64748B"/>
-                </a:solidFill>
-                <a:latin typeface="Montserrat"/>
-              </a:rPr>
-              <a:t>ELEMENTOS · TALLOS</a:t>
+              <a:rPr sz="1300" b="1" i="0">
+                <a:solidFill>
+                  <a:srgbClr val="E8801A"/>
+                </a:solidFill>
+                <a:latin typeface="Montserrat"/>
+              </a:rPr>
+              <a:t>DISEÑO · TRAMOS DE PRESIÓN</a:t>
             </a:r>
           </a:p>
         </p:txBody>
@@ -8266,26 +9120,70 @@
           <a:lstStyle/>
           <a:p>
             <a:r>
-              <a:rPr sz="2700" b="1" i="0">
+              <a:rPr sz="2800" b="1" i="0">
                 <a:solidFill>
                   <a:srgbClr val="1E2761"/>
                 </a:solidFill>
                 <a:latin typeface="Montserrat"/>
               </a:rPr>
-              <a:t>El tallo: de la calle a la casa</a:t>
-            </a:r>
-          </a:p>
-        </p:txBody>
-      </p:sp>
-      <p:sp>
-        <p:nvSpPr>
-          <p:cNvPr id="7" name="TextBox 6"/>
+              <a:t>La escalera de presiones</a:t>
+            </a:r>
+          </a:p>
+        </p:txBody>
+      </p:sp>
+      <p:sp>
+        <p:nvSpPr>
+          <p:cNvPr id="7" name="Rounded Rectangle 6"/>
+          <p:cNvSpPr/>
+          <p:nvPr/>
+        </p:nvSpPr>
+        <p:spPr>
+          <a:xfrm>
+            <a:off x="868680" y="1627632"/>
+            <a:ext cx="2011680" cy="73152"/>
+          </a:xfrm>
+          <a:prstGeom prst="roundRect">
+            <a:avLst/>
+          </a:prstGeom>
+          <a:solidFill>
+            <a:srgbClr val="E8801A"/>
+          </a:solidFill>
+          <a:ln>
+            <a:noFill/>
+          </a:ln>
+          <a:effectLst/>
+        </p:spPr>
+        <p:style>
+          <a:lnRef idx="1">
+            <a:schemeClr val="accent1"/>
+          </a:lnRef>
+          <a:fillRef idx="3">
+            <a:schemeClr val="accent1"/>
+          </a:fillRef>
+          <a:effectRef idx="2">
+            <a:schemeClr val="accent1"/>
+          </a:effectRef>
+          <a:fontRef idx="minor">
+            <a:schemeClr val="lt1"/>
+          </a:fontRef>
+        </p:style>
+        <p:txBody>
+          <a:bodyPr rtlCol="0" anchor="ctr"/>
+          <a:lstStyle/>
+          <a:p>
+            <a:pPr algn="ctr"/>
+          </a:p>
+        </p:txBody>
+      </p:sp>
+      <p:sp>
+        <p:nvSpPr>
+          <p:cNvPr id="8" name="TextBox 7"/>
           <p:cNvSpPr txBox="1"/>
           <p:nvPr/>
         </p:nvSpPr>
         <p:spPr>
           <a:xfrm>
-            <a:off x="822960" y="1920240"/>
+            <a:off x="822960" y="1965960"/>
             <a:ext cx="4983480" cy="4206240"/>
           </a:xfrm>
           <a:prstGeom prst="rect">
@@ -8301,17 +9199,17 @@
           <a:p>
             <a:pPr>
               <a:spcAft>
-                <a:spcPts val="1000"/>
+                <a:spcPts val="1100"/>
               </a:spcAft>
             </a:pPr>
             <a:r>
               <a:rPr sz="1600" b="1" i="0">
                 <a:solidFill>
-                  <a:srgbClr val="2E3A80"/>
-                </a:solidFill>
-                <a:latin typeface="Montserrat"/>
-              </a:rPr>
-              <a:t>•  </a:t>
+                  <a:srgbClr val="E8801A"/>
+                </a:solidFill>
+                <a:latin typeface="Montserrat"/>
+              </a:rPr>
+              <a:t>▸  </a:t>
             </a:r>
             <a:r>
               <a:rPr sz="1600" b="0" i="0">
@@ -8320,23 +9218,23 @@
                 </a:solidFill>
                 <a:latin typeface="Montserrat"/>
               </a:rPr>
-              <a:t>Une el PE enterrado con el metal visto</a:t>
+              <a:t>Cada tramo se nombra por su MOP</a:t>
             </a:r>
           </a:p>
           <a:p>
             <a:pPr>
               <a:spcAft>
-                <a:spcPts val="1000"/>
+                <a:spcPts val="1100"/>
               </a:spcAft>
             </a:pPr>
             <a:r>
               <a:rPr sz="1600" b="1" i="0">
                 <a:solidFill>
-                  <a:srgbClr val="2E3A80"/>
-                </a:solidFill>
-                <a:latin typeface="Montserrat"/>
-              </a:rPr>
-              <a:t>•  </a:t>
+                  <a:srgbClr val="E8801A"/>
+                </a:solidFill>
+                <a:latin typeface="Montserrat"/>
+              </a:rPr>
+              <a:t>▸  </a:t>
             </a:r>
             <a:r>
               <a:rPr sz="1600" b="0" i="0">
@@ -8345,23 +9243,23 @@
                 </a:solidFill>
                 <a:latin typeface="Montserrat"/>
               </a:rPr>
-              <a:t>Norma UNE 60405</a:t>
+              <a:t>Cortes: 5 – 2 – 0,4 – 0,15 – 0,05 bar</a:t>
             </a:r>
           </a:p>
           <a:p>
             <a:pPr>
               <a:spcAft>
-                <a:spcPts val="1000"/>
+                <a:spcPts val="1100"/>
               </a:spcAft>
             </a:pPr>
             <a:r>
               <a:rPr sz="1600" b="1" i="0">
                 <a:solidFill>
-                  <a:srgbClr val="2E3A80"/>
-                </a:solidFill>
-                <a:latin typeface="Montserrat"/>
-              </a:rPr>
-              <a:t>•  </a:t>
+                  <a:srgbClr val="E8801A"/>
+                </a:solidFill>
+                <a:latin typeface="Montserrat"/>
+              </a:rPr>
+              <a:t>▸  </a:t>
             </a:r>
             <a:r>
               <a:rPr sz="1600" b="0" i="0">
@@ -8370,23 +9268,23 @@
                 </a:solidFill>
                 <a:latin typeface="Montserrat"/>
               </a:rPr>
-              <a:t>PE-cobre, -acero, -inox o -multicapa</a:t>
+              <a:t>Se nombra por su valor superior</a:t>
             </a:r>
           </a:p>
           <a:p>
             <a:pPr>
               <a:spcAft>
-                <a:spcPts val="1000"/>
+                <a:spcPts val="1100"/>
               </a:spcAft>
             </a:pPr>
             <a:r>
               <a:rPr sz="1600" b="1" i="0">
                 <a:solidFill>
-                  <a:srgbClr val="2E3A80"/>
-                </a:solidFill>
-                <a:latin typeface="Montserrat"/>
-              </a:rPr>
-              <a:t>•  </a:t>
+                  <a:srgbClr val="E8801A"/>
+                </a:solidFill>
+                <a:latin typeface="Montserrat"/>
+              </a:rPr>
+              <a:t>▸  </a:t>
             </a:r>
             <a:r>
               <a:rPr sz="1600" b="0" i="0">
@@ -8395,14 +9293,14 @@
                 </a:solidFill>
                 <a:latin typeface="Montserrat"/>
               </a:rPr>
-              <a:t>El PE, siempre protegido del sol</a:t>
-            </a:r>
-          </a:p>
-        </p:txBody>
-      </p:sp>
-      <p:sp>
-        <p:nvSpPr>
-          <p:cNvPr id="8" name="imgph" descr="IMGQ:gas service pipe transition fitting ground"/>
+              <a:t>Media Parte 3 clasifica por aquí</a:t>
+            </a:r>
+          </a:p>
+        </p:txBody>
+      </p:sp>
+      <p:sp>
+        <p:nvSpPr>
+          <p:cNvPr id="9" name="imgph" descr="IMGQ:gas pressure gauge manometer dial"/>
           <p:cNvSpPr/>
           <p:nvPr/>
         </p:nvSpPr>
@@ -8448,7 +9346,7 @@
       </p:sp>
       <p:sp>
         <p:nvSpPr>
-          <p:cNvPr id="9" name="TextBox 8"/>
+          <p:cNvPr id="10" name="TextBox 9"/>
           <p:cNvSpPr txBox="1"/>
           <p:nvPr/>
         </p:nvSpPr>
@@ -8488,7 +9386,7 @@
                 </a:solidFill>
                 <a:latin typeface="Montserrat"/>
               </a:rPr>
-              <a:t>gas service pipe transition fitting ground</a:t>
+              <a:t>gas pressure gauge manometer dial</a:t>
             </a:r>
           </a:p>
         </p:txBody>
@@ -8585,7 +9483,7 @@
                 </a:solidFill>
                 <a:latin typeface="Montserrat"/>
               </a:rPr>
-              <a:t>005 / 015</a:t>
+              <a:t>005 / 016</a:t>
             </a:r>
           </a:p>
         </p:txBody>
@@ -8633,7 +9531,7 @@
         <p:spPr>
           <a:xfrm>
             <a:off x="822960" y="457200"/>
-            <a:ext cx="8229600" cy="365760"/>
+            <a:ext cx="10058400" cy="365760"/>
           </a:xfrm>
           <a:prstGeom prst="rect">
             <a:avLst/>
@@ -8647,13 +9545,13 @@
           <a:lstStyle/>
           <a:p>
             <a:r>
-              <a:rPr sz="1200" b="1" i="0">
-                <a:solidFill>
-                  <a:srgbClr val="64748B"/>
-                </a:solidFill>
-                <a:latin typeface="Montserrat"/>
-              </a:rPr>
-              <a:t>REGULACIÓN · 2ª FAMILIA</a:t>
+              <a:rPr sz="1300" b="1" i="0">
+                <a:solidFill>
+                  <a:srgbClr val="E8801A"/>
+                </a:solidFill>
+                <a:latin typeface="Montserrat"/>
+              </a:rPr>
+              <a:t>ELEMENTOS · TALLOS</a:t>
             </a:r>
           </a:p>
         </p:txBody>
@@ -8681,26 +9579,70 @@
           <a:lstStyle/>
           <a:p>
             <a:r>
-              <a:rPr sz="2700" b="1" i="0">
+              <a:rPr sz="2800" b="1" i="0">
                 <a:solidFill>
                   <a:srgbClr val="1E2761"/>
                 </a:solidFill>
                 <a:latin typeface="Montserrat"/>
               </a:rPr>
-              <a:t>Regular el gas natural</a:t>
-            </a:r>
-          </a:p>
-        </p:txBody>
-      </p:sp>
-      <p:sp>
-        <p:nvSpPr>
-          <p:cNvPr id="7" name="TextBox 6"/>
+              <a:t>El tallo: de la calle a la casa</a:t>
+            </a:r>
+          </a:p>
+        </p:txBody>
+      </p:sp>
+      <p:sp>
+        <p:nvSpPr>
+          <p:cNvPr id="7" name="Rounded Rectangle 6"/>
+          <p:cNvSpPr/>
+          <p:nvPr/>
+        </p:nvSpPr>
+        <p:spPr>
+          <a:xfrm>
+            <a:off x="868680" y="1627632"/>
+            <a:ext cx="2011680" cy="73152"/>
+          </a:xfrm>
+          <a:prstGeom prst="roundRect">
+            <a:avLst/>
+          </a:prstGeom>
+          <a:solidFill>
+            <a:srgbClr val="E8801A"/>
+          </a:solidFill>
+          <a:ln>
+            <a:noFill/>
+          </a:ln>
+          <a:effectLst/>
+        </p:spPr>
+        <p:style>
+          <a:lnRef idx="1">
+            <a:schemeClr val="accent1"/>
+          </a:lnRef>
+          <a:fillRef idx="3">
+            <a:schemeClr val="accent1"/>
+          </a:fillRef>
+          <a:effectRef idx="2">
+            <a:schemeClr val="accent1"/>
+          </a:effectRef>
+          <a:fontRef idx="minor">
+            <a:schemeClr val="lt1"/>
+          </a:fontRef>
+        </p:style>
+        <p:txBody>
+          <a:bodyPr rtlCol="0" anchor="ctr"/>
+          <a:lstStyle/>
+          <a:p>
+            <a:pPr algn="ctr"/>
+          </a:p>
+        </p:txBody>
+      </p:sp>
+      <p:sp>
+        <p:nvSpPr>
+          <p:cNvPr id="8" name="TextBox 7"/>
           <p:cNvSpPr txBox="1"/>
           <p:nvPr/>
         </p:nvSpPr>
         <p:spPr>
           <a:xfrm>
-            <a:off x="822960" y="1920240"/>
+            <a:off x="822960" y="1965960"/>
             <a:ext cx="4983480" cy="4206240"/>
           </a:xfrm>
           <a:prstGeom prst="rect">
@@ -8716,17 +9658,17 @@
           <a:p>
             <a:pPr>
               <a:spcAft>
-                <a:spcPts val="1000"/>
+                <a:spcPts val="1100"/>
               </a:spcAft>
             </a:pPr>
             <a:r>
               <a:rPr sz="1600" b="1" i="0">
                 <a:solidFill>
-                  <a:srgbClr val="2E3A80"/>
-                </a:solidFill>
-                <a:latin typeface="Montserrat"/>
-              </a:rPr>
-              <a:t>•  </a:t>
+                  <a:srgbClr val="E8801A"/>
+                </a:solidFill>
+                <a:latin typeface="Montserrat"/>
+              </a:rPr>
+              <a:t>▸  </a:t>
             </a:r>
             <a:r>
               <a:rPr sz="1600" b="0" i="0">
@@ -8735,23 +9677,23 @@
                 </a:solidFill>
                 <a:latin typeface="Montserrat"/>
               </a:rPr>
-              <a:t>Aplica al gas natural (2ª familia)</a:t>
+              <a:t>Une el PE enterrado con el metal visto</a:t>
             </a:r>
           </a:p>
           <a:p>
             <a:pPr>
               <a:spcAft>
-                <a:spcPts val="1000"/>
+                <a:spcPts val="1100"/>
               </a:spcAft>
             </a:pPr>
             <a:r>
               <a:rPr sz="1600" b="1" i="0">
                 <a:solidFill>
-                  <a:srgbClr val="2E3A80"/>
-                </a:solidFill>
-                <a:latin typeface="Montserrat"/>
-              </a:rPr>
-              <a:t>•  </a:t>
+                  <a:srgbClr val="E8801A"/>
+                </a:solidFill>
+                <a:latin typeface="Montserrat"/>
+              </a:rPr>
+              <a:t>▸  </a:t>
             </a:r>
             <a:r>
               <a:rPr sz="1600" b="0" i="0">
@@ -8760,23 +9702,23 @@
                 </a:solidFill>
                 <a:latin typeface="Montserrat"/>
               </a:rPr>
-              <a:t>Estaciones: UNE 60620-3</a:t>
+              <a:t>Norma UNE 60405</a:t>
             </a:r>
           </a:p>
           <a:p>
             <a:pPr>
               <a:spcAft>
-                <a:spcPts val="1000"/>
+                <a:spcPts val="1100"/>
               </a:spcAft>
             </a:pPr>
             <a:r>
               <a:rPr sz="1600" b="1" i="0">
                 <a:solidFill>
-                  <a:srgbClr val="2E3A80"/>
-                </a:solidFill>
-                <a:latin typeface="Montserrat"/>
-              </a:rPr>
-              <a:t>•  </a:t>
+                  <a:srgbClr val="E8801A"/>
+                </a:solidFill>
+                <a:latin typeface="Montserrat"/>
+              </a:rPr>
+              <a:t>▸  </a:t>
             </a:r>
             <a:r>
               <a:rPr sz="1600" b="0" i="0">
@@ -8785,23 +9727,23 @@
                 </a:solidFill>
                 <a:latin typeface="Montserrat"/>
               </a:rPr>
-              <a:t>Conjuntos, por su presión de entrada</a:t>
+              <a:t>PE-cobre, -acero, -inox o -multicapa</a:t>
             </a:r>
           </a:p>
           <a:p>
             <a:pPr>
               <a:spcAft>
-                <a:spcPts val="1000"/>
+                <a:spcPts val="1100"/>
               </a:spcAft>
             </a:pPr>
             <a:r>
               <a:rPr sz="1600" b="1" i="0">
                 <a:solidFill>
-                  <a:srgbClr val="2E3A80"/>
-                </a:solidFill>
-                <a:latin typeface="Montserrat"/>
-              </a:rPr>
-              <a:t>•  </a:t>
+                  <a:srgbClr val="E8801A"/>
+                </a:solidFill>
+                <a:latin typeface="Montserrat"/>
+              </a:rPr>
+              <a:t>▸  </a:t>
             </a:r>
             <a:r>
               <a:rPr sz="1600" b="0" i="0">
@@ -8810,14 +9752,14 @@
                 </a:solidFill>
                 <a:latin typeface="Montserrat"/>
               </a:rPr>
-              <a:t>MOPe 5, MOPe 0,4 o MOPe 0,15</a:t>
-            </a:r>
-          </a:p>
-        </p:txBody>
-      </p:sp>
-      <p:sp>
-        <p:nvSpPr>
-          <p:cNvPr id="8" name="imgph" descr="IMGQ:gas pressure regulator cabinet outdoor"/>
+              <a:t>El PE, siempre protegido del sol</a:t>
+            </a:r>
+          </a:p>
+        </p:txBody>
+      </p:sp>
+      <p:sp>
+        <p:nvSpPr>
+          <p:cNvPr id="9" name="imgph" descr="IMGQ:gas service pipe transition fitting ground"/>
           <p:cNvSpPr/>
           <p:nvPr/>
         </p:nvSpPr>
@@ -8863,7 +9805,7 @@
       </p:sp>
       <p:sp>
         <p:nvSpPr>
-          <p:cNvPr id="9" name="TextBox 8"/>
+          <p:cNvPr id="10" name="TextBox 9"/>
           <p:cNvSpPr txBox="1"/>
           <p:nvPr/>
         </p:nvSpPr>
@@ -8903,7 +9845,7 @@
                 </a:solidFill>
                 <a:latin typeface="Montserrat"/>
               </a:rPr>
-              <a:t>gas pressure regulator cabinet outdoor</a:t>
+              <a:t>gas service pipe transition fitting ground</a:t>
             </a:r>
           </a:p>
         </p:txBody>
@@ -9000,7 +9942,7 @@
                 </a:solidFill>
                 <a:latin typeface="Montserrat"/>
               </a:rPr>
-              <a:t>006 / 015</a:t>
+              <a:t>006 / 016</a:t>
             </a:r>
           </a:p>
         </p:txBody>
@@ -9048,7 +9990,7 @@
         <p:spPr>
           <a:xfrm>
             <a:off x="822960" y="457200"/>
-            <a:ext cx="8229600" cy="365760"/>
+            <a:ext cx="10058400" cy="365760"/>
           </a:xfrm>
           <a:prstGeom prst="rect">
             <a:avLst/>
@@ -9062,9 +10004,9 @@
           <a:lstStyle/>
           <a:p>
             <a:r>
-              <a:rPr sz="1200" b="1" i="0">
-                <a:solidFill>
-                  <a:srgbClr val="64748B"/>
+              <a:rPr sz="1300" b="1" i="0">
+                <a:solidFill>
+                  <a:srgbClr val="E8801A"/>
                 </a:solidFill>
                 <a:latin typeface="Montserrat"/>
               </a:rPr>
@@ -9096,26 +10038,70 @@
           <a:lstStyle/>
           <a:p>
             <a:r>
-              <a:rPr sz="2700" b="1" i="0">
+              <a:rPr sz="2800" b="1" i="0">
                 <a:solidFill>
                   <a:srgbClr val="1E2761"/>
                 </a:solidFill>
                 <a:latin typeface="Montserrat"/>
               </a:rPr>
-              <a:t>Elegir el regulador por su escalón</a:t>
-            </a:r>
-          </a:p>
-        </p:txBody>
-      </p:sp>
-      <p:sp>
-        <p:nvSpPr>
-          <p:cNvPr id="7" name="TextBox 6"/>
+              <a:t>Regular el gas natural</a:t>
+            </a:r>
+          </a:p>
+        </p:txBody>
+      </p:sp>
+      <p:sp>
+        <p:nvSpPr>
+          <p:cNvPr id="7" name="Rounded Rectangle 6"/>
+          <p:cNvSpPr/>
+          <p:nvPr/>
+        </p:nvSpPr>
+        <p:spPr>
+          <a:xfrm>
+            <a:off x="868680" y="1627632"/>
+            <a:ext cx="2011680" cy="73152"/>
+          </a:xfrm>
+          <a:prstGeom prst="roundRect">
+            <a:avLst/>
+          </a:prstGeom>
+          <a:solidFill>
+            <a:srgbClr val="E8801A"/>
+          </a:solidFill>
+          <a:ln>
+            <a:noFill/>
+          </a:ln>
+          <a:effectLst/>
+        </p:spPr>
+        <p:style>
+          <a:lnRef idx="1">
+            <a:schemeClr val="accent1"/>
+          </a:lnRef>
+          <a:fillRef idx="3">
+            <a:schemeClr val="accent1"/>
+          </a:fillRef>
+          <a:effectRef idx="2">
+            <a:schemeClr val="accent1"/>
+          </a:effectRef>
+          <a:fontRef idx="minor">
+            <a:schemeClr val="lt1"/>
+          </a:fontRef>
+        </p:style>
+        <p:txBody>
+          <a:bodyPr rtlCol="0" anchor="ctr"/>
+          <a:lstStyle/>
+          <a:p>
+            <a:pPr algn="ctr"/>
+          </a:p>
+        </p:txBody>
+      </p:sp>
+      <p:sp>
+        <p:nvSpPr>
+          <p:cNvPr id="8" name="TextBox 7"/>
           <p:cNvSpPr txBox="1"/>
           <p:nvPr/>
         </p:nvSpPr>
         <p:spPr>
           <a:xfrm>
-            <a:off x="822960" y="1920240"/>
+            <a:off x="822960" y="1965960"/>
             <a:ext cx="4983480" cy="4206240"/>
           </a:xfrm>
           <a:prstGeom prst="rect">
@@ -9131,17 +10117,17 @@
           <a:p>
             <a:pPr>
               <a:spcAft>
-                <a:spcPts val="1000"/>
+                <a:spcPts val="1100"/>
               </a:spcAft>
             </a:pPr>
             <a:r>
               <a:rPr sz="1600" b="1" i="0">
                 <a:solidFill>
-                  <a:srgbClr val="2E3A80"/>
-                </a:solidFill>
-                <a:latin typeface="Montserrat"/>
-              </a:rPr>
-              <a:t>•  </a:t>
+                  <a:srgbClr val="E8801A"/>
+                </a:solidFill>
+                <a:latin typeface="Montserrat"/>
+              </a:rPr>
+              <a:t>▸  </a:t>
             </a:r>
             <a:r>
               <a:rPr sz="1600" b="0" i="0">
@@ -9150,23 +10136,23 @@
                 </a:solidFill>
                 <a:latin typeface="Montserrat"/>
               </a:rPr>
-              <a:t>Entrada 0,4 / salida 0,1 → UNE 60402-1</a:t>
+              <a:t>Aplica al gas natural (2ª familia)</a:t>
             </a:r>
           </a:p>
           <a:p>
             <a:pPr>
               <a:spcAft>
-                <a:spcPts val="1000"/>
+                <a:spcPts val="1100"/>
               </a:spcAft>
             </a:pPr>
             <a:r>
               <a:rPr sz="1600" b="1" i="0">
                 <a:solidFill>
-                  <a:srgbClr val="2E3A80"/>
-                </a:solidFill>
-                <a:latin typeface="Montserrat"/>
-              </a:rPr>
-              <a:t>•  </a:t>
+                  <a:srgbClr val="E8801A"/>
+                </a:solidFill>
+                <a:latin typeface="Montserrat"/>
+              </a:rPr>
+              <a:t>▸  </a:t>
             </a:r>
             <a:r>
               <a:rPr sz="1600" b="0" i="0">
@@ -9175,23 +10161,23 @@
                 </a:solidFill>
                 <a:latin typeface="Montserrat"/>
               </a:rPr>
-              <a:t>Entrada 0,15–0,4 / salida 0,15 → UNE 60402-2</a:t>
+              <a:t>Estaciones: UNE 60620-3</a:t>
             </a:r>
           </a:p>
           <a:p>
             <a:pPr>
               <a:spcAft>
-                <a:spcPts val="1000"/>
+                <a:spcPts val="1100"/>
               </a:spcAft>
             </a:pPr>
             <a:r>
               <a:rPr sz="1600" b="1" i="0">
                 <a:solidFill>
-                  <a:srgbClr val="2E3A80"/>
-                </a:solidFill>
-                <a:latin typeface="Montserrat"/>
-              </a:rPr>
-              <a:t>•  </a:t>
+                  <a:srgbClr val="E8801A"/>
+                </a:solidFill>
+                <a:latin typeface="Montserrat"/>
+              </a:rPr>
+              <a:t>▸  </a:t>
             </a:r>
             <a:r>
               <a:rPr sz="1600" b="0" i="0">
@@ -9200,23 +10186,23 @@
                 </a:solidFill>
                 <a:latin typeface="Montserrat"/>
               </a:rPr>
-              <a:t>Entrada 0,4–5 / salida ≤ 0,4 → UNE 60411</a:t>
+              <a:t>Conjuntos, por su presión de entrada</a:t>
             </a:r>
           </a:p>
           <a:p>
             <a:pPr>
               <a:spcAft>
-                <a:spcPts val="1000"/>
+                <a:spcPts val="1100"/>
               </a:spcAft>
             </a:pPr>
             <a:r>
               <a:rPr sz="1600" b="1" i="0">
                 <a:solidFill>
-                  <a:srgbClr val="2E3A80"/>
-                </a:solidFill>
-                <a:latin typeface="Montserrat"/>
-              </a:rPr>
-              <a:t>•  </a:t>
+                  <a:srgbClr val="E8801A"/>
+                </a:solidFill>
+                <a:latin typeface="Montserrat"/>
+              </a:rPr>
+              <a:t>▸  </a:t>
             </a:r>
             <a:r>
               <a:rPr sz="1600" b="0" i="0">
@@ -9225,14 +10211,14 @@
                 </a:solidFill>
                 <a:latin typeface="Montserrat"/>
               </a:rPr>
-              <a:t>Se elige por lo que entra y lo que sale</a:t>
-            </a:r>
-          </a:p>
-        </p:txBody>
-      </p:sp>
-      <p:sp>
-        <p:nvSpPr>
-          <p:cNvPr id="8" name="imgph" descr="IMGQ:gas pressure regulator close up device"/>
+              <a:t>MOPe 5, MOPe 0,4 o MOPe 0,15</a:t>
+            </a:r>
+          </a:p>
+        </p:txBody>
+      </p:sp>
+      <p:sp>
+        <p:nvSpPr>
+          <p:cNvPr id="9" name="imgph" descr="IMGQ:gas pressure regulator cabinet outdoor"/>
           <p:cNvSpPr/>
           <p:nvPr/>
         </p:nvSpPr>
@@ -9278,7 +10264,7 @@
       </p:sp>
       <p:sp>
         <p:nvSpPr>
-          <p:cNvPr id="9" name="TextBox 8"/>
+          <p:cNvPr id="10" name="TextBox 9"/>
           <p:cNvSpPr txBox="1"/>
           <p:nvPr/>
         </p:nvSpPr>
@@ -9318,7 +10304,7 @@
                 </a:solidFill>
                 <a:latin typeface="Montserrat"/>
               </a:rPr>
-              <a:t>gas pressure regulator close up device</a:t>
+              <a:t>gas pressure regulator cabinet outdoor</a:t>
             </a:r>
           </a:p>
         </p:txBody>
@@ -9415,7 +10401,7 @@
                 </a:solidFill>
                 <a:latin typeface="Montserrat"/>
               </a:rPr>
-              <a:t>007 / 015</a:t>
+              <a:t>007 / 016</a:t>
             </a:r>
           </a:p>
         </p:txBody>
@@ -9463,7 +10449,7 @@
         <p:spPr>
           <a:xfrm>
             <a:off x="822960" y="457200"/>
-            <a:ext cx="8229600" cy="365760"/>
+            <a:ext cx="10058400" cy="365760"/>
           </a:xfrm>
           <a:prstGeom prst="rect">
             <a:avLst/>
@@ -9477,13 +10463,13 @@
           <a:lstStyle/>
           <a:p>
             <a:r>
-              <a:rPr sz="1200" b="1" i="0">
-                <a:solidFill>
-                  <a:srgbClr val="64748B"/>
-                </a:solidFill>
-                <a:latin typeface="Montserrat"/>
-              </a:rPr>
-              <a:t>REGULACIÓN · 3ª FAMILIA (GLP)</a:t>
+              <a:rPr sz="1300" b="1" i="0">
+                <a:solidFill>
+                  <a:srgbClr val="E8801A"/>
+                </a:solidFill>
+                <a:latin typeface="Montserrat"/>
+              </a:rPr>
+              <a:t>REGULACIÓN · 2ª FAMILIA</a:t>
             </a:r>
           </a:p>
         </p:txBody>
@@ -9511,26 +10497,70 @@
           <a:lstStyle/>
           <a:p>
             <a:r>
-              <a:rPr sz="2700" b="1" i="0">
+              <a:rPr sz="2800" b="1" i="0">
                 <a:solidFill>
                   <a:srgbClr val="1E2761"/>
                 </a:solidFill>
                 <a:latin typeface="Montserrat"/>
               </a:rPr>
-              <a:t>Butano y propano: la frontera de 15 kg</a:t>
-            </a:r>
-          </a:p>
-        </p:txBody>
-      </p:sp>
-      <p:sp>
-        <p:nvSpPr>
-          <p:cNvPr id="7" name="TextBox 6"/>
+              <a:t>Elegir el regulador por su escalón</a:t>
+            </a:r>
+          </a:p>
+        </p:txBody>
+      </p:sp>
+      <p:sp>
+        <p:nvSpPr>
+          <p:cNvPr id="7" name="Rounded Rectangle 6"/>
+          <p:cNvSpPr/>
+          <p:nvPr/>
+        </p:nvSpPr>
+        <p:spPr>
+          <a:xfrm>
+            <a:off x="868680" y="1627632"/>
+            <a:ext cx="2011680" cy="73152"/>
+          </a:xfrm>
+          <a:prstGeom prst="roundRect">
+            <a:avLst/>
+          </a:prstGeom>
+          <a:solidFill>
+            <a:srgbClr val="E8801A"/>
+          </a:solidFill>
+          <a:ln>
+            <a:noFill/>
+          </a:ln>
+          <a:effectLst/>
+        </p:spPr>
+        <p:style>
+          <a:lnRef idx="1">
+            <a:schemeClr val="accent1"/>
+          </a:lnRef>
+          <a:fillRef idx="3">
+            <a:schemeClr val="accent1"/>
+          </a:fillRef>
+          <a:effectRef idx="2">
+            <a:schemeClr val="accent1"/>
+          </a:effectRef>
+          <a:fontRef idx="minor">
+            <a:schemeClr val="lt1"/>
+          </a:fontRef>
+        </p:style>
+        <p:txBody>
+          <a:bodyPr rtlCol="0" anchor="ctr"/>
+          <a:lstStyle/>
+          <a:p>
+            <a:pPr algn="ctr"/>
+          </a:p>
+        </p:txBody>
+      </p:sp>
+      <p:sp>
+        <p:nvSpPr>
+          <p:cNvPr id="8" name="TextBox 7"/>
           <p:cNvSpPr txBox="1"/>
           <p:nvPr/>
         </p:nvSpPr>
         <p:spPr>
           <a:xfrm>
-            <a:off x="822960" y="1920240"/>
+            <a:off x="822960" y="1965960"/>
             <a:ext cx="4983480" cy="4206240"/>
           </a:xfrm>
           <a:prstGeom prst="rect">
@@ -9546,17 +10576,17 @@
           <a:p>
             <a:pPr>
               <a:spcAft>
-                <a:spcPts val="1000"/>
+                <a:spcPts val="1100"/>
               </a:spcAft>
             </a:pPr>
             <a:r>
               <a:rPr sz="1600" b="1" i="0">
                 <a:solidFill>
-                  <a:srgbClr val="2E3A80"/>
-                </a:solidFill>
-                <a:latin typeface="Montserrat"/>
-              </a:rPr>
-              <a:t>•  </a:t>
+                  <a:srgbClr val="E8801A"/>
+                </a:solidFill>
+                <a:latin typeface="Montserrat"/>
+              </a:rPr>
+              <a:t>▸  </a:t>
             </a:r>
             <a:r>
               <a:rPr sz="1600" b="0" i="0">
@@ -9565,23 +10595,23 @@
                 </a:solidFill>
                 <a:latin typeface="Montserrat"/>
               </a:rPr>
-              <a:t>Conjuntos MOPe 5 → UNE 60404-1</a:t>
+              <a:t>Entrada 0,4 / salida 0,1 → UNE 60402-1</a:t>
             </a:r>
           </a:p>
           <a:p>
             <a:pPr>
               <a:spcAft>
-                <a:spcPts val="1000"/>
+                <a:spcPts val="1100"/>
               </a:spcAft>
             </a:pPr>
             <a:r>
               <a:rPr sz="1600" b="1" i="0">
                 <a:solidFill>
-                  <a:srgbClr val="2E3A80"/>
-                </a:solidFill>
-                <a:latin typeface="Montserrat"/>
-              </a:rPr>
-              <a:t>•  </a:t>
+                  <a:srgbClr val="E8801A"/>
+                </a:solidFill>
+                <a:latin typeface="Montserrat"/>
+              </a:rPr>
+              <a:t>▸  </a:t>
             </a:r>
             <a:r>
               <a:rPr sz="1600" b="0" i="0">
@@ -9590,23 +10620,23 @@
                 </a:solidFill>
                 <a:latin typeface="Montserrat"/>
               </a:rPr>
-              <a:t>Reguladores de GLP → UNE-EN 16129</a:t>
+              <a:t>Entrada 0,15–0,4 / salida 0,15 → UNE 60402-2</a:t>
             </a:r>
           </a:p>
           <a:p>
             <a:pPr>
               <a:spcAft>
-                <a:spcPts val="1000"/>
+                <a:spcPts val="1100"/>
               </a:spcAft>
             </a:pPr>
             <a:r>
               <a:rPr sz="1600" b="1" i="0">
                 <a:solidFill>
-                  <a:srgbClr val="2E3A80"/>
-                </a:solidFill>
-                <a:latin typeface="Montserrat"/>
-              </a:rPr>
-              <a:t>•  </a:t>
+                  <a:srgbClr val="E8801A"/>
+                </a:solidFill>
+                <a:latin typeface="Montserrat"/>
+              </a:rPr>
+              <a:t>▸  </a:t>
             </a:r>
             <a:r>
               <a:rPr sz="1600" b="0" i="0">
@@ -9615,23 +10645,23 @@
                 </a:solidFill>
                 <a:latin typeface="Montserrat"/>
               </a:rPr>
-              <a:t>Por encima y por debajo de 15 kg</a:t>
+              <a:t>Entrada 0,4–5 / salida ≤ 0,4 → UNE 60411</a:t>
             </a:r>
           </a:p>
           <a:p>
             <a:pPr>
               <a:spcAft>
-                <a:spcPts val="1000"/>
+                <a:spcPts val="1100"/>
               </a:spcAft>
             </a:pPr>
             <a:r>
               <a:rPr sz="1600" b="1" i="0">
                 <a:solidFill>
-                  <a:srgbClr val="2E3A80"/>
-                </a:solidFill>
-                <a:latin typeface="Montserrat"/>
-              </a:rPr>
-              <a:t>•  </a:t>
+                  <a:srgbClr val="E8801A"/>
+                </a:solidFill>
+                <a:latin typeface="Montserrat"/>
+              </a:rPr>
+              <a:t>▸  </a:t>
             </a:r>
             <a:r>
               <a:rPr sz="1600" b="0" i="0">
@@ -9640,14 +10670,14 @@
                 </a:solidFill>
                 <a:latin typeface="Montserrat"/>
               </a:rPr>
-              <a:t>Adaptador de salida libre ≤ 15 kg → UNE 60408</a:t>
-            </a:r>
-          </a:p>
-        </p:txBody>
-      </p:sp>
-      <p:sp>
-        <p:nvSpPr>
-          <p:cNvPr id="8" name="imgph" descr="IMGQ:propane gas cylinder pressure regulator"/>
+              <a:t>Se elige por lo que entra y lo que sale</a:t>
+            </a:r>
+          </a:p>
+        </p:txBody>
+      </p:sp>
+      <p:sp>
+        <p:nvSpPr>
+          <p:cNvPr id="9" name="imgph" descr="IMGQ:gas pressure regulator close up device"/>
           <p:cNvSpPr/>
           <p:nvPr/>
         </p:nvSpPr>
@@ -9693,7 +10723,7 @@
       </p:sp>
       <p:sp>
         <p:nvSpPr>
-          <p:cNvPr id="9" name="TextBox 8"/>
+          <p:cNvPr id="10" name="TextBox 9"/>
           <p:cNvSpPr txBox="1"/>
           <p:nvPr/>
         </p:nvSpPr>
@@ -9733,7 +10763,7 @@
                 </a:solidFill>
                 <a:latin typeface="Montserrat"/>
               </a:rPr>
-              <a:t>propane gas cylinder pressure regulator</a:t>
+              <a:t>gas pressure regulator close up device</a:t>
             </a:r>
           </a:p>
         </p:txBody>
@@ -9830,7 +10860,7 @@
                 </a:solidFill>
                 <a:latin typeface="Montserrat"/>
               </a:rPr>
-              <a:t>008 / 015</a:t>
+              <a:t>008 / 016</a:t>
             </a:r>
           </a:p>
         </p:txBody>
@@ -9878,7 +10908,7 @@
         <p:spPr>
           <a:xfrm>
             <a:off x="822960" y="457200"/>
-            <a:ext cx="8229600" cy="365760"/>
+            <a:ext cx="10058400" cy="365760"/>
           </a:xfrm>
           <a:prstGeom prst="rect">
             <a:avLst/>
@@ -9892,13 +10922,13 @@
           <a:lstStyle/>
           <a:p>
             <a:r>
-              <a:rPr sz="1200" b="1" i="0">
-                <a:solidFill>
-                  <a:srgbClr val="64748B"/>
-                </a:solidFill>
-                <a:latin typeface="Montserrat"/>
-              </a:rPr>
-              <a:t>SEGURIDAD · VÁLVULAS</a:t>
+              <a:rPr sz="1300" b="1" i="0">
+                <a:solidFill>
+                  <a:srgbClr val="E8801A"/>
+                </a:solidFill>
+                <a:latin typeface="Montserrat"/>
+              </a:rPr>
+              <a:t>REGULACIÓN · 3ª FAMILIA (GLP)</a:t>
             </a:r>
           </a:p>
         </p:txBody>
@@ -9926,26 +10956,70 @@
           <a:lstStyle/>
           <a:p>
             <a:r>
-              <a:rPr sz="2700" b="1" i="0">
+              <a:rPr sz="2800" b="1" i="0">
                 <a:solidFill>
                   <a:srgbClr val="1E2761"/>
                 </a:solidFill>
                 <a:latin typeface="Montserrat"/>
               </a:rPr>
-              <a:t>Los dos guardianes de la presión</a:t>
-            </a:r>
-          </a:p>
-        </p:txBody>
-      </p:sp>
-      <p:sp>
-        <p:nvSpPr>
-          <p:cNvPr id="7" name="TextBox 6"/>
+              <a:t>Butano y propano: la frontera de 15 kg</a:t>
+            </a:r>
+          </a:p>
+        </p:txBody>
+      </p:sp>
+      <p:sp>
+        <p:nvSpPr>
+          <p:cNvPr id="7" name="Rounded Rectangle 6"/>
+          <p:cNvSpPr/>
+          <p:nvPr/>
+        </p:nvSpPr>
+        <p:spPr>
+          <a:xfrm>
+            <a:off x="868680" y="1627632"/>
+            <a:ext cx="2011680" cy="73152"/>
+          </a:xfrm>
+          <a:prstGeom prst="roundRect">
+            <a:avLst/>
+          </a:prstGeom>
+          <a:solidFill>
+            <a:srgbClr val="E8801A"/>
+          </a:solidFill>
+          <a:ln>
+            <a:noFill/>
+          </a:ln>
+          <a:effectLst/>
+        </p:spPr>
+        <p:style>
+          <a:lnRef idx="1">
+            <a:schemeClr val="accent1"/>
+          </a:lnRef>
+          <a:fillRef idx="3">
+            <a:schemeClr val="accent1"/>
+          </a:fillRef>
+          <a:effectRef idx="2">
+            <a:schemeClr val="accent1"/>
+          </a:effectRef>
+          <a:fontRef idx="minor">
+            <a:schemeClr val="lt1"/>
+          </a:fontRef>
+        </p:style>
+        <p:txBody>
+          <a:bodyPr rtlCol="0" anchor="ctr"/>
+          <a:lstStyle/>
+          <a:p>
+            <a:pPr algn="ctr"/>
+          </a:p>
+        </p:txBody>
+      </p:sp>
+      <p:sp>
+        <p:nvSpPr>
+          <p:cNvPr id="8" name="TextBox 7"/>
           <p:cNvSpPr txBox="1"/>
           <p:nvPr/>
         </p:nvSpPr>
         <p:spPr>
           <a:xfrm>
-            <a:off x="822960" y="1920240"/>
+            <a:off x="822960" y="1965960"/>
             <a:ext cx="4983480" cy="4206240"/>
           </a:xfrm>
           <a:prstGeom prst="rect">
@@ -9961,17 +11035,17 @@
           <a:p>
             <a:pPr>
               <a:spcAft>
-                <a:spcPts val="1000"/>
+                <a:spcPts val="1100"/>
               </a:spcAft>
             </a:pPr>
             <a:r>
               <a:rPr sz="1600" b="1" i="0">
                 <a:solidFill>
-                  <a:srgbClr val="2E3A80"/>
-                </a:solidFill>
-                <a:latin typeface="Montserrat"/>
-              </a:rPr>
-              <a:t>•  </a:t>
+                  <a:srgbClr val="E8801A"/>
+                </a:solidFill>
+                <a:latin typeface="Montserrat"/>
+              </a:rPr>
+              <a:t>▸  </a:t>
             </a:r>
             <a:r>
               <a:rPr sz="1600" b="0" i="0">
@@ -9980,23 +11054,23 @@
                 </a:solidFill>
                 <a:latin typeface="Montserrat"/>
               </a:rPr>
-              <a:t>VIS de mínima: corta si la presión baja</a:t>
+              <a:t>Conjuntos MOPe 5 → UNE 60404-1</a:t>
             </a:r>
           </a:p>
           <a:p>
             <a:pPr>
               <a:spcAft>
-                <a:spcPts val="1000"/>
+                <a:spcPts val="1100"/>
               </a:spcAft>
             </a:pPr>
             <a:r>
               <a:rPr sz="1600" b="1" i="0">
                 <a:solidFill>
-                  <a:srgbClr val="2E3A80"/>
-                </a:solidFill>
-                <a:latin typeface="Montserrat"/>
-              </a:rPr>
-              <a:t>•  </a:t>
+                  <a:srgbClr val="E8801A"/>
+                </a:solidFill>
+                <a:latin typeface="Montserrat"/>
+              </a:rPr>
+              <a:t>▸  </a:t>
             </a:r>
             <a:r>
               <a:rPr sz="1600" b="0" i="0">
@@ -10005,23 +11079,23 @@
                 </a:solidFill>
                 <a:latin typeface="Montserrat"/>
               </a:rPr>
-              <a:t>VIS ≤ 4,8 m³/h → UNE 60403</a:t>
+              <a:t>Reguladores de GLP → UNE-EN 16129</a:t>
             </a:r>
           </a:p>
           <a:p>
             <a:pPr>
               <a:spcAft>
-                <a:spcPts val="1000"/>
+                <a:spcPts val="1100"/>
               </a:spcAft>
             </a:pPr>
             <a:r>
               <a:rPr sz="1600" b="1" i="0">
                 <a:solidFill>
-                  <a:srgbClr val="2E3A80"/>
-                </a:solidFill>
-                <a:latin typeface="Montserrat"/>
-              </a:rPr>
-              <a:t>•  </a:t>
+                  <a:srgbClr val="E8801A"/>
+                </a:solidFill>
+                <a:latin typeface="Montserrat"/>
+              </a:rPr>
+              <a:t>▸  </a:t>
             </a:r>
             <a:r>
               <a:rPr sz="1600" b="0" i="0">
@@ -10030,23 +11104,23 @@
                 </a:solidFill>
                 <a:latin typeface="Montserrat"/>
               </a:rPr>
-              <a:t>Máxima: corta si la presión sube</a:t>
+              <a:t>Por encima y por debajo de 15 kg</a:t>
             </a:r>
           </a:p>
           <a:p>
             <a:pPr>
               <a:spcAft>
-                <a:spcPts val="1000"/>
+                <a:spcPts val="1100"/>
               </a:spcAft>
             </a:pPr>
             <a:r>
               <a:rPr sz="1600" b="1" i="0">
                 <a:solidFill>
-                  <a:srgbClr val="2E3A80"/>
-                </a:solidFill>
-                <a:latin typeface="Montserrat"/>
-              </a:rPr>
-              <a:t>•  </a:t>
+                  <a:srgbClr val="E8801A"/>
+                </a:solidFill>
+                <a:latin typeface="Montserrat"/>
+              </a:rPr>
+              <a:t>▸  </a:t>
             </a:r>
             <a:r>
               <a:rPr sz="1600" b="0" i="0">
@@ -10055,14 +11129,14 @@
                 </a:solidFill>
                 <a:latin typeface="Montserrat"/>
               </a:rPr>
-              <a:t>Máxima: rearme manual y tarado precintado</a:t>
-            </a:r>
-          </a:p>
-        </p:txBody>
-      </p:sp>
-      <p:sp>
-        <p:nvSpPr>
-          <p:cNvPr id="8" name="imgph" descr="IMGQ:gas safety shut off valve close up"/>
+              <a:t>Adaptador de salida libre ≤ 15 kg → UNE 60408</a:t>
+            </a:r>
+          </a:p>
+        </p:txBody>
+      </p:sp>
+      <p:sp>
+        <p:nvSpPr>
+          <p:cNvPr id="9" name="imgph" descr="IMGQ:propane gas cylinder pressure regulator"/>
           <p:cNvSpPr/>
           <p:nvPr/>
         </p:nvSpPr>
@@ -10108,7 +11182,7 @@
       </p:sp>
       <p:sp>
         <p:nvSpPr>
-          <p:cNvPr id="9" name="TextBox 8"/>
+          <p:cNvPr id="10" name="TextBox 9"/>
           <p:cNvSpPr txBox="1"/>
           <p:nvPr/>
         </p:nvSpPr>
@@ -10148,7 +11222,7 @@
                 </a:solidFill>
                 <a:latin typeface="Montserrat"/>
               </a:rPr>
-              <a:t>gas safety shut off valve close up</a:t>
+              <a:t>propane gas cylinder pressure regulator</a:t>
             </a:r>
           </a:p>
         </p:txBody>
@@ -10245,7 +11319,7 @@
                 </a:solidFill>
                 <a:latin typeface="Montserrat"/>
               </a:rPr>
-              <a:t>009 / 015</a:t>
+              <a:t>009 / 016</a:t>
             </a:r>
           </a:p>
         </p:txBody>
@@ -10293,7 +11367,7 @@
         <p:spPr>
           <a:xfrm>
             <a:off x="822960" y="457200"/>
-            <a:ext cx="8229600" cy="365760"/>
+            <a:ext cx="10058400" cy="365760"/>
           </a:xfrm>
           <a:prstGeom prst="rect">
             <a:avLst/>
@@ -10307,13 +11381,13 @@
           <a:lstStyle/>
           <a:p>
             <a:r>
-              <a:rPr sz="1200" b="1" i="0">
-                <a:solidFill>
-                  <a:srgbClr val="64748B"/>
-                </a:solidFill>
-                <a:latin typeface="Montserrat"/>
-              </a:rPr>
-              <a:t>ELEMENTOS · CONTADORES</a:t>
+              <a:rPr sz="1300" b="1" i="0">
+                <a:solidFill>
+                  <a:srgbClr val="E8801A"/>
+                </a:solidFill>
+                <a:latin typeface="Montserrat"/>
+              </a:rPr>
+              <a:t>SEGURIDAD · VÁLVULAS</a:t>
             </a:r>
           </a:p>
         </p:txBody>
@@ -10341,26 +11415,70 @@
           <a:lstStyle/>
           <a:p>
             <a:r>
-              <a:rPr sz="2700" b="1" i="0">
+              <a:rPr sz="2800" b="1" i="0">
                 <a:solidFill>
                   <a:srgbClr val="1E2761"/>
                 </a:solidFill>
                 <a:latin typeface="Montserrat"/>
               </a:rPr>
-              <a:t>Cuatro tipos de contador</a:t>
-            </a:r>
-          </a:p>
-        </p:txBody>
-      </p:sp>
-      <p:sp>
-        <p:nvSpPr>
-          <p:cNvPr id="7" name="TextBox 6"/>
+              <a:t>Los dos guardianes de la presión</a:t>
+            </a:r>
+          </a:p>
+        </p:txBody>
+      </p:sp>
+      <p:sp>
+        <p:nvSpPr>
+          <p:cNvPr id="7" name="Rounded Rectangle 6"/>
+          <p:cNvSpPr/>
+          <p:nvPr/>
+        </p:nvSpPr>
+        <p:spPr>
+          <a:xfrm>
+            <a:off x="868680" y="1627632"/>
+            <a:ext cx="2011680" cy="73152"/>
+          </a:xfrm>
+          <a:prstGeom prst="roundRect">
+            <a:avLst/>
+          </a:prstGeom>
+          <a:solidFill>
+            <a:srgbClr val="E8801A"/>
+          </a:solidFill>
+          <a:ln>
+            <a:noFill/>
+          </a:ln>
+          <a:effectLst/>
+        </p:spPr>
+        <p:style>
+          <a:lnRef idx="1">
+            <a:schemeClr val="accent1"/>
+          </a:lnRef>
+          <a:fillRef idx="3">
+            <a:schemeClr val="accent1"/>
+          </a:fillRef>
+          <a:effectRef idx="2">
+            <a:schemeClr val="accent1"/>
+          </a:effectRef>
+          <a:fontRef idx="minor">
+            <a:schemeClr val="lt1"/>
+          </a:fontRef>
+        </p:style>
+        <p:txBody>
+          <a:bodyPr rtlCol="0" anchor="ctr"/>
+          <a:lstStyle/>
+          <a:p>
+            <a:pPr algn="ctr"/>
+          </a:p>
+        </p:txBody>
+      </p:sp>
+      <p:sp>
+        <p:nvSpPr>
+          <p:cNvPr id="8" name="TextBox 7"/>
           <p:cNvSpPr txBox="1"/>
           <p:nvPr/>
         </p:nvSpPr>
         <p:spPr>
           <a:xfrm>
-            <a:off x="822960" y="1920240"/>
+            <a:off x="822960" y="1965960"/>
             <a:ext cx="4983480" cy="4206240"/>
           </a:xfrm>
           <a:prstGeom prst="rect">
@@ -10376,17 +11494,17 @@
           <a:p>
             <a:pPr>
               <a:spcAft>
-                <a:spcPts val="1000"/>
+                <a:spcPts val="1100"/>
               </a:spcAft>
             </a:pPr>
             <a:r>
               <a:rPr sz="1600" b="1" i="0">
                 <a:solidFill>
-                  <a:srgbClr val="2E3A80"/>
-                </a:solidFill>
-                <a:latin typeface="Montserrat"/>
-              </a:rPr>
-              <a:t>•  </a:t>
+                  <a:srgbClr val="E8801A"/>
+                </a:solidFill>
+                <a:latin typeface="Montserrat"/>
+              </a:rPr>
+              <a:t>▸  </a:t>
             </a:r>
             <a:r>
               <a:rPr sz="1600" b="0" i="0">
@@ -10395,23 +11513,23 @@
                 </a:solidFill>
                 <a:latin typeface="Montserrat"/>
               </a:rPr>
-              <a:t>Membrana → UNE-EN 1359 y UNE 60510</a:t>
+              <a:t>VIS de mínima: corta si la presión baja</a:t>
             </a:r>
           </a:p>
           <a:p>
             <a:pPr>
               <a:spcAft>
-                <a:spcPts val="1000"/>
+                <a:spcPts val="1100"/>
               </a:spcAft>
             </a:pPr>
             <a:r>
               <a:rPr sz="1600" b="1" i="0">
                 <a:solidFill>
-                  <a:srgbClr val="2E3A80"/>
-                </a:solidFill>
-                <a:latin typeface="Montserrat"/>
-              </a:rPr>
-              <a:t>•  </a:t>
+                  <a:srgbClr val="E8801A"/>
+                </a:solidFill>
+                <a:latin typeface="Montserrat"/>
+              </a:rPr>
+              <a:t>▸  </a:t>
             </a:r>
             <a:r>
               <a:rPr sz="1600" b="0" i="0">
@@ -10420,23 +11538,23 @@
                 </a:solidFill>
                 <a:latin typeface="Montserrat"/>
               </a:rPr>
-              <a:t>Turbina → UNE-EN 12261</a:t>
+              <a:t>VIS ≤ 4,8 m³/h → UNE 60403</a:t>
             </a:r>
           </a:p>
           <a:p>
             <a:pPr>
               <a:spcAft>
-                <a:spcPts val="1000"/>
+                <a:spcPts val="1100"/>
               </a:spcAft>
             </a:pPr>
             <a:r>
               <a:rPr sz="1600" b="1" i="0">
                 <a:solidFill>
-                  <a:srgbClr val="2E3A80"/>
-                </a:solidFill>
-                <a:latin typeface="Montserrat"/>
-              </a:rPr>
-              <a:t>•  </a:t>
+                  <a:srgbClr val="E8801A"/>
+                </a:solidFill>
+                <a:latin typeface="Montserrat"/>
+              </a:rPr>
+              <a:t>▸  </a:t>
             </a:r>
             <a:r>
               <a:rPr sz="1600" b="0" i="0">
@@ -10445,23 +11563,23 @@
                 </a:solidFill>
                 <a:latin typeface="Montserrat"/>
               </a:rPr>
-              <a:t>Pistones → UNE-EN 12480</a:t>
+              <a:t>Máxima: corta si la presión sube</a:t>
             </a:r>
           </a:p>
           <a:p>
             <a:pPr>
               <a:spcAft>
-                <a:spcPts val="1000"/>
+                <a:spcPts val="1100"/>
               </a:spcAft>
             </a:pPr>
             <a:r>
               <a:rPr sz="1600" b="1" i="0">
                 <a:solidFill>
-                  <a:srgbClr val="2E3A80"/>
-                </a:solidFill>
-                <a:latin typeface="Montserrat"/>
-              </a:rPr>
-              <a:t>•  </a:t>
+                  <a:srgbClr val="E8801A"/>
+                </a:solidFill>
+                <a:latin typeface="Montserrat"/>
+              </a:rPr>
+              <a:t>▸  </a:t>
             </a:r>
             <a:r>
               <a:rPr sz="1600" b="0" i="0">
@@ -10470,14 +11588,14 @@
                 </a:solidFill>
                 <a:latin typeface="Montserrat"/>
               </a:rPr>
-              <a:t>Ultrasónico doméstico → UNE-EN 14236</a:t>
-            </a:r>
-          </a:p>
-        </p:txBody>
-      </p:sp>
-      <p:sp>
-        <p:nvSpPr>
-          <p:cNvPr id="8" name="imgph" descr="IMGQ:domestic gas meter diaphragm cabinet"/>
+              <a:t>Máxima: rearme manual y tarado precintado</a:t>
+            </a:r>
+          </a:p>
+        </p:txBody>
+      </p:sp>
+      <p:sp>
+        <p:nvSpPr>
+          <p:cNvPr id="9" name="imgph" descr="IMGQ:gas safety shut off valve close up"/>
           <p:cNvSpPr/>
           <p:nvPr/>
         </p:nvSpPr>
@@ -10523,7 +11641,7 @@
       </p:sp>
       <p:sp>
         <p:nvSpPr>
-          <p:cNvPr id="9" name="TextBox 8"/>
+          <p:cNvPr id="10" name="TextBox 9"/>
           <p:cNvSpPr txBox="1"/>
           <p:nvPr/>
         </p:nvSpPr>
@@ -10563,7 +11681,7 @@
                 </a:solidFill>
                 <a:latin typeface="Montserrat"/>
               </a:rPr>
-              <a:t>domestic gas meter diaphragm cabinet</a:t>
+              <a:t>gas safety shut off valve close up</a:t>
             </a:r>
           </a:p>
         </p:txBody>

--- a/Curso Gas B/10 - UNE 60670 - Tuberias, accesorios y uniones/10 - UNE 60670 - Tuberias, accesorios y uniones - Vídeo 2.pptx
+++ b/Curso Gas B/10 - UNE 60670 - Tuberias, accesorios y uniones/10 - UNE 60670 - Tuberias, accesorios y uniones - Vídeo 2.pptx
@@ -21,6 +21,13 @@
     <p:sldId id="269" r:id="rId21"/>
     <p:sldId id="270" r:id="rId22"/>
     <p:sldId id="271" r:id="rId23"/>
+    <p:sldId id="272" r:id="rId24"/>
+    <p:sldId id="273" r:id="rId25"/>
+    <p:sldId id="274" r:id="rId26"/>
+    <p:sldId id="275" r:id="rId27"/>
+    <p:sldId id="276" r:id="rId28"/>
+    <p:sldId id="277" r:id="rId29"/>
+    <p:sldId id="278" r:id="rId30"/>
   </p:sldIdLst>
   <p:sldSz cx="12191695" cy="6858000" type="screen4x3"/>
   <p:notesSz cx="6858000" cy="9144000"/>
@@ -592,12 +599,12 @@
           <a:lstStyle/>
           <a:p>
             <a:r>
-              <a:t>N1: El contador de casa, ¿cuál de los cuatro es?</a:t>
-            </a:r>
-          </a:p>
-          <a:p>
-            <a:r>
-              <a:t>N2: El de casa de toda la vida es el de membrana, también llamado de paredes deformables: mide el gas llenando y vaciando unas cámaras, como un fuelle. Fíjate en que es el único que lleva dos normas: la europea de producto, mil trescientos cincuenta y nueve, y la española de medidas y acabado, sesenta mil quinientos diez. Los otros dos clásicos son para grandes consumos, industria y similares: el de turbina, que mide por un molinillo que gira, y el de pistones. Y la novedad de esta edición es el contador ultrasónico doméstico, que mide el gas con ultrasonidos y no tiene piezas móviles; su norma es la catorce mil doscientos treinta y seis. Un apunte de obra: el contador suele ser propiedad de la distribuidora y va precintado; romper ese precinto sin permiso es un problema serio.</a:t>
+              <a:t>N1: ¿Cómo sé qué regulador toca? Son tres normas parecidas.</a:t>
+            </a:r>
+          </a:p>
+          <a:p>
+            <a:r>
+              <a:t>N2: No memorices las normas sueltas; memoriza el escalón de presión, que es como de verdad se elige. Un regulador se define por dos datos: qué presión le entra y qué presión te da a la salida. Con eso, la chuleta es sencilla. Si entra cero coma cuatro y sale cero coma uno, es la sesenta mil cuatrocientos dos, parte uno. Si entra entre cero coma quince y cero coma cuatro y sale cero coma quince, es la misma sesenta mil cuatrocientos dos, pero parte dos. Y si entra fuerte, entre cero coma cuatro y cinco bar, y sale como mucho cero coma cuatro, es la sesenta mil cuatrocientos once. ¿Por qué importa acertar? Porque un regulador mal elegido o descalibrado le da al aparato una presión que no le toca, y eso es llama amarilla, hollín y mala combustión. Casi toda avería de gas empieza en una presión mal dada.</a:t>
             </a:r>
           </a:p>
         </p:txBody>
@@ -667,12 +674,12 @@
           <a:lstStyle/>
           <a:p>
             <a:r>
-              <a:t>N1: ¿La batería de contadores del portal también tiene su norma?</a:t>
-            </a:r>
-          </a:p>
-          <a:p>
-            <a:r>
-              <a:t>N2: La tiene, y hay un despiste típico que quiero que evites. Primero los soportes: la pieza que sujeta un contador. Si va dentro de vivienda o local, sigue la norma sesenta mil cuatrocientos noventa y cinco, parte uno; si va a la intemperie, la parte dos de esa misma norma. Y ahora la centralización, que es la batería de contadores del cuarto de contadores de un edificio, esos contadores puestos en fila. Aquí está la trampa: da igual que compres el módulo ya hecho de fábrica, prefabricado, o que lo montes tubo a tubo allí mismo. En los dos casos manda la misma norma, la sesenta mil cuatrocientos noventa. Mucha gente cree que solo aplica a los prefabricados, y no: aplica siempre.</a:t>
+              <a:t>N1: En butano y propano, ¿otra vez aparece lo de los 15 kilos?</a:t>
+            </a:r>
+          </a:p>
+          <a:p>
+            <a:r>
+              <a:t>N2: Sí, y no es casualidad: el envase de quince kilos es la frontera de siempre en el GLP. Estamos en tercera familia, butano y propano. Los conjuntos de regulación que trabajan a cinco bar de entrada van por la norma sesenta mil cuatrocientos cuatro, parte uno. Y los reguladores, tanto los de instalaciones grandes, red o depósito o envases de más de quince kilos, como los que se acoplan a las bombonas de quince kilos o menos, van todos a la misma norma, la dieciséis mil ciento veintinueve, que es la que juntó todas las normas viejas de reguladores de GLP. Solo hay una pieza aparte: el adaptador de salida libre, ese que rosca directo en la bombona pequeña de hasta quince kilos, que va por la norma sesenta mil cuatrocientos ocho. Resumen: casi todo GLP, dieciséis mil ciento veintinueve; el adaptador de la botella, sesenta mil cuatrocientos ocho.</a:t>
             </a:r>
           </a:p>
         </p:txBody>
@@ -742,12 +749,12 @@
           <a:lstStyle/>
           <a:p>
             <a:r>
-              <a:t>N1: ¿Qué le pido a una llave de corte para fiarme de ella?</a:t>
-            </a:r>
-          </a:p>
-          <a:p>
-            <a:r>
-              <a:t>N2: Que cierre siempre que haga falta, sobre todo el día de una avería. Empecemos por las llaves no enterrables, las normales, que van por la norma trescientos treinta y uno. Para diámetros de hasta cien, quédate con dos exigencias fijas. Una, clase de temperatura menos veinte grados: la llave tiene que poder cerrar aunque haga frío, sin agarrotarse. Dos, tiene que poder bloquearse y precintarse en posición de 'cerrado', para que tras cortar en una revisión o emergencia nadie la vuelva a abrir por error. Por encima de cien de diámetro ya no hay llave de bola pequeña normalizada; se ponen de bola grande o de mariposa. Y ojo a una diferencia que se pregunta: una cosa son las llaves no enterrables y otra las enterrables, que tienen su propia norma según sean de plástico o metálicas. No las mezcles: una llave que no cierra cuando hay una fuga no sirve absolutamente de nada.</a:t>
+              <a:t>N1: ¿Para qué dos válvulas de seguridad distintas?</a:t>
+            </a:r>
+          </a:p>
+          <a:p>
+            <a:r>
+              <a:t>N2: Porque vigilan peligros opuestos, y por eso les llamo los dos guardianes. La válvula de mínima corta el paso cuando la presión baja demasiado; y que la presión caiga de repente suele ser mala señal, indicio de una fuga aguas abajo o de que se acabó el gas. Las de caudal pequeño, hasta cuatro coma ocho metros cúbicos por hora, van por la norma sesenta mil cuatrocientos tres. La válvula de máxima hace lo contrario: corta cuando la presión sube de más, típicamente porque un regulador ha fallado. Y aquí dos detalles que caen en examen: la de máxima es siempre de rearme manual, es decir, no se rearma sola; obliga a que alguien vaya, mire por qué saltó y la reponga a mano, para que nadie ignore el problema. Y sus tornillos de tarado van precintados, para que nadie los toque. Truco de obra: si el cliente dice 'el gas se me corta solo', antes de culpar al aparato, mira si ha saltado un guardián; ahí puede estar la fuga.</a:t>
             </a:r>
           </a:p>
         </p:txBody>
@@ -817,12 +824,12 @@
           <a:lstStyle/>
           <a:p>
             <a:r>
-              <a:t>N1: El aparato se conecta con un flexible, ¿pero cualquier flexible vale?</a:t>
-            </a:r>
-          </a:p>
-          <a:p>
-            <a:r>
-              <a:t>N2: No, cada flexible tiene su tipo y su norma, y no valen los del agua ni los caseros. Primero, el aparato, la cocina o la caldera, se puede conectar de dos formas, rígida o flexible, según el tipo de aparato, y el detalle de cuál toca lo manda la parte siete. Para los envases de GLP, las bombonas, el tubo flexible que une la salida del envase con la instalación se considera parte de la propia instalación, así que también está regulado. Tienes tres familias: el flexible de goma, que la norma llama elastómero, va por la cincuenta y tres mil quinientos treinta y nueve; el flexible no metálico con armadura, más resistente, por las normas dieciséis mil cuatrocientos treinta y seis; y el flexible metálico, por la catorce mil ochocientos. Cada uno con su longitud máxima, que está en la parte siete. La idea: el flexible es parte de la instalación, no un accesorio suelto que pones a ojo.</a:t>
+              <a:t>N1: Hablemos de los dos guardianes. La válvula de máxima presión, ¿cómo se rearma cuando salta?</a:t>
+            </a:r>
+          </a:p>
+          <a:p>
+            <a:r>
+              <a:t>N2: Piensa en para qué salta: si la presión ha subido de más, ¿te interesa que se reponga sola sin que nadie mire qué ha pasado?</a:t>
             </a:r>
           </a:p>
         </p:txBody>
@@ -892,12 +899,12 @@
           <a:lstStyle/>
           <a:p>
             <a:r>
-              <a:t>N1: ¿Por qué tanto énfasis con los cero coma ochenta metros del contador?</a:t>
-            </a:r>
-          </a:p>
-          <a:p>
-            <a:r>
-              <a:t>N2: Porque es un dato que cae con número exacto, de los que valen un punto entero en el examen. El flexible que conecta el contador es de acero inoxidable corrugado con conexiones roscadas, ese tubo metálico en forma de acordeón, y va por la norma sesenta mil setecientos trece. Se considera parte de la instalación receptora, y tiene un tope claro de longitud: no puede pasar de cero coma ochenta metros, ochenta centímetros. ¿Por qué un límite? Porque un flexible largo cuelga, se mueve, sufre y acaba fallando; cuanto más corto, más seguro. Y aquí el error que buscan: no lo confundas con los flexibles que conectan un aparato o una bombona de GLP, cuyas longitudes están en la parte siete y son otras. Para el contador, la cifra mágica es cero coma ochenta metros como mucho.</a:t>
+              <a:t>N1: ¿Por qué manual y no automática?</a:t>
+            </a:r>
+          </a:p>
+          <a:p>
+            <a:r>
+              <a:t>N2: Porque si se rearmara sola, nadie se enteraría de que hubo un problema de presión. Al ser de rearme manual, obliga a que alguien vaya, mire por qué saltó y lo resuelva. Y sus tornillos de tarado van precintados para que nadie los toque.</a:t>
             </a:r>
           </a:p>
         </p:txBody>
@@ -967,12 +974,12 @@
           <a:lstStyle/>
           <a:p>
             <a:r>
-              <a:t>N1: ¿Qué es una toma de presión y por qué hay dos clases?</a:t>
-            </a:r>
-          </a:p>
-          <a:p>
-            <a:r>
-              <a:t>N2: La toma de presión es el pinchazo por donde metes el manómetro para medir a qué presión va el gas. Sin ella no puedes comprobar presiones ni en la puesta en servicio ni en una revisión, así que es una pieza de trabajo diario. Su norma es la sesenta mil setecientos diecinueve, y el tipo depende de la presión del tramo, que enlaza con la escalera del principio. La regla es sencilla: hasta ciento cincuenta milibares vale la sencilla, de débil calibre, o una Peterson; por encima de ciento cincuenta milibares solo vale la Peterson, que es más robusta porque tiene que aguantar más presión. Fíjate en que ese corte, ciento cincuenta milibares, es justo el peldaño de cero coma quince bar de nuestra escalera: son la misma cifra en otras unidades. Todo encaja.</a:t>
+              <a:t>N1: El contador de casa, ¿cuál de los cuatro es?</a:t>
+            </a:r>
+          </a:p>
+          <a:p>
+            <a:r>
+              <a:t>N2: El de casa de toda la vida es el de membrana, también llamado de paredes deformables: mide el gas llenando y vaciando unas cámaras, como un fuelle. Fíjate en que es el único que lleva dos normas: la europea de producto, mil trescientos cincuenta y nueve, y la española de medidas y acabado, sesenta mil quinientos diez. Los otros dos clásicos son para grandes consumos, industria y similares: el de turbina, que mide por un molinillo que gira, y el de pistones. Y la novedad de esta edición es el contador ultrasónico doméstico, que mide el gas con ultrasonidos y no tiene piezas móviles; su norma es la catorce mil doscientos treinta y seis. Un apunte de obra: el contador suele ser propiedad de la distribuidora y va precintado; romper ese precinto sin permiso es un problema serio.</a:t>
             </a:r>
           </a:p>
         </p:txBody>
@@ -1042,22 +1049,237 @@
           <a:lstStyle/>
           <a:p>
             <a:r>
-              <a:t>N1: Segundo vídeo cerrado. ¿Cómo lo ordeno todo en la cabeza?</a:t>
-            </a:r>
-          </a:p>
-          <a:p>
-            <a:r>
-              <a:t>N2: Vamos a reconstruir el hilo, porque hoy ha caído mucha sigla. Todo colgaba de una sola herramienta: la escalera de presiones, cinco - dos - cero coma cuatro - cero coma quince - cero coma cero cinco bar. Con ella elegimos los reguladores, que se escogen por lo que entra y lo que sale, y las tomas de presión. En butano y propano vimos que la frontera vuelve a ser el envase de quince kilos, y que casi todo va a la dieciséis mil ciento veintinueve. Conocimos a los dos guardianes: la válvula de mínima, que corta si la presión baja, y la de máxima, siempre de rearme manual y precintada, que corta si sube. Vimos los cuatro contadores, con el ultrasónico como novedad, y las llaves de corte, que para hasta cien de diámetro piden clase menos veinte grados y poder precintarse en cerrado. Y clavamos dos cifras exactas: el flexible del contador, cero coma ochenta metros, y el corte de las tomas de presión en ciento cincuenta milibares.</a:t>
-            </a:r>
-          </a:p>
-          <a:p>
-            <a:r>
-              <a:t>N1: ¿Y en el examen y en la obra?</a:t>
-            </a:r>
-          </a:p>
-          <a:p>
-            <a:r>
-              <a:t>N2: En el examen te darán una presión, un caudal o un envase y tendrás que decir qué pieza y qué norma le toca; hoy has montado la chuleta mental para acertarlas. Y en la obra, todos estos elementos acaban reflejados en el boletín que firma la empresa instaladora, mientras la puesta en servicio y el precintado del contador los hace la distribuidora. Un elemento mal elegido reaparece como defecto en la inspección. Hoy ya eres más gasista que ayer: sabes elegir cada pieza. En el último vídeo cerramos la Parte 3 con lo que evita la fuga: las uniones, soldar, roscar y embridar. Te espero allí.</a:t>
+              <a:t>N1: ¿La batería de contadores del portal también tiene su norma?</a:t>
+            </a:r>
+          </a:p>
+          <a:p>
+            <a:r>
+              <a:t>N2: La tiene, y hay un despiste típico que quiero que evites. Primero los soportes: la pieza que sujeta un contador. Si va dentro de vivienda o local, sigue la norma sesenta mil cuatrocientos noventa y cinco, parte uno; si va a la intemperie, la parte dos de esa misma norma. Y ahora la centralización, que es la batería de contadores del cuarto de contadores de un edificio, esos contadores puestos en fila. Aquí está la trampa: da igual que compres el módulo ya hecho de fábrica, prefabricado, o que lo montes tubo a tubo allí mismo. En los dos casos manda la misma norma, la sesenta mil cuatrocientos noventa. Mucha gente cree que solo aplica a los prefabricados, y no: aplica siempre.</a:t>
+            </a:r>
+          </a:p>
+        </p:txBody>
+      </p:sp>
+      <p:sp>
+        <p:nvSpPr>
+          <p:cNvPr id="4" name="Slide Number Placeholder 3"/>
+          <p:cNvSpPr>
+            <a:spLocks noGrp="1"/>
+          </p:cNvSpPr>
+          <p:nvPr>
+            <p:ph type="sldNum" idx="5" sz="quarter"/>
+          </p:nvPr>
+        </p:nvSpPr>
+        <p:spPr/>
+      </p:sp>
+    </p:spTree>
+  </p:cSld>
+  <p:clrMapOvr>
+    <a:masterClrMapping/>
+  </p:clrMapOvr>
+</p:notes>
+</file>
+
+<file path=ppt/notesSlides/notesSlide17.xml><?xml version="1.0" encoding="utf-8"?>
+<p:notes xmlns:a="http://schemas.openxmlformats.org/drawingml/2006/main" xmlns:p="http://schemas.openxmlformats.org/presentationml/2006/main" xmlns:r="http://schemas.openxmlformats.org/officeDocument/2006/relationships">
+  <p:cSld>
+    <p:spTree>
+      <p:nvGrpSpPr>
+        <p:cNvPr id="1" name=""/>
+        <p:cNvGrpSpPr/>
+        <p:nvPr/>
+      </p:nvGrpSpPr>
+      <p:grpSpPr>
+        <a:xfrm>
+          <a:off x="0" y="0"/>
+          <a:ext cx="0" cy="0"/>
+          <a:chOff x="0" y="0"/>
+          <a:chExt cx="0" cy="0"/>
+        </a:xfrm>
+      </p:grpSpPr>
+      <p:sp>
+        <p:nvSpPr>
+          <p:cNvPr id="2" name="Slide Image Placeholder 1"/>
+          <p:cNvSpPr>
+            <a:spLocks noGrp="1"/>
+          </p:cNvSpPr>
+          <p:nvPr>
+            <p:ph type="sldImg" idx="2"/>
+          </p:nvPr>
+        </p:nvSpPr>
+        <p:spPr/>
+      </p:sp>
+      <p:sp>
+        <p:nvSpPr>
+          <p:cNvPr id="3" name="Notes Placeholder 2"/>
+          <p:cNvSpPr>
+            <a:spLocks noGrp="1"/>
+          </p:cNvSpPr>
+          <p:nvPr>
+            <p:ph type="body" idx="3" sz="quarter"/>
+          </p:nvPr>
+        </p:nvSpPr>
+        <p:spPr/>
+        <p:txBody>
+          <a:bodyPr/>
+          <a:lstStyle/>
+          <a:p>
+            <a:r>
+              <a:t>N1: ¿Qué le pido a una llave de corte para fiarme de ella?</a:t>
+            </a:r>
+          </a:p>
+          <a:p>
+            <a:r>
+              <a:t>N2: Que cierre siempre que haga falta, sobre todo el día de una avería. Empecemos por las llaves no enterrables, las normales, que van por la norma trescientos treinta y uno. Para diámetros de hasta cien, quédate con dos exigencias fijas. Una, clase de temperatura menos veinte grados: la llave tiene que poder cerrar aunque haga frío, sin agarrotarse. Dos, tiene que poder bloquearse y precintarse en posición de 'cerrado', para que tras cortar en una revisión o emergencia nadie la vuelva a abrir por error. Por encima de cien de diámetro ya no hay llave de bola pequeña normalizada; se ponen de bola grande o de mariposa. Y ojo a una diferencia que se pregunta: una cosa son las llaves no enterrables y otra las enterrables, que tienen su propia norma según sean de plástico o metálicas. No las mezcles: una llave que no cierra cuando hay una fuga no sirve absolutamente de nada.</a:t>
+            </a:r>
+          </a:p>
+        </p:txBody>
+      </p:sp>
+      <p:sp>
+        <p:nvSpPr>
+          <p:cNvPr id="4" name="Slide Number Placeholder 3"/>
+          <p:cNvSpPr>
+            <a:spLocks noGrp="1"/>
+          </p:cNvSpPr>
+          <p:nvPr>
+            <p:ph type="sldNum" idx="5" sz="quarter"/>
+          </p:nvPr>
+        </p:nvSpPr>
+        <p:spPr/>
+      </p:sp>
+    </p:spTree>
+  </p:cSld>
+  <p:clrMapOvr>
+    <a:masterClrMapping/>
+  </p:clrMapOvr>
+</p:notes>
+</file>
+
+<file path=ppt/notesSlides/notesSlide18.xml><?xml version="1.0" encoding="utf-8"?>
+<p:notes xmlns:a="http://schemas.openxmlformats.org/drawingml/2006/main" xmlns:p="http://schemas.openxmlformats.org/presentationml/2006/main" xmlns:r="http://schemas.openxmlformats.org/officeDocument/2006/relationships">
+  <p:cSld>
+    <p:spTree>
+      <p:nvGrpSpPr>
+        <p:cNvPr id="1" name=""/>
+        <p:cNvGrpSpPr/>
+        <p:nvPr/>
+      </p:nvGrpSpPr>
+      <p:grpSpPr>
+        <a:xfrm>
+          <a:off x="0" y="0"/>
+          <a:ext cx="0" cy="0"/>
+          <a:chOff x="0" y="0"/>
+          <a:chExt cx="0" cy="0"/>
+        </a:xfrm>
+      </p:grpSpPr>
+      <p:sp>
+        <p:nvSpPr>
+          <p:cNvPr id="2" name="Slide Image Placeholder 1"/>
+          <p:cNvSpPr>
+            <a:spLocks noGrp="1"/>
+          </p:cNvSpPr>
+          <p:nvPr>
+            <p:ph type="sldImg" idx="2"/>
+          </p:nvPr>
+        </p:nvSpPr>
+        <p:spPr/>
+      </p:sp>
+      <p:sp>
+        <p:nvSpPr>
+          <p:cNvPr id="3" name="Notes Placeholder 2"/>
+          <p:cNvSpPr>
+            <a:spLocks noGrp="1"/>
+          </p:cNvSpPr>
+          <p:nvPr>
+            <p:ph type="body" idx="3" sz="quarter"/>
+          </p:nvPr>
+        </p:nvSpPr>
+        <p:spPr/>
+        <p:txBody>
+          <a:bodyPr/>
+          <a:lstStyle/>
+          <a:p>
+            <a:r>
+              <a:t>N1: El aparato se conecta con un flexible, ¿pero cualquier flexible vale?</a:t>
+            </a:r>
+          </a:p>
+          <a:p>
+            <a:r>
+              <a:t>N2: No, cada flexible tiene su tipo y su norma, y no valen los del agua ni los caseros. Primero, el aparato, la cocina o la caldera, se puede conectar de dos formas, rígida o flexible, según el tipo de aparato, y el detalle de cuál toca lo manda la parte siete. Para los envases de GLP, las bombonas, el tubo flexible que une la salida del envase con la instalación se considera parte de la propia instalación, así que también está regulado. Tienes tres familias: el flexible de goma, que la norma llama elastómero, va por la cincuenta y tres mil quinientos treinta y nueve; el flexible no metálico con armadura, más resistente, por las normas dieciséis mil cuatrocientos treinta y seis; y el flexible metálico, por la catorce mil ochocientos. Cada uno con su longitud máxima, que está en la parte siete. La idea: el flexible es parte de la instalación, no un accesorio suelto que pones a ojo.</a:t>
+            </a:r>
+          </a:p>
+        </p:txBody>
+      </p:sp>
+      <p:sp>
+        <p:nvSpPr>
+          <p:cNvPr id="4" name="Slide Number Placeholder 3"/>
+          <p:cNvSpPr>
+            <a:spLocks noGrp="1"/>
+          </p:cNvSpPr>
+          <p:nvPr>
+            <p:ph type="sldNum" idx="5" sz="quarter"/>
+          </p:nvPr>
+        </p:nvSpPr>
+        <p:spPr/>
+      </p:sp>
+    </p:spTree>
+  </p:cSld>
+  <p:clrMapOvr>
+    <a:masterClrMapping/>
+  </p:clrMapOvr>
+</p:notes>
+</file>
+
+<file path=ppt/notesSlides/notesSlide19.xml><?xml version="1.0" encoding="utf-8"?>
+<p:notes xmlns:a="http://schemas.openxmlformats.org/drawingml/2006/main" xmlns:p="http://schemas.openxmlformats.org/presentationml/2006/main" xmlns:r="http://schemas.openxmlformats.org/officeDocument/2006/relationships">
+  <p:cSld>
+    <p:spTree>
+      <p:nvGrpSpPr>
+        <p:cNvPr id="1" name=""/>
+        <p:cNvGrpSpPr/>
+        <p:nvPr/>
+      </p:nvGrpSpPr>
+      <p:grpSpPr>
+        <a:xfrm>
+          <a:off x="0" y="0"/>
+          <a:ext cx="0" cy="0"/>
+          <a:chOff x="0" y="0"/>
+          <a:chExt cx="0" cy="0"/>
+        </a:xfrm>
+      </p:grpSpPr>
+      <p:sp>
+        <p:nvSpPr>
+          <p:cNvPr id="2" name="Slide Image Placeholder 1"/>
+          <p:cNvSpPr>
+            <a:spLocks noGrp="1"/>
+          </p:cNvSpPr>
+          <p:nvPr>
+            <p:ph type="sldImg" idx="2"/>
+          </p:nvPr>
+        </p:nvSpPr>
+        <p:spPr/>
+      </p:sp>
+      <p:sp>
+        <p:nvSpPr>
+          <p:cNvPr id="3" name="Notes Placeholder 2"/>
+          <p:cNvSpPr>
+            <a:spLocks noGrp="1"/>
+          </p:cNvSpPr>
+          <p:nvPr>
+            <p:ph type="body" idx="3" sz="quarter"/>
+          </p:nvPr>
+        </p:nvSpPr>
+        <p:spPr/>
+        <p:txBody>
+          <a:bodyPr/>
+          <a:lstStyle/>
+          <a:p>
+            <a:r>
+              <a:t>N1: ¿Por qué tanto énfasis con los cero coma ochenta metros del contador?</a:t>
+            </a:r>
+          </a:p>
+          <a:p>
+            <a:r>
+              <a:t>N2: Porque es un dato que cae con número exacto, de los que valen un punto entero en el examen. El flexible que conecta el contador es de acero inoxidable corrugado con conexiones roscadas, ese tubo metálico en forma de acordeón, y va por la norma sesenta mil setecientos trece. Se considera parte de la instalación receptora, y tiene un tope claro de longitud: no puede pasar de cero coma ochenta metros, ochenta centímetros. ¿Por qué un límite? Porque un flexible largo cuelga, se mueve, sufre y acaba fallando; cuanto más corto, más seguro. Y aquí el error que buscan: no lo confundas con los flexibles que conectan un aparato o una bombona de GLP, cuyas longitudes están en la parte siete y son otras. Para el contador, la cifra mágica es cero coma ochenta metros como mucho.</a:t>
             </a:r>
           </a:p>
         </p:txBody>
@@ -1157,6 +1379,316 @@
 </p:notes>
 </file>
 
+<file path=ppt/notesSlides/notesSlide20.xml><?xml version="1.0" encoding="utf-8"?>
+<p:notes xmlns:a="http://schemas.openxmlformats.org/drawingml/2006/main" xmlns:p="http://schemas.openxmlformats.org/presentationml/2006/main" xmlns:r="http://schemas.openxmlformats.org/officeDocument/2006/relationships">
+  <p:cSld>
+    <p:spTree>
+      <p:nvGrpSpPr>
+        <p:cNvPr id="1" name=""/>
+        <p:cNvGrpSpPr/>
+        <p:nvPr/>
+      </p:nvGrpSpPr>
+      <p:grpSpPr>
+        <a:xfrm>
+          <a:off x="0" y="0"/>
+          <a:ext cx="0" cy="0"/>
+          <a:chOff x="0" y="0"/>
+          <a:chExt cx="0" cy="0"/>
+        </a:xfrm>
+      </p:grpSpPr>
+      <p:sp>
+        <p:nvSpPr>
+          <p:cNvPr id="2" name="Slide Image Placeholder 1"/>
+          <p:cNvSpPr>
+            <a:spLocks noGrp="1"/>
+          </p:cNvSpPr>
+          <p:nvPr>
+            <p:ph type="sldImg" idx="2"/>
+          </p:nvPr>
+        </p:nvSpPr>
+        <p:spPr/>
+      </p:sp>
+      <p:sp>
+        <p:nvSpPr>
+          <p:cNvPr id="3" name="Notes Placeholder 2"/>
+          <p:cNvSpPr>
+            <a:spLocks noGrp="1"/>
+          </p:cNvSpPr>
+          <p:nvPr>
+            <p:ph type="body" idx="3" sz="quarter"/>
+          </p:nvPr>
+        </p:nvSpPr>
+        <p:spPr/>
+        <p:txBody>
+          <a:bodyPr/>
+          <a:lstStyle/>
+          <a:p>
+            <a:r>
+              <a:t>N1: Dato de cifra exacta, de los que valen un punto entero. ¿Cuánto puede medir como mucho el flexible del contador?</a:t>
+            </a:r>
+          </a:p>
+          <a:p>
+            <a:r>
+              <a:t>N2: Es un número redondo por debajo del metro; piensa en ochenta centímetros.</a:t>
+            </a:r>
+          </a:p>
+        </p:txBody>
+      </p:sp>
+      <p:sp>
+        <p:nvSpPr>
+          <p:cNvPr id="4" name="Slide Number Placeholder 3"/>
+          <p:cNvSpPr>
+            <a:spLocks noGrp="1"/>
+          </p:cNvSpPr>
+          <p:nvPr>
+            <p:ph type="sldNum" idx="5" sz="quarter"/>
+          </p:nvPr>
+        </p:nvSpPr>
+        <p:spPr/>
+      </p:sp>
+    </p:spTree>
+  </p:cSld>
+  <p:clrMapOvr>
+    <a:masterClrMapping/>
+  </p:clrMapOvr>
+</p:notes>
+</file>
+
+<file path=ppt/notesSlides/notesSlide21.xml><?xml version="1.0" encoding="utf-8"?>
+<p:notes xmlns:a="http://schemas.openxmlformats.org/drawingml/2006/main" xmlns:p="http://schemas.openxmlformats.org/presentationml/2006/main" xmlns:r="http://schemas.openxmlformats.org/officeDocument/2006/relationships">
+  <p:cSld>
+    <p:spTree>
+      <p:nvGrpSpPr>
+        <p:cNvPr id="1" name=""/>
+        <p:cNvGrpSpPr/>
+        <p:nvPr/>
+      </p:nvGrpSpPr>
+      <p:grpSpPr>
+        <a:xfrm>
+          <a:off x="0" y="0"/>
+          <a:ext cx="0" cy="0"/>
+          <a:chOff x="0" y="0"/>
+          <a:chExt cx="0" cy="0"/>
+        </a:xfrm>
+      </p:grpSpPr>
+      <p:sp>
+        <p:nvSpPr>
+          <p:cNvPr id="2" name="Slide Image Placeholder 1"/>
+          <p:cNvSpPr>
+            <a:spLocks noGrp="1"/>
+          </p:cNvSpPr>
+          <p:nvPr>
+            <p:ph type="sldImg" idx="2"/>
+          </p:nvPr>
+        </p:nvSpPr>
+        <p:spPr/>
+      </p:sp>
+      <p:sp>
+        <p:nvSpPr>
+          <p:cNvPr id="3" name="Notes Placeholder 2"/>
+          <p:cNvSpPr>
+            <a:spLocks noGrp="1"/>
+          </p:cNvSpPr>
+          <p:nvPr>
+            <p:ph type="body" idx="3" sz="quarter"/>
+          </p:nvPr>
+        </p:nvSpPr>
+        <p:spPr/>
+        <p:txBody>
+          <a:bodyPr/>
+          <a:lstStyle/>
+          <a:p>
+            <a:r>
+              <a:t>N1: ¿Por qué se limita esa longitud?</a:t>
+            </a:r>
+          </a:p>
+          <a:p>
+            <a:r>
+              <a:t>N2: Porque un flexible largo cuelga, se mueve, sufre y termina fallando; cuanto más corto, más seguro. El tope es cero coma ochenta metros. Y no lo confundas con los flexibles de aparato o de bombona, que tienen sus propias longitudes en la parte siete.</a:t>
+            </a:r>
+          </a:p>
+        </p:txBody>
+      </p:sp>
+      <p:sp>
+        <p:nvSpPr>
+          <p:cNvPr id="4" name="Slide Number Placeholder 3"/>
+          <p:cNvSpPr>
+            <a:spLocks noGrp="1"/>
+          </p:cNvSpPr>
+          <p:nvPr>
+            <p:ph type="sldNum" idx="5" sz="quarter"/>
+          </p:nvPr>
+        </p:nvSpPr>
+        <p:spPr/>
+      </p:sp>
+    </p:spTree>
+  </p:cSld>
+  <p:clrMapOvr>
+    <a:masterClrMapping/>
+  </p:clrMapOvr>
+</p:notes>
+</file>
+
+<file path=ppt/notesSlides/notesSlide22.xml><?xml version="1.0" encoding="utf-8"?>
+<p:notes xmlns:a="http://schemas.openxmlformats.org/drawingml/2006/main" xmlns:p="http://schemas.openxmlformats.org/presentationml/2006/main" xmlns:r="http://schemas.openxmlformats.org/officeDocument/2006/relationships">
+  <p:cSld>
+    <p:spTree>
+      <p:nvGrpSpPr>
+        <p:cNvPr id="1" name=""/>
+        <p:cNvGrpSpPr/>
+        <p:nvPr/>
+      </p:nvGrpSpPr>
+      <p:grpSpPr>
+        <a:xfrm>
+          <a:off x="0" y="0"/>
+          <a:ext cx="0" cy="0"/>
+          <a:chOff x="0" y="0"/>
+          <a:chExt cx="0" cy="0"/>
+        </a:xfrm>
+      </p:grpSpPr>
+      <p:sp>
+        <p:nvSpPr>
+          <p:cNvPr id="2" name="Slide Image Placeholder 1"/>
+          <p:cNvSpPr>
+            <a:spLocks noGrp="1"/>
+          </p:cNvSpPr>
+          <p:nvPr>
+            <p:ph type="sldImg" idx="2"/>
+          </p:nvPr>
+        </p:nvSpPr>
+        <p:spPr/>
+      </p:sp>
+      <p:sp>
+        <p:nvSpPr>
+          <p:cNvPr id="3" name="Notes Placeholder 2"/>
+          <p:cNvSpPr>
+            <a:spLocks noGrp="1"/>
+          </p:cNvSpPr>
+          <p:nvPr>
+            <p:ph type="body" idx="3" sz="quarter"/>
+          </p:nvPr>
+        </p:nvSpPr>
+        <p:spPr/>
+        <p:txBody>
+          <a:bodyPr/>
+          <a:lstStyle/>
+          <a:p>
+            <a:r>
+              <a:t>N1: ¿Qué es una toma de presión y por qué hay dos clases?</a:t>
+            </a:r>
+          </a:p>
+          <a:p>
+            <a:r>
+              <a:t>N2: La toma de presión es el pinchazo por donde metes el manómetro para medir a qué presión va el gas. Sin ella no puedes comprobar presiones ni en la puesta en servicio ni en una revisión, así que es una pieza de trabajo diario. Su norma es la sesenta mil setecientos diecinueve, y el tipo depende de la presión del tramo, que enlaza con la escalera del principio. La regla es sencilla: hasta ciento cincuenta milibares vale la sencilla, de débil calibre, o una Peterson; por encima de ciento cincuenta milibares solo vale la Peterson, que es más robusta porque tiene que aguantar más presión. Fíjate en que ese corte, ciento cincuenta milibares, es justo el peldaño de cero coma quince bar de nuestra escalera: son la misma cifra en otras unidades. Todo encaja.</a:t>
+            </a:r>
+          </a:p>
+        </p:txBody>
+      </p:sp>
+      <p:sp>
+        <p:nvSpPr>
+          <p:cNvPr id="4" name="Slide Number Placeholder 3"/>
+          <p:cNvSpPr>
+            <a:spLocks noGrp="1"/>
+          </p:cNvSpPr>
+          <p:nvPr>
+            <p:ph type="sldNum" idx="5" sz="quarter"/>
+          </p:nvPr>
+        </p:nvSpPr>
+        <p:spPr/>
+      </p:sp>
+    </p:spTree>
+  </p:cSld>
+  <p:clrMapOvr>
+    <a:masterClrMapping/>
+  </p:clrMapOvr>
+</p:notes>
+</file>
+
+<file path=ppt/notesSlides/notesSlide23.xml><?xml version="1.0" encoding="utf-8"?>
+<p:notes xmlns:a="http://schemas.openxmlformats.org/drawingml/2006/main" xmlns:p="http://schemas.openxmlformats.org/presentationml/2006/main" xmlns:r="http://schemas.openxmlformats.org/officeDocument/2006/relationships">
+  <p:cSld>
+    <p:spTree>
+      <p:nvGrpSpPr>
+        <p:cNvPr id="1" name=""/>
+        <p:cNvGrpSpPr/>
+        <p:nvPr/>
+      </p:nvGrpSpPr>
+      <p:grpSpPr>
+        <a:xfrm>
+          <a:off x="0" y="0"/>
+          <a:ext cx="0" cy="0"/>
+          <a:chOff x="0" y="0"/>
+          <a:chExt cx="0" cy="0"/>
+        </a:xfrm>
+      </p:grpSpPr>
+      <p:sp>
+        <p:nvSpPr>
+          <p:cNvPr id="2" name="Slide Image Placeholder 1"/>
+          <p:cNvSpPr>
+            <a:spLocks noGrp="1"/>
+          </p:cNvSpPr>
+          <p:nvPr>
+            <p:ph type="sldImg" idx="2"/>
+          </p:nvPr>
+        </p:nvSpPr>
+        <p:spPr/>
+      </p:sp>
+      <p:sp>
+        <p:nvSpPr>
+          <p:cNvPr id="3" name="Notes Placeholder 2"/>
+          <p:cNvSpPr>
+            <a:spLocks noGrp="1"/>
+          </p:cNvSpPr>
+          <p:nvPr>
+            <p:ph type="body" idx="3" sz="quarter"/>
+          </p:nvPr>
+        </p:nvSpPr>
+        <p:spPr/>
+        <p:txBody>
+          <a:bodyPr/>
+          <a:lstStyle/>
+          <a:p>
+            <a:r>
+              <a:t>N1: Segundo vídeo cerrado. ¿Cómo lo ordeno todo en la cabeza?</a:t>
+            </a:r>
+          </a:p>
+          <a:p>
+            <a:r>
+              <a:t>N2: Vamos a reconstruir el hilo, porque hoy ha caído mucha sigla. Todo colgaba de una sola herramienta: la escalera de presiones, cinco - dos - cero coma cuatro - cero coma quince - cero coma cero cinco bar. Con ella elegimos los reguladores, que se escogen por lo que entra y lo que sale, y las tomas de presión. En butano y propano vimos que la frontera vuelve a ser el envase de quince kilos, y que casi todo va a la dieciséis mil ciento veintinueve. Conocimos a los dos guardianes: la válvula de mínima, que corta si la presión baja, y la de máxima, siempre de rearme manual y precintada, que corta si sube. Vimos los cuatro contadores, con el ultrasónico como novedad, y las llaves de corte, que para hasta cien de diámetro piden clase menos veinte grados y poder precintarse en cerrado. Y clavamos dos cifras exactas: el flexible del contador, cero coma ochenta metros, y el corte de las tomas de presión en ciento cincuenta milibares.</a:t>
+            </a:r>
+          </a:p>
+          <a:p>
+            <a:r>
+              <a:t>N1: ¿Y en el examen y en la obra?</a:t>
+            </a:r>
+          </a:p>
+          <a:p>
+            <a:r>
+              <a:t>N2: En el examen te darán una presión, un caudal o un envase y tendrás que decir qué pieza y qué norma le toca; hoy has montado la chuleta mental para acertarlas. Y en la obra, todos estos elementos acaban reflejados en el boletín que firma la empresa instaladora, mientras la puesta en servicio y el precintado del contador los hace la distribuidora. Un elemento mal elegido reaparece como defecto en la inspección. Hoy ya eres más gasista que ayer: sabes elegir cada pieza. En el último vídeo cerramos la Parte 3 con lo que evita la fuga: las uniones, soldar, roscar y embridar. Te espero allí.</a:t>
+            </a:r>
+          </a:p>
+        </p:txBody>
+      </p:sp>
+      <p:sp>
+        <p:nvSpPr>
+          <p:cNvPr id="4" name="Slide Number Placeholder 3"/>
+          <p:cNvSpPr>
+            <a:spLocks noGrp="1"/>
+          </p:cNvSpPr>
+          <p:nvPr>
+            <p:ph type="sldNum" idx="5" sz="quarter"/>
+          </p:nvPr>
+        </p:nvSpPr>
+        <p:spPr/>
+      </p:sp>
+    </p:spTree>
+  </p:cSld>
+  <p:clrMapOvr>
+    <a:masterClrMapping/>
+  </p:clrMapOvr>
+</p:notes>
+</file>
+
 <file path=ppt/notesSlides/notesSlide3.xml><?xml version="1.0" encoding="utf-8"?>
 <p:notes xmlns:a="http://schemas.openxmlformats.org/drawingml/2006/main" xmlns:p="http://schemas.openxmlformats.org/presentationml/2006/main" xmlns:r="http://schemas.openxmlformats.org/officeDocument/2006/relationships">
   <p:cSld>
@@ -1343,12 +1875,12 @@
           <a:lstStyle/>
           <a:p>
             <a:r>
-              <a:t>N1: ¿Qué pinta un 'tallo' en la instalación?</a:t>
-            </a:r>
-          </a:p>
-          <a:p>
-            <a:r>
-              <a:t>N2: El tallo es la pieza que casa dos mundos: el tubo de plástico que viene enterrado de la calle y el tubo metálico que sube a la vista hasta el armario del contador. Es un enganche de transición. Se fabrica combinando el polietileno con el metal de destino: lo tienes en pe-cobre, pe-acero, pe-inoxidable y, novedad de esta edición, pe-multicapa. Todos según la norma sesenta mil cuatrocientos cinco. Y aquí vuelve la lección del vídeo anterior: como el polietileno no soporta el sol, la parte de plástico del tallo tiene que ir siempre protegida, enterrada o dentro de su vaina de transición, nunca al aire. Un tallo con el plástico asomando al sol es la misma fuga por rayos ultravioleta de la que ya hablamos.</a:t>
+              <a:t>N1: ¿Cómo se lee esta escalera de presiones y para qué la usamos?</a:t>
+            </a:r>
+          </a:p>
+          <a:p>
+            <a:r>
+              <a:t>N2: Es la herramienta que abre todo el vídeo, así que vamos despacio. La columna de la izquierda te dice el rango de presión en el que trabaja el tramo, y la de la derecha el nombre que le pone la norma. La clave está en fijarte en que cada escalón se nombra por su valor de arriba. Fila a fila, de mayor a menor: un tramo entre dos y cinco bar se llama eme-o-pe cinco; entre cero coma cuatro y dos, eme-o-pe dos; entre cero coma quince y cero coma cuatro, eme-o-pe cero coma cuatro; entre cero coma cero cinco y cero coma quince, eme-o-pe cero coma quince; y hasta cero coma cero cinco, eme-o-pe cero coma cinco. Ejemplo de obra: si mides en un tramo una presión de uno coma cinco bar, cae en el peldaño de cero coma cuatro a dos, así que ese tramo es eme-o-pe dos. Con esta tabla en la cabeza colocas cualquier regulador, válvula o toma de presión en su sitio.</a:t>
             </a:r>
           </a:p>
         </p:txBody>
@@ -1418,12 +1950,12 @@
           <a:lstStyle/>
           <a:p>
             <a:r>
-              <a:t>N1: Estación, conjunto, regulador... ¿no es todo lo mismo?</a:t>
-            </a:r>
-          </a:p>
-          <a:p>
-            <a:r>
-              <a:t>N2: Se parecen, pero conviene separarlos. Estamos en gas natural, lo que la norma llama segunda familia. La estación de regulación es la instalación grande que baja la presión de la red; va con la norma sesenta mil seiscientos veinte. El conjunto de regulación es la caja completa que te regula, y a veces también mide, el gas antes de entrar; se clasifica por la presión que le entra, su MOPe. Puede ser un conjunto de MOPe cinco, de cero coma cuatro o de cero coma quince, y cada uno tiene su norma de la serie sesenta mil cuatrocientos cuatro. Quédate con la idea general: el conjunto es la caja; dentro de esa caja está el regulador, que es la pieza concreta que baja la presión. Ahora vamos a esa pieza.</a:t>
+              <a:t>N1: Recién vista la tabla, vamos a estrenarla. Un tramo que trabaja a uno coma cinco bar, ¿qué denominación le toca?</a:t>
+            </a:r>
+          </a:p>
+          <a:p>
+            <a:r>
+              <a:t>N2: Busca en qué peldaño de la escalera cae ese valor, y recuerda que el escalón se nombra por su número de arriba.</a:t>
             </a:r>
           </a:p>
         </p:txBody>
@@ -1493,12 +2025,12 @@
           <a:lstStyle/>
           <a:p>
             <a:r>
-              <a:t>N1: ¿Cómo sé qué regulador toca? Son tres normas parecidas.</a:t>
-            </a:r>
-          </a:p>
-          <a:p>
-            <a:r>
-              <a:t>N2: No memorices las normas sueltas; memoriza el escalón de presión, que es como de verdad se elige. Un regulador se define por dos datos: qué presión le entra y qué presión te da a la salida. Con eso, la chuleta es sencilla. Si entra cero coma cuatro y sale cero coma uno, es la sesenta mil cuatrocientos dos, parte uno. Si entra entre cero coma quince y cero coma cuatro y sale cero coma quince, es la misma sesenta mil cuatrocientos dos, pero parte dos. Y si entra fuerte, entre cero coma cuatro y cinco bar, y sale como mucho cero coma cuatro, es la sesenta mil cuatrocientos once. ¿Por qué importa acertar? Porque un regulador mal elegido o descalibrado le da al aparato una presión que no le toca, y eso es llama amarilla, hollín y mala combustión. Casi toda avería de gas empieza en una presión mal dada.</a:t>
+              <a:t>N1: ¿Por qué eme-o-pe dos y no eme-o-pe uno coma cinco?</a:t>
+            </a:r>
+          </a:p>
+          <a:p>
+            <a:r>
+              <a:t>N2: Porque uno coma cinco está entre cero coma cuatro y dos, y ese escalón se llama por su techo, que es dos. El nombre nunca es la presión exacta del tramo, sino el valor superior del peldaño. Por eso 'eme-o-pe uno coma cinco' ni siquiera existe.</a:t>
             </a:r>
           </a:p>
         </p:txBody>
@@ -1568,12 +2100,12 @@
           <a:lstStyle/>
           <a:p>
             <a:r>
-              <a:t>N1: En butano y propano, ¿otra vez aparece lo de los 15 kilos?</a:t>
-            </a:r>
-          </a:p>
-          <a:p>
-            <a:r>
-              <a:t>N2: Sí, y no es casualidad: el envase de quince kilos es la frontera de siempre en el GLP. Estamos en tercera familia, butano y propano. Los conjuntos de regulación que trabajan a cinco bar de entrada van por la norma sesenta mil cuatrocientos cuatro, parte uno. Y los reguladores, tanto los de instalaciones grandes, red o depósito o envases de más de quince kilos, como los que se acoplan a las bombonas de quince kilos o menos, van todos a la misma norma, la dieciséis mil ciento veintinueve, que es la que juntó todas las normas viejas de reguladores de GLP. Solo hay una pieza aparte: el adaptador de salida libre, ese que rosca directo en la bombona pequeña de hasta quince kilos, que va por la norma sesenta mil cuatrocientos ocho. Resumen: casi todo GLP, dieciséis mil ciento veintinueve; el adaptador de la botella, sesenta mil cuatrocientos ocho.</a:t>
+              <a:t>N1: ¿Qué pinta un 'tallo' en la instalación?</a:t>
+            </a:r>
+          </a:p>
+          <a:p>
+            <a:r>
+              <a:t>N2: El tallo es la pieza que casa dos mundos: el tubo de plástico que viene enterrado de la calle y el tubo metálico que sube a la vista hasta el armario del contador. Es un enganche de transición. Se fabrica combinando el polietileno con el metal de destino: lo tienes en pe-cobre, pe-acero, pe-inoxidable y, novedad de esta edición, pe-multicapa. Todos según la norma sesenta mil cuatrocientos cinco. Y aquí vuelve la lección del vídeo anterior: como el polietileno no soporta el sol, la parte de plástico del tallo tiene que ir siempre protegida, enterrada o dentro de su vaina de transición, nunca al aire. Un tallo con el plástico asomando al sol es la misma fuga por rayos ultravioleta de la que ya hablamos.</a:t>
             </a:r>
           </a:p>
         </p:txBody>
@@ -1643,12 +2175,12 @@
           <a:lstStyle/>
           <a:p>
             <a:r>
-              <a:t>N1: ¿Para qué dos válvulas de seguridad distintas?</a:t>
-            </a:r>
-          </a:p>
-          <a:p>
-            <a:r>
-              <a:t>N2: Porque vigilan peligros opuestos, y por eso les llamo los dos guardianes. La válvula de mínima corta el paso cuando la presión baja demasiado; y que la presión caiga de repente suele ser mala señal, indicio de una fuga aguas abajo o de que se acabó el gas. Las de caudal pequeño, hasta cuatro coma ocho metros cúbicos por hora, van por la norma sesenta mil cuatrocientos tres. La válvula de máxima hace lo contrario: corta cuando la presión sube de más, típicamente porque un regulador ha fallado. Y aquí dos detalles que caen en examen: la de máxima es siempre de rearme manual, es decir, no se rearma sola; obliga a que alguien vaya, mire por qué saltó y la reponga a mano, para que nadie ignore el problema. Y sus tornillos de tarado van precintados, para que nadie los toque. Truco de obra: si el cliente dice 'el gas se me corta solo', antes de culpar al aparato, mira si ha saltado un guardián; ahí puede estar la fuga.</a:t>
+              <a:t>N1: Estación, conjunto, regulador... ¿no es todo lo mismo?</a:t>
+            </a:r>
+          </a:p>
+          <a:p>
+            <a:r>
+              <a:t>N2: Se parecen, pero conviene separarlos. Estamos en gas natural, lo que la norma llama segunda familia. La estación de regulación es la instalación grande que baja la presión de la red; va con la norma sesenta mil seiscientos veinte. El conjunto de regulación es la caja completa que te regula, y a veces también mide, el gas antes de entrar; se clasifica por la presión que le entra, su MOPe. Puede ser un conjunto de MOPe cinco, de cero coma cuatro o de cero coma quince, y cada uno tiene su norma de la serie sesenta mil cuatrocientos cuatro. Quédate con la idea general: el conjunto es la caja; dentro de esa caja está el regulador, que es la pieza concreta que baja la presión. Ahora vamos a esa pieza.</a:t>
             </a:r>
           </a:p>
         </p:txBody>
@@ -4734,7 +5266,7 @@
       </p:sp>
       <p:sp>
         <p:nvSpPr>
-          <p:cNvPr id="4" name="Rounded Rectangle 3"/>
+          <p:cNvPr id="4" name="Rectangle 3"/>
           <p:cNvSpPr/>
           <p:nvPr/>
         </p:nvSpPr>
@@ -4743,7 +5275,7 @@
             <a:off x="868680" y="2057400"/>
             <a:ext cx="1463040" cy="82296"/>
           </a:xfrm>
-          <a:prstGeom prst="roundRect">
+          <a:prstGeom prst="rect">
             <a:avLst/>
           </a:prstGeom>
           <a:solidFill>
@@ -4860,6 +5392,18 @@
   <p:clrMapOvr>
     <a:masterClrMapping/>
   </p:clrMapOvr>
+  <mc:AlternateContent xmlns:mc="http://schemas.openxmlformats.org/markup-compatibility/2006">
+    <mc:Choice xmlns:p14="http://schemas.microsoft.com/office/powerpoint/2010/main" Requires="p14">
+      <p:transition spd="med" p14:dur="700">
+        <p14:cube dir="l"/>
+      </p:transition>
+    </mc:Choice>
+    <mc:Fallback>
+      <p:transition spd="med">
+        <p:push dir="l"/>
+      </p:transition>
+    </mc:Fallback>
+  </mc:AlternateContent>
 </p:sld>
 </file>
 
@@ -4947,7 +5491,7 @@
                 </a:solidFill>
                 <a:latin typeface="Montserrat"/>
               </a:rPr>
-              <a:t>010 / 016</a:t>
+              <a:t>010 / 023</a:t>
             </a:r>
           </a:p>
         </p:txBody>
@@ -5015,7 +5559,7 @@
                 </a:solidFill>
                 <a:latin typeface="Montserrat"/>
               </a:rPr>
-              <a:t>ELEMENTOS · CONTADORES</a:t>
+              <a:t>REGULACIÓN · 2ª FAMILIA</a:t>
             </a:r>
           </a:p>
         </p:txBody>
@@ -5049,14 +5593,14 @@
                 </a:solidFill>
                 <a:latin typeface="Montserrat"/>
               </a:rPr>
-              <a:t>Cuatro tipos de contador</a:t>
-            </a:r>
-          </a:p>
-        </p:txBody>
-      </p:sp>
-      <p:sp>
-        <p:nvSpPr>
-          <p:cNvPr id="7" name="Rounded Rectangle 6"/>
+              <a:t>Elegir el regulador por su escalón</a:t>
+            </a:r>
+          </a:p>
+        </p:txBody>
+      </p:sp>
+      <p:sp>
+        <p:nvSpPr>
+          <p:cNvPr id="7" name="Rectangle 6"/>
           <p:cNvSpPr/>
           <p:nvPr/>
         </p:nvSpPr>
@@ -5065,7 +5609,7 @@
             <a:off x="868680" y="1627632"/>
             <a:ext cx="2011680" cy="73152"/>
           </a:xfrm>
-          <a:prstGeom prst="roundRect">
+          <a:prstGeom prst="rect">
             <a:avLst/>
           </a:prstGeom>
           <a:solidFill>
@@ -5106,8 +5650,8 @@
         </p:nvSpPr>
         <p:spPr>
           <a:xfrm>
-            <a:off x="822960" y="1965960"/>
-            <a:ext cx="4983480" cy="4206240"/>
+            <a:off x="6355080" y="1965960"/>
+            <a:ext cx="5029200" cy="4206240"/>
           </a:xfrm>
           <a:prstGeom prst="rect">
             <a:avLst/>
@@ -5141,7 +5685,7 @@
                 </a:solidFill>
                 <a:latin typeface="Montserrat"/>
               </a:rPr>
-              <a:t>Membrana → UNE-EN 1359 y UNE 60510</a:t>
+              <a:t>Entrada 0,4 / salida 0,1 → UNE 60402-1</a:t>
             </a:r>
           </a:p>
           <a:p>
@@ -5166,7 +5710,7 @@
                 </a:solidFill>
                 <a:latin typeface="Montserrat"/>
               </a:rPr>
-              <a:t>Turbina → UNE-EN 12261</a:t>
+              <a:t>Entrada 0,15–0,4 / salida 0,15 → UNE 60402-2</a:t>
             </a:r>
           </a:p>
           <a:p>
@@ -5191,7 +5735,7 @@
                 </a:solidFill>
                 <a:latin typeface="Montserrat"/>
               </a:rPr>
-              <a:t>Pistones → UNE-EN 12480</a:t>
+              <a:t>Entrada 0,4–5 / salida ≤ 0,4 → UNE 60411</a:t>
             </a:r>
           </a:p>
           <a:p>
@@ -5216,21 +5760,21 @@
                 </a:solidFill>
                 <a:latin typeface="Montserrat"/>
               </a:rPr>
-              <a:t>Ultrasónico doméstico → UNE-EN 14236</a:t>
-            </a:r>
-          </a:p>
-        </p:txBody>
-      </p:sp>
-      <p:sp>
-        <p:nvSpPr>
-          <p:cNvPr id="9" name="imgph" descr="IMGQ:domestic gas meter diaphragm cabinet"/>
+              <a:t>Se elige por lo que entra y lo que sale</a:t>
+            </a:r>
+          </a:p>
+        </p:txBody>
+      </p:sp>
+      <p:sp>
+        <p:nvSpPr>
+          <p:cNvPr id="9" name="imgph" descr="IMGQ:gas pressure regulator close up device"/>
           <p:cNvSpPr/>
           <p:nvPr/>
         </p:nvSpPr>
         <p:spPr>
           <a:xfrm>
-            <a:off x="5806440" y="1051560"/>
-            <a:ext cx="5298947" cy="4629150"/>
+            <a:off x="822960" y="1965960"/>
+            <a:ext cx="5303520" cy="4572000"/>
           </a:xfrm>
           <a:prstGeom prst="roundRect">
             <a:avLst/>
@@ -5275,8 +5819,8 @@
         </p:nvSpPr>
         <p:spPr>
           <a:xfrm>
-            <a:off x="6080760" y="2726055"/>
-            <a:ext cx="4750307" cy="1280160"/>
+            <a:off x="1097280" y="3611880"/>
+            <a:ext cx="4754880" cy="1280160"/>
           </a:xfrm>
           <a:prstGeom prst="rect">
             <a:avLst/>
@@ -5297,7 +5841,7 @@
                 </a:solidFill>
                 <a:latin typeface="Montserrat"/>
               </a:rPr>
-              <a:t>IMAGEN REALISTA</a:t>
+              <a:t>IMAGEN</a:t>
             </a:r>
           </a:p>
           <a:p>
@@ -5309,7 +5853,7 @@
                 </a:solidFill>
                 <a:latin typeface="Montserrat"/>
               </a:rPr>
-              <a:t>domestic gas meter diaphragm cabinet</a:t>
+              <a:t>gas pressure regulator close up device</a:t>
             </a:r>
           </a:p>
         </p:txBody>
@@ -5319,6 +5863,18 @@
   <p:clrMapOvr>
     <a:masterClrMapping/>
   </p:clrMapOvr>
+  <mc:AlternateContent xmlns:mc="http://schemas.openxmlformats.org/markup-compatibility/2006">
+    <mc:Choice xmlns:p14="http://schemas.microsoft.com/office/powerpoint/2010/main" Requires="p14">
+      <p:transition spd="med" p14:dur="700">
+        <p14:cube dir="r"/>
+      </p:transition>
+    </mc:Choice>
+    <mc:Fallback>
+      <p:transition spd="med">
+        <p:push dir="r"/>
+      </p:transition>
+    </mc:Fallback>
+  </mc:AlternateContent>
 </p:sld>
 </file>
 
@@ -5406,7 +5962,7 @@
                 </a:solidFill>
                 <a:latin typeface="Montserrat"/>
               </a:rPr>
-              <a:t>011 / 016</a:t>
+              <a:t>011 / 023</a:t>
             </a:r>
           </a:p>
         </p:txBody>
@@ -5474,7 +6030,7 @@
                 </a:solidFill>
                 <a:latin typeface="Montserrat"/>
               </a:rPr>
-              <a:t>ELEMENTOS · CONTADORES</a:t>
+              <a:t>REGULACIÓN · 3ª FAMILIA (GLP)</a:t>
             </a:r>
           </a:p>
         </p:txBody>
@@ -5508,14 +6064,14 @@
                 </a:solidFill>
                 <a:latin typeface="Montserrat"/>
               </a:rPr>
-              <a:t>Soportes y centralización</a:t>
-            </a:r>
-          </a:p>
-        </p:txBody>
-      </p:sp>
-      <p:sp>
-        <p:nvSpPr>
-          <p:cNvPr id="7" name="Rounded Rectangle 6"/>
+              <a:t>Butano y propano: la frontera de 15 kg</a:t>
+            </a:r>
+          </a:p>
+        </p:txBody>
+      </p:sp>
+      <p:sp>
+        <p:nvSpPr>
+          <p:cNvPr id="7" name="Rectangle 6"/>
           <p:cNvSpPr/>
           <p:nvPr/>
         </p:nvSpPr>
@@ -5524,7 +6080,7 @@
             <a:off x="868680" y="1627632"/>
             <a:ext cx="2011680" cy="73152"/>
           </a:xfrm>
-          <a:prstGeom prst="roundRect">
+          <a:prstGeom prst="rect">
             <a:avLst/>
           </a:prstGeom>
           <a:solidFill>
@@ -5566,7 +6122,7 @@
         <p:spPr>
           <a:xfrm>
             <a:off x="822960" y="1965960"/>
-            <a:ext cx="4983480" cy="4206240"/>
+            <a:ext cx="5029200" cy="4206240"/>
           </a:xfrm>
           <a:prstGeom prst="rect">
             <a:avLst/>
@@ -5600,7 +6156,7 @@
                 </a:solidFill>
                 <a:latin typeface="Montserrat"/>
               </a:rPr>
-              <a:t>Soporte interior → UNE 60495-1</a:t>
+              <a:t>Conjuntos MOPe 5 → UNE 60404-1</a:t>
             </a:r>
           </a:p>
           <a:p>
@@ -5625,7 +6181,7 @@
                 </a:solidFill>
                 <a:latin typeface="Montserrat"/>
               </a:rPr>
-              <a:t>Soporte a la intemperie → UNE 60495-2</a:t>
+              <a:t>Reguladores de GLP → UNE-EN 16129</a:t>
             </a:r>
           </a:p>
           <a:p>
@@ -5650,7 +6206,7 @@
                 </a:solidFill>
                 <a:latin typeface="Montserrat"/>
               </a:rPr>
-              <a:t>Batería de contadores → UNE 60490</a:t>
+              <a:t>Por encima y por debajo de 15 kg</a:t>
             </a:r>
           </a:p>
           <a:p>
@@ -5675,21 +6231,21 @@
                 </a:solidFill>
                 <a:latin typeface="Montserrat"/>
               </a:rPr>
-              <a:t>Prefabricada o montada: misma norma</a:t>
-            </a:r>
-          </a:p>
-        </p:txBody>
-      </p:sp>
-      <p:sp>
-        <p:nvSpPr>
-          <p:cNvPr id="9" name="imgph" descr="IMGQ:gas meter battery cabinet building"/>
+              <a:t>Adaptador de salida libre ≤ 15 kg → UNE 60408</a:t>
+            </a:r>
+          </a:p>
+        </p:txBody>
+      </p:sp>
+      <p:sp>
+        <p:nvSpPr>
+          <p:cNvPr id="9" name="imgph" descr="IMGQ:propane gas cylinder pressure regulator"/>
           <p:cNvSpPr/>
           <p:nvPr/>
         </p:nvSpPr>
         <p:spPr>
           <a:xfrm>
-            <a:off x="5806440" y="1051560"/>
-            <a:ext cx="5298947" cy="4629150"/>
+            <a:off x="6080760" y="1965960"/>
+            <a:ext cx="5303520" cy="4572000"/>
           </a:xfrm>
           <a:prstGeom prst="roundRect">
             <a:avLst/>
@@ -5734,8 +6290,8 @@
         </p:nvSpPr>
         <p:spPr>
           <a:xfrm>
-            <a:off x="6080760" y="2726055"/>
-            <a:ext cx="4750307" cy="1280160"/>
+            <a:off x="6355080" y="3611880"/>
+            <a:ext cx="4754880" cy="1280160"/>
           </a:xfrm>
           <a:prstGeom prst="rect">
             <a:avLst/>
@@ -5756,7 +6312,7 @@
                 </a:solidFill>
                 <a:latin typeface="Montserrat"/>
               </a:rPr>
-              <a:t>IMAGEN REALISTA</a:t>
+              <a:t>IMAGEN</a:t>
             </a:r>
           </a:p>
           <a:p>
@@ -5768,7 +6324,7 @@
                 </a:solidFill>
                 <a:latin typeface="Montserrat"/>
               </a:rPr>
-              <a:t>gas meter battery cabinet building</a:t>
+              <a:t>propane gas cylinder pressure regulator</a:t>
             </a:r>
           </a:p>
         </p:txBody>
@@ -5778,6 +6334,18 @@
   <p:clrMapOvr>
     <a:masterClrMapping/>
   </p:clrMapOvr>
+  <mc:AlternateContent xmlns:mc="http://schemas.openxmlformats.org/markup-compatibility/2006">
+    <mc:Choice xmlns:p14="http://schemas.microsoft.com/office/powerpoint/2010/main" Requires="p14">
+      <p:transition spd="med" p14:dur="700">
+        <p14:cube dir="l"/>
+      </p:transition>
+    </mc:Choice>
+    <mc:Fallback>
+      <p:transition spd="med">
+        <p:push dir="l"/>
+      </p:transition>
+    </mc:Fallback>
+  </mc:AlternateContent>
 </p:sld>
 </file>
 
@@ -5865,7 +6433,7 @@
                 </a:solidFill>
                 <a:latin typeface="Montserrat"/>
               </a:rPr>
-              <a:t>012 / 016</a:t>
+              <a:t>012 / 023</a:t>
             </a:r>
           </a:p>
         </p:txBody>
@@ -5933,7 +6501,7 @@
                 </a:solidFill>
                 <a:latin typeface="Montserrat"/>
               </a:rPr>
-              <a:t>ELEMENTOS · LLAVES DE CORTE</a:t>
+              <a:t>SEGURIDAD · VÁLVULAS</a:t>
             </a:r>
           </a:p>
         </p:txBody>
@@ -5967,14 +6535,14 @@
                 </a:solidFill>
                 <a:latin typeface="Montserrat"/>
               </a:rPr>
-              <a:t>Llaves: cerrar con seguridad</a:t>
-            </a:r>
-          </a:p>
-        </p:txBody>
-      </p:sp>
-      <p:sp>
-        <p:nvSpPr>
-          <p:cNvPr id="7" name="Rounded Rectangle 6"/>
+              <a:t>Los dos guardianes de la presión</a:t>
+            </a:r>
+          </a:p>
+        </p:txBody>
+      </p:sp>
+      <p:sp>
+        <p:nvSpPr>
+          <p:cNvPr id="7" name="Rectangle 6"/>
           <p:cNvSpPr/>
           <p:nvPr/>
         </p:nvSpPr>
@@ -5983,7 +6551,7 @@
             <a:off x="868680" y="1627632"/>
             <a:ext cx="2011680" cy="73152"/>
           </a:xfrm>
-          <a:prstGeom prst="roundRect">
+          <a:prstGeom prst="rect">
             <a:avLst/>
           </a:prstGeom>
           <a:solidFill>
@@ -6024,8 +6592,8 @@
         </p:nvSpPr>
         <p:spPr>
           <a:xfrm>
-            <a:off x="822960" y="1965960"/>
-            <a:ext cx="4983480" cy="4206240"/>
+            <a:off x="6355080" y="1965960"/>
+            <a:ext cx="5029200" cy="4206240"/>
           </a:xfrm>
           <a:prstGeom prst="rect">
             <a:avLst/>
@@ -6059,7 +6627,7 @@
                 </a:solidFill>
                 <a:latin typeface="Montserrat"/>
               </a:rPr>
-              <a:t>No enterrables → UNE-EN 331</a:t>
+              <a:t>VIS de mínima: corta si la presión baja</a:t>
             </a:r>
           </a:p>
           <a:p>
@@ -6084,7 +6652,7 @@
                 </a:solidFill>
                 <a:latin typeface="Montserrat"/>
               </a:rPr>
-              <a:t>DN ≤ 100: clase de temperatura −20 °C</a:t>
+              <a:t>VIS ≤ 4,8 m³/h → UNE 60403</a:t>
             </a:r>
           </a:p>
           <a:p>
@@ -6109,7 +6677,7 @@
                 </a:solidFill>
                 <a:latin typeface="Montserrat"/>
               </a:rPr>
-              <a:t>Bloqueables y precintables en 'cerrado'</a:t>
+              <a:t>Máxima: corta si la presión sube</a:t>
             </a:r>
           </a:p>
           <a:p>
@@ -6134,21 +6702,21 @@
                 </a:solidFill>
                 <a:latin typeface="Montserrat"/>
               </a:rPr>
-              <a:t>Enterrables: PE UNE-EN 1555-4 / metal UNE-EN 13774</a:t>
-            </a:r>
-          </a:p>
-        </p:txBody>
-      </p:sp>
-      <p:sp>
-        <p:nvSpPr>
-          <p:cNvPr id="9" name="imgph" descr="IMGQ:gas ball valve shut off yellow"/>
+              <a:t>Máxima: rearme manual y tarado precintado</a:t>
+            </a:r>
+          </a:p>
+        </p:txBody>
+      </p:sp>
+      <p:sp>
+        <p:nvSpPr>
+          <p:cNvPr id="9" name="imgph" descr="IMGQ:gas safety shut off valve close up"/>
           <p:cNvSpPr/>
           <p:nvPr/>
         </p:nvSpPr>
         <p:spPr>
           <a:xfrm>
-            <a:off x="5806440" y="1051560"/>
-            <a:ext cx="5298947" cy="4629150"/>
+            <a:off x="822960" y="1965960"/>
+            <a:ext cx="5303520" cy="4572000"/>
           </a:xfrm>
           <a:prstGeom prst="roundRect">
             <a:avLst/>
@@ -6193,8 +6761,8 @@
         </p:nvSpPr>
         <p:spPr>
           <a:xfrm>
-            <a:off x="6080760" y="2726055"/>
-            <a:ext cx="4750307" cy="1280160"/>
+            <a:off x="1097280" y="3611880"/>
+            <a:ext cx="4754880" cy="1280160"/>
           </a:xfrm>
           <a:prstGeom prst="rect">
             <a:avLst/>
@@ -6215,7 +6783,7 @@
                 </a:solidFill>
                 <a:latin typeface="Montserrat"/>
               </a:rPr>
-              <a:t>IMAGEN REALISTA</a:t>
+              <a:t>IMAGEN</a:t>
             </a:r>
           </a:p>
           <a:p>
@@ -6227,7 +6795,7 @@
                 </a:solidFill>
                 <a:latin typeface="Montserrat"/>
               </a:rPr>
-              <a:t>gas ball valve shut off yellow</a:t>
+              <a:t>gas safety shut off valve close up</a:t>
             </a:r>
           </a:p>
         </p:txBody>
@@ -6237,6 +6805,18 @@
   <p:clrMapOvr>
     <a:masterClrMapping/>
   </p:clrMapOvr>
+  <mc:AlternateContent xmlns:mc="http://schemas.openxmlformats.org/markup-compatibility/2006">
+    <mc:Choice xmlns:p14="http://schemas.microsoft.com/office/powerpoint/2010/main" Requires="p14">
+      <p:transition spd="med" p14:dur="700">
+        <p14:cube dir="r"/>
+      </p:transition>
+    </mc:Choice>
+    <mc:Fallback>
+      <p:transition spd="med">
+        <p:push dir="r"/>
+      </p:transition>
+    </mc:Fallback>
+  </mc:AlternateContent>
 </p:sld>
 </file>
 
@@ -6324,7 +6904,7 @@
                 </a:solidFill>
                 <a:latin typeface="Montserrat"/>
               </a:rPr>
-              <a:t>013 / 016</a:t>
+              <a:t>013 / 023</a:t>
             </a:r>
           </a:p>
         </p:txBody>
@@ -6365,84 +6945,16 @@
       </p:sp>
       <p:sp>
         <p:nvSpPr>
-          <p:cNvPr id="5" name="TextBox 4"/>
-          <p:cNvSpPr txBox="1"/>
-          <p:nvPr/>
-        </p:nvSpPr>
-        <p:spPr>
-          <a:xfrm>
-            <a:off x="822960" y="457200"/>
-            <a:ext cx="10058400" cy="365760"/>
-          </a:xfrm>
-          <a:prstGeom prst="rect">
-            <a:avLst/>
-          </a:prstGeom>
-          <a:noFill/>
-        </p:spPr>
-        <p:txBody>
-          <a:bodyPr wrap="square">
-            <a:spAutoFit/>
-          </a:bodyPr>
-          <a:lstStyle/>
-          <a:p>
-            <a:r>
-              <a:rPr sz="1300" b="1" i="0">
-                <a:solidFill>
-                  <a:srgbClr val="E8801A"/>
-                </a:solidFill>
-                <a:latin typeface="Montserrat"/>
-              </a:rPr>
-              <a:t>CONEXIONES · APARATOS Y GLP</a:t>
-            </a:r>
-          </a:p>
-        </p:txBody>
-      </p:sp>
-      <p:sp>
-        <p:nvSpPr>
-          <p:cNvPr id="6" name="TextBox 5"/>
-          <p:cNvSpPr txBox="1"/>
-          <p:nvPr/>
-        </p:nvSpPr>
-        <p:spPr>
-          <a:xfrm>
-            <a:off x="822960" y="868680"/>
-            <a:ext cx="10515600" cy="914400"/>
-          </a:xfrm>
-          <a:prstGeom prst="rect">
-            <a:avLst/>
-          </a:prstGeom>
-          <a:noFill/>
-        </p:spPr>
-        <p:txBody>
-          <a:bodyPr wrap="square">
-            <a:spAutoFit/>
-          </a:bodyPr>
-          <a:lstStyle/>
-          <a:p>
-            <a:r>
-              <a:rPr sz="2800" b="1" i="0">
-                <a:solidFill>
-                  <a:srgbClr val="1E2761"/>
-                </a:solidFill>
-                <a:latin typeface="Montserrat"/>
-              </a:rPr>
-              <a:t>Conectar aparatos y bombonas</a:t>
-            </a:r>
-          </a:p>
-        </p:txBody>
-      </p:sp>
-      <p:sp>
-        <p:nvSpPr>
-          <p:cNvPr id="7" name="Rounded Rectangle 6"/>
+          <p:cNvPr id="5" name="Rectangle 4"/>
           <p:cNvSpPr/>
           <p:nvPr/>
         </p:nvSpPr>
         <p:spPr>
           <a:xfrm>
-            <a:off x="868680" y="1627632"/>
-            <a:ext cx="2011680" cy="73152"/>
-          </a:xfrm>
-          <a:prstGeom prst="roundRect">
+            <a:off x="0" y="0"/>
+            <a:ext cx="12191695" cy="1143000"/>
+          </a:xfrm>
+          <a:prstGeom prst="rect">
             <a:avLst/>
           </a:prstGeom>
           <a:solidFill>
@@ -6477,14 +6989,14 @@
       </p:sp>
       <p:sp>
         <p:nvSpPr>
-          <p:cNvPr id="8" name="TextBox 7"/>
+          <p:cNvPr id="6" name="TextBox 5"/>
           <p:cNvSpPr txBox="1"/>
           <p:nvPr/>
         </p:nvSpPr>
         <p:spPr>
           <a:xfrm>
-            <a:off x="822960" y="1965960"/>
-            <a:ext cx="4983480" cy="4206240"/>
+            <a:off x="822960" y="274320"/>
+            <a:ext cx="10515600" cy="640080"/>
           </a:xfrm>
           <a:prstGeom prst="rect">
             <a:avLst/>
@@ -6497,117 +7009,62 @@
           </a:bodyPr>
           <a:lstStyle/>
           <a:p>
-            <a:pPr>
-              <a:spcAft>
-                <a:spcPts val="1100"/>
-              </a:spcAft>
-            </a:pPr>
-            <a:r>
-              <a:rPr sz="1600" b="1" i="0">
-                <a:solidFill>
-                  <a:srgbClr val="E8801A"/>
-                </a:solidFill>
-                <a:latin typeface="Montserrat"/>
-              </a:rPr>
-              <a:t>▸  </a:t>
-            </a:r>
-            <a:r>
-              <a:rPr sz="1600" b="0" i="0">
-                <a:solidFill>
-                  <a:srgbClr val="1B2330"/>
-                </a:solidFill>
-                <a:latin typeface="Montserrat"/>
-              </a:rPr>
-              <a:t>Aparatos: rígida o flexible (UNE 60670-7)</a:t>
-            </a:r>
-          </a:p>
-          <a:p>
-            <a:pPr>
-              <a:spcAft>
-                <a:spcPts val="1100"/>
-              </a:spcAft>
-            </a:pPr>
-            <a:r>
-              <a:rPr sz="1600" b="1" i="0">
-                <a:solidFill>
-                  <a:srgbClr val="E8801A"/>
-                </a:solidFill>
-                <a:latin typeface="Montserrat"/>
-              </a:rPr>
-              <a:t>▸  </a:t>
-            </a:r>
-            <a:r>
-              <a:rPr sz="1600" b="0" i="0">
-                <a:solidFill>
-                  <a:srgbClr val="1B2330"/>
-                </a:solidFill>
-                <a:latin typeface="Montserrat"/>
-              </a:rPr>
-              <a:t>Flexible de elastómero → UNE 53539</a:t>
-            </a:r>
-          </a:p>
-          <a:p>
-            <a:pPr>
-              <a:spcAft>
-                <a:spcPts val="1100"/>
-              </a:spcAft>
-            </a:pPr>
-            <a:r>
-              <a:rPr sz="1600" b="1" i="0">
-                <a:solidFill>
-                  <a:srgbClr val="E8801A"/>
-                </a:solidFill>
-                <a:latin typeface="Montserrat"/>
-              </a:rPr>
-              <a:t>▸  </a:t>
-            </a:r>
-            <a:r>
-              <a:rPr sz="1600" b="0" i="0">
-                <a:solidFill>
-                  <a:srgbClr val="1B2330"/>
-                </a:solidFill>
-                <a:latin typeface="Montserrat"/>
-              </a:rPr>
-              <a:t>Con armadura → UNE-EN 16436</a:t>
-            </a:r>
-          </a:p>
-          <a:p>
-            <a:pPr>
-              <a:spcAft>
-                <a:spcPts val="1100"/>
-              </a:spcAft>
-            </a:pPr>
-            <a:r>
-              <a:rPr sz="1600" b="1" i="0">
-                <a:solidFill>
-                  <a:srgbClr val="E8801A"/>
-                </a:solidFill>
-                <a:latin typeface="Montserrat"/>
-              </a:rPr>
-              <a:t>▸  </a:t>
-            </a:r>
-            <a:r>
-              <a:rPr sz="1600" b="0" i="0">
-                <a:solidFill>
-                  <a:srgbClr val="1B2330"/>
-                </a:solidFill>
-                <a:latin typeface="Montserrat"/>
-              </a:rPr>
-              <a:t>Metálico → UNE-EN 14800</a:t>
-            </a:r>
-          </a:p>
-        </p:txBody>
-      </p:sp>
-      <p:sp>
-        <p:nvSpPr>
-          <p:cNvPr id="9" name="imgph" descr="IMGQ:gas appliance flexible connection hose"/>
+            <a:r>
+              <a:rPr sz="2400" b="1" i="0">
+                <a:solidFill>
+                  <a:srgbClr val="FFFFFF"/>
+                </a:solidFill>
+                <a:latin typeface="Montserrat"/>
+              </a:rPr>
+              <a:t>⚡  PREGUNTA RÁPIDA</a:t>
+            </a:r>
+          </a:p>
+        </p:txBody>
+      </p:sp>
+      <p:sp>
+        <p:nvSpPr>
+          <p:cNvPr id="7" name="TextBox 6"/>
+          <p:cNvSpPr txBox="1"/>
+          <p:nvPr/>
+        </p:nvSpPr>
+        <p:spPr>
+          <a:xfrm>
+            <a:off x="822960" y="1508760"/>
+            <a:ext cx="10515600" cy="1371600"/>
+          </a:xfrm>
+          <a:prstGeom prst="rect">
+            <a:avLst/>
+          </a:prstGeom>
+          <a:noFill/>
+        </p:spPr>
+        <p:txBody>
+          <a:bodyPr wrap="square">
+            <a:spAutoFit/>
+          </a:bodyPr>
+          <a:lstStyle/>
+          <a:p>
+            <a:r>
+              <a:rPr sz="2400" b="1" i="0">
+                <a:solidFill>
+                  <a:srgbClr val="1E2761"/>
+                </a:solidFill>
+                <a:latin typeface="Montserrat"/>
+              </a:rPr>
+              <a:t>La válvula de seguridad por máxima presión debe ser siempre...</a:t>
+            </a:r>
+          </a:p>
+        </p:txBody>
+      </p:sp>
+      <p:sp>
+        <p:nvSpPr>
+          <p:cNvPr id="8" name="Rounded Rectangle 7"/>
           <p:cNvSpPr/>
           <p:nvPr/>
         </p:nvSpPr>
         <p:spPr>
           <a:xfrm>
-            <a:off x="5806440" y="1051560"/>
-            <a:ext cx="5298947" cy="4629150"/>
+            <a:off x="822960" y="3291840"/>
+            <a:ext cx="4983480" cy="1143000"/>
           </a:xfrm>
           <a:prstGeom prst="roundRect">
             <a:avLst/>
@@ -6646,14 +7103,58 @@
       </p:sp>
       <p:sp>
         <p:nvSpPr>
+          <p:cNvPr id="9" name="Rectangle 8"/>
+          <p:cNvSpPr/>
+          <p:nvPr/>
+        </p:nvSpPr>
+        <p:spPr>
+          <a:xfrm>
+            <a:off x="822960" y="3291840"/>
+            <a:ext cx="640080" cy="1143000"/>
+          </a:xfrm>
+          <a:prstGeom prst="rect">
+            <a:avLst/>
+          </a:prstGeom>
+          <a:solidFill>
+            <a:srgbClr val="1E2761"/>
+          </a:solidFill>
+          <a:ln>
+            <a:noFill/>
+          </a:ln>
+          <a:effectLst/>
+        </p:spPr>
+        <p:style>
+          <a:lnRef idx="1">
+            <a:schemeClr val="accent1"/>
+          </a:lnRef>
+          <a:fillRef idx="3">
+            <a:schemeClr val="accent1"/>
+          </a:fillRef>
+          <a:effectRef idx="2">
+            <a:schemeClr val="accent1"/>
+          </a:effectRef>
+          <a:fontRef idx="minor">
+            <a:schemeClr val="lt1"/>
+          </a:fontRef>
+        </p:style>
+        <p:txBody>
+          <a:bodyPr rtlCol="0" anchor="ctr"/>
+          <a:lstStyle/>
+          <a:p>
+            <a:pPr algn="ctr"/>
+          </a:p>
+        </p:txBody>
+      </p:sp>
+      <p:sp>
+        <p:nvSpPr>
           <p:cNvPr id="10" name="TextBox 9"/>
           <p:cNvSpPr txBox="1"/>
           <p:nvPr/>
         </p:nvSpPr>
         <p:spPr>
           <a:xfrm>
-            <a:off x="6080760" y="2726055"/>
-            <a:ext cx="4750307" cy="1280160"/>
+            <a:off x="822960" y="3611880"/>
+            <a:ext cx="640080" cy="548640"/>
           </a:xfrm>
           <a:prstGeom prst="rect">
             <a:avLst/>
@@ -6668,25 +7169,524 @@
           <a:p>
             <a:pPr algn="ctr"/>
             <a:r>
-              <a:rPr sz="1400" b="1" i="0">
-                <a:solidFill>
-                  <a:srgbClr val="64748B"/>
-                </a:solidFill>
-                <a:latin typeface="Montserrat"/>
-              </a:rPr>
-              <a:t>IMAGEN REALISTA</a:t>
-            </a:r>
-          </a:p>
+              <a:rPr sz="2200" b="1" i="0">
+                <a:solidFill>
+                  <a:srgbClr val="FFFFFF"/>
+                </a:solidFill>
+                <a:latin typeface="Montserrat"/>
+              </a:rPr>
+              <a:t>A</a:t>
+            </a:r>
+          </a:p>
+        </p:txBody>
+      </p:sp>
+      <p:sp>
+        <p:nvSpPr>
+          <p:cNvPr id="11" name="TextBox 10"/>
+          <p:cNvSpPr txBox="1"/>
+          <p:nvPr/>
+        </p:nvSpPr>
+        <p:spPr>
+          <a:xfrm>
+            <a:off x="1600200" y="3474720"/>
+            <a:ext cx="4114800" cy="868680"/>
+          </a:xfrm>
+          <a:prstGeom prst="rect">
+            <a:avLst/>
+          </a:prstGeom>
+          <a:noFill/>
+        </p:spPr>
+        <p:txBody>
+          <a:bodyPr wrap="square">
+            <a:spAutoFit/>
+          </a:bodyPr>
+          <a:lstStyle/>
+          <a:p>
+            <a:r>
+              <a:rPr sz="1400" b="0" i="0">
+                <a:solidFill>
+                  <a:srgbClr val="1B2330"/>
+                </a:solidFill>
+                <a:latin typeface="Montserrat"/>
+              </a:rPr>
+              <a:t>De rearme automático</a:t>
+            </a:r>
+          </a:p>
+        </p:txBody>
+      </p:sp>
+      <p:sp>
+        <p:nvSpPr>
+          <p:cNvPr id="12" name="Rounded Rectangle 11"/>
+          <p:cNvSpPr/>
+          <p:nvPr/>
+        </p:nvSpPr>
+        <p:spPr>
+          <a:xfrm>
+            <a:off x="6355080" y="3291840"/>
+            <a:ext cx="4983480" cy="1143000"/>
+          </a:xfrm>
+          <a:prstGeom prst="roundRect">
+            <a:avLst/>
+          </a:prstGeom>
+          <a:solidFill>
+            <a:srgbClr val="F3F6FB"/>
+          </a:solidFill>
+          <a:ln w="12700">
+            <a:solidFill>
+              <a:srgbClr val="C7D2E6"/>
+            </a:solidFill>
+          </a:ln>
+          <a:effectLst/>
+        </p:spPr>
+        <p:style>
+          <a:lnRef idx="1">
+            <a:schemeClr val="accent1"/>
+          </a:lnRef>
+          <a:fillRef idx="3">
+            <a:schemeClr val="accent1"/>
+          </a:fillRef>
+          <a:effectRef idx="2">
+            <a:schemeClr val="accent1"/>
+          </a:effectRef>
+          <a:fontRef idx="minor">
+            <a:schemeClr val="lt1"/>
+          </a:fontRef>
+        </p:style>
+        <p:txBody>
+          <a:bodyPr rtlCol="0" anchor="ctr"/>
+          <a:lstStyle/>
           <a:p>
             <a:pPr algn="ctr"/>
-            <a:r>
-              <a:rPr sz="1100" b="0" i="1">
-                <a:solidFill>
-                  <a:srgbClr val="64748B"/>
-                </a:solidFill>
-                <a:latin typeface="Montserrat"/>
-              </a:rPr>
-              <a:t>gas appliance flexible connection hose</a:t>
+          </a:p>
+        </p:txBody>
+      </p:sp>
+      <p:sp>
+        <p:nvSpPr>
+          <p:cNvPr id="13" name="Rectangle 12"/>
+          <p:cNvSpPr/>
+          <p:nvPr/>
+        </p:nvSpPr>
+        <p:spPr>
+          <a:xfrm>
+            <a:off x="6355080" y="3291840"/>
+            <a:ext cx="640080" cy="1143000"/>
+          </a:xfrm>
+          <a:prstGeom prst="rect">
+            <a:avLst/>
+          </a:prstGeom>
+          <a:solidFill>
+            <a:srgbClr val="1E2761"/>
+          </a:solidFill>
+          <a:ln>
+            <a:noFill/>
+          </a:ln>
+          <a:effectLst/>
+        </p:spPr>
+        <p:style>
+          <a:lnRef idx="1">
+            <a:schemeClr val="accent1"/>
+          </a:lnRef>
+          <a:fillRef idx="3">
+            <a:schemeClr val="accent1"/>
+          </a:fillRef>
+          <a:effectRef idx="2">
+            <a:schemeClr val="accent1"/>
+          </a:effectRef>
+          <a:fontRef idx="minor">
+            <a:schemeClr val="lt1"/>
+          </a:fontRef>
+        </p:style>
+        <p:txBody>
+          <a:bodyPr rtlCol="0" anchor="ctr"/>
+          <a:lstStyle/>
+          <a:p>
+            <a:pPr algn="ctr"/>
+          </a:p>
+        </p:txBody>
+      </p:sp>
+      <p:sp>
+        <p:nvSpPr>
+          <p:cNvPr id="14" name="TextBox 13"/>
+          <p:cNvSpPr txBox="1"/>
+          <p:nvPr/>
+        </p:nvSpPr>
+        <p:spPr>
+          <a:xfrm>
+            <a:off x="6355080" y="3611880"/>
+            <a:ext cx="640080" cy="548640"/>
+          </a:xfrm>
+          <a:prstGeom prst="rect">
+            <a:avLst/>
+          </a:prstGeom>
+          <a:noFill/>
+        </p:spPr>
+        <p:txBody>
+          <a:bodyPr wrap="square">
+            <a:spAutoFit/>
+          </a:bodyPr>
+          <a:lstStyle/>
+          <a:p>
+            <a:pPr algn="ctr"/>
+            <a:r>
+              <a:rPr sz="2200" b="1" i="0">
+                <a:solidFill>
+                  <a:srgbClr val="FFFFFF"/>
+                </a:solidFill>
+                <a:latin typeface="Montserrat"/>
+              </a:rPr>
+              <a:t>B</a:t>
+            </a:r>
+          </a:p>
+        </p:txBody>
+      </p:sp>
+      <p:sp>
+        <p:nvSpPr>
+          <p:cNvPr id="15" name="TextBox 14"/>
+          <p:cNvSpPr txBox="1"/>
+          <p:nvPr/>
+        </p:nvSpPr>
+        <p:spPr>
+          <a:xfrm>
+            <a:off x="7132320" y="3474720"/>
+            <a:ext cx="4114800" cy="868680"/>
+          </a:xfrm>
+          <a:prstGeom prst="rect">
+            <a:avLst/>
+          </a:prstGeom>
+          <a:noFill/>
+        </p:spPr>
+        <p:txBody>
+          <a:bodyPr wrap="square">
+            <a:spAutoFit/>
+          </a:bodyPr>
+          <a:lstStyle/>
+          <a:p>
+            <a:r>
+              <a:rPr sz="1400" b="0" i="0">
+                <a:solidFill>
+                  <a:srgbClr val="1B2330"/>
+                </a:solidFill>
+                <a:latin typeface="Montserrat"/>
+              </a:rPr>
+              <a:t>De rearme manual</a:t>
+            </a:r>
+          </a:p>
+        </p:txBody>
+      </p:sp>
+      <p:sp>
+        <p:nvSpPr>
+          <p:cNvPr id="16" name="Rounded Rectangle 15"/>
+          <p:cNvSpPr/>
+          <p:nvPr/>
+        </p:nvSpPr>
+        <p:spPr>
+          <a:xfrm>
+            <a:off x="822960" y="4617720"/>
+            <a:ext cx="4983480" cy="1143000"/>
+          </a:xfrm>
+          <a:prstGeom prst="roundRect">
+            <a:avLst/>
+          </a:prstGeom>
+          <a:solidFill>
+            <a:srgbClr val="F3F6FB"/>
+          </a:solidFill>
+          <a:ln w="12700">
+            <a:solidFill>
+              <a:srgbClr val="C7D2E6"/>
+            </a:solidFill>
+          </a:ln>
+          <a:effectLst/>
+        </p:spPr>
+        <p:style>
+          <a:lnRef idx="1">
+            <a:schemeClr val="accent1"/>
+          </a:lnRef>
+          <a:fillRef idx="3">
+            <a:schemeClr val="accent1"/>
+          </a:fillRef>
+          <a:effectRef idx="2">
+            <a:schemeClr val="accent1"/>
+          </a:effectRef>
+          <a:fontRef idx="minor">
+            <a:schemeClr val="lt1"/>
+          </a:fontRef>
+        </p:style>
+        <p:txBody>
+          <a:bodyPr rtlCol="0" anchor="ctr"/>
+          <a:lstStyle/>
+          <a:p>
+            <a:pPr algn="ctr"/>
+          </a:p>
+        </p:txBody>
+      </p:sp>
+      <p:sp>
+        <p:nvSpPr>
+          <p:cNvPr id="17" name="Rectangle 16"/>
+          <p:cNvSpPr/>
+          <p:nvPr/>
+        </p:nvSpPr>
+        <p:spPr>
+          <a:xfrm>
+            <a:off x="822960" y="4617720"/>
+            <a:ext cx="640080" cy="1143000"/>
+          </a:xfrm>
+          <a:prstGeom prst="rect">
+            <a:avLst/>
+          </a:prstGeom>
+          <a:solidFill>
+            <a:srgbClr val="1E2761"/>
+          </a:solidFill>
+          <a:ln>
+            <a:noFill/>
+          </a:ln>
+          <a:effectLst/>
+        </p:spPr>
+        <p:style>
+          <a:lnRef idx="1">
+            <a:schemeClr val="accent1"/>
+          </a:lnRef>
+          <a:fillRef idx="3">
+            <a:schemeClr val="accent1"/>
+          </a:fillRef>
+          <a:effectRef idx="2">
+            <a:schemeClr val="accent1"/>
+          </a:effectRef>
+          <a:fontRef idx="minor">
+            <a:schemeClr val="lt1"/>
+          </a:fontRef>
+        </p:style>
+        <p:txBody>
+          <a:bodyPr rtlCol="0" anchor="ctr"/>
+          <a:lstStyle/>
+          <a:p>
+            <a:pPr algn="ctr"/>
+          </a:p>
+        </p:txBody>
+      </p:sp>
+      <p:sp>
+        <p:nvSpPr>
+          <p:cNvPr id="18" name="TextBox 17"/>
+          <p:cNvSpPr txBox="1"/>
+          <p:nvPr/>
+        </p:nvSpPr>
+        <p:spPr>
+          <a:xfrm>
+            <a:off x="822960" y="4937760"/>
+            <a:ext cx="640080" cy="548640"/>
+          </a:xfrm>
+          <a:prstGeom prst="rect">
+            <a:avLst/>
+          </a:prstGeom>
+          <a:noFill/>
+        </p:spPr>
+        <p:txBody>
+          <a:bodyPr wrap="square">
+            <a:spAutoFit/>
+          </a:bodyPr>
+          <a:lstStyle/>
+          <a:p>
+            <a:pPr algn="ctr"/>
+            <a:r>
+              <a:rPr sz="2200" b="1" i="0">
+                <a:solidFill>
+                  <a:srgbClr val="FFFFFF"/>
+                </a:solidFill>
+                <a:latin typeface="Montserrat"/>
+              </a:rPr>
+              <a:t>C</a:t>
+            </a:r>
+          </a:p>
+        </p:txBody>
+      </p:sp>
+      <p:sp>
+        <p:nvSpPr>
+          <p:cNvPr id="19" name="TextBox 18"/>
+          <p:cNvSpPr txBox="1"/>
+          <p:nvPr/>
+        </p:nvSpPr>
+        <p:spPr>
+          <a:xfrm>
+            <a:off x="1600200" y="4800600"/>
+            <a:ext cx="4114800" cy="868680"/>
+          </a:xfrm>
+          <a:prstGeom prst="rect">
+            <a:avLst/>
+          </a:prstGeom>
+          <a:noFill/>
+        </p:spPr>
+        <p:txBody>
+          <a:bodyPr wrap="square">
+            <a:spAutoFit/>
+          </a:bodyPr>
+          <a:lstStyle/>
+          <a:p>
+            <a:r>
+              <a:rPr sz="1400" b="0" i="0">
+                <a:solidFill>
+                  <a:srgbClr val="1B2330"/>
+                </a:solidFill>
+                <a:latin typeface="Montserrat"/>
+              </a:rPr>
+              <a:t>De accionamiento eléctrico</a:t>
+            </a:r>
+          </a:p>
+        </p:txBody>
+      </p:sp>
+      <p:sp>
+        <p:nvSpPr>
+          <p:cNvPr id="20" name="Rounded Rectangle 19"/>
+          <p:cNvSpPr/>
+          <p:nvPr/>
+        </p:nvSpPr>
+        <p:spPr>
+          <a:xfrm>
+            <a:off x="6355080" y="4617720"/>
+            <a:ext cx="4983480" cy="1143000"/>
+          </a:xfrm>
+          <a:prstGeom prst="roundRect">
+            <a:avLst/>
+          </a:prstGeom>
+          <a:solidFill>
+            <a:srgbClr val="F3F6FB"/>
+          </a:solidFill>
+          <a:ln w="12700">
+            <a:solidFill>
+              <a:srgbClr val="C7D2E6"/>
+            </a:solidFill>
+          </a:ln>
+          <a:effectLst/>
+        </p:spPr>
+        <p:style>
+          <a:lnRef idx="1">
+            <a:schemeClr val="accent1"/>
+          </a:lnRef>
+          <a:fillRef idx="3">
+            <a:schemeClr val="accent1"/>
+          </a:fillRef>
+          <a:effectRef idx="2">
+            <a:schemeClr val="accent1"/>
+          </a:effectRef>
+          <a:fontRef idx="minor">
+            <a:schemeClr val="lt1"/>
+          </a:fontRef>
+        </p:style>
+        <p:txBody>
+          <a:bodyPr rtlCol="0" anchor="ctr"/>
+          <a:lstStyle/>
+          <a:p>
+            <a:pPr algn="ctr"/>
+          </a:p>
+        </p:txBody>
+      </p:sp>
+      <p:sp>
+        <p:nvSpPr>
+          <p:cNvPr id="21" name="Rectangle 20"/>
+          <p:cNvSpPr/>
+          <p:nvPr/>
+        </p:nvSpPr>
+        <p:spPr>
+          <a:xfrm>
+            <a:off x="6355080" y="4617720"/>
+            <a:ext cx="640080" cy="1143000"/>
+          </a:xfrm>
+          <a:prstGeom prst="rect">
+            <a:avLst/>
+          </a:prstGeom>
+          <a:solidFill>
+            <a:srgbClr val="1E2761"/>
+          </a:solidFill>
+          <a:ln>
+            <a:noFill/>
+          </a:ln>
+          <a:effectLst/>
+        </p:spPr>
+        <p:style>
+          <a:lnRef idx="1">
+            <a:schemeClr val="accent1"/>
+          </a:lnRef>
+          <a:fillRef idx="3">
+            <a:schemeClr val="accent1"/>
+          </a:fillRef>
+          <a:effectRef idx="2">
+            <a:schemeClr val="accent1"/>
+          </a:effectRef>
+          <a:fontRef idx="minor">
+            <a:schemeClr val="lt1"/>
+          </a:fontRef>
+        </p:style>
+        <p:txBody>
+          <a:bodyPr rtlCol="0" anchor="ctr"/>
+          <a:lstStyle/>
+          <a:p>
+            <a:pPr algn="ctr"/>
+          </a:p>
+        </p:txBody>
+      </p:sp>
+      <p:sp>
+        <p:nvSpPr>
+          <p:cNvPr id="22" name="TextBox 21"/>
+          <p:cNvSpPr txBox="1"/>
+          <p:nvPr/>
+        </p:nvSpPr>
+        <p:spPr>
+          <a:xfrm>
+            <a:off x="6355080" y="4937760"/>
+            <a:ext cx="640080" cy="548640"/>
+          </a:xfrm>
+          <a:prstGeom prst="rect">
+            <a:avLst/>
+          </a:prstGeom>
+          <a:noFill/>
+        </p:spPr>
+        <p:txBody>
+          <a:bodyPr wrap="square">
+            <a:spAutoFit/>
+          </a:bodyPr>
+          <a:lstStyle/>
+          <a:p>
+            <a:pPr algn="ctr"/>
+            <a:r>
+              <a:rPr sz="2200" b="1" i="0">
+                <a:solidFill>
+                  <a:srgbClr val="FFFFFF"/>
+                </a:solidFill>
+                <a:latin typeface="Montserrat"/>
+              </a:rPr>
+              <a:t>D</a:t>
+            </a:r>
+          </a:p>
+        </p:txBody>
+      </p:sp>
+      <p:sp>
+        <p:nvSpPr>
+          <p:cNvPr id="23" name="TextBox 22"/>
+          <p:cNvSpPr txBox="1"/>
+          <p:nvPr/>
+        </p:nvSpPr>
+        <p:spPr>
+          <a:xfrm>
+            <a:off x="7132320" y="4800600"/>
+            <a:ext cx="4114800" cy="868680"/>
+          </a:xfrm>
+          <a:prstGeom prst="rect">
+            <a:avLst/>
+          </a:prstGeom>
+          <a:noFill/>
+        </p:spPr>
+        <p:txBody>
+          <a:bodyPr wrap="square">
+            <a:spAutoFit/>
+          </a:bodyPr>
+          <a:lstStyle/>
+          <a:p>
+            <a:r>
+              <a:rPr sz="1400" b="0" i="0">
+                <a:solidFill>
+                  <a:srgbClr val="1B2330"/>
+                </a:solidFill>
+                <a:latin typeface="Montserrat"/>
+              </a:rPr>
+              <a:t>De tarado sin precintar</a:t>
             </a:r>
           </a:p>
         </p:txBody>
@@ -6696,6 +7696,18 @@
   <p:clrMapOvr>
     <a:masterClrMapping/>
   </p:clrMapOvr>
+  <mc:AlternateContent xmlns:mc="http://schemas.openxmlformats.org/markup-compatibility/2006">
+    <mc:Choice xmlns:p14="http://schemas.microsoft.com/office/powerpoint/2010/main" Requires="p14">
+      <p:transition spd="med" p14:dur="700">
+        <p14:cube dir="l"/>
+      </p:transition>
+    </mc:Choice>
+    <mc:Fallback>
+      <p:transition spd="med">
+        <p:push dir="l"/>
+      </p:transition>
+    </mc:Fallback>
+  </mc:AlternateContent>
 </p:sld>
 </file>
 
@@ -6783,7 +7795,7 @@
                 </a:solidFill>
                 <a:latin typeface="Montserrat"/>
               </a:rPr>
-              <a:t>014 / 016</a:t>
+              <a:t>014 / 023</a:t>
             </a:r>
           </a:p>
         </p:txBody>
@@ -6824,88 +7836,20 @@
       </p:sp>
       <p:sp>
         <p:nvSpPr>
-          <p:cNvPr id="5" name="TextBox 4"/>
-          <p:cNvSpPr txBox="1"/>
-          <p:nvPr/>
-        </p:nvSpPr>
-        <p:spPr>
-          <a:xfrm>
-            <a:off x="822960" y="457200"/>
-            <a:ext cx="10058400" cy="365760"/>
-          </a:xfrm>
-          <a:prstGeom prst="rect">
-            <a:avLst/>
-          </a:prstGeom>
-          <a:noFill/>
-        </p:spPr>
-        <p:txBody>
-          <a:bodyPr wrap="square">
-            <a:spAutoFit/>
-          </a:bodyPr>
-          <a:lstStyle/>
-          <a:p>
-            <a:r>
-              <a:rPr sz="1300" b="1" i="0">
-                <a:solidFill>
-                  <a:srgbClr val="E8801A"/>
-                </a:solidFill>
-                <a:latin typeface="Montserrat"/>
-              </a:rPr>
-              <a:t>CONEXIONES · CONTADOR</a:t>
-            </a:r>
-          </a:p>
-        </p:txBody>
-      </p:sp>
-      <p:sp>
-        <p:nvSpPr>
-          <p:cNvPr id="6" name="TextBox 5"/>
-          <p:cNvSpPr txBox="1"/>
-          <p:nvPr/>
-        </p:nvSpPr>
-        <p:spPr>
-          <a:xfrm>
-            <a:off x="822960" y="868680"/>
-            <a:ext cx="10515600" cy="914400"/>
-          </a:xfrm>
-          <a:prstGeom prst="rect">
-            <a:avLst/>
-          </a:prstGeom>
-          <a:noFill/>
-        </p:spPr>
-        <p:txBody>
-          <a:bodyPr wrap="square">
-            <a:spAutoFit/>
-          </a:bodyPr>
-          <a:lstStyle/>
-          <a:p>
-            <a:r>
-              <a:rPr sz="2800" b="1" i="0">
-                <a:solidFill>
-                  <a:srgbClr val="1E2761"/>
-                </a:solidFill>
-                <a:latin typeface="Montserrat"/>
-              </a:rPr>
-              <a:t>El flexible del contador: 0,80 m</a:t>
-            </a:r>
-          </a:p>
-        </p:txBody>
-      </p:sp>
-      <p:sp>
-        <p:nvSpPr>
-          <p:cNvPr id="7" name="Rounded Rectangle 6"/>
+          <p:cNvPr id="5" name="Rectangle 4"/>
           <p:cNvSpPr/>
           <p:nvPr/>
         </p:nvSpPr>
         <p:spPr>
           <a:xfrm>
-            <a:off x="868680" y="1627632"/>
-            <a:ext cx="2011680" cy="73152"/>
-          </a:xfrm>
-          <a:prstGeom prst="roundRect">
+            <a:off x="0" y="0"/>
+            <a:ext cx="12191695" cy="1143000"/>
+          </a:xfrm>
+          <a:prstGeom prst="rect">
             <a:avLst/>
           </a:prstGeom>
           <a:solidFill>
-            <a:srgbClr val="E8801A"/>
+            <a:srgbClr val="1E8E4B"/>
           </a:solidFill>
           <a:ln>
             <a:noFill/>
@@ -6936,14 +7880,14 @@
       </p:sp>
       <p:sp>
         <p:nvSpPr>
-          <p:cNvPr id="8" name="TextBox 7"/>
+          <p:cNvPr id="6" name="TextBox 5"/>
           <p:cNvSpPr txBox="1"/>
           <p:nvPr/>
         </p:nvSpPr>
         <p:spPr>
           <a:xfrm>
-            <a:off x="822960" y="1965960"/>
-            <a:ext cx="4983480" cy="4206240"/>
+            <a:off x="822960" y="274320"/>
+            <a:ext cx="10515600" cy="640080"/>
           </a:xfrm>
           <a:prstGeom prst="rect">
             <a:avLst/>
@@ -6956,127 +7900,72 @@
           </a:bodyPr>
           <a:lstStyle/>
           <a:p>
-            <a:pPr>
-              <a:spcAft>
-                <a:spcPts val="1100"/>
-              </a:spcAft>
-            </a:pPr>
-            <a:r>
-              <a:rPr sz="1600" b="1" i="0">
-                <a:solidFill>
-                  <a:srgbClr val="E8801A"/>
-                </a:solidFill>
-                <a:latin typeface="Montserrat"/>
-              </a:rPr>
-              <a:t>▸  </a:t>
-            </a:r>
-            <a:r>
-              <a:rPr sz="1600" b="0" i="0">
-                <a:solidFill>
-                  <a:srgbClr val="1B2330"/>
-                </a:solidFill>
-                <a:latin typeface="Montserrat"/>
-              </a:rPr>
-              <a:t>Inox corrugado con conexiones roscadas</a:t>
-            </a:r>
-          </a:p>
-          <a:p>
-            <a:pPr>
-              <a:spcAft>
-                <a:spcPts val="1100"/>
-              </a:spcAft>
-            </a:pPr>
-            <a:r>
-              <a:rPr sz="1600" b="1" i="0">
-                <a:solidFill>
-                  <a:srgbClr val="E8801A"/>
-                </a:solidFill>
-                <a:latin typeface="Montserrat"/>
-              </a:rPr>
-              <a:t>▸  </a:t>
-            </a:r>
-            <a:r>
-              <a:rPr sz="1600" b="0" i="0">
-                <a:solidFill>
-                  <a:srgbClr val="1B2330"/>
-                </a:solidFill>
-                <a:latin typeface="Montserrat"/>
-              </a:rPr>
-              <a:t>Norma UNE 60713</a:t>
-            </a:r>
-          </a:p>
-          <a:p>
-            <a:pPr>
-              <a:spcAft>
-                <a:spcPts val="1100"/>
-              </a:spcAft>
-            </a:pPr>
-            <a:r>
-              <a:rPr sz="1600" b="1" i="0">
-                <a:solidFill>
-                  <a:srgbClr val="E8801A"/>
-                </a:solidFill>
-                <a:latin typeface="Montserrat"/>
-              </a:rPr>
-              <a:t>▸  </a:t>
-            </a:r>
-            <a:r>
-              <a:rPr sz="1600" b="0" i="0">
-                <a:solidFill>
-                  <a:srgbClr val="1B2330"/>
-                </a:solidFill>
-                <a:latin typeface="Montserrat"/>
-              </a:rPr>
-              <a:t>Longitud máxima 0,80 m</a:t>
-            </a:r>
-          </a:p>
-          <a:p>
-            <a:pPr>
-              <a:spcAft>
-                <a:spcPts val="1100"/>
-              </a:spcAft>
-            </a:pPr>
-            <a:r>
-              <a:rPr sz="1600" b="1" i="0">
-                <a:solidFill>
-                  <a:srgbClr val="E8801A"/>
-                </a:solidFill>
-                <a:latin typeface="Montserrat"/>
-              </a:rPr>
-              <a:t>▸  </a:t>
-            </a:r>
-            <a:r>
-              <a:rPr sz="1600" b="0" i="0">
-                <a:solidFill>
-                  <a:srgbClr val="1B2330"/>
-                </a:solidFill>
-                <a:latin typeface="Montserrat"/>
-              </a:rPr>
-              <a:t>No confundir con los flexibles de aparato</a:t>
-            </a:r>
-          </a:p>
-        </p:txBody>
-      </p:sp>
-      <p:sp>
-        <p:nvSpPr>
-          <p:cNvPr id="9" name="imgph" descr="IMGQ:corrugated stainless steel meter connector"/>
+            <a:r>
+              <a:rPr sz="2400" b="1" i="0">
+                <a:solidFill>
+                  <a:srgbClr val="FFFFFF"/>
+                </a:solidFill>
+                <a:latin typeface="Montserrat"/>
+              </a:rPr>
+              <a:t>✔  RESPUESTA:  B</a:t>
+            </a:r>
+          </a:p>
+        </p:txBody>
+      </p:sp>
+      <p:sp>
+        <p:nvSpPr>
+          <p:cNvPr id="7" name="TextBox 6"/>
+          <p:cNvSpPr txBox="1"/>
+          <p:nvPr/>
+        </p:nvSpPr>
+        <p:spPr>
+          <a:xfrm>
+            <a:off x="822960" y="1417320"/>
+            <a:ext cx="10515600" cy="914400"/>
+          </a:xfrm>
+          <a:prstGeom prst="rect">
+            <a:avLst/>
+          </a:prstGeom>
+          <a:noFill/>
+        </p:spPr>
+        <p:txBody>
+          <a:bodyPr wrap="square">
+            <a:spAutoFit/>
+          </a:bodyPr>
+          <a:lstStyle/>
+          <a:p>
+            <a:r>
+              <a:rPr sz="1800" b="1" i="0">
+                <a:solidFill>
+                  <a:srgbClr val="64748B"/>
+                </a:solidFill>
+                <a:latin typeface="Montserrat"/>
+              </a:rPr>
+              <a:t>La válvula de seguridad por máxima presión debe ser siempre...</a:t>
+            </a:r>
+          </a:p>
+        </p:txBody>
+      </p:sp>
+      <p:sp>
+        <p:nvSpPr>
+          <p:cNvPr id="8" name="Rounded Rectangle 7"/>
           <p:cNvSpPr/>
           <p:nvPr/>
         </p:nvSpPr>
         <p:spPr>
           <a:xfrm>
-            <a:off x="5806440" y="1051560"/>
-            <a:ext cx="5298947" cy="4629150"/>
+            <a:off x="822960" y="2514600"/>
+            <a:ext cx="10515600" cy="914400"/>
           </a:xfrm>
           <a:prstGeom prst="roundRect">
             <a:avLst/>
           </a:prstGeom>
           <a:solidFill>
-            <a:srgbClr val="F3F6FB"/>
+            <a:srgbClr val="E9F6EE"/>
           </a:solidFill>
           <a:ln w="12700">
             <a:solidFill>
-              <a:srgbClr val="C7D2E6"/>
+              <a:srgbClr val="1E8E4B"/>
             </a:solidFill>
           </a:ln>
           <a:effectLst/>
@@ -7105,14 +7994,14 @@
       </p:sp>
       <p:sp>
         <p:nvSpPr>
-          <p:cNvPr id="10" name="TextBox 9"/>
+          <p:cNvPr id="9" name="TextBox 8"/>
           <p:cNvSpPr txBox="1"/>
           <p:nvPr/>
         </p:nvSpPr>
         <p:spPr>
           <a:xfrm>
-            <a:off x="6080760" y="2726055"/>
-            <a:ext cx="4750307" cy="1280160"/>
+            <a:off x="1097280" y="2697480"/>
+            <a:ext cx="10058400" cy="640080"/>
           </a:xfrm>
           <a:prstGeom prst="rect">
             <a:avLst/>
@@ -7125,27 +8014,66 @@
           </a:bodyPr>
           <a:lstStyle/>
           <a:p>
-            <a:pPr algn="ctr"/>
-            <a:r>
-              <a:rPr sz="1400" b="1" i="0">
-                <a:solidFill>
-                  <a:srgbClr val="64748B"/>
-                </a:solidFill>
-                <a:latin typeface="Montserrat"/>
-              </a:rPr>
-              <a:t>IMAGEN REALISTA</a:t>
-            </a:r>
-          </a:p>
-          <a:p>
-            <a:pPr algn="ctr"/>
-            <a:r>
-              <a:rPr sz="1100" b="0" i="1">
-                <a:solidFill>
-                  <a:srgbClr val="64748B"/>
-                </a:solidFill>
-                <a:latin typeface="Montserrat"/>
-              </a:rPr>
-              <a:t>corrugated stainless steel meter connector</a:t>
+            <a:r>
+              <a:rPr sz="1800" b="1" i="0">
+                <a:solidFill>
+                  <a:srgbClr val="1E8E4B"/>
+                </a:solidFill>
+                <a:latin typeface="Montserrat"/>
+              </a:rPr>
+              <a:t>B.  </a:t>
+            </a:r>
+            <a:r>
+              <a:rPr sz="1800" b="1" i="0">
+                <a:solidFill>
+                  <a:srgbClr val="1E2761"/>
+                </a:solidFill>
+                <a:latin typeface="Montserrat"/>
+              </a:rPr>
+              <a:t>De rearme manual</a:t>
+            </a:r>
+          </a:p>
+        </p:txBody>
+      </p:sp>
+      <p:sp>
+        <p:nvSpPr>
+          <p:cNvPr id="10" name="TextBox 9"/>
+          <p:cNvSpPr txBox="1"/>
+          <p:nvPr/>
+        </p:nvSpPr>
+        <p:spPr>
+          <a:xfrm>
+            <a:off x="822960" y="3749039"/>
+            <a:ext cx="10515600" cy="2194560"/>
+          </a:xfrm>
+          <a:prstGeom prst="rect">
+            <a:avLst/>
+          </a:prstGeom>
+          <a:noFill/>
+        </p:spPr>
+        <p:txBody>
+          <a:bodyPr wrap="square">
+            <a:spAutoFit/>
+          </a:bodyPr>
+          <a:lstStyle/>
+          <a:p>
+            <a:r>
+              <a:rPr sz="1500" b="1" i="0">
+                <a:solidFill>
+                  <a:srgbClr val="E8801A"/>
+                </a:solidFill>
+                <a:latin typeface="Montserrat"/>
+              </a:rPr>
+              <a:t>Por qué:  </a:t>
+            </a:r>
+            <a:r>
+              <a:rPr sz="1500" b="0" i="0">
+                <a:solidFill>
+                  <a:srgbClr val="1B2330"/>
+                </a:solidFill>
+                <a:latin typeface="Montserrat"/>
+              </a:rPr>
+              <a:t>La de máxima es siempre de rearme manual: obliga a que alguien acuda, vea por qué saltó y la reponga a mano; además, sus elementos de tarado van precintados.</a:t>
             </a:r>
           </a:p>
         </p:txBody>
@@ -7155,6 +8083,18 @@
   <p:clrMapOvr>
     <a:masterClrMapping/>
   </p:clrMapOvr>
+  <mc:AlternateContent xmlns:mc="http://schemas.openxmlformats.org/markup-compatibility/2006">
+    <mc:Choice xmlns:p14="http://schemas.microsoft.com/office/powerpoint/2010/main" Requires="p14">
+      <p:transition spd="med" p14:dur="700">
+        <p14:cube dir="r"/>
+      </p:transition>
+    </mc:Choice>
+    <mc:Fallback>
+      <p:transition spd="med">
+        <p:push dir="r"/>
+      </p:transition>
+    </mc:Fallback>
+  </mc:AlternateContent>
 </p:sld>
 </file>
 
@@ -7242,7 +8182,7 @@
                 </a:solidFill>
                 <a:latin typeface="Montserrat"/>
               </a:rPr>
-              <a:t>015 / 016</a:t>
+              <a:t>015 / 023</a:t>
             </a:r>
           </a:p>
         </p:txBody>
@@ -7310,7 +8250,7 @@
                 </a:solidFill>
                 <a:latin typeface="Montserrat"/>
               </a:rPr>
-              <a:t>ELEMENTOS · TOMAS DE PRESIÓN</a:t>
+              <a:t>ELEMENTOS · CONTADORES</a:t>
             </a:r>
           </a:p>
         </p:txBody>
@@ -7344,14 +8284,14 @@
                 </a:solidFill>
                 <a:latin typeface="Montserrat"/>
               </a:rPr>
-              <a:t>El pinchazo para medir</a:t>
-            </a:r>
-          </a:p>
-        </p:txBody>
-      </p:sp>
-      <p:sp>
-        <p:nvSpPr>
-          <p:cNvPr id="7" name="Rounded Rectangle 6"/>
+              <a:t>Cuatro tipos de contador</a:t>
+            </a:r>
+          </a:p>
+        </p:txBody>
+      </p:sp>
+      <p:sp>
+        <p:nvSpPr>
+          <p:cNvPr id="7" name="Rectangle 6"/>
           <p:cNvSpPr/>
           <p:nvPr/>
         </p:nvSpPr>
@@ -7360,7 +8300,7 @@
             <a:off x="868680" y="1627632"/>
             <a:ext cx="2011680" cy="73152"/>
           </a:xfrm>
-          <a:prstGeom prst="roundRect">
+          <a:prstGeom prst="rect">
             <a:avLst/>
           </a:prstGeom>
           <a:solidFill>
@@ -7402,7 +8342,7 @@
         <p:spPr>
           <a:xfrm>
             <a:off x="822960" y="1965960"/>
-            <a:ext cx="4983480" cy="4206240"/>
+            <a:ext cx="5029200" cy="4206240"/>
           </a:xfrm>
           <a:prstGeom prst="rect">
             <a:avLst/>
@@ -7436,7 +8376,7 @@
                 </a:solidFill>
                 <a:latin typeface="Montserrat"/>
               </a:rPr>
-              <a:t>Depende de la MOP del tramo (UNE 60719)</a:t>
+              <a:t>Membrana → UNE-EN 1359 y UNE 60510</a:t>
             </a:r>
           </a:p>
           <a:p>
@@ -7461,7 +8401,7 @@
                 </a:solidFill>
                 <a:latin typeface="Montserrat"/>
               </a:rPr>
-              <a:t>≤ 150 mbar: débil calibre o Peterson</a:t>
+              <a:t>Turbina → UNE-EN 12261</a:t>
             </a:r>
           </a:p>
           <a:p>
@@ -7486,7 +8426,7 @@
                 </a:solidFill>
                 <a:latin typeface="Montserrat"/>
               </a:rPr>
-              <a:t>&gt; 150 mbar: solo Peterson</a:t>
+              <a:t>Pistones → UNE-EN 12480</a:t>
             </a:r>
           </a:p>
           <a:p>
@@ -7511,21 +8451,21 @@
                 </a:solidFill>
                 <a:latin typeface="Montserrat"/>
               </a:rPr>
-              <a:t>150 mbar = 0,15 bar de la escalera</a:t>
-            </a:r>
-          </a:p>
-        </p:txBody>
-      </p:sp>
-      <p:sp>
-        <p:nvSpPr>
-          <p:cNvPr id="9" name="imgph" descr="IMGQ:gas pressure test point gauge measure"/>
+              <a:t>Ultrasónico doméstico → UNE-EN 14236</a:t>
+            </a:r>
+          </a:p>
+        </p:txBody>
+      </p:sp>
+      <p:sp>
+        <p:nvSpPr>
+          <p:cNvPr id="9" name="imgph" descr="IMGQ:domestic gas meter diaphragm cabinet"/>
           <p:cNvSpPr/>
           <p:nvPr/>
         </p:nvSpPr>
         <p:spPr>
           <a:xfrm>
-            <a:off x="5806440" y="1051560"/>
-            <a:ext cx="5298947" cy="4629150"/>
+            <a:off x="6080760" y="1965960"/>
+            <a:ext cx="5303520" cy="4572000"/>
           </a:xfrm>
           <a:prstGeom prst="roundRect">
             <a:avLst/>
@@ -7570,8 +8510,8 @@
         </p:nvSpPr>
         <p:spPr>
           <a:xfrm>
-            <a:off x="6080760" y="2726055"/>
-            <a:ext cx="4750307" cy="1280160"/>
+            <a:off x="6355080" y="3611880"/>
+            <a:ext cx="4754880" cy="1280160"/>
           </a:xfrm>
           <a:prstGeom prst="rect">
             <a:avLst/>
@@ -7592,7 +8532,7 @@
                 </a:solidFill>
                 <a:latin typeface="Montserrat"/>
               </a:rPr>
-              <a:t>IMAGEN REALISTA</a:t>
+              <a:t>IMAGEN</a:t>
             </a:r>
           </a:p>
           <a:p>
@@ -7604,7 +8544,7 @@
                 </a:solidFill>
                 <a:latin typeface="Montserrat"/>
               </a:rPr>
-              <a:t>gas pressure test point gauge measure</a:t>
+              <a:t>domestic gas meter diaphragm cabinet</a:t>
             </a:r>
           </a:p>
         </p:txBody>
@@ -7614,6 +8554,18 @@
   <p:clrMapOvr>
     <a:masterClrMapping/>
   </p:clrMapOvr>
+  <mc:AlternateContent xmlns:mc="http://schemas.openxmlformats.org/markup-compatibility/2006">
+    <mc:Choice xmlns:p14="http://schemas.microsoft.com/office/powerpoint/2010/main" Requires="p14">
+      <p:transition spd="med" p14:dur="700">
+        <p14:cube dir="l"/>
+      </p:transition>
+    </mc:Choice>
+    <mc:Fallback>
+      <p:transition spd="med">
+        <p:push dir="l"/>
+      </p:transition>
+    </mc:Fallback>
+  </mc:AlternateContent>
 </p:sld>
 </file>
 
@@ -7642,7 +8594,7 @@
             <a:avLst/>
           </a:prstGeom>
           <a:solidFill>
-            <a:srgbClr val="1E2761"/>
+            <a:srgbClr val="FFFFFF"/>
           </a:solidFill>
           <a:ln>
             <a:noFill/>
@@ -7679,8 +8631,8 @@
         </p:nvSpPr>
         <p:spPr>
           <a:xfrm>
-            <a:off x="822960" y="640080"/>
-            <a:ext cx="10515600" cy="457200"/>
+            <a:off x="10607040" y="320040"/>
+            <a:ext cx="1371600" cy="365760"/>
           </a:xfrm>
           <a:prstGeom prst="rect">
             <a:avLst/>
@@ -7693,30 +8645,133 @@
           </a:bodyPr>
           <a:lstStyle/>
           <a:p>
-            <a:r>
-              <a:rPr sz="1400" b="1" i="0">
-                <a:solidFill>
-                  <a:srgbClr val="F4A24C"/>
-                </a:solidFill>
-                <a:latin typeface="Montserrat"/>
-              </a:rPr>
-              <a:t>LO QUE YA DOMINAS</a:t>
-            </a:r>
-          </a:p>
-        </p:txBody>
-      </p:sp>
-      <p:sp>
-        <p:nvSpPr>
-          <p:cNvPr id="4" name="Rounded Rectangle 3"/>
+            <a:pPr algn="r"/>
+            <a:r>
+              <a:rPr sz="1000" b="1" i="0">
+                <a:solidFill>
+                  <a:srgbClr val="64748B"/>
+                </a:solidFill>
+                <a:latin typeface="Montserrat"/>
+              </a:rPr>
+              <a:t>016 / 023</a:t>
+            </a:r>
+          </a:p>
+        </p:txBody>
+      </p:sp>
+      <p:sp>
+        <p:nvSpPr>
+          <p:cNvPr id="4" name="TextBox 3"/>
+          <p:cNvSpPr txBox="1"/>
+          <p:nvPr/>
+        </p:nvSpPr>
+        <p:spPr>
+          <a:xfrm>
+            <a:off x="457200" y="6419088"/>
+            <a:ext cx="8229600" cy="365760"/>
+          </a:xfrm>
+          <a:prstGeom prst="rect">
+            <a:avLst/>
+          </a:prstGeom>
+          <a:noFill/>
+        </p:spPr>
+        <p:txBody>
+          <a:bodyPr wrap="square">
+            <a:spAutoFit/>
+          </a:bodyPr>
+          <a:lstStyle/>
+          <a:p>
+            <a:r>
+              <a:rPr sz="900" b="0" i="0">
+                <a:solidFill>
+                  <a:srgbClr val="64748B"/>
+                </a:solidFill>
+                <a:latin typeface="Montserrat"/>
+              </a:rPr>
+              <a:t>Curso Gas B · Tema 10 · UNE 60670-3</a:t>
+            </a:r>
+          </a:p>
+        </p:txBody>
+      </p:sp>
+      <p:sp>
+        <p:nvSpPr>
+          <p:cNvPr id="5" name="TextBox 4"/>
+          <p:cNvSpPr txBox="1"/>
+          <p:nvPr/>
+        </p:nvSpPr>
+        <p:spPr>
+          <a:xfrm>
+            <a:off x="822960" y="457200"/>
+            <a:ext cx="10058400" cy="365760"/>
+          </a:xfrm>
+          <a:prstGeom prst="rect">
+            <a:avLst/>
+          </a:prstGeom>
+          <a:noFill/>
+        </p:spPr>
+        <p:txBody>
+          <a:bodyPr wrap="square">
+            <a:spAutoFit/>
+          </a:bodyPr>
+          <a:lstStyle/>
+          <a:p>
+            <a:r>
+              <a:rPr sz="1300" b="1" i="0">
+                <a:solidFill>
+                  <a:srgbClr val="E8801A"/>
+                </a:solidFill>
+                <a:latin typeface="Montserrat"/>
+              </a:rPr>
+              <a:t>ELEMENTOS · CONTADORES</a:t>
+            </a:r>
+          </a:p>
+        </p:txBody>
+      </p:sp>
+      <p:sp>
+        <p:nvSpPr>
+          <p:cNvPr id="6" name="TextBox 5"/>
+          <p:cNvSpPr txBox="1"/>
+          <p:nvPr/>
+        </p:nvSpPr>
+        <p:spPr>
+          <a:xfrm>
+            <a:off x="822960" y="868680"/>
+            <a:ext cx="10515600" cy="914400"/>
+          </a:xfrm>
+          <a:prstGeom prst="rect">
+            <a:avLst/>
+          </a:prstGeom>
+          <a:noFill/>
+        </p:spPr>
+        <p:txBody>
+          <a:bodyPr wrap="square">
+            <a:spAutoFit/>
+          </a:bodyPr>
+          <a:lstStyle/>
+          <a:p>
+            <a:r>
+              <a:rPr sz="2800" b="1" i="0">
+                <a:solidFill>
+                  <a:srgbClr val="1E2761"/>
+                </a:solidFill>
+                <a:latin typeface="Montserrat"/>
+              </a:rPr>
+              <a:t>Soportes y centralización</a:t>
+            </a:r>
+          </a:p>
+        </p:txBody>
+      </p:sp>
+      <p:sp>
+        <p:nvSpPr>
+          <p:cNvPr id="7" name="Rectangle 6"/>
           <p:cNvSpPr/>
           <p:nvPr/>
         </p:nvSpPr>
         <p:spPr>
           <a:xfrm>
-            <a:off x="868680" y="1051560"/>
-            <a:ext cx="1463040" cy="82296"/>
-          </a:xfrm>
-          <a:prstGeom prst="roundRect">
+            <a:off x="868680" y="1627632"/>
+            <a:ext cx="2011680" cy="73152"/>
+          </a:xfrm>
+          <a:prstGeom prst="rect">
             <a:avLst/>
           </a:prstGeom>
           <a:solidFill>
@@ -7751,14 +8806,14 @@
       </p:sp>
       <p:sp>
         <p:nvSpPr>
-          <p:cNvPr id="5" name="TextBox 4"/>
+          <p:cNvPr id="8" name="TextBox 7"/>
           <p:cNvSpPr txBox="1"/>
           <p:nvPr/>
         </p:nvSpPr>
         <p:spPr>
           <a:xfrm>
-            <a:off x="822960" y="1234440"/>
-            <a:ext cx="10515600" cy="1097280"/>
+            <a:off x="6355080" y="1965960"/>
+            <a:ext cx="5029200" cy="4206240"/>
           </a:xfrm>
           <a:prstGeom prst="rect">
             <a:avLst/>
@@ -7771,28 +8826,163 @@
           </a:bodyPr>
           <a:lstStyle/>
           <a:p>
-            <a:r>
-              <a:rPr sz="3400" b="1" i="0">
-                <a:solidFill>
-                  <a:srgbClr val="FFFFFF"/>
-                </a:solidFill>
-                <a:latin typeface="Montserrat"/>
-              </a:rPr>
-              <a:t>Ya conoces cada pieza del gas</a:t>
-            </a:r>
-          </a:p>
-        </p:txBody>
-      </p:sp>
-      <p:sp>
-        <p:nvSpPr>
-          <p:cNvPr id="6" name="TextBox 5"/>
+            <a:pPr>
+              <a:spcAft>
+                <a:spcPts val="1100"/>
+              </a:spcAft>
+            </a:pPr>
+            <a:r>
+              <a:rPr sz="1600" b="1" i="0">
+                <a:solidFill>
+                  <a:srgbClr val="E8801A"/>
+                </a:solidFill>
+                <a:latin typeface="Montserrat"/>
+              </a:rPr>
+              <a:t>▸  </a:t>
+            </a:r>
+            <a:r>
+              <a:rPr sz="1600" b="0" i="0">
+                <a:solidFill>
+                  <a:srgbClr val="1B2330"/>
+                </a:solidFill>
+                <a:latin typeface="Montserrat"/>
+              </a:rPr>
+              <a:t>Soporte interior → UNE 60495-1</a:t>
+            </a:r>
+          </a:p>
+          <a:p>
+            <a:pPr>
+              <a:spcAft>
+                <a:spcPts val="1100"/>
+              </a:spcAft>
+            </a:pPr>
+            <a:r>
+              <a:rPr sz="1600" b="1" i="0">
+                <a:solidFill>
+                  <a:srgbClr val="E8801A"/>
+                </a:solidFill>
+                <a:latin typeface="Montserrat"/>
+              </a:rPr>
+              <a:t>▸  </a:t>
+            </a:r>
+            <a:r>
+              <a:rPr sz="1600" b="0" i="0">
+                <a:solidFill>
+                  <a:srgbClr val="1B2330"/>
+                </a:solidFill>
+                <a:latin typeface="Montserrat"/>
+              </a:rPr>
+              <a:t>Soporte a la intemperie → UNE 60495-2</a:t>
+            </a:r>
+          </a:p>
+          <a:p>
+            <a:pPr>
+              <a:spcAft>
+                <a:spcPts val="1100"/>
+              </a:spcAft>
+            </a:pPr>
+            <a:r>
+              <a:rPr sz="1600" b="1" i="0">
+                <a:solidFill>
+                  <a:srgbClr val="E8801A"/>
+                </a:solidFill>
+                <a:latin typeface="Montserrat"/>
+              </a:rPr>
+              <a:t>▸  </a:t>
+            </a:r>
+            <a:r>
+              <a:rPr sz="1600" b="0" i="0">
+                <a:solidFill>
+                  <a:srgbClr val="1B2330"/>
+                </a:solidFill>
+                <a:latin typeface="Montserrat"/>
+              </a:rPr>
+              <a:t>Batería de contadores → UNE 60490</a:t>
+            </a:r>
+          </a:p>
+          <a:p>
+            <a:pPr>
+              <a:spcAft>
+                <a:spcPts val="1100"/>
+              </a:spcAft>
+            </a:pPr>
+            <a:r>
+              <a:rPr sz="1600" b="1" i="0">
+                <a:solidFill>
+                  <a:srgbClr val="E8801A"/>
+                </a:solidFill>
+                <a:latin typeface="Montserrat"/>
+              </a:rPr>
+              <a:t>▸  </a:t>
+            </a:r>
+            <a:r>
+              <a:rPr sz="1600" b="0" i="0">
+                <a:solidFill>
+                  <a:srgbClr val="1B2330"/>
+                </a:solidFill>
+                <a:latin typeface="Montserrat"/>
+              </a:rPr>
+              <a:t>Prefabricada o montada: misma norma</a:t>
+            </a:r>
+          </a:p>
+        </p:txBody>
+      </p:sp>
+      <p:sp>
+        <p:nvSpPr>
+          <p:cNvPr id="9" name="imgph" descr="IMGQ:gas meter battery cabinet building"/>
+          <p:cNvSpPr/>
+          <p:nvPr/>
+        </p:nvSpPr>
+        <p:spPr>
+          <a:xfrm>
+            <a:off x="822960" y="1965960"/>
+            <a:ext cx="5303520" cy="4572000"/>
+          </a:xfrm>
+          <a:prstGeom prst="roundRect">
+            <a:avLst/>
+          </a:prstGeom>
+          <a:solidFill>
+            <a:srgbClr val="F3F6FB"/>
+          </a:solidFill>
+          <a:ln w="12700">
+            <a:solidFill>
+              <a:srgbClr val="C7D2E6"/>
+            </a:solidFill>
+          </a:ln>
+          <a:effectLst/>
+        </p:spPr>
+        <p:style>
+          <a:lnRef idx="1">
+            <a:schemeClr val="accent1"/>
+          </a:lnRef>
+          <a:fillRef idx="3">
+            <a:schemeClr val="accent1"/>
+          </a:fillRef>
+          <a:effectRef idx="2">
+            <a:schemeClr val="accent1"/>
+          </a:effectRef>
+          <a:fontRef idx="minor">
+            <a:schemeClr val="lt1"/>
+          </a:fontRef>
+        </p:style>
+        <p:txBody>
+          <a:bodyPr rtlCol="0" anchor="ctr"/>
+          <a:lstStyle/>
+          <a:p>
+            <a:pPr algn="ctr"/>
+          </a:p>
+        </p:txBody>
+      </p:sp>
+      <p:sp>
+        <p:nvSpPr>
+          <p:cNvPr id="10" name="TextBox 9"/>
           <p:cNvSpPr txBox="1"/>
           <p:nvPr/>
         </p:nvSpPr>
         <p:spPr>
           <a:xfrm>
-            <a:off x="822960" y="2606040"/>
-            <a:ext cx="10515600" cy="2743200"/>
+            <a:off x="1097280" y="3611880"/>
+            <a:ext cx="4754880" cy="1280160"/>
           </a:xfrm>
           <a:prstGeom prst="rect">
             <a:avLst/>
@@ -7805,119 +8995,254 @@
           </a:bodyPr>
           <a:lstStyle/>
           <a:p>
-            <a:pPr>
-              <a:spcAft>
-                <a:spcPts val="1200"/>
-              </a:spcAft>
-            </a:pPr>
-            <a:r>
-              <a:rPr sz="2000" b="1" i="0">
-                <a:solidFill>
-                  <a:srgbClr val="F4A24C"/>
-                </a:solidFill>
-                <a:latin typeface="Montserrat"/>
-              </a:rPr>
-              <a:t>✓  </a:t>
-            </a:r>
-            <a:r>
-              <a:rPr sz="1900" b="0" i="0">
-                <a:solidFill>
-                  <a:srgbClr val="FFFFFF"/>
-                </a:solidFill>
-                <a:latin typeface="Montserrat"/>
-              </a:rPr>
-              <a:t>Escalera 5 – 2 – 0,4 – 0,15 – 0,05 bar</a:t>
-            </a:r>
-          </a:p>
-          <a:p>
-            <a:pPr>
-              <a:spcAft>
-                <a:spcPts val="1200"/>
-              </a:spcAft>
-            </a:pPr>
-            <a:r>
-              <a:rPr sz="2000" b="1" i="0">
-                <a:solidFill>
-                  <a:srgbClr val="F4A24C"/>
-                </a:solidFill>
-                <a:latin typeface="Montserrat"/>
-              </a:rPr>
-              <a:t>✓  </a:t>
-            </a:r>
-            <a:r>
-              <a:rPr sz="1900" b="0" i="0">
-                <a:solidFill>
-                  <a:srgbClr val="FFFFFF"/>
-                </a:solidFill>
-                <a:latin typeface="Montserrat"/>
-              </a:rPr>
-              <a:t>Reguladores por escalón; GLP en los 15 kg</a:t>
-            </a:r>
-          </a:p>
-          <a:p>
-            <a:pPr>
-              <a:spcAft>
-                <a:spcPts val="1200"/>
-              </a:spcAft>
-            </a:pPr>
-            <a:r>
-              <a:rPr sz="2000" b="1" i="0">
-                <a:solidFill>
-                  <a:srgbClr val="F4A24C"/>
-                </a:solidFill>
-                <a:latin typeface="Montserrat"/>
-              </a:rPr>
-              <a:t>✓  </a:t>
-            </a:r>
-            <a:r>
-              <a:rPr sz="1900" b="0" i="0">
-                <a:solidFill>
-                  <a:srgbClr val="FFFFFF"/>
-                </a:solidFill>
-                <a:latin typeface="Montserrat"/>
-              </a:rPr>
-              <a:t>Dos guardianes: mínima y máxima</a:t>
-            </a:r>
-          </a:p>
-          <a:p>
-            <a:pPr>
-              <a:spcAft>
-                <a:spcPts val="1200"/>
-              </a:spcAft>
-            </a:pPr>
-            <a:r>
-              <a:rPr sz="2000" b="1" i="0">
-                <a:solidFill>
-                  <a:srgbClr val="F4A24C"/>
-                </a:solidFill>
-                <a:latin typeface="Montserrat"/>
-              </a:rPr>
-              <a:t>✓  </a:t>
-            </a:r>
-            <a:r>
-              <a:rPr sz="1900" b="0" i="0">
-                <a:solidFill>
-                  <a:srgbClr val="FFFFFF"/>
-                </a:solidFill>
-                <a:latin typeface="Montserrat"/>
-              </a:rPr>
-              <a:t>Contador: flexible de 0,80 m como mucho</a:t>
-            </a:r>
-          </a:p>
-        </p:txBody>
-      </p:sp>
-      <p:sp>
-        <p:nvSpPr>
-          <p:cNvPr id="7" name="Rounded Rectangle 6"/>
+            <a:pPr algn="ctr"/>
+            <a:r>
+              <a:rPr sz="1400" b="1" i="0">
+                <a:solidFill>
+                  <a:srgbClr val="64748B"/>
+                </a:solidFill>
+                <a:latin typeface="Montserrat"/>
+              </a:rPr>
+              <a:t>IMAGEN</a:t>
+            </a:r>
+          </a:p>
+          <a:p>
+            <a:pPr algn="ctr"/>
+            <a:r>
+              <a:rPr sz="1100" b="0" i="1">
+                <a:solidFill>
+                  <a:srgbClr val="64748B"/>
+                </a:solidFill>
+                <a:latin typeface="Montserrat"/>
+              </a:rPr>
+              <a:t>gas meter battery cabinet building</a:t>
+            </a:r>
+          </a:p>
+        </p:txBody>
+      </p:sp>
+    </p:spTree>
+  </p:cSld>
+  <p:clrMapOvr>
+    <a:masterClrMapping/>
+  </p:clrMapOvr>
+  <mc:AlternateContent xmlns:mc="http://schemas.openxmlformats.org/markup-compatibility/2006">
+    <mc:Choice xmlns:p14="http://schemas.microsoft.com/office/powerpoint/2010/main" Requires="p14">
+      <p:transition spd="med" p14:dur="700">
+        <p14:cube dir="r"/>
+      </p:transition>
+    </mc:Choice>
+    <mc:Fallback>
+      <p:transition spd="med">
+        <p:push dir="r"/>
+      </p:transition>
+    </mc:Fallback>
+  </mc:AlternateContent>
+</p:sld>
+</file>
+
+<file path=ppt/slides/slide17.xml><?xml version="1.0" encoding="utf-8"?>
+<p:sld xmlns:a="http://schemas.openxmlformats.org/drawingml/2006/main" xmlns:p="http://schemas.openxmlformats.org/presentationml/2006/main" xmlns:r="http://schemas.openxmlformats.org/officeDocument/2006/relationships">
+  <p:cSld>
+    <p:spTree>
+      <p:nvGrpSpPr>
+        <p:cNvPr id="1" name=""/>
+        <p:cNvGrpSpPr/>
+        <p:nvPr/>
+      </p:nvGrpSpPr>
+      <p:grpSpPr/>
+      <p:sp>
+        <p:nvSpPr>
+          <p:cNvPr id="2" name="Rectangle 1"/>
           <p:cNvSpPr/>
           <p:nvPr/>
         </p:nvSpPr>
         <p:spPr>
           <a:xfrm>
-            <a:off x="822960" y="5532120"/>
-            <a:ext cx="10515600" cy="822960"/>
-          </a:xfrm>
-          <a:prstGeom prst="roundRect">
+            <a:off x="0" y="0"/>
+            <a:ext cx="12191695" cy="6858000"/>
+          </a:xfrm>
+          <a:prstGeom prst="rect">
+            <a:avLst/>
+          </a:prstGeom>
+          <a:solidFill>
+            <a:srgbClr val="FFFFFF"/>
+          </a:solidFill>
+          <a:ln>
+            <a:noFill/>
+          </a:ln>
+          <a:effectLst/>
+        </p:spPr>
+        <p:style>
+          <a:lnRef idx="1">
+            <a:schemeClr val="accent1"/>
+          </a:lnRef>
+          <a:fillRef idx="3">
+            <a:schemeClr val="accent1"/>
+          </a:fillRef>
+          <a:effectRef idx="2">
+            <a:schemeClr val="accent1"/>
+          </a:effectRef>
+          <a:fontRef idx="minor">
+            <a:schemeClr val="lt1"/>
+          </a:fontRef>
+        </p:style>
+        <p:txBody>
+          <a:bodyPr rtlCol="0" anchor="ctr"/>
+          <a:lstStyle/>
+          <a:p>
+            <a:pPr algn="ctr"/>
+          </a:p>
+        </p:txBody>
+      </p:sp>
+      <p:sp>
+        <p:nvSpPr>
+          <p:cNvPr id="3" name="TextBox 2"/>
+          <p:cNvSpPr txBox="1"/>
+          <p:nvPr/>
+        </p:nvSpPr>
+        <p:spPr>
+          <a:xfrm>
+            <a:off x="10607040" y="320040"/>
+            <a:ext cx="1371600" cy="365760"/>
+          </a:xfrm>
+          <a:prstGeom prst="rect">
+            <a:avLst/>
+          </a:prstGeom>
+          <a:noFill/>
+        </p:spPr>
+        <p:txBody>
+          <a:bodyPr wrap="square">
+            <a:spAutoFit/>
+          </a:bodyPr>
+          <a:lstStyle/>
+          <a:p>
+            <a:pPr algn="r"/>
+            <a:r>
+              <a:rPr sz="1000" b="1" i="0">
+                <a:solidFill>
+                  <a:srgbClr val="64748B"/>
+                </a:solidFill>
+                <a:latin typeface="Montserrat"/>
+              </a:rPr>
+              <a:t>017 / 023</a:t>
+            </a:r>
+          </a:p>
+        </p:txBody>
+      </p:sp>
+      <p:sp>
+        <p:nvSpPr>
+          <p:cNvPr id="4" name="TextBox 3"/>
+          <p:cNvSpPr txBox="1"/>
+          <p:nvPr/>
+        </p:nvSpPr>
+        <p:spPr>
+          <a:xfrm>
+            <a:off x="457200" y="6419088"/>
+            <a:ext cx="8229600" cy="365760"/>
+          </a:xfrm>
+          <a:prstGeom prst="rect">
+            <a:avLst/>
+          </a:prstGeom>
+          <a:noFill/>
+        </p:spPr>
+        <p:txBody>
+          <a:bodyPr wrap="square">
+            <a:spAutoFit/>
+          </a:bodyPr>
+          <a:lstStyle/>
+          <a:p>
+            <a:r>
+              <a:rPr sz="900" b="0" i="0">
+                <a:solidFill>
+                  <a:srgbClr val="64748B"/>
+                </a:solidFill>
+                <a:latin typeface="Montserrat"/>
+              </a:rPr>
+              <a:t>Curso Gas B · Tema 10 · UNE 60670-3</a:t>
+            </a:r>
+          </a:p>
+        </p:txBody>
+      </p:sp>
+      <p:sp>
+        <p:nvSpPr>
+          <p:cNvPr id="5" name="TextBox 4"/>
+          <p:cNvSpPr txBox="1"/>
+          <p:nvPr/>
+        </p:nvSpPr>
+        <p:spPr>
+          <a:xfrm>
+            <a:off x="822960" y="457200"/>
+            <a:ext cx="10058400" cy="365760"/>
+          </a:xfrm>
+          <a:prstGeom prst="rect">
+            <a:avLst/>
+          </a:prstGeom>
+          <a:noFill/>
+        </p:spPr>
+        <p:txBody>
+          <a:bodyPr wrap="square">
+            <a:spAutoFit/>
+          </a:bodyPr>
+          <a:lstStyle/>
+          <a:p>
+            <a:r>
+              <a:rPr sz="1300" b="1" i="0">
+                <a:solidFill>
+                  <a:srgbClr val="E8801A"/>
+                </a:solidFill>
+                <a:latin typeface="Montserrat"/>
+              </a:rPr>
+              <a:t>ELEMENTOS · LLAVES DE CORTE</a:t>
+            </a:r>
+          </a:p>
+        </p:txBody>
+      </p:sp>
+      <p:sp>
+        <p:nvSpPr>
+          <p:cNvPr id="6" name="TextBox 5"/>
+          <p:cNvSpPr txBox="1"/>
+          <p:nvPr/>
+        </p:nvSpPr>
+        <p:spPr>
+          <a:xfrm>
+            <a:off x="822960" y="868680"/>
+            <a:ext cx="10515600" cy="914400"/>
+          </a:xfrm>
+          <a:prstGeom prst="rect">
+            <a:avLst/>
+          </a:prstGeom>
+          <a:noFill/>
+        </p:spPr>
+        <p:txBody>
+          <a:bodyPr wrap="square">
+            <a:spAutoFit/>
+          </a:bodyPr>
+          <a:lstStyle/>
+          <a:p>
+            <a:r>
+              <a:rPr sz="2800" b="1" i="0">
+                <a:solidFill>
+                  <a:srgbClr val="1E2761"/>
+                </a:solidFill>
+                <a:latin typeface="Montserrat"/>
+              </a:rPr>
+              <a:t>Llaves: cerrar con seguridad</a:t>
+            </a:r>
+          </a:p>
+        </p:txBody>
+      </p:sp>
+      <p:sp>
+        <p:nvSpPr>
+          <p:cNvPr id="7" name="Rectangle 6"/>
+          <p:cNvSpPr/>
+          <p:nvPr/>
+        </p:nvSpPr>
+        <p:spPr>
+          <a:xfrm>
+            <a:off x="868680" y="1627632"/>
+            <a:ext cx="2011680" cy="73152"/>
+          </a:xfrm>
+          <a:prstGeom prst="rect">
             <a:avLst/>
           </a:prstGeom>
           <a:solidFill>
@@ -7958,8 +9283,8 @@
         </p:nvSpPr>
         <p:spPr>
           <a:xfrm>
-            <a:off x="1051560" y="5623560"/>
-            <a:ext cx="10058400" cy="640080"/>
+            <a:off x="822960" y="1965960"/>
+            <a:ext cx="5029200" cy="4206240"/>
           </a:xfrm>
           <a:prstGeom prst="rect">
             <a:avLst/>
@@ -7972,14 +9297,196 @@
           </a:bodyPr>
           <a:lstStyle/>
           <a:p>
-            <a:r>
-              <a:rPr sz="1500" b="1" i="1">
-                <a:solidFill>
-                  <a:srgbClr val="1E2761"/>
-                </a:solidFill>
-                <a:latin typeface="Montserrat"/>
-              </a:rPr>
-              <a:t>Con los elementos dominados, solo falta lo que los mantiene sin fugas: las uniones.</a:t>
+            <a:pPr>
+              <a:spcAft>
+                <a:spcPts val="1100"/>
+              </a:spcAft>
+            </a:pPr>
+            <a:r>
+              <a:rPr sz="1600" b="1" i="0">
+                <a:solidFill>
+                  <a:srgbClr val="E8801A"/>
+                </a:solidFill>
+                <a:latin typeface="Montserrat"/>
+              </a:rPr>
+              <a:t>▸  </a:t>
+            </a:r>
+            <a:r>
+              <a:rPr sz="1600" b="0" i="0">
+                <a:solidFill>
+                  <a:srgbClr val="1B2330"/>
+                </a:solidFill>
+                <a:latin typeface="Montserrat"/>
+              </a:rPr>
+              <a:t>No enterrables → UNE-EN 331</a:t>
+            </a:r>
+          </a:p>
+          <a:p>
+            <a:pPr>
+              <a:spcAft>
+                <a:spcPts val="1100"/>
+              </a:spcAft>
+            </a:pPr>
+            <a:r>
+              <a:rPr sz="1600" b="1" i="0">
+                <a:solidFill>
+                  <a:srgbClr val="E8801A"/>
+                </a:solidFill>
+                <a:latin typeface="Montserrat"/>
+              </a:rPr>
+              <a:t>▸  </a:t>
+            </a:r>
+            <a:r>
+              <a:rPr sz="1600" b="0" i="0">
+                <a:solidFill>
+                  <a:srgbClr val="1B2330"/>
+                </a:solidFill>
+                <a:latin typeface="Montserrat"/>
+              </a:rPr>
+              <a:t>DN ≤ 100: clase de temperatura −20 °C</a:t>
+            </a:r>
+          </a:p>
+          <a:p>
+            <a:pPr>
+              <a:spcAft>
+                <a:spcPts val="1100"/>
+              </a:spcAft>
+            </a:pPr>
+            <a:r>
+              <a:rPr sz="1600" b="1" i="0">
+                <a:solidFill>
+                  <a:srgbClr val="E8801A"/>
+                </a:solidFill>
+                <a:latin typeface="Montserrat"/>
+              </a:rPr>
+              <a:t>▸  </a:t>
+            </a:r>
+            <a:r>
+              <a:rPr sz="1600" b="0" i="0">
+                <a:solidFill>
+                  <a:srgbClr val="1B2330"/>
+                </a:solidFill>
+                <a:latin typeface="Montserrat"/>
+              </a:rPr>
+              <a:t>Bloqueables y precintables en 'cerrado'</a:t>
+            </a:r>
+          </a:p>
+          <a:p>
+            <a:pPr>
+              <a:spcAft>
+                <a:spcPts val="1100"/>
+              </a:spcAft>
+            </a:pPr>
+            <a:r>
+              <a:rPr sz="1600" b="1" i="0">
+                <a:solidFill>
+                  <a:srgbClr val="E8801A"/>
+                </a:solidFill>
+                <a:latin typeface="Montserrat"/>
+              </a:rPr>
+              <a:t>▸  </a:t>
+            </a:r>
+            <a:r>
+              <a:rPr sz="1600" b="0" i="0">
+                <a:solidFill>
+                  <a:srgbClr val="1B2330"/>
+                </a:solidFill>
+                <a:latin typeface="Montserrat"/>
+              </a:rPr>
+              <a:t>Enterrables: PE UNE-EN 1555-4 / metal UNE-EN 13774</a:t>
+            </a:r>
+          </a:p>
+        </p:txBody>
+      </p:sp>
+      <p:sp>
+        <p:nvSpPr>
+          <p:cNvPr id="9" name="imgph" descr="IMGQ:gas ball valve shut off yellow"/>
+          <p:cNvSpPr/>
+          <p:nvPr/>
+        </p:nvSpPr>
+        <p:spPr>
+          <a:xfrm>
+            <a:off x="6080760" y="1965960"/>
+            <a:ext cx="5303520" cy="4572000"/>
+          </a:xfrm>
+          <a:prstGeom prst="roundRect">
+            <a:avLst/>
+          </a:prstGeom>
+          <a:solidFill>
+            <a:srgbClr val="F3F6FB"/>
+          </a:solidFill>
+          <a:ln w="12700">
+            <a:solidFill>
+              <a:srgbClr val="C7D2E6"/>
+            </a:solidFill>
+          </a:ln>
+          <a:effectLst/>
+        </p:spPr>
+        <p:style>
+          <a:lnRef idx="1">
+            <a:schemeClr val="accent1"/>
+          </a:lnRef>
+          <a:fillRef idx="3">
+            <a:schemeClr val="accent1"/>
+          </a:fillRef>
+          <a:effectRef idx="2">
+            <a:schemeClr val="accent1"/>
+          </a:effectRef>
+          <a:fontRef idx="minor">
+            <a:schemeClr val="lt1"/>
+          </a:fontRef>
+        </p:style>
+        <p:txBody>
+          <a:bodyPr rtlCol="0" anchor="ctr"/>
+          <a:lstStyle/>
+          <a:p>
+            <a:pPr algn="ctr"/>
+          </a:p>
+        </p:txBody>
+      </p:sp>
+      <p:sp>
+        <p:nvSpPr>
+          <p:cNvPr id="10" name="TextBox 9"/>
+          <p:cNvSpPr txBox="1"/>
+          <p:nvPr/>
+        </p:nvSpPr>
+        <p:spPr>
+          <a:xfrm>
+            <a:off x="6355080" y="3611880"/>
+            <a:ext cx="4754880" cy="1280160"/>
+          </a:xfrm>
+          <a:prstGeom prst="rect">
+            <a:avLst/>
+          </a:prstGeom>
+          <a:noFill/>
+        </p:spPr>
+        <p:txBody>
+          <a:bodyPr wrap="square">
+            <a:spAutoFit/>
+          </a:bodyPr>
+          <a:lstStyle/>
+          <a:p>
+            <a:pPr algn="ctr"/>
+            <a:r>
+              <a:rPr sz="1400" b="1" i="0">
+                <a:solidFill>
+                  <a:srgbClr val="64748B"/>
+                </a:solidFill>
+                <a:latin typeface="Montserrat"/>
+              </a:rPr>
+              <a:t>IMAGEN</a:t>
+            </a:r>
+          </a:p>
+          <a:p>
+            <a:pPr algn="ctr"/>
+            <a:r>
+              <a:rPr sz="1100" b="0" i="1">
+                <a:solidFill>
+                  <a:srgbClr val="64748B"/>
+                </a:solidFill>
+                <a:latin typeface="Montserrat"/>
+              </a:rPr>
+              <a:t>gas ball valve shut off yellow</a:t>
             </a:r>
           </a:p>
         </p:txBody>
@@ -7989,6 +9496,960 @@
   <p:clrMapOvr>
     <a:masterClrMapping/>
   </p:clrMapOvr>
+  <mc:AlternateContent xmlns:mc="http://schemas.openxmlformats.org/markup-compatibility/2006">
+    <mc:Choice xmlns:p14="http://schemas.microsoft.com/office/powerpoint/2010/main" Requires="p14">
+      <p:transition spd="med" p14:dur="700">
+        <p14:cube dir="l"/>
+      </p:transition>
+    </mc:Choice>
+    <mc:Fallback>
+      <p:transition spd="med">
+        <p:push dir="l"/>
+      </p:transition>
+    </mc:Fallback>
+  </mc:AlternateContent>
+</p:sld>
+</file>
+
+<file path=ppt/slides/slide18.xml><?xml version="1.0" encoding="utf-8"?>
+<p:sld xmlns:a="http://schemas.openxmlformats.org/drawingml/2006/main" xmlns:p="http://schemas.openxmlformats.org/presentationml/2006/main" xmlns:r="http://schemas.openxmlformats.org/officeDocument/2006/relationships">
+  <p:cSld>
+    <p:spTree>
+      <p:nvGrpSpPr>
+        <p:cNvPr id="1" name=""/>
+        <p:cNvGrpSpPr/>
+        <p:nvPr/>
+      </p:nvGrpSpPr>
+      <p:grpSpPr/>
+      <p:sp>
+        <p:nvSpPr>
+          <p:cNvPr id="2" name="Rectangle 1"/>
+          <p:cNvSpPr/>
+          <p:nvPr/>
+        </p:nvSpPr>
+        <p:spPr>
+          <a:xfrm>
+            <a:off x="0" y="0"/>
+            <a:ext cx="12191695" cy="6858000"/>
+          </a:xfrm>
+          <a:prstGeom prst="rect">
+            <a:avLst/>
+          </a:prstGeom>
+          <a:solidFill>
+            <a:srgbClr val="FFFFFF"/>
+          </a:solidFill>
+          <a:ln>
+            <a:noFill/>
+          </a:ln>
+          <a:effectLst/>
+        </p:spPr>
+        <p:style>
+          <a:lnRef idx="1">
+            <a:schemeClr val="accent1"/>
+          </a:lnRef>
+          <a:fillRef idx="3">
+            <a:schemeClr val="accent1"/>
+          </a:fillRef>
+          <a:effectRef idx="2">
+            <a:schemeClr val="accent1"/>
+          </a:effectRef>
+          <a:fontRef idx="minor">
+            <a:schemeClr val="lt1"/>
+          </a:fontRef>
+        </p:style>
+        <p:txBody>
+          <a:bodyPr rtlCol="0" anchor="ctr"/>
+          <a:lstStyle/>
+          <a:p>
+            <a:pPr algn="ctr"/>
+          </a:p>
+        </p:txBody>
+      </p:sp>
+      <p:sp>
+        <p:nvSpPr>
+          <p:cNvPr id="3" name="TextBox 2"/>
+          <p:cNvSpPr txBox="1"/>
+          <p:nvPr/>
+        </p:nvSpPr>
+        <p:spPr>
+          <a:xfrm>
+            <a:off x="10607040" y="320040"/>
+            <a:ext cx="1371600" cy="365760"/>
+          </a:xfrm>
+          <a:prstGeom prst="rect">
+            <a:avLst/>
+          </a:prstGeom>
+          <a:noFill/>
+        </p:spPr>
+        <p:txBody>
+          <a:bodyPr wrap="square">
+            <a:spAutoFit/>
+          </a:bodyPr>
+          <a:lstStyle/>
+          <a:p>
+            <a:pPr algn="r"/>
+            <a:r>
+              <a:rPr sz="1000" b="1" i="0">
+                <a:solidFill>
+                  <a:srgbClr val="64748B"/>
+                </a:solidFill>
+                <a:latin typeface="Montserrat"/>
+              </a:rPr>
+              <a:t>018 / 023</a:t>
+            </a:r>
+          </a:p>
+        </p:txBody>
+      </p:sp>
+      <p:sp>
+        <p:nvSpPr>
+          <p:cNvPr id="4" name="TextBox 3"/>
+          <p:cNvSpPr txBox="1"/>
+          <p:nvPr/>
+        </p:nvSpPr>
+        <p:spPr>
+          <a:xfrm>
+            <a:off x="457200" y="6419088"/>
+            <a:ext cx="8229600" cy="365760"/>
+          </a:xfrm>
+          <a:prstGeom prst="rect">
+            <a:avLst/>
+          </a:prstGeom>
+          <a:noFill/>
+        </p:spPr>
+        <p:txBody>
+          <a:bodyPr wrap="square">
+            <a:spAutoFit/>
+          </a:bodyPr>
+          <a:lstStyle/>
+          <a:p>
+            <a:r>
+              <a:rPr sz="900" b="0" i="0">
+                <a:solidFill>
+                  <a:srgbClr val="64748B"/>
+                </a:solidFill>
+                <a:latin typeface="Montserrat"/>
+              </a:rPr>
+              <a:t>Curso Gas B · Tema 10 · UNE 60670-3</a:t>
+            </a:r>
+          </a:p>
+        </p:txBody>
+      </p:sp>
+      <p:sp>
+        <p:nvSpPr>
+          <p:cNvPr id="5" name="TextBox 4"/>
+          <p:cNvSpPr txBox="1"/>
+          <p:nvPr/>
+        </p:nvSpPr>
+        <p:spPr>
+          <a:xfrm>
+            <a:off x="822960" y="457200"/>
+            <a:ext cx="10058400" cy="365760"/>
+          </a:xfrm>
+          <a:prstGeom prst="rect">
+            <a:avLst/>
+          </a:prstGeom>
+          <a:noFill/>
+        </p:spPr>
+        <p:txBody>
+          <a:bodyPr wrap="square">
+            <a:spAutoFit/>
+          </a:bodyPr>
+          <a:lstStyle/>
+          <a:p>
+            <a:r>
+              <a:rPr sz="1300" b="1" i="0">
+                <a:solidFill>
+                  <a:srgbClr val="E8801A"/>
+                </a:solidFill>
+                <a:latin typeface="Montserrat"/>
+              </a:rPr>
+              <a:t>CONEXIONES · APARATOS Y GLP</a:t>
+            </a:r>
+          </a:p>
+        </p:txBody>
+      </p:sp>
+      <p:sp>
+        <p:nvSpPr>
+          <p:cNvPr id="6" name="TextBox 5"/>
+          <p:cNvSpPr txBox="1"/>
+          <p:nvPr/>
+        </p:nvSpPr>
+        <p:spPr>
+          <a:xfrm>
+            <a:off x="822960" y="868680"/>
+            <a:ext cx="10515600" cy="914400"/>
+          </a:xfrm>
+          <a:prstGeom prst="rect">
+            <a:avLst/>
+          </a:prstGeom>
+          <a:noFill/>
+        </p:spPr>
+        <p:txBody>
+          <a:bodyPr wrap="square">
+            <a:spAutoFit/>
+          </a:bodyPr>
+          <a:lstStyle/>
+          <a:p>
+            <a:r>
+              <a:rPr sz="2800" b="1" i="0">
+                <a:solidFill>
+                  <a:srgbClr val="1E2761"/>
+                </a:solidFill>
+                <a:latin typeface="Montserrat"/>
+              </a:rPr>
+              <a:t>Conectar aparatos y bombonas</a:t>
+            </a:r>
+          </a:p>
+        </p:txBody>
+      </p:sp>
+      <p:sp>
+        <p:nvSpPr>
+          <p:cNvPr id="7" name="Rectangle 6"/>
+          <p:cNvSpPr/>
+          <p:nvPr/>
+        </p:nvSpPr>
+        <p:spPr>
+          <a:xfrm>
+            <a:off x="868680" y="1627632"/>
+            <a:ext cx="2011680" cy="73152"/>
+          </a:xfrm>
+          <a:prstGeom prst="rect">
+            <a:avLst/>
+          </a:prstGeom>
+          <a:solidFill>
+            <a:srgbClr val="E8801A"/>
+          </a:solidFill>
+          <a:ln>
+            <a:noFill/>
+          </a:ln>
+          <a:effectLst/>
+        </p:spPr>
+        <p:style>
+          <a:lnRef idx="1">
+            <a:schemeClr val="accent1"/>
+          </a:lnRef>
+          <a:fillRef idx="3">
+            <a:schemeClr val="accent1"/>
+          </a:fillRef>
+          <a:effectRef idx="2">
+            <a:schemeClr val="accent1"/>
+          </a:effectRef>
+          <a:fontRef idx="minor">
+            <a:schemeClr val="lt1"/>
+          </a:fontRef>
+        </p:style>
+        <p:txBody>
+          <a:bodyPr rtlCol="0" anchor="ctr"/>
+          <a:lstStyle/>
+          <a:p>
+            <a:pPr algn="ctr"/>
+          </a:p>
+        </p:txBody>
+      </p:sp>
+      <p:sp>
+        <p:nvSpPr>
+          <p:cNvPr id="8" name="TextBox 7"/>
+          <p:cNvSpPr txBox="1"/>
+          <p:nvPr/>
+        </p:nvSpPr>
+        <p:spPr>
+          <a:xfrm>
+            <a:off x="6355080" y="1965960"/>
+            <a:ext cx="5029200" cy="4206240"/>
+          </a:xfrm>
+          <a:prstGeom prst="rect">
+            <a:avLst/>
+          </a:prstGeom>
+          <a:noFill/>
+        </p:spPr>
+        <p:txBody>
+          <a:bodyPr wrap="square">
+            <a:spAutoFit/>
+          </a:bodyPr>
+          <a:lstStyle/>
+          <a:p>
+            <a:pPr>
+              <a:spcAft>
+                <a:spcPts val="1100"/>
+              </a:spcAft>
+            </a:pPr>
+            <a:r>
+              <a:rPr sz="1600" b="1" i="0">
+                <a:solidFill>
+                  <a:srgbClr val="E8801A"/>
+                </a:solidFill>
+                <a:latin typeface="Montserrat"/>
+              </a:rPr>
+              <a:t>▸  </a:t>
+            </a:r>
+            <a:r>
+              <a:rPr sz="1600" b="0" i="0">
+                <a:solidFill>
+                  <a:srgbClr val="1B2330"/>
+                </a:solidFill>
+                <a:latin typeface="Montserrat"/>
+              </a:rPr>
+              <a:t>Aparatos: rígida o flexible (UNE 60670-7)</a:t>
+            </a:r>
+          </a:p>
+          <a:p>
+            <a:pPr>
+              <a:spcAft>
+                <a:spcPts val="1100"/>
+              </a:spcAft>
+            </a:pPr>
+            <a:r>
+              <a:rPr sz="1600" b="1" i="0">
+                <a:solidFill>
+                  <a:srgbClr val="E8801A"/>
+                </a:solidFill>
+                <a:latin typeface="Montserrat"/>
+              </a:rPr>
+              <a:t>▸  </a:t>
+            </a:r>
+            <a:r>
+              <a:rPr sz="1600" b="0" i="0">
+                <a:solidFill>
+                  <a:srgbClr val="1B2330"/>
+                </a:solidFill>
+                <a:latin typeface="Montserrat"/>
+              </a:rPr>
+              <a:t>Flexible de elastómero → UNE 53539</a:t>
+            </a:r>
+          </a:p>
+          <a:p>
+            <a:pPr>
+              <a:spcAft>
+                <a:spcPts val="1100"/>
+              </a:spcAft>
+            </a:pPr>
+            <a:r>
+              <a:rPr sz="1600" b="1" i="0">
+                <a:solidFill>
+                  <a:srgbClr val="E8801A"/>
+                </a:solidFill>
+                <a:latin typeface="Montserrat"/>
+              </a:rPr>
+              <a:t>▸  </a:t>
+            </a:r>
+            <a:r>
+              <a:rPr sz="1600" b="0" i="0">
+                <a:solidFill>
+                  <a:srgbClr val="1B2330"/>
+                </a:solidFill>
+                <a:latin typeface="Montserrat"/>
+              </a:rPr>
+              <a:t>Con armadura → UNE-EN 16436</a:t>
+            </a:r>
+          </a:p>
+          <a:p>
+            <a:pPr>
+              <a:spcAft>
+                <a:spcPts val="1100"/>
+              </a:spcAft>
+            </a:pPr>
+            <a:r>
+              <a:rPr sz="1600" b="1" i="0">
+                <a:solidFill>
+                  <a:srgbClr val="E8801A"/>
+                </a:solidFill>
+                <a:latin typeface="Montserrat"/>
+              </a:rPr>
+              <a:t>▸  </a:t>
+            </a:r>
+            <a:r>
+              <a:rPr sz="1600" b="0" i="0">
+                <a:solidFill>
+                  <a:srgbClr val="1B2330"/>
+                </a:solidFill>
+                <a:latin typeface="Montserrat"/>
+              </a:rPr>
+              <a:t>Metálico → UNE-EN 14800</a:t>
+            </a:r>
+          </a:p>
+        </p:txBody>
+      </p:sp>
+      <p:sp>
+        <p:nvSpPr>
+          <p:cNvPr id="9" name="imgph" descr="IMGQ:gas appliance flexible connection hose"/>
+          <p:cNvSpPr/>
+          <p:nvPr/>
+        </p:nvSpPr>
+        <p:spPr>
+          <a:xfrm>
+            <a:off x="822960" y="1965960"/>
+            <a:ext cx="5303520" cy="4572000"/>
+          </a:xfrm>
+          <a:prstGeom prst="roundRect">
+            <a:avLst/>
+          </a:prstGeom>
+          <a:solidFill>
+            <a:srgbClr val="F3F6FB"/>
+          </a:solidFill>
+          <a:ln w="12700">
+            <a:solidFill>
+              <a:srgbClr val="C7D2E6"/>
+            </a:solidFill>
+          </a:ln>
+          <a:effectLst/>
+        </p:spPr>
+        <p:style>
+          <a:lnRef idx="1">
+            <a:schemeClr val="accent1"/>
+          </a:lnRef>
+          <a:fillRef idx="3">
+            <a:schemeClr val="accent1"/>
+          </a:fillRef>
+          <a:effectRef idx="2">
+            <a:schemeClr val="accent1"/>
+          </a:effectRef>
+          <a:fontRef idx="minor">
+            <a:schemeClr val="lt1"/>
+          </a:fontRef>
+        </p:style>
+        <p:txBody>
+          <a:bodyPr rtlCol="0" anchor="ctr"/>
+          <a:lstStyle/>
+          <a:p>
+            <a:pPr algn="ctr"/>
+          </a:p>
+        </p:txBody>
+      </p:sp>
+      <p:sp>
+        <p:nvSpPr>
+          <p:cNvPr id="10" name="TextBox 9"/>
+          <p:cNvSpPr txBox="1"/>
+          <p:nvPr/>
+        </p:nvSpPr>
+        <p:spPr>
+          <a:xfrm>
+            <a:off x="1097280" y="3611880"/>
+            <a:ext cx="4754880" cy="1280160"/>
+          </a:xfrm>
+          <a:prstGeom prst="rect">
+            <a:avLst/>
+          </a:prstGeom>
+          <a:noFill/>
+        </p:spPr>
+        <p:txBody>
+          <a:bodyPr wrap="square">
+            <a:spAutoFit/>
+          </a:bodyPr>
+          <a:lstStyle/>
+          <a:p>
+            <a:pPr algn="ctr"/>
+            <a:r>
+              <a:rPr sz="1400" b="1" i="0">
+                <a:solidFill>
+                  <a:srgbClr val="64748B"/>
+                </a:solidFill>
+                <a:latin typeface="Montserrat"/>
+              </a:rPr>
+              <a:t>IMAGEN</a:t>
+            </a:r>
+          </a:p>
+          <a:p>
+            <a:pPr algn="ctr"/>
+            <a:r>
+              <a:rPr sz="1100" b="0" i="1">
+                <a:solidFill>
+                  <a:srgbClr val="64748B"/>
+                </a:solidFill>
+                <a:latin typeface="Montserrat"/>
+              </a:rPr>
+              <a:t>gas appliance flexible connection hose</a:t>
+            </a:r>
+          </a:p>
+        </p:txBody>
+      </p:sp>
+    </p:spTree>
+  </p:cSld>
+  <p:clrMapOvr>
+    <a:masterClrMapping/>
+  </p:clrMapOvr>
+  <mc:AlternateContent xmlns:mc="http://schemas.openxmlformats.org/markup-compatibility/2006">
+    <mc:Choice xmlns:p14="http://schemas.microsoft.com/office/powerpoint/2010/main" Requires="p14">
+      <p:transition spd="med" p14:dur="700">
+        <p14:cube dir="r"/>
+      </p:transition>
+    </mc:Choice>
+    <mc:Fallback>
+      <p:transition spd="med">
+        <p:push dir="r"/>
+      </p:transition>
+    </mc:Fallback>
+  </mc:AlternateContent>
+</p:sld>
+</file>
+
+<file path=ppt/slides/slide19.xml><?xml version="1.0" encoding="utf-8"?>
+<p:sld xmlns:a="http://schemas.openxmlformats.org/drawingml/2006/main" xmlns:p="http://schemas.openxmlformats.org/presentationml/2006/main" xmlns:r="http://schemas.openxmlformats.org/officeDocument/2006/relationships">
+  <p:cSld>
+    <p:spTree>
+      <p:nvGrpSpPr>
+        <p:cNvPr id="1" name=""/>
+        <p:cNvGrpSpPr/>
+        <p:nvPr/>
+      </p:nvGrpSpPr>
+      <p:grpSpPr/>
+      <p:sp>
+        <p:nvSpPr>
+          <p:cNvPr id="2" name="Rectangle 1"/>
+          <p:cNvSpPr/>
+          <p:nvPr/>
+        </p:nvSpPr>
+        <p:spPr>
+          <a:xfrm>
+            <a:off x="0" y="0"/>
+            <a:ext cx="12191695" cy="6858000"/>
+          </a:xfrm>
+          <a:prstGeom prst="rect">
+            <a:avLst/>
+          </a:prstGeom>
+          <a:solidFill>
+            <a:srgbClr val="FFFFFF"/>
+          </a:solidFill>
+          <a:ln>
+            <a:noFill/>
+          </a:ln>
+          <a:effectLst/>
+        </p:spPr>
+        <p:style>
+          <a:lnRef idx="1">
+            <a:schemeClr val="accent1"/>
+          </a:lnRef>
+          <a:fillRef idx="3">
+            <a:schemeClr val="accent1"/>
+          </a:fillRef>
+          <a:effectRef idx="2">
+            <a:schemeClr val="accent1"/>
+          </a:effectRef>
+          <a:fontRef idx="minor">
+            <a:schemeClr val="lt1"/>
+          </a:fontRef>
+        </p:style>
+        <p:txBody>
+          <a:bodyPr rtlCol="0" anchor="ctr"/>
+          <a:lstStyle/>
+          <a:p>
+            <a:pPr algn="ctr"/>
+          </a:p>
+        </p:txBody>
+      </p:sp>
+      <p:sp>
+        <p:nvSpPr>
+          <p:cNvPr id="3" name="TextBox 2"/>
+          <p:cNvSpPr txBox="1"/>
+          <p:nvPr/>
+        </p:nvSpPr>
+        <p:spPr>
+          <a:xfrm>
+            <a:off x="10607040" y="320040"/>
+            <a:ext cx="1371600" cy="365760"/>
+          </a:xfrm>
+          <a:prstGeom prst="rect">
+            <a:avLst/>
+          </a:prstGeom>
+          <a:noFill/>
+        </p:spPr>
+        <p:txBody>
+          <a:bodyPr wrap="square">
+            <a:spAutoFit/>
+          </a:bodyPr>
+          <a:lstStyle/>
+          <a:p>
+            <a:pPr algn="r"/>
+            <a:r>
+              <a:rPr sz="1000" b="1" i="0">
+                <a:solidFill>
+                  <a:srgbClr val="64748B"/>
+                </a:solidFill>
+                <a:latin typeface="Montserrat"/>
+              </a:rPr>
+              <a:t>019 / 023</a:t>
+            </a:r>
+          </a:p>
+        </p:txBody>
+      </p:sp>
+      <p:sp>
+        <p:nvSpPr>
+          <p:cNvPr id="4" name="TextBox 3"/>
+          <p:cNvSpPr txBox="1"/>
+          <p:nvPr/>
+        </p:nvSpPr>
+        <p:spPr>
+          <a:xfrm>
+            <a:off x="457200" y="6419088"/>
+            <a:ext cx="8229600" cy="365760"/>
+          </a:xfrm>
+          <a:prstGeom prst="rect">
+            <a:avLst/>
+          </a:prstGeom>
+          <a:noFill/>
+        </p:spPr>
+        <p:txBody>
+          <a:bodyPr wrap="square">
+            <a:spAutoFit/>
+          </a:bodyPr>
+          <a:lstStyle/>
+          <a:p>
+            <a:r>
+              <a:rPr sz="900" b="0" i="0">
+                <a:solidFill>
+                  <a:srgbClr val="64748B"/>
+                </a:solidFill>
+                <a:latin typeface="Montserrat"/>
+              </a:rPr>
+              <a:t>Curso Gas B · Tema 10 · UNE 60670-3</a:t>
+            </a:r>
+          </a:p>
+        </p:txBody>
+      </p:sp>
+      <p:sp>
+        <p:nvSpPr>
+          <p:cNvPr id="5" name="TextBox 4"/>
+          <p:cNvSpPr txBox="1"/>
+          <p:nvPr/>
+        </p:nvSpPr>
+        <p:spPr>
+          <a:xfrm>
+            <a:off x="822960" y="457200"/>
+            <a:ext cx="10058400" cy="365760"/>
+          </a:xfrm>
+          <a:prstGeom prst="rect">
+            <a:avLst/>
+          </a:prstGeom>
+          <a:noFill/>
+        </p:spPr>
+        <p:txBody>
+          <a:bodyPr wrap="square">
+            <a:spAutoFit/>
+          </a:bodyPr>
+          <a:lstStyle/>
+          <a:p>
+            <a:r>
+              <a:rPr sz="1300" b="1" i="0">
+                <a:solidFill>
+                  <a:srgbClr val="E8801A"/>
+                </a:solidFill>
+                <a:latin typeface="Montserrat"/>
+              </a:rPr>
+              <a:t>CONEXIONES · CONTADOR</a:t>
+            </a:r>
+          </a:p>
+        </p:txBody>
+      </p:sp>
+      <p:sp>
+        <p:nvSpPr>
+          <p:cNvPr id="6" name="TextBox 5"/>
+          <p:cNvSpPr txBox="1"/>
+          <p:nvPr/>
+        </p:nvSpPr>
+        <p:spPr>
+          <a:xfrm>
+            <a:off x="822960" y="868680"/>
+            <a:ext cx="10515600" cy="914400"/>
+          </a:xfrm>
+          <a:prstGeom prst="rect">
+            <a:avLst/>
+          </a:prstGeom>
+          <a:noFill/>
+        </p:spPr>
+        <p:txBody>
+          <a:bodyPr wrap="square">
+            <a:spAutoFit/>
+          </a:bodyPr>
+          <a:lstStyle/>
+          <a:p>
+            <a:r>
+              <a:rPr sz="2800" b="1" i="0">
+                <a:solidFill>
+                  <a:srgbClr val="1E2761"/>
+                </a:solidFill>
+                <a:latin typeface="Montserrat"/>
+              </a:rPr>
+              <a:t>El flexible del contador: 0,80 m</a:t>
+            </a:r>
+          </a:p>
+        </p:txBody>
+      </p:sp>
+      <p:sp>
+        <p:nvSpPr>
+          <p:cNvPr id="7" name="Rectangle 6"/>
+          <p:cNvSpPr/>
+          <p:nvPr/>
+        </p:nvSpPr>
+        <p:spPr>
+          <a:xfrm>
+            <a:off x="868680" y="1627632"/>
+            <a:ext cx="2011680" cy="73152"/>
+          </a:xfrm>
+          <a:prstGeom prst="rect">
+            <a:avLst/>
+          </a:prstGeom>
+          <a:solidFill>
+            <a:srgbClr val="E8801A"/>
+          </a:solidFill>
+          <a:ln>
+            <a:noFill/>
+          </a:ln>
+          <a:effectLst/>
+        </p:spPr>
+        <p:style>
+          <a:lnRef idx="1">
+            <a:schemeClr val="accent1"/>
+          </a:lnRef>
+          <a:fillRef idx="3">
+            <a:schemeClr val="accent1"/>
+          </a:fillRef>
+          <a:effectRef idx="2">
+            <a:schemeClr val="accent1"/>
+          </a:effectRef>
+          <a:fontRef idx="minor">
+            <a:schemeClr val="lt1"/>
+          </a:fontRef>
+        </p:style>
+        <p:txBody>
+          <a:bodyPr rtlCol="0" anchor="ctr"/>
+          <a:lstStyle/>
+          <a:p>
+            <a:pPr algn="ctr"/>
+          </a:p>
+        </p:txBody>
+      </p:sp>
+      <p:sp>
+        <p:nvSpPr>
+          <p:cNvPr id="8" name="TextBox 7"/>
+          <p:cNvSpPr txBox="1"/>
+          <p:nvPr/>
+        </p:nvSpPr>
+        <p:spPr>
+          <a:xfrm>
+            <a:off x="822960" y="1965960"/>
+            <a:ext cx="5029200" cy="4206240"/>
+          </a:xfrm>
+          <a:prstGeom prst="rect">
+            <a:avLst/>
+          </a:prstGeom>
+          <a:noFill/>
+        </p:spPr>
+        <p:txBody>
+          <a:bodyPr wrap="square">
+            <a:spAutoFit/>
+          </a:bodyPr>
+          <a:lstStyle/>
+          <a:p>
+            <a:pPr>
+              <a:spcAft>
+                <a:spcPts val="1100"/>
+              </a:spcAft>
+            </a:pPr>
+            <a:r>
+              <a:rPr sz="1600" b="1" i="0">
+                <a:solidFill>
+                  <a:srgbClr val="E8801A"/>
+                </a:solidFill>
+                <a:latin typeface="Montserrat"/>
+              </a:rPr>
+              <a:t>▸  </a:t>
+            </a:r>
+            <a:r>
+              <a:rPr sz="1600" b="0" i="0">
+                <a:solidFill>
+                  <a:srgbClr val="1B2330"/>
+                </a:solidFill>
+                <a:latin typeface="Montserrat"/>
+              </a:rPr>
+              <a:t>Inox corrugado con conexiones roscadas</a:t>
+            </a:r>
+          </a:p>
+          <a:p>
+            <a:pPr>
+              <a:spcAft>
+                <a:spcPts val="1100"/>
+              </a:spcAft>
+            </a:pPr>
+            <a:r>
+              <a:rPr sz="1600" b="1" i="0">
+                <a:solidFill>
+                  <a:srgbClr val="E8801A"/>
+                </a:solidFill>
+                <a:latin typeface="Montserrat"/>
+              </a:rPr>
+              <a:t>▸  </a:t>
+            </a:r>
+            <a:r>
+              <a:rPr sz="1600" b="0" i="0">
+                <a:solidFill>
+                  <a:srgbClr val="1B2330"/>
+                </a:solidFill>
+                <a:latin typeface="Montserrat"/>
+              </a:rPr>
+              <a:t>Norma UNE 60713</a:t>
+            </a:r>
+          </a:p>
+          <a:p>
+            <a:pPr>
+              <a:spcAft>
+                <a:spcPts val="1100"/>
+              </a:spcAft>
+            </a:pPr>
+            <a:r>
+              <a:rPr sz="1600" b="1" i="0">
+                <a:solidFill>
+                  <a:srgbClr val="E8801A"/>
+                </a:solidFill>
+                <a:latin typeface="Montserrat"/>
+              </a:rPr>
+              <a:t>▸  </a:t>
+            </a:r>
+            <a:r>
+              <a:rPr sz="1600" b="0" i="0">
+                <a:solidFill>
+                  <a:srgbClr val="1B2330"/>
+                </a:solidFill>
+                <a:latin typeface="Montserrat"/>
+              </a:rPr>
+              <a:t>Longitud máxima 0,80 m</a:t>
+            </a:r>
+          </a:p>
+          <a:p>
+            <a:pPr>
+              <a:spcAft>
+                <a:spcPts val="1100"/>
+              </a:spcAft>
+            </a:pPr>
+            <a:r>
+              <a:rPr sz="1600" b="1" i="0">
+                <a:solidFill>
+                  <a:srgbClr val="E8801A"/>
+                </a:solidFill>
+                <a:latin typeface="Montserrat"/>
+              </a:rPr>
+              <a:t>▸  </a:t>
+            </a:r>
+            <a:r>
+              <a:rPr sz="1600" b="0" i="0">
+                <a:solidFill>
+                  <a:srgbClr val="1B2330"/>
+                </a:solidFill>
+                <a:latin typeface="Montserrat"/>
+              </a:rPr>
+              <a:t>No confundir con los flexibles de aparato</a:t>
+            </a:r>
+          </a:p>
+        </p:txBody>
+      </p:sp>
+      <p:sp>
+        <p:nvSpPr>
+          <p:cNvPr id="9" name="imgph" descr="IMGQ:corrugated stainless steel meter connector"/>
+          <p:cNvSpPr/>
+          <p:nvPr/>
+        </p:nvSpPr>
+        <p:spPr>
+          <a:xfrm>
+            <a:off x="6080760" y="1965960"/>
+            <a:ext cx="5303520" cy="4572000"/>
+          </a:xfrm>
+          <a:prstGeom prst="roundRect">
+            <a:avLst/>
+          </a:prstGeom>
+          <a:solidFill>
+            <a:srgbClr val="F3F6FB"/>
+          </a:solidFill>
+          <a:ln w="12700">
+            <a:solidFill>
+              <a:srgbClr val="C7D2E6"/>
+            </a:solidFill>
+          </a:ln>
+          <a:effectLst/>
+        </p:spPr>
+        <p:style>
+          <a:lnRef idx="1">
+            <a:schemeClr val="accent1"/>
+          </a:lnRef>
+          <a:fillRef idx="3">
+            <a:schemeClr val="accent1"/>
+          </a:fillRef>
+          <a:effectRef idx="2">
+            <a:schemeClr val="accent1"/>
+          </a:effectRef>
+          <a:fontRef idx="minor">
+            <a:schemeClr val="lt1"/>
+          </a:fontRef>
+        </p:style>
+        <p:txBody>
+          <a:bodyPr rtlCol="0" anchor="ctr"/>
+          <a:lstStyle/>
+          <a:p>
+            <a:pPr algn="ctr"/>
+          </a:p>
+        </p:txBody>
+      </p:sp>
+      <p:sp>
+        <p:nvSpPr>
+          <p:cNvPr id="10" name="TextBox 9"/>
+          <p:cNvSpPr txBox="1"/>
+          <p:nvPr/>
+        </p:nvSpPr>
+        <p:spPr>
+          <a:xfrm>
+            <a:off x="6355080" y="3611880"/>
+            <a:ext cx="4754880" cy="1280160"/>
+          </a:xfrm>
+          <a:prstGeom prst="rect">
+            <a:avLst/>
+          </a:prstGeom>
+          <a:noFill/>
+        </p:spPr>
+        <p:txBody>
+          <a:bodyPr wrap="square">
+            <a:spAutoFit/>
+          </a:bodyPr>
+          <a:lstStyle/>
+          <a:p>
+            <a:pPr algn="ctr"/>
+            <a:r>
+              <a:rPr sz="1400" b="1" i="0">
+                <a:solidFill>
+                  <a:srgbClr val="64748B"/>
+                </a:solidFill>
+                <a:latin typeface="Montserrat"/>
+              </a:rPr>
+              <a:t>IMAGEN</a:t>
+            </a:r>
+          </a:p>
+          <a:p>
+            <a:pPr algn="ctr"/>
+            <a:r>
+              <a:rPr sz="1100" b="0" i="1">
+                <a:solidFill>
+                  <a:srgbClr val="64748B"/>
+                </a:solidFill>
+                <a:latin typeface="Montserrat"/>
+              </a:rPr>
+              <a:t>corrugated stainless steel meter connector</a:t>
+            </a:r>
+          </a:p>
+        </p:txBody>
+      </p:sp>
+    </p:spTree>
+  </p:cSld>
+  <p:clrMapOvr>
+    <a:masterClrMapping/>
+  </p:clrMapOvr>
+  <mc:AlternateContent xmlns:mc="http://schemas.openxmlformats.org/markup-compatibility/2006">
+    <mc:Choice xmlns:p14="http://schemas.microsoft.com/office/powerpoint/2010/main" Requires="p14">
+      <p:transition spd="med" p14:dur="700">
+        <p14:cube dir="l"/>
+      </p:transition>
+    </mc:Choice>
+    <mc:Fallback>
+      <p:transition spd="med">
+        <p:push dir="l"/>
+      </p:transition>
+    </mc:Fallback>
+  </mc:AlternateContent>
 </p:sld>
 </file>
 
@@ -8076,7 +10537,7 @@
                 </a:solidFill>
                 <a:latin typeface="Montserrat"/>
               </a:rPr>
-              <a:t>002 / 016</a:t>
+              <a:t>002 / 023</a:t>
             </a:r>
           </a:p>
         </p:txBody>
@@ -8151,7 +10612,7 @@
       </p:sp>
       <p:sp>
         <p:nvSpPr>
-          <p:cNvPr id="6" name="Rounded Rectangle 5"/>
+          <p:cNvPr id="6" name="Rectangle 5"/>
           <p:cNvSpPr/>
           <p:nvPr/>
         </p:nvSpPr>
@@ -8160,7 +10621,7 @@
             <a:off x="868680" y="1234440"/>
             <a:ext cx="1463040" cy="73152"/>
           </a:xfrm>
-          <a:prstGeom prst="roundRect">
+          <a:prstGeom prst="rect">
             <a:avLst/>
           </a:prstGeom>
           <a:solidFill>
@@ -8241,14 +10702,58 @@
       </p:sp>
       <p:sp>
         <p:nvSpPr>
-          <p:cNvPr id="8" name="TextBox 7"/>
+          <p:cNvPr id="8" name="Rectangle 7"/>
+          <p:cNvSpPr/>
+          <p:nvPr/>
+        </p:nvSpPr>
+        <p:spPr>
+          <a:xfrm>
+            <a:off x="822960" y="2011680"/>
+            <a:ext cx="3017520" cy="128016"/>
+          </a:xfrm>
+          <a:prstGeom prst="rect">
+            <a:avLst/>
+          </a:prstGeom>
+          <a:solidFill>
+            <a:srgbClr val="E8801A"/>
+          </a:solidFill>
+          <a:ln>
+            <a:noFill/>
+          </a:ln>
+          <a:effectLst/>
+        </p:spPr>
+        <p:style>
+          <a:lnRef idx="1">
+            <a:schemeClr val="accent1"/>
+          </a:lnRef>
+          <a:fillRef idx="3">
+            <a:schemeClr val="accent1"/>
+          </a:fillRef>
+          <a:effectRef idx="2">
+            <a:schemeClr val="accent1"/>
+          </a:effectRef>
+          <a:fontRef idx="minor">
+            <a:schemeClr val="lt1"/>
+          </a:fontRef>
+        </p:style>
+        <p:txBody>
+          <a:bodyPr rtlCol="0" anchor="ctr"/>
+          <a:lstStyle/>
+          <a:p>
+            <a:pPr algn="ctr"/>
+          </a:p>
+        </p:txBody>
+      </p:sp>
+      <p:sp>
+        <p:nvSpPr>
+          <p:cNvPr id="9" name="TextBox 8"/>
           <p:cNvSpPr txBox="1"/>
           <p:nvPr/>
         </p:nvSpPr>
         <p:spPr>
           <a:xfrm>
-            <a:off x="822960" y="2331720"/>
-            <a:ext cx="3017520" cy="1463040"/>
+            <a:off x="822960" y="2377440"/>
+            <a:ext cx="3017520" cy="1371600"/>
           </a:xfrm>
           <a:prstGeom prst="rect">
             <a:avLst/>
@@ -8263,7 +10768,7 @@
           <a:p>
             <a:pPr algn="ctr"/>
             <a:r>
-              <a:rPr sz="6000" b="1" i="0">
+              <a:rPr sz="5800" b="1" i="0">
                 <a:solidFill>
                   <a:srgbClr val="1E2761"/>
                 </a:solidFill>
@@ -8276,13 +10781,13 @@
       </p:sp>
       <p:sp>
         <p:nvSpPr>
-          <p:cNvPr id="9" name="TextBox 8"/>
+          <p:cNvPr id="10" name="TextBox 9"/>
           <p:cNvSpPr txBox="1"/>
           <p:nvPr/>
         </p:nvSpPr>
         <p:spPr>
           <a:xfrm>
-            <a:off x="1051560" y="3611880"/>
+            <a:off x="1051560" y="3657600"/>
             <a:ext cx="2560320" cy="1005840"/>
           </a:xfrm>
           <a:prstGeom prst="rect">
@@ -8311,7 +10816,7 @@
       </p:sp>
       <p:sp>
         <p:nvSpPr>
-          <p:cNvPr id="10" name="Rounded Rectangle 9"/>
+          <p:cNvPr id="11" name="Rounded Rectangle 10"/>
           <p:cNvSpPr/>
           <p:nvPr/>
         </p:nvSpPr>
@@ -8357,14 +10862,58 @@
       </p:sp>
       <p:sp>
         <p:nvSpPr>
-          <p:cNvPr id="11" name="TextBox 10"/>
+          <p:cNvPr id="12" name="Rectangle 11"/>
+          <p:cNvSpPr/>
+          <p:nvPr/>
+        </p:nvSpPr>
+        <p:spPr>
+          <a:xfrm>
+            <a:off x="4617720" y="2011680"/>
+            <a:ext cx="3017520" cy="128016"/>
+          </a:xfrm>
+          <a:prstGeom prst="rect">
+            <a:avLst/>
+          </a:prstGeom>
+          <a:solidFill>
+            <a:srgbClr val="E8801A"/>
+          </a:solidFill>
+          <a:ln>
+            <a:noFill/>
+          </a:ln>
+          <a:effectLst/>
+        </p:spPr>
+        <p:style>
+          <a:lnRef idx="1">
+            <a:schemeClr val="accent1"/>
+          </a:lnRef>
+          <a:fillRef idx="3">
+            <a:schemeClr val="accent1"/>
+          </a:fillRef>
+          <a:effectRef idx="2">
+            <a:schemeClr val="accent1"/>
+          </a:effectRef>
+          <a:fontRef idx="minor">
+            <a:schemeClr val="lt1"/>
+          </a:fontRef>
+        </p:style>
+        <p:txBody>
+          <a:bodyPr rtlCol="0" anchor="ctr"/>
+          <a:lstStyle/>
+          <a:p>
+            <a:pPr algn="ctr"/>
+          </a:p>
+        </p:txBody>
+      </p:sp>
+      <p:sp>
+        <p:nvSpPr>
+          <p:cNvPr id="13" name="TextBox 12"/>
           <p:cNvSpPr txBox="1"/>
           <p:nvPr/>
         </p:nvSpPr>
         <p:spPr>
           <a:xfrm>
-            <a:off x="4617720" y="2331720"/>
-            <a:ext cx="3017520" cy="1463040"/>
+            <a:off x="4617720" y="2377440"/>
+            <a:ext cx="3017520" cy="1371600"/>
           </a:xfrm>
           <a:prstGeom prst="rect">
             <a:avLst/>
@@ -8379,7 +10928,7 @@
           <a:p>
             <a:pPr algn="ctr"/>
             <a:r>
-              <a:rPr sz="6000" b="1" i="0">
+              <a:rPr sz="5800" b="1" i="0">
                 <a:solidFill>
                   <a:srgbClr val="1E2761"/>
                 </a:solidFill>
@@ -8392,13 +10941,13 @@
       </p:sp>
       <p:sp>
         <p:nvSpPr>
-          <p:cNvPr id="12" name="TextBox 11"/>
+          <p:cNvPr id="14" name="TextBox 13"/>
           <p:cNvSpPr txBox="1"/>
           <p:nvPr/>
         </p:nvSpPr>
         <p:spPr>
           <a:xfrm>
-            <a:off x="4846320" y="3611880"/>
+            <a:off x="4846320" y="3657600"/>
             <a:ext cx="2560320" cy="1005840"/>
           </a:xfrm>
           <a:prstGeom prst="rect">
@@ -8427,7 +10976,7 @@
       </p:sp>
       <p:sp>
         <p:nvSpPr>
-          <p:cNvPr id="13" name="Rounded Rectangle 12"/>
+          <p:cNvPr id="15" name="Rounded Rectangle 14"/>
           <p:cNvSpPr/>
           <p:nvPr/>
         </p:nvSpPr>
@@ -8473,14 +11022,58 @@
       </p:sp>
       <p:sp>
         <p:nvSpPr>
-          <p:cNvPr id="14" name="TextBox 13"/>
+          <p:cNvPr id="16" name="Rectangle 15"/>
+          <p:cNvSpPr/>
+          <p:nvPr/>
+        </p:nvSpPr>
+        <p:spPr>
+          <a:xfrm>
+            <a:off x="8412480" y="2011680"/>
+            <a:ext cx="3017520" cy="128016"/>
+          </a:xfrm>
+          <a:prstGeom prst="rect">
+            <a:avLst/>
+          </a:prstGeom>
+          <a:solidFill>
+            <a:srgbClr val="E8801A"/>
+          </a:solidFill>
+          <a:ln>
+            <a:noFill/>
+          </a:ln>
+          <a:effectLst/>
+        </p:spPr>
+        <p:style>
+          <a:lnRef idx="1">
+            <a:schemeClr val="accent1"/>
+          </a:lnRef>
+          <a:fillRef idx="3">
+            <a:schemeClr val="accent1"/>
+          </a:fillRef>
+          <a:effectRef idx="2">
+            <a:schemeClr val="accent1"/>
+          </a:effectRef>
+          <a:fontRef idx="minor">
+            <a:schemeClr val="lt1"/>
+          </a:fontRef>
+        </p:style>
+        <p:txBody>
+          <a:bodyPr rtlCol="0" anchor="ctr"/>
+          <a:lstStyle/>
+          <a:p>
+            <a:pPr algn="ctr"/>
+          </a:p>
+        </p:txBody>
+      </p:sp>
+      <p:sp>
+        <p:nvSpPr>
+          <p:cNvPr id="17" name="TextBox 16"/>
           <p:cNvSpPr txBox="1"/>
           <p:nvPr/>
         </p:nvSpPr>
         <p:spPr>
           <a:xfrm>
-            <a:off x="8412480" y="2331720"/>
-            <a:ext cx="3017520" cy="1463040"/>
+            <a:off x="8412480" y="2377440"/>
+            <a:ext cx="3017520" cy="1371600"/>
           </a:xfrm>
           <a:prstGeom prst="rect">
             <a:avLst/>
@@ -8495,7 +11088,7 @@
           <a:p>
             <a:pPr algn="ctr"/>
             <a:r>
-              <a:rPr sz="6000" b="1" i="0">
+              <a:rPr sz="5800" b="1" i="0">
                 <a:solidFill>
                   <a:srgbClr val="1E2761"/>
                 </a:solidFill>
@@ -8508,13 +11101,13 @@
       </p:sp>
       <p:sp>
         <p:nvSpPr>
-          <p:cNvPr id="15" name="TextBox 14"/>
+          <p:cNvPr id="18" name="TextBox 17"/>
           <p:cNvSpPr txBox="1"/>
           <p:nvPr/>
         </p:nvSpPr>
         <p:spPr>
           <a:xfrm>
-            <a:off x="8641080" y="3611880"/>
+            <a:off x="8641080" y="3657600"/>
             <a:ext cx="2560320" cy="1005840"/>
           </a:xfrm>
           <a:prstGeom prst="rect">
@@ -8546,6 +11139,2154 @@
   <p:clrMapOvr>
     <a:masterClrMapping/>
   </p:clrMapOvr>
+  <mc:AlternateContent xmlns:mc="http://schemas.openxmlformats.org/markup-compatibility/2006">
+    <mc:Choice xmlns:p14="http://schemas.microsoft.com/office/powerpoint/2010/main" Requires="p14">
+      <p:transition spd="med" p14:dur="700">
+        <p14:cube dir="r"/>
+      </p:transition>
+    </mc:Choice>
+    <mc:Fallback>
+      <p:transition spd="med">
+        <p:push dir="r"/>
+      </p:transition>
+    </mc:Fallback>
+  </mc:AlternateContent>
+</p:sld>
+</file>
+
+<file path=ppt/slides/slide20.xml><?xml version="1.0" encoding="utf-8"?>
+<p:sld xmlns:a="http://schemas.openxmlformats.org/drawingml/2006/main" xmlns:p="http://schemas.openxmlformats.org/presentationml/2006/main" xmlns:r="http://schemas.openxmlformats.org/officeDocument/2006/relationships">
+  <p:cSld>
+    <p:spTree>
+      <p:nvGrpSpPr>
+        <p:cNvPr id="1" name=""/>
+        <p:cNvGrpSpPr/>
+        <p:nvPr/>
+      </p:nvGrpSpPr>
+      <p:grpSpPr/>
+      <p:sp>
+        <p:nvSpPr>
+          <p:cNvPr id="2" name="Rectangle 1"/>
+          <p:cNvSpPr/>
+          <p:nvPr/>
+        </p:nvSpPr>
+        <p:spPr>
+          <a:xfrm>
+            <a:off x="0" y="0"/>
+            <a:ext cx="12191695" cy="6858000"/>
+          </a:xfrm>
+          <a:prstGeom prst="rect">
+            <a:avLst/>
+          </a:prstGeom>
+          <a:solidFill>
+            <a:srgbClr val="FFFFFF"/>
+          </a:solidFill>
+          <a:ln>
+            <a:noFill/>
+          </a:ln>
+          <a:effectLst/>
+        </p:spPr>
+        <p:style>
+          <a:lnRef idx="1">
+            <a:schemeClr val="accent1"/>
+          </a:lnRef>
+          <a:fillRef idx="3">
+            <a:schemeClr val="accent1"/>
+          </a:fillRef>
+          <a:effectRef idx="2">
+            <a:schemeClr val="accent1"/>
+          </a:effectRef>
+          <a:fontRef idx="minor">
+            <a:schemeClr val="lt1"/>
+          </a:fontRef>
+        </p:style>
+        <p:txBody>
+          <a:bodyPr rtlCol="0" anchor="ctr"/>
+          <a:lstStyle/>
+          <a:p>
+            <a:pPr algn="ctr"/>
+          </a:p>
+        </p:txBody>
+      </p:sp>
+      <p:sp>
+        <p:nvSpPr>
+          <p:cNvPr id="3" name="TextBox 2"/>
+          <p:cNvSpPr txBox="1"/>
+          <p:nvPr/>
+        </p:nvSpPr>
+        <p:spPr>
+          <a:xfrm>
+            <a:off x="10607040" y="320040"/>
+            <a:ext cx="1371600" cy="365760"/>
+          </a:xfrm>
+          <a:prstGeom prst="rect">
+            <a:avLst/>
+          </a:prstGeom>
+          <a:noFill/>
+        </p:spPr>
+        <p:txBody>
+          <a:bodyPr wrap="square">
+            <a:spAutoFit/>
+          </a:bodyPr>
+          <a:lstStyle/>
+          <a:p>
+            <a:pPr algn="r"/>
+            <a:r>
+              <a:rPr sz="1000" b="1" i="0">
+                <a:solidFill>
+                  <a:srgbClr val="64748B"/>
+                </a:solidFill>
+                <a:latin typeface="Montserrat"/>
+              </a:rPr>
+              <a:t>020 / 023</a:t>
+            </a:r>
+          </a:p>
+        </p:txBody>
+      </p:sp>
+      <p:sp>
+        <p:nvSpPr>
+          <p:cNvPr id="4" name="TextBox 3"/>
+          <p:cNvSpPr txBox="1"/>
+          <p:nvPr/>
+        </p:nvSpPr>
+        <p:spPr>
+          <a:xfrm>
+            <a:off x="457200" y="6419088"/>
+            <a:ext cx="8229600" cy="365760"/>
+          </a:xfrm>
+          <a:prstGeom prst="rect">
+            <a:avLst/>
+          </a:prstGeom>
+          <a:noFill/>
+        </p:spPr>
+        <p:txBody>
+          <a:bodyPr wrap="square">
+            <a:spAutoFit/>
+          </a:bodyPr>
+          <a:lstStyle/>
+          <a:p>
+            <a:r>
+              <a:rPr sz="900" b="0" i="0">
+                <a:solidFill>
+                  <a:srgbClr val="64748B"/>
+                </a:solidFill>
+                <a:latin typeface="Montserrat"/>
+              </a:rPr>
+              <a:t>Curso Gas B · Tema 10 · UNE 60670-3</a:t>
+            </a:r>
+          </a:p>
+        </p:txBody>
+      </p:sp>
+      <p:sp>
+        <p:nvSpPr>
+          <p:cNvPr id="5" name="Rectangle 4"/>
+          <p:cNvSpPr/>
+          <p:nvPr/>
+        </p:nvSpPr>
+        <p:spPr>
+          <a:xfrm>
+            <a:off x="0" y="0"/>
+            <a:ext cx="12191695" cy="1143000"/>
+          </a:xfrm>
+          <a:prstGeom prst="rect">
+            <a:avLst/>
+          </a:prstGeom>
+          <a:solidFill>
+            <a:srgbClr val="E8801A"/>
+          </a:solidFill>
+          <a:ln>
+            <a:noFill/>
+          </a:ln>
+          <a:effectLst/>
+        </p:spPr>
+        <p:style>
+          <a:lnRef idx="1">
+            <a:schemeClr val="accent1"/>
+          </a:lnRef>
+          <a:fillRef idx="3">
+            <a:schemeClr val="accent1"/>
+          </a:fillRef>
+          <a:effectRef idx="2">
+            <a:schemeClr val="accent1"/>
+          </a:effectRef>
+          <a:fontRef idx="minor">
+            <a:schemeClr val="lt1"/>
+          </a:fontRef>
+        </p:style>
+        <p:txBody>
+          <a:bodyPr rtlCol="0" anchor="ctr"/>
+          <a:lstStyle/>
+          <a:p>
+            <a:pPr algn="ctr"/>
+          </a:p>
+        </p:txBody>
+      </p:sp>
+      <p:sp>
+        <p:nvSpPr>
+          <p:cNvPr id="6" name="TextBox 5"/>
+          <p:cNvSpPr txBox="1"/>
+          <p:nvPr/>
+        </p:nvSpPr>
+        <p:spPr>
+          <a:xfrm>
+            <a:off x="822960" y="274320"/>
+            <a:ext cx="10515600" cy="640080"/>
+          </a:xfrm>
+          <a:prstGeom prst="rect">
+            <a:avLst/>
+          </a:prstGeom>
+          <a:noFill/>
+        </p:spPr>
+        <p:txBody>
+          <a:bodyPr wrap="square">
+            <a:spAutoFit/>
+          </a:bodyPr>
+          <a:lstStyle/>
+          <a:p>
+            <a:r>
+              <a:rPr sz="2400" b="1" i="0">
+                <a:solidFill>
+                  <a:srgbClr val="FFFFFF"/>
+                </a:solidFill>
+                <a:latin typeface="Montserrat"/>
+              </a:rPr>
+              <a:t>⚡  PREGUNTA RÁPIDA</a:t>
+            </a:r>
+          </a:p>
+        </p:txBody>
+      </p:sp>
+      <p:sp>
+        <p:nvSpPr>
+          <p:cNvPr id="7" name="TextBox 6"/>
+          <p:cNvSpPr txBox="1"/>
+          <p:nvPr/>
+        </p:nvSpPr>
+        <p:spPr>
+          <a:xfrm>
+            <a:off x="822960" y="1508760"/>
+            <a:ext cx="10515600" cy="1371600"/>
+          </a:xfrm>
+          <a:prstGeom prst="rect">
+            <a:avLst/>
+          </a:prstGeom>
+          <a:noFill/>
+        </p:spPr>
+        <p:txBody>
+          <a:bodyPr wrap="square">
+            <a:spAutoFit/>
+          </a:bodyPr>
+          <a:lstStyle/>
+          <a:p>
+            <a:r>
+              <a:rPr sz="2400" b="1" i="0">
+                <a:solidFill>
+                  <a:srgbClr val="1E2761"/>
+                </a:solidFill>
+                <a:latin typeface="Montserrat"/>
+              </a:rPr>
+              <a:t>¿Cuál es la longitud máxima del tubo flexible que conecta el contador de gas?</a:t>
+            </a:r>
+          </a:p>
+        </p:txBody>
+      </p:sp>
+      <p:sp>
+        <p:nvSpPr>
+          <p:cNvPr id="8" name="Rounded Rectangle 7"/>
+          <p:cNvSpPr/>
+          <p:nvPr/>
+        </p:nvSpPr>
+        <p:spPr>
+          <a:xfrm>
+            <a:off x="822960" y="3291840"/>
+            <a:ext cx="4983480" cy="1143000"/>
+          </a:xfrm>
+          <a:prstGeom prst="roundRect">
+            <a:avLst/>
+          </a:prstGeom>
+          <a:solidFill>
+            <a:srgbClr val="F3F6FB"/>
+          </a:solidFill>
+          <a:ln w="12700">
+            <a:solidFill>
+              <a:srgbClr val="C7D2E6"/>
+            </a:solidFill>
+          </a:ln>
+          <a:effectLst/>
+        </p:spPr>
+        <p:style>
+          <a:lnRef idx="1">
+            <a:schemeClr val="accent1"/>
+          </a:lnRef>
+          <a:fillRef idx="3">
+            <a:schemeClr val="accent1"/>
+          </a:fillRef>
+          <a:effectRef idx="2">
+            <a:schemeClr val="accent1"/>
+          </a:effectRef>
+          <a:fontRef idx="minor">
+            <a:schemeClr val="lt1"/>
+          </a:fontRef>
+        </p:style>
+        <p:txBody>
+          <a:bodyPr rtlCol="0" anchor="ctr"/>
+          <a:lstStyle/>
+          <a:p>
+            <a:pPr algn="ctr"/>
+          </a:p>
+        </p:txBody>
+      </p:sp>
+      <p:sp>
+        <p:nvSpPr>
+          <p:cNvPr id="9" name="Rectangle 8"/>
+          <p:cNvSpPr/>
+          <p:nvPr/>
+        </p:nvSpPr>
+        <p:spPr>
+          <a:xfrm>
+            <a:off x="822960" y="3291840"/>
+            <a:ext cx="640080" cy="1143000"/>
+          </a:xfrm>
+          <a:prstGeom prst="rect">
+            <a:avLst/>
+          </a:prstGeom>
+          <a:solidFill>
+            <a:srgbClr val="1E2761"/>
+          </a:solidFill>
+          <a:ln>
+            <a:noFill/>
+          </a:ln>
+          <a:effectLst/>
+        </p:spPr>
+        <p:style>
+          <a:lnRef idx="1">
+            <a:schemeClr val="accent1"/>
+          </a:lnRef>
+          <a:fillRef idx="3">
+            <a:schemeClr val="accent1"/>
+          </a:fillRef>
+          <a:effectRef idx="2">
+            <a:schemeClr val="accent1"/>
+          </a:effectRef>
+          <a:fontRef idx="minor">
+            <a:schemeClr val="lt1"/>
+          </a:fontRef>
+        </p:style>
+        <p:txBody>
+          <a:bodyPr rtlCol="0" anchor="ctr"/>
+          <a:lstStyle/>
+          <a:p>
+            <a:pPr algn="ctr"/>
+          </a:p>
+        </p:txBody>
+      </p:sp>
+      <p:sp>
+        <p:nvSpPr>
+          <p:cNvPr id="10" name="TextBox 9"/>
+          <p:cNvSpPr txBox="1"/>
+          <p:nvPr/>
+        </p:nvSpPr>
+        <p:spPr>
+          <a:xfrm>
+            <a:off x="822960" y="3611880"/>
+            <a:ext cx="640080" cy="548640"/>
+          </a:xfrm>
+          <a:prstGeom prst="rect">
+            <a:avLst/>
+          </a:prstGeom>
+          <a:noFill/>
+        </p:spPr>
+        <p:txBody>
+          <a:bodyPr wrap="square">
+            <a:spAutoFit/>
+          </a:bodyPr>
+          <a:lstStyle/>
+          <a:p>
+            <a:pPr algn="ctr"/>
+            <a:r>
+              <a:rPr sz="2200" b="1" i="0">
+                <a:solidFill>
+                  <a:srgbClr val="FFFFFF"/>
+                </a:solidFill>
+                <a:latin typeface="Montserrat"/>
+              </a:rPr>
+              <a:t>A</a:t>
+            </a:r>
+          </a:p>
+        </p:txBody>
+      </p:sp>
+      <p:sp>
+        <p:nvSpPr>
+          <p:cNvPr id="11" name="TextBox 10"/>
+          <p:cNvSpPr txBox="1"/>
+          <p:nvPr/>
+        </p:nvSpPr>
+        <p:spPr>
+          <a:xfrm>
+            <a:off x="1600200" y="3474720"/>
+            <a:ext cx="4114800" cy="868680"/>
+          </a:xfrm>
+          <a:prstGeom prst="rect">
+            <a:avLst/>
+          </a:prstGeom>
+          <a:noFill/>
+        </p:spPr>
+        <p:txBody>
+          <a:bodyPr wrap="square">
+            <a:spAutoFit/>
+          </a:bodyPr>
+          <a:lstStyle/>
+          <a:p>
+            <a:r>
+              <a:rPr sz="1400" b="0" i="0">
+                <a:solidFill>
+                  <a:srgbClr val="1B2330"/>
+                </a:solidFill>
+                <a:latin typeface="Montserrat"/>
+              </a:rPr>
+              <a:t>0,50 m</a:t>
+            </a:r>
+          </a:p>
+        </p:txBody>
+      </p:sp>
+      <p:sp>
+        <p:nvSpPr>
+          <p:cNvPr id="12" name="Rounded Rectangle 11"/>
+          <p:cNvSpPr/>
+          <p:nvPr/>
+        </p:nvSpPr>
+        <p:spPr>
+          <a:xfrm>
+            <a:off x="6355080" y="3291840"/>
+            <a:ext cx="4983480" cy="1143000"/>
+          </a:xfrm>
+          <a:prstGeom prst="roundRect">
+            <a:avLst/>
+          </a:prstGeom>
+          <a:solidFill>
+            <a:srgbClr val="F3F6FB"/>
+          </a:solidFill>
+          <a:ln w="12700">
+            <a:solidFill>
+              <a:srgbClr val="C7D2E6"/>
+            </a:solidFill>
+          </a:ln>
+          <a:effectLst/>
+        </p:spPr>
+        <p:style>
+          <a:lnRef idx="1">
+            <a:schemeClr val="accent1"/>
+          </a:lnRef>
+          <a:fillRef idx="3">
+            <a:schemeClr val="accent1"/>
+          </a:fillRef>
+          <a:effectRef idx="2">
+            <a:schemeClr val="accent1"/>
+          </a:effectRef>
+          <a:fontRef idx="minor">
+            <a:schemeClr val="lt1"/>
+          </a:fontRef>
+        </p:style>
+        <p:txBody>
+          <a:bodyPr rtlCol="0" anchor="ctr"/>
+          <a:lstStyle/>
+          <a:p>
+            <a:pPr algn="ctr"/>
+          </a:p>
+        </p:txBody>
+      </p:sp>
+      <p:sp>
+        <p:nvSpPr>
+          <p:cNvPr id="13" name="Rectangle 12"/>
+          <p:cNvSpPr/>
+          <p:nvPr/>
+        </p:nvSpPr>
+        <p:spPr>
+          <a:xfrm>
+            <a:off x="6355080" y="3291840"/>
+            <a:ext cx="640080" cy="1143000"/>
+          </a:xfrm>
+          <a:prstGeom prst="rect">
+            <a:avLst/>
+          </a:prstGeom>
+          <a:solidFill>
+            <a:srgbClr val="1E2761"/>
+          </a:solidFill>
+          <a:ln>
+            <a:noFill/>
+          </a:ln>
+          <a:effectLst/>
+        </p:spPr>
+        <p:style>
+          <a:lnRef idx="1">
+            <a:schemeClr val="accent1"/>
+          </a:lnRef>
+          <a:fillRef idx="3">
+            <a:schemeClr val="accent1"/>
+          </a:fillRef>
+          <a:effectRef idx="2">
+            <a:schemeClr val="accent1"/>
+          </a:effectRef>
+          <a:fontRef idx="minor">
+            <a:schemeClr val="lt1"/>
+          </a:fontRef>
+        </p:style>
+        <p:txBody>
+          <a:bodyPr rtlCol="0" anchor="ctr"/>
+          <a:lstStyle/>
+          <a:p>
+            <a:pPr algn="ctr"/>
+          </a:p>
+        </p:txBody>
+      </p:sp>
+      <p:sp>
+        <p:nvSpPr>
+          <p:cNvPr id="14" name="TextBox 13"/>
+          <p:cNvSpPr txBox="1"/>
+          <p:nvPr/>
+        </p:nvSpPr>
+        <p:spPr>
+          <a:xfrm>
+            <a:off x="6355080" y="3611880"/>
+            <a:ext cx="640080" cy="548640"/>
+          </a:xfrm>
+          <a:prstGeom prst="rect">
+            <a:avLst/>
+          </a:prstGeom>
+          <a:noFill/>
+        </p:spPr>
+        <p:txBody>
+          <a:bodyPr wrap="square">
+            <a:spAutoFit/>
+          </a:bodyPr>
+          <a:lstStyle/>
+          <a:p>
+            <a:pPr algn="ctr"/>
+            <a:r>
+              <a:rPr sz="2200" b="1" i="0">
+                <a:solidFill>
+                  <a:srgbClr val="FFFFFF"/>
+                </a:solidFill>
+                <a:latin typeface="Montserrat"/>
+              </a:rPr>
+              <a:t>B</a:t>
+            </a:r>
+          </a:p>
+        </p:txBody>
+      </p:sp>
+      <p:sp>
+        <p:nvSpPr>
+          <p:cNvPr id="15" name="TextBox 14"/>
+          <p:cNvSpPr txBox="1"/>
+          <p:nvPr/>
+        </p:nvSpPr>
+        <p:spPr>
+          <a:xfrm>
+            <a:off x="7132320" y="3474720"/>
+            <a:ext cx="4114800" cy="868680"/>
+          </a:xfrm>
+          <a:prstGeom prst="rect">
+            <a:avLst/>
+          </a:prstGeom>
+          <a:noFill/>
+        </p:spPr>
+        <p:txBody>
+          <a:bodyPr wrap="square">
+            <a:spAutoFit/>
+          </a:bodyPr>
+          <a:lstStyle/>
+          <a:p>
+            <a:r>
+              <a:rPr sz="1400" b="0" i="0">
+                <a:solidFill>
+                  <a:srgbClr val="1B2330"/>
+                </a:solidFill>
+                <a:latin typeface="Montserrat"/>
+              </a:rPr>
+              <a:t>0,80 m</a:t>
+            </a:r>
+          </a:p>
+        </p:txBody>
+      </p:sp>
+      <p:sp>
+        <p:nvSpPr>
+          <p:cNvPr id="16" name="Rounded Rectangle 15"/>
+          <p:cNvSpPr/>
+          <p:nvPr/>
+        </p:nvSpPr>
+        <p:spPr>
+          <a:xfrm>
+            <a:off x="822960" y="4617720"/>
+            <a:ext cx="4983480" cy="1143000"/>
+          </a:xfrm>
+          <a:prstGeom prst="roundRect">
+            <a:avLst/>
+          </a:prstGeom>
+          <a:solidFill>
+            <a:srgbClr val="F3F6FB"/>
+          </a:solidFill>
+          <a:ln w="12700">
+            <a:solidFill>
+              <a:srgbClr val="C7D2E6"/>
+            </a:solidFill>
+          </a:ln>
+          <a:effectLst/>
+        </p:spPr>
+        <p:style>
+          <a:lnRef idx="1">
+            <a:schemeClr val="accent1"/>
+          </a:lnRef>
+          <a:fillRef idx="3">
+            <a:schemeClr val="accent1"/>
+          </a:fillRef>
+          <a:effectRef idx="2">
+            <a:schemeClr val="accent1"/>
+          </a:effectRef>
+          <a:fontRef idx="minor">
+            <a:schemeClr val="lt1"/>
+          </a:fontRef>
+        </p:style>
+        <p:txBody>
+          <a:bodyPr rtlCol="0" anchor="ctr"/>
+          <a:lstStyle/>
+          <a:p>
+            <a:pPr algn="ctr"/>
+          </a:p>
+        </p:txBody>
+      </p:sp>
+      <p:sp>
+        <p:nvSpPr>
+          <p:cNvPr id="17" name="Rectangle 16"/>
+          <p:cNvSpPr/>
+          <p:nvPr/>
+        </p:nvSpPr>
+        <p:spPr>
+          <a:xfrm>
+            <a:off x="822960" y="4617720"/>
+            <a:ext cx="640080" cy="1143000"/>
+          </a:xfrm>
+          <a:prstGeom prst="rect">
+            <a:avLst/>
+          </a:prstGeom>
+          <a:solidFill>
+            <a:srgbClr val="1E2761"/>
+          </a:solidFill>
+          <a:ln>
+            <a:noFill/>
+          </a:ln>
+          <a:effectLst/>
+        </p:spPr>
+        <p:style>
+          <a:lnRef idx="1">
+            <a:schemeClr val="accent1"/>
+          </a:lnRef>
+          <a:fillRef idx="3">
+            <a:schemeClr val="accent1"/>
+          </a:fillRef>
+          <a:effectRef idx="2">
+            <a:schemeClr val="accent1"/>
+          </a:effectRef>
+          <a:fontRef idx="minor">
+            <a:schemeClr val="lt1"/>
+          </a:fontRef>
+        </p:style>
+        <p:txBody>
+          <a:bodyPr rtlCol="0" anchor="ctr"/>
+          <a:lstStyle/>
+          <a:p>
+            <a:pPr algn="ctr"/>
+          </a:p>
+        </p:txBody>
+      </p:sp>
+      <p:sp>
+        <p:nvSpPr>
+          <p:cNvPr id="18" name="TextBox 17"/>
+          <p:cNvSpPr txBox="1"/>
+          <p:nvPr/>
+        </p:nvSpPr>
+        <p:spPr>
+          <a:xfrm>
+            <a:off x="822960" y="4937760"/>
+            <a:ext cx="640080" cy="548640"/>
+          </a:xfrm>
+          <a:prstGeom prst="rect">
+            <a:avLst/>
+          </a:prstGeom>
+          <a:noFill/>
+        </p:spPr>
+        <p:txBody>
+          <a:bodyPr wrap="square">
+            <a:spAutoFit/>
+          </a:bodyPr>
+          <a:lstStyle/>
+          <a:p>
+            <a:pPr algn="ctr"/>
+            <a:r>
+              <a:rPr sz="2200" b="1" i="0">
+                <a:solidFill>
+                  <a:srgbClr val="FFFFFF"/>
+                </a:solidFill>
+                <a:latin typeface="Montserrat"/>
+              </a:rPr>
+              <a:t>C</a:t>
+            </a:r>
+          </a:p>
+        </p:txBody>
+      </p:sp>
+      <p:sp>
+        <p:nvSpPr>
+          <p:cNvPr id="19" name="TextBox 18"/>
+          <p:cNvSpPr txBox="1"/>
+          <p:nvPr/>
+        </p:nvSpPr>
+        <p:spPr>
+          <a:xfrm>
+            <a:off x="1600200" y="4800600"/>
+            <a:ext cx="4114800" cy="868680"/>
+          </a:xfrm>
+          <a:prstGeom prst="rect">
+            <a:avLst/>
+          </a:prstGeom>
+          <a:noFill/>
+        </p:spPr>
+        <p:txBody>
+          <a:bodyPr wrap="square">
+            <a:spAutoFit/>
+          </a:bodyPr>
+          <a:lstStyle/>
+          <a:p>
+            <a:r>
+              <a:rPr sz="1400" b="0" i="0">
+                <a:solidFill>
+                  <a:srgbClr val="1B2330"/>
+                </a:solidFill>
+                <a:latin typeface="Montserrat"/>
+              </a:rPr>
+              <a:t>1,00 m</a:t>
+            </a:r>
+          </a:p>
+        </p:txBody>
+      </p:sp>
+      <p:sp>
+        <p:nvSpPr>
+          <p:cNvPr id="20" name="Rounded Rectangle 19"/>
+          <p:cNvSpPr/>
+          <p:nvPr/>
+        </p:nvSpPr>
+        <p:spPr>
+          <a:xfrm>
+            <a:off x="6355080" y="4617720"/>
+            <a:ext cx="4983480" cy="1143000"/>
+          </a:xfrm>
+          <a:prstGeom prst="roundRect">
+            <a:avLst/>
+          </a:prstGeom>
+          <a:solidFill>
+            <a:srgbClr val="F3F6FB"/>
+          </a:solidFill>
+          <a:ln w="12700">
+            <a:solidFill>
+              <a:srgbClr val="C7D2E6"/>
+            </a:solidFill>
+          </a:ln>
+          <a:effectLst/>
+        </p:spPr>
+        <p:style>
+          <a:lnRef idx="1">
+            <a:schemeClr val="accent1"/>
+          </a:lnRef>
+          <a:fillRef idx="3">
+            <a:schemeClr val="accent1"/>
+          </a:fillRef>
+          <a:effectRef idx="2">
+            <a:schemeClr val="accent1"/>
+          </a:effectRef>
+          <a:fontRef idx="minor">
+            <a:schemeClr val="lt1"/>
+          </a:fontRef>
+        </p:style>
+        <p:txBody>
+          <a:bodyPr rtlCol="0" anchor="ctr"/>
+          <a:lstStyle/>
+          <a:p>
+            <a:pPr algn="ctr"/>
+          </a:p>
+        </p:txBody>
+      </p:sp>
+      <p:sp>
+        <p:nvSpPr>
+          <p:cNvPr id="21" name="Rectangle 20"/>
+          <p:cNvSpPr/>
+          <p:nvPr/>
+        </p:nvSpPr>
+        <p:spPr>
+          <a:xfrm>
+            <a:off x="6355080" y="4617720"/>
+            <a:ext cx="640080" cy="1143000"/>
+          </a:xfrm>
+          <a:prstGeom prst="rect">
+            <a:avLst/>
+          </a:prstGeom>
+          <a:solidFill>
+            <a:srgbClr val="1E2761"/>
+          </a:solidFill>
+          <a:ln>
+            <a:noFill/>
+          </a:ln>
+          <a:effectLst/>
+        </p:spPr>
+        <p:style>
+          <a:lnRef idx="1">
+            <a:schemeClr val="accent1"/>
+          </a:lnRef>
+          <a:fillRef idx="3">
+            <a:schemeClr val="accent1"/>
+          </a:fillRef>
+          <a:effectRef idx="2">
+            <a:schemeClr val="accent1"/>
+          </a:effectRef>
+          <a:fontRef idx="minor">
+            <a:schemeClr val="lt1"/>
+          </a:fontRef>
+        </p:style>
+        <p:txBody>
+          <a:bodyPr rtlCol="0" anchor="ctr"/>
+          <a:lstStyle/>
+          <a:p>
+            <a:pPr algn="ctr"/>
+          </a:p>
+        </p:txBody>
+      </p:sp>
+      <p:sp>
+        <p:nvSpPr>
+          <p:cNvPr id="22" name="TextBox 21"/>
+          <p:cNvSpPr txBox="1"/>
+          <p:nvPr/>
+        </p:nvSpPr>
+        <p:spPr>
+          <a:xfrm>
+            <a:off x="6355080" y="4937760"/>
+            <a:ext cx="640080" cy="548640"/>
+          </a:xfrm>
+          <a:prstGeom prst="rect">
+            <a:avLst/>
+          </a:prstGeom>
+          <a:noFill/>
+        </p:spPr>
+        <p:txBody>
+          <a:bodyPr wrap="square">
+            <a:spAutoFit/>
+          </a:bodyPr>
+          <a:lstStyle/>
+          <a:p>
+            <a:pPr algn="ctr"/>
+            <a:r>
+              <a:rPr sz="2200" b="1" i="0">
+                <a:solidFill>
+                  <a:srgbClr val="FFFFFF"/>
+                </a:solidFill>
+                <a:latin typeface="Montserrat"/>
+              </a:rPr>
+              <a:t>D</a:t>
+            </a:r>
+          </a:p>
+        </p:txBody>
+      </p:sp>
+      <p:sp>
+        <p:nvSpPr>
+          <p:cNvPr id="23" name="TextBox 22"/>
+          <p:cNvSpPr txBox="1"/>
+          <p:nvPr/>
+        </p:nvSpPr>
+        <p:spPr>
+          <a:xfrm>
+            <a:off x="7132320" y="4800600"/>
+            <a:ext cx="4114800" cy="868680"/>
+          </a:xfrm>
+          <a:prstGeom prst="rect">
+            <a:avLst/>
+          </a:prstGeom>
+          <a:noFill/>
+        </p:spPr>
+        <p:txBody>
+          <a:bodyPr wrap="square">
+            <a:spAutoFit/>
+          </a:bodyPr>
+          <a:lstStyle/>
+          <a:p>
+            <a:r>
+              <a:rPr sz="1400" b="0" i="0">
+                <a:solidFill>
+                  <a:srgbClr val="1B2330"/>
+                </a:solidFill>
+                <a:latin typeface="Montserrat"/>
+              </a:rPr>
+              <a:t>1,50 m</a:t>
+            </a:r>
+          </a:p>
+        </p:txBody>
+      </p:sp>
+    </p:spTree>
+  </p:cSld>
+  <p:clrMapOvr>
+    <a:masterClrMapping/>
+  </p:clrMapOvr>
+  <mc:AlternateContent xmlns:mc="http://schemas.openxmlformats.org/markup-compatibility/2006">
+    <mc:Choice xmlns:p14="http://schemas.microsoft.com/office/powerpoint/2010/main" Requires="p14">
+      <p:transition spd="med" p14:dur="700">
+        <p14:cube dir="r"/>
+      </p:transition>
+    </mc:Choice>
+    <mc:Fallback>
+      <p:transition spd="med">
+        <p:push dir="r"/>
+      </p:transition>
+    </mc:Fallback>
+  </mc:AlternateContent>
+</p:sld>
+</file>
+
+<file path=ppt/slides/slide21.xml><?xml version="1.0" encoding="utf-8"?>
+<p:sld xmlns:a="http://schemas.openxmlformats.org/drawingml/2006/main" xmlns:p="http://schemas.openxmlformats.org/presentationml/2006/main" xmlns:r="http://schemas.openxmlformats.org/officeDocument/2006/relationships">
+  <p:cSld>
+    <p:spTree>
+      <p:nvGrpSpPr>
+        <p:cNvPr id="1" name=""/>
+        <p:cNvGrpSpPr/>
+        <p:nvPr/>
+      </p:nvGrpSpPr>
+      <p:grpSpPr/>
+      <p:sp>
+        <p:nvSpPr>
+          <p:cNvPr id="2" name="Rectangle 1"/>
+          <p:cNvSpPr/>
+          <p:nvPr/>
+        </p:nvSpPr>
+        <p:spPr>
+          <a:xfrm>
+            <a:off x="0" y="0"/>
+            <a:ext cx="12191695" cy="6858000"/>
+          </a:xfrm>
+          <a:prstGeom prst="rect">
+            <a:avLst/>
+          </a:prstGeom>
+          <a:solidFill>
+            <a:srgbClr val="FFFFFF"/>
+          </a:solidFill>
+          <a:ln>
+            <a:noFill/>
+          </a:ln>
+          <a:effectLst/>
+        </p:spPr>
+        <p:style>
+          <a:lnRef idx="1">
+            <a:schemeClr val="accent1"/>
+          </a:lnRef>
+          <a:fillRef idx="3">
+            <a:schemeClr val="accent1"/>
+          </a:fillRef>
+          <a:effectRef idx="2">
+            <a:schemeClr val="accent1"/>
+          </a:effectRef>
+          <a:fontRef idx="minor">
+            <a:schemeClr val="lt1"/>
+          </a:fontRef>
+        </p:style>
+        <p:txBody>
+          <a:bodyPr rtlCol="0" anchor="ctr"/>
+          <a:lstStyle/>
+          <a:p>
+            <a:pPr algn="ctr"/>
+          </a:p>
+        </p:txBody>
+      </p:sp>
+      <p:sp>
+        <p:nvSpPr>
+          <p:cNvPr id="3" name="TextBox 2"/>
+          <p:cNvSpPr txBox="1"/>
+          <p:nvPr/>
+        </p:nvSpPr>
+        <p:spPr>
+          <a:xfrm>
+            <a:off x="10607040" y="320040"/>
+            <a:ext cx="1371600" cy="365760"/>
+          </a:xfrm>
+          <a:prstGeom prst="rect">
+            <a:avLst/>
+          </a:prstGeom>
+          <a:noFill/>
+        </p:spPr>
+        <p:txBody>
+          <a:bodyPr wrap="square">
+            <a:spAutoFit/>
+          </a:bodyPr>
+          <a:lstStyle/>
+          <a:p>
+            <a:pPr algn="r"/>
+            <a:r>
+              <a:rPr sz="1000" b="1" i="0">
+                <a:solidFill>
+                  <a:srgbClr val="64748B"/>
+                </a:solidFill>
+                <a:latin typeface="Montserrat"/>
+              </a:rPr>
+              <a:t>021 / 023</a:t>
+            </a:r>
+          </a:p>
+        </p:txBody>
+      </p:sp>
+      <p:sp>
+        <p:nvSpPr>
+          <p:cNvPr id="4" name="TextBox 3"/>
+          <p:cNvSpPr txBox="1"/>
+          <p:nvPr/>
+        </p:nvSpPr>
+        <p:spPr>
+          <a:xfrm>
+            <a:off x="457200" y="6419088"/>
+            <a:ext cx="8229600" cy="365760"/>
+          </a:xfrm>
+          <a:prstGeom prst="rect">
+            <a:avLst/>
+          </a:prstGeom>
+          <a:noFill/>
+        </p:spPr>
+        <p:txBody>
+          <a:bodyPr wrap="square">
+            <a:spAutoFit/>
+          </a:bodyPr>
+          <a:lstStyle/>
+          <a:p>
+            <a:r>
+              <a:rPr sz="900" b="0" i="0">
+                <a:solidFill>
+                  <a:srgbClr val="64748B"/>
+                </a:solidFill>
+                <a:latin typeface="Montserrat"/>
+              </a:rPr>
+              <a:t>Curso Gas B · Tema 10 · UNE 60670-3</a:t>
+            </a:r>
+          </a:p>
+        </p:txBody>
+      </p:sp>
+      <p:sp>
+        <p:nvSpPr>
+          <p:cNvPr id="5" name="Rectangle 4"/>
+          <p:cNvSpPr/>
+          <p:nvPr/>
+        </p:nvSpPr>
+        <p:spPr>
+          <a:xfrm>
+            <a:off x="0" y="0"/>
+            <a:ext cx="12191695" cy="1143000"/>
+          </a:xfrm>
+          <a:prstGeom prst="rect">
+            <a:avLst/>
+          </a:prstGeom>
+          <a:solidFill>
+            <a:srgbClr val="1E8E4B"/>
+          </a:solidFill>
+          <a:ln>
+            <a:noFill/>
+          </a:ln>
+          <a:effectLst/>
+        </p:spPr>
+        <p:style>
+          <a:lnRef idx="1">
+            <a:schemeClr val="accent1"/>
+          </a:lnRef>
+          <a:fillRef idx="3">
+            <a:schemeClr val="accent1"/>
+          </a:fillRef>
+          <a:effectRef idx="2">
+            <a:schemeClr val="accent1"/>
+          </a:effectRef>
+          <a:fontRef idx="minor">
+            <a:schemeClr val="lt1"/>
+          </a:fontRef>
+        </p:style>
+        <p:txBody>
+          <a:bodyPr rtlCol="0" anchor="ctr"/>
+          <a:lstStyle/>
+          <a:p>
+            <a:pPr algn="ctr"/>
+          </a:p>
+        </p:txBody>
+      </p:sp>
+      <p:sp>
+        <p:nvSpPr>
+          <p:cNvPr id="6" name="TextBox 5"/>
+          <p:cNvSpPr txBox="1"/>
+          <p:nvPr/>
+        </p:nvSpPr>
+        <p:spPr>
+          <a:xfrm>
+            <a:off x="822960" y="274320"/>
+            <a:ext cx="10515600" cy="640080"/>
+          </a:xfrm>
+          <a:prstGeom prst="rect">
+            <a:avLst/>
+          </a:prstGeom>
+          <a:noFill/>
+        </p:spPr>
+        <p:txBody>
+          <a:bodyPr wrap="square">
+            <a:spAutoFit/>
+          </a:bodyPr>
+          <a:lstStyle/>
+          <a:p>
+            <a:r>
+              <a:rPr sz="2400" b="1" i="0">
+                <a:solidFill>
+                  <a:srgbClr val="FFFFFF"/>
+                </a:solidFill>
+                <a:latin typeface="Montserrat"/>
+              </a:rPr>
+              <a:t>✔  RESPUESTA:  B</a:t>
+            </a:r>
+          </a:p>
+        </p:txBody>
+      </p:sp>
+      <p:sp>
+        <p:nvSpPr>
+          <p:cNvPr id="7" name="TextBox 6"/>
+          <p:cNvSpPr txBox="1"/>
+          <p:nvPr/>
+        </p:nvSpPr>
+        <p:spPr>
+          <a:xfrm>
+            <a:off x="822960" y="1417320"/>
+            <a:ext cx="10515600" cy="914400"/>
+          </a:xfrm>
+          <a:prstGeom prst="rect">
+            <a:avLst/>
+          </a:prstGeom>
+          <a:noFill/>
+        </p:spPr>
+        <p:txBody>
+          <a:bodyPr wrap="square">
+            <a:spAutoFit/>
+          </a:bodyPr>
+          <a:lstStyle/>
+          <a:p>
+            <a:r>
+              <a:rPr sz="1800" b="1" i="0">
+                <a:solidFill>
+                  <a:srgbClr val="64748B"/>
+                </a:solidFill>
+                <a:latin typeface="Montserrat"/>
+              </a:rPr>
+              <a:t>¿Cuál es la longitud máxima del tubo flexible que conecta el contador de gas?</a:t>
+            </a:r>
+          </a:p>
+        </p:txBody>
+      </p:sp>
+      <p:sp>
+        <p:nvSpPr>
+          <p:cNvPr id="8" name="Rounded Rectangle 7"/>
+          <p:cNvSpPr/>
+          <p:nvPr/>
+        </p:nvSpPr>
+        <p:spPr>
+          <a:xfrm>
+            <a:off x="822960" y="2514600"/>
+            <a:ext cx="10515600" cy="914400"/>
+          </a:xfrm>
+          <a:prstGeom prst="roundRect">
+            <a:avLst/>
+          </a:prstGeom>
+          <a:solidFill>
+            <a:srgbClr val="E9F6EE"/>
+          </a:solidFill>
+          <a:ln w="12700">
+            <a:solidFill>
+              <a:srgbClr val="1E8E4B"/>
+            </a:solidFill>
+          </a:ln>
+          <a:effectLst/>
+        </p:spPr>
+        <p:style>
+          <a:lnRef idx="1">
+            <a:schemeClr val="accent1"/>
+          </a:lnRef>
+          <a:fillRef idx="3">
+            <a:schemeClr val="accent1"/>
+          </a:fillRef>
+          <a:effectRef idx="2">
+            <a:schemeClr val="accent1"/>
+          </a:effectRef>
+          <a:fontRef idx="minor">
+            <a:schemeClr val="lt1"/>
+          </a:fontRef>
+        </p:style>
+        <p:txBody>
+          <a:bodyPr rtlCol="0" anchor="ctr"/>
+          <a:lstStyle/>
+          <a:p>
+            <a:pPr algn="ctr"/>
+          </a:p>
+        </p:txBody>
+      </p:sp>
+      <p:sp>
+        <p:nvSpPr>
+          <p:cNvPr id="9" name="TextBox 8"/>
+          <p:cNvSpPr txBox="1"/>
+          <p:nvPr/>
+        </p:nvSpPr>
+        <p:spPr>
+          <a:xfrm>
+            <a:off x="1097280" y="2697480"/>
+            <a:ext cx="10058400" cy="640080"/>
+          </a:xfrm>
+          <a:prstGeom prst="rect">
+            <a:avLst/>
+          </a:prstGeom>
+          <a:noFill/>
+        </p:spPr>
+        <p:txBody>
+          <a:bodyPr wrap="square">
+            <a:spAutoFit/>
+          </a:bodyPr>
+          <a:lstStyle/>
+          <a:p>
+            <a:r>
+              <a:rPr sz="1800" b="1" i="0">
+                <a:solidFill>
+                  <a:srgbClr val="1E8E4B"/>
+                </a:solidFill>
+                <a:latin typeface="Montserrat"/>
+              </a:rPr>
+              <a:t>B.  </a:t>
+            </a:r>
+            <a:r>
+              <a:rPr sz="1800" b="1" i="0">
+                <a:solidFill>
+                  <a:srgbClr val="1E2761"/>
+                </a:solidFill>
+                <a:latin typeface="Montserrat"/>
+              </a:rPr>
+              <a:t>0,80 m</a:t>
+            </a:r>
+          </a:p>
+        </p:txBody>
+      </p:sp>
+      <p:sp>
+        <p:nvSpPr>
+          <p:cNvPr id="10" name="TextBox 9"/>
+          <p:cNvSpPr txBox="1"/>
+          <p:nvPr/>
+        </p:nvSpPr>
+        <p:spPr>
+          <a:xfrm>
+            <a:off x="822960" y="3749039"/>
+            <a:ext cx="10515600" cy="2194560"/>
+          </a:xfrm>
+          <a:prstGeom prst="rect">
+            <a:avLst/>
+          </a:prstGeom>
+          <a:noFill/>
+        </p:spPr>
+        <p:txBody>
+          <a:bodyPr wrap="square">
+            <a:spAutoFit/>
+          </a:bodyPr>
+          <a:lstStyle/>
+          <a:p>
+            <a:r>
+              <a:rPr sz="1500" b="1" i="0">
+                <a:solidFill>
+                  <a:srgbClr val="E8801A"/>
+                </a:solidFill>
+                <a:latin typeface="Montserrat"/>
+              </a:rPr>
+              <a:t>Por qué:  </a:t>
+            </a:r>
+            <a:r>
+              <a:rPr sz="1500" b="0" i="0">
+                <a:solidFill>
+                  <a:srgbClr val="1B2330"/>
+                </a:solidFill>
+                <a:latin typeface="Montserrat"/>
+              </a:rPr>
+              <a:t>El flexible de acero inoxidable corrugado del contador (UNE 60713) no puede pasar de 0,80 m; un flexible más largo cuelga, se mueve y acaba fallando.</a:t>
+            </a:r>
+          </a:p>
+        </p:txBody>
+      </p:sp>
+    </p:spTree>
+  </p:cSld>
+  <p:clrMapOvr>
+    <a:masterClrMapping/>
+  </p:clrMapOvr>
+  <mc:AlternateContent xmlns:mc="http://schemas.openxmlformats.org/markup-compatibility/2006">
+    <mc:Choice xmlns:p14="http://schemas.microsoft.com/office/powerpoint/2010/main" Requires="p14">
+      <p:transition spd="med" p14:dur="700">
+        <p14:cube dir="l"/>
+      </p:transition>
+    </mc:Choice>
+    <mc:Fallback>
+      <p:transition spd="med">
+        <p:push dir="l"/>
+      </p:transition>
+    </mc:Fallback>
+  </mc:AlternateContent>
+</p:sld>
+</file>
+
+<file path=ppt/slides/slide22.xml><?xml version="1.0" encoding="utf-8"?>
+<p:sld xmlns:a="http://schemas.openxmlformats.org/drawingml/2006/main" xmlns:p="http://schemas.openxmlformats.org/presentationml/2006/main" xmlns:r="http://schemas.openxmlformats.org/officeDocument/2006/relationships">
+  <p:cSld>
+    <p:spTree>
+      <p:nvGrpSpPr>
+        <p:cNvPr id="1" name=""/>
+        <p:cNvGrpSpPr/>
+        <p:nvPr/>
+      </p:nvGrpSpPr>
+      <p:grpSpPr/>
+      <p:sp>
+        <p:nvSpPr>
+          <p:cNvPr id="2" name="Rectangle 1"/>
+          <p:cNvSpPr/>
+          <p:nvPr/>
+        </p:nvSpPr>
+        <p:spPr>
+          <a:xfrm>
+            <a:off x="0" y="0"/>
+            <a:ext cx="12191695" cy="6858000"/>
+          </a:xfrm>
+          <a:prstGeom prst="rect">
+            <a:avLst/>
+          </a:prstGeom>
+          <a:solidFill>
+            <a:srgbClr val="FFFFFF"/>
+          </a:solidFill>
+          <a:ln>
+            <a:noFill/>
+          </a:ln>
+          <a:effectLst/>
+        </p:spPr>
+        <p:style>
+          <a:lnRef idx="1">
+            <a:schemeClr val="accent1"/>
+          </a:lnRef>
+          <a:fillRef idx="3">
+            <a:schemeClr val="accent1"/>
+          </a:fillRef>
+          <a:effectRef idx="2">
+            <a:schemeClr val="accent1"/>
+          </a:effectRef>
+          <a:fontRef idx="minor">
+            <a:schemeClr val="lt1"/>
+          </a:fontRef>
+        </p:style>
+        <p:txBody>
+          <a:bodyPr rtlCol="0" anchor="ctr"/>
+          <a:lstStyle/>
+          <a:p>
+            <a:pPr algn="ctr"/>
+          </a:p>
+        </p:txBody>
+      </p:sp>
+      <p:sp>
+        <p:nvSpPr>
+          <p:cNvPr id="3" name="TextBox 2"/>
+          <p:cNvSpPr txBox="1"/>
+          <p:nvPr/>
+        </p:nvSpPr>
+        <p:spPr>
+          <a:xfrm>
+            <a:off x="10607040" y="320040"/>
+            <a:ext cx="1371600" cy="365760"/>
+          </a:xfrm>
+          <a:prstGeom prst="rect">
+            <a:avLst/>
+          </a:prstGeom>
+          <a:noFill/>
+        </p:spPr>
+        <p:txBody>
+          <a:bodyPr wrap="square">
+            <a:spAutoFit/>
+          </a:bodyPr>
+          <a:lstStyle/>
+          <a:p>
+            <a:pPr algn="r"/>
+            <a:r>
+              <a:rPr sz="1000" b="1" i="0">
+                <a:solidFill>
+                  <a:srgbClr val="64748B"/>
+                </a:solidFill>
+                <a:latin typeface="Montserrat"/>
+              </a:rPr>
+              <a:t>022 / 023</a:t>
+            </a:r>
+          </a:p>
+        </p:txBody>
+      </p:sp>
+      <p:sp>
+        <p:nvSpPr>
+          <p:cNvPr id="4" name="TextBox 3"/>
+          <p:cNvSpPr txBox="1"/>
+          <p:nvPr/>
+        </p:nvSpPr>
+        <p:spPr>
+          <a:xfrm>
+            <a:off x="457200" y="6419088"/>
+            <a:ext cx="8229600" cy="365760"/>
+          </a:xfrm>
+          <a:prstGeom prst="rect">
+            <a:avLst/>
+          </a:prstGeom>
+          <a:noFill/>
+        </p:spPr>
+        <p:txBody>
+          <a:bodyPr wrap="square">
+            <a:spAutoFit/>
+          </a:bodyPr>
+          <a:lstStyle/>
+          <a:p>
+            <a:r>
+              <a:rPr sz="900" b="0" i="0">
+                <a:solidFill>
+                  <a:srgbClr val="64748B"/>
+                </a:solidFill>
+                <a:latin typeface="Montserrat"/>
+              </a:rPr>
+              <a:t>Curso Gas B · Tema 10 · UNE 60670-3</a:t>
+            </a:r>
+          </a:p>
+        </p:txBody>
+      </p:sp>
+      <p:sp>
+        <p:nvSpPr>
+          <p:cNvPr id="5" name="TextBox 4"/>
+          <p:cNvSpPr txBox="1"/>
+          <p:nvPr/>
+        </p:nvSpPr>
+        <p:spPr>
+          <a:xfrm>
+            <a:off x="822960" y="457200"/>
+            <a:ext cx="10058400" cy="365760"/>
+          </a:xfrm>
+          <a:prstGeom prst="rect">
+            <a:avLst/>
+          </a:prstGeom>
+          <a:noFill/>
+        </p:spPr>
+        <p:txBody>
+          <a:bodyPr wrap="square">
+            <a:spAutoFit/>
+          </a:bodyPr>
+          <a:lstStyle/>
+          <a:p>
+            <a:r>
+              <a:rPr sz="1300" b="1" i="0">
+                <a:solidFill>
+                  <a:srgbClr val="E8801A"/>
+                </a:solidFill>
+                <a:latin typeface="Montserrat"/>
+              </a:rPr>
+              <a:t>ELEMENTOS · TOMAS DE PRESIÓN</a:t>
+            </a:r>
+          </a:p>
+        </p:txBody>
+      </p:sp>
+      <p:sp>
+        <p:nvSpPr>
+          <p:cNvPr id="6" name="TextBox 5"/>
+          <p:cNvSpPr txBox="1"/>
+          <p:nvPr/>
+        </p:nvSpPr>
+        <p:spPr>
+          <a:xfrm>
+            <a:off x="822960" y="868680"/>
+            <a:ext cx="10515600" cy="914400"/>
+          </a:xfrm>
+          <a:prstGeom prst="rect">
+            <a:avLst/>
+          </a:prstGeom>
+          <a:noFill/>
+        </p:spPr>
+        <p:txBody>
+          <a:bodyPr wrap="square">
+            <a:spAutoFit/>
+          </a:bodyPr>
+          <a:lstStyle/>
+          <a:p>
+            <a:r>
+              <a:rPr sz="2800" b="1" i="0">
+                <a:solidFill>
+                  <a:srgbClr val="1E2761"/>
+                </a:solidFill>
+                <a:latin typeface="Montserrat"/>
+              </a:rPr>
+              <a:t>El pinchazo para medir</a:t>
+            </a:r>
+          </a:p>
+        </p:txBody>
+      </p:sp>
+      <p:sp>
+        <p:nvSpPr>
+          <p:cNvPr id="7" name="Rectangle 6"/>
+          <p:cNvSpPr/>
+          <p:nvPr/>
+        </p:nvSpPr>
+        <p:spPr>
+          <a:xfrm>
+            <a:off x="868680" y="1627632"/>
+            <a:ext cx="2011680" cy="73152"/>
+          </a:xfrm>
+          <a:prstGeom prst="rect">
+            <a:avLst/>
+          </a:prstGeom>
+          <a:solidFill>
+            <a:srgbClr val="E8801A"/>
+          </a:solidFill>
+          <a:ln>
+            <a:noFill/>
+          </a:ln>
+          <a:effectLst/>
+        </p:spPr>
+        <p:style>
+          <a:lnRef idx="1">
+            <a:schemeClr val="accent1"/>
+          </a:lnRef>
+          <a:fillRef idx="3">
+            <a:schemeClr val="accent1"/>
+          </a:fillRef>
+          <a:effectRef idx="2">
+            <a:schemeClr val="accent1"/>
+          </a:effectRef>
+          <a:fontRef idx="minor">
+            <a:schemeClr val="lt1"/>
+          </a:fontRef>
+        </p:style>
+        <p:txBody>
+          <a:bodyPr rtlCol="0" anchor="ctr"/>
+          <a:lstStyle/>
+          <a:p>
+            <a:pPr algn="ctr"/>
+          </a:p>
+        </p:txBody>
+      </p:sp>
+      <p:sp>
+        <p:nvSpPr>
+          <p:cNvPr id="8" name="TextBox 7"/>
+          <p:cNvSpPr txBox="1"/>
+          <p:nvPr/>
+        </p:nvSpPr>
+        <p:spPr>
+          <a:xfrm>
+            <a:off x="6355080" y="1965960"/>
+            <a:ext cx="5029200" cy="4206240"/>
+          </a:xfrm>
+          <a:prstGeom prst="rect">
+            <a:avLst/>
+          </a:prstGeom>
+          <a:noFill/>
+        </p:spPr>
+        <p:txBody>
+          <a:bodyPr wrap="square">
+            <a:spAutoFit/>
+          </a:bodyPr>
+          <a:lstStyle/>
+          <a:p>
+            <a:pPr>
+              <a:spcAft>
+                <a:spcPts val="1100"/>
+              </a:spcAft>
+            </a:pPr>
+            <a:r>
+              <a:rPr sz="1600" b="1" i="0">
+                <a:solidFill>
+                  <a:srgbClr val="E8801A"/>
+                </a:solidFill>
+                <a:latin typeface="Montserrat"/>
+              </a:rPr>
+              <a:t>▸  </a:t>
+            </a:r>
+            <a:r>
+              <a:rPr sz="1600" b="0" i="0">
+                <a:solidFill>
+                  <a:srgbClr val="1B2330"/>
+                </a:solidFill>
+                <a:latin typeface="Montserrat"/>
+              </a:rPr>
+              <a:t>Depende de la MOP del tramo (UNE 60719)</a:t>
+            </a:r>
+          </a:p>
+          <a:p>
+            <a:pPr>
+              <a:spcAft>
+                <a:spcPts val="1100"/>
+              </a:spcAft>
+            </a:pPr>
+            <a:r>
+              <a:rPr sz="1600" b="1" i="0">
+                <a:solidFill>
+                  <a:srgbClr val="E8801A"/>
+                </a:solidFill>
+                <a:latin typeface="Montserrat"/>
+              </a:rPr>
+              <a:t>▸  </a:t>
+            </a:r>
+            <a:r>
+              <a:rPr sz="1600" b="0" i="0">
+                <a:solidFill>
+                  <a:srgbClr val="1B2330"/>
+                </a:solidFill>
+                <a:latin typeface="Montserrat"/>
+              </a:rPr>
+              <a:t>≤ 150 mbar: débil calibre o Peterson</a:t>
+            </a:r>
+          </a:p>
+          <a:p>
+            <a:pPr>
+              <a:spcAft>
+                <a:spcPts val="1100"/>
+              </a:spcAft>
+            </a:pPr>
+            <a:r>
+              <a:rPr sz="1600" b="1" i="0">
+                <a:solidFill>
+                  <a:srgbClr val="E8801A"/>
+                </a:solidFill>
+                <a:latin typeface="Montserrat"/>
+              </a:rPr>
+              <a:t>▸  </a:t>
+            </a:r>
+            <a:r>
+              <a:rPr sz="1600" b="0" i="0">
+                <a:solidFill>
+                  <a:srgbClr val="1B2330"/>
+                </a:solidFill>
+                <a:latin typeface="Montserrat"/>
+              </a:rPr>
+              <a:t>&gt; 150 mbar: solo Peterson</a:t>
+            </a:r>
+          </a:p>
+          <a:p>
+            <a:pPr>
+              <a:spcAft>
+                <a:spcPts val="1100"/>
+              </a:spcAft>
+            </a:pPr>
+            <a:r>
+              <a:rPr sz="1600" b="1" i="0">
+                <a:solidFill>
+                  <a:srgbClr val="E8801A"/>
+                </a:solidFill>
+                <a:latin typeface="Montserrat"/>
+              </a:rPr>
+              <a:t>▸  </a:t>
+            </a:r>
+            <a:r>
+              <a:rPr sz="1600" b="0" i="0">
+                <a:solidFill>
+                  <a:srgbClr val="1B2330"/>
+                </a:solidFill>
+                <a:latin typeface="Montserrat"/>
+              </a:rPr>
+              <a:t>150 mbar = 0,15 bar de la escalera</a:t>
+            </a:r>
+          </a:p>
+        </p:txBody>
+      </p:sp>
+      <p:sp>
+        <p:nvSpPr>
+          <p:cNvPr id="9" name="imgph" descr="IMGQ:gas pressure test point gauge measure"/>
+          <p:cNvSpPr/>
+          <p:nvPr/>
+        </p:nvSpPr>
+        <p:spPr>
+          <a:xfrm>
+            <a:off x="822960" y="1965960"/>
+            <a:ext cx="5303520" cy="4572000"/>
+          </a:xfrm>
+          <a:prstGeom prst="roundRect">
+            <a:avLst/>
+          </a:prstGeom>
+          <a:solidFill>
+            <a:srgbClr val="F3F6FB"/>
+          </a:solidFill>
+          <a:ln w="12700">
+            <a:solidFill>
+              <a:srgbClr val="C7D2E6"/>
+            </a:solidFill>
+          </a:ln>
+          <a:effectLst/>
+        </p:spPr>
+        <p:style>
+          <a:lnRef idx="1">
+            <a:schemeClr val="accent1"/>
+          </a:lnRef>
+          <a:fillRef idx="3">
+            <a:schemeClr val="accent1"/>
+          </a:fillRef>
+          <a:effectRef idx="2">
+            <a:schemeClr val="accent1"/>
+          </a:effectRef>
+          <a:fontRef idx="minor">
+            <a:schemeClr val="lt1"/>
+          </a:fontRef>
+        </p:style>
+        <p:txBody>
+          <a:bodyPr rtlCol="0" anchor="ctr"/>
+          <a:lstStyle/>
+          <a:p>
+            <a:pPr algn="ctr"/>
+          </a:p>
+        </p:txBody>
+      </p:sp>
+      <p:sp>
+        <p:nvSpPr>
+          <p:cNvPr id="10" name="TextBox 9"/>
+          <p:cNvSpPr txBox="1"/>
+          <p:nvPr/>
+        </p:nvSpPr>
+        <p:spPr>
+          <a:xfrm>
+            <a:off x="1097280" y="3611880"/>
+            <a:ext cx="4754880" cy="1280160"/>
+          </a:xfrm>
+          <a:prstGeom prst="rect">
+            <a:avLst/>
+          </a:prstGeom>
+          <a:noFill/>
+        </p:spPr>
+        <p:txBody>
+          <a:bodyPr wrap="square">
+            <a:spAutoFit/>
+          </a:bodyPr>
+          <a:lstStyle/>
+          <a:p>
+            <a:pPr algn="ctr"/>
+            <a:r>
+              <a:rPr sz="1400" b="1" i="0">
+                <a:solidFill>
+                  <a:srgbClr val="64748B"/>
+                </a:solidFill>
+                <a:latin typeface="Montserrat"/>
+              </a:rPr>
+              <a:t>IMAGEN</a:t>
+            </a:r>
+          </a:p>
+          <a:p>
+            <a:pPr algn="ctr"/>
+            <a:r>
+              <a:rPr sz="1100" b="0" i="1">
+                <a:solidFill>
+                  <a:srgbClr val="64748B"/>
+                </a:solidFill>
+                <a:latin typeface="Montserrat"/>
+              </a:rPr>
+              <a:t>gas pressure test point gauge measure</a:t>
+            </a:r>
+          </a:p>
+        </p:txBody>
+      </p:sp>
+    </p:spTree>
+  </p:cSld>
+  <p:clrMapOvr>
+    <a:masterClrMapping/>
+  </p:clrMapOvr>
+  <mc:AlternateContent xmlns:mc="http://schemas.openxmlformats.org/markup-compatibility/2006">
+    <mc:Choice xmlns:p14="http://schemas.microsoft.com/office/powerpoint/2010/main" Requires="p14">
+      <p:transition spd="med" p14:dur="700">
+        <p14:cube dir="r"/>
+      </p:transition>
+    </mc:Choice>
+    <mc:Fallback>
+      <p:transition spd="med">
+        <p:push dir="r"/>
+      </p:transition>
+    </mc:Fallback>
+  </mc:AlternateContent>
+</p:sld>
+</file>
+
+<file path=ppt/slides/slide23.xml><?xml version="1.0" encoding="utf-8"?>
+<p:sld xmlns:a="http://schemas.openxmlformats.org/drawingml/2006/main" xmlns:p="http://schemas.openxmlformats.org/presentationml/2006/main" xmlns:r="http://schemas.openxmlformats.org/officeDocument/2006/relationships">
+  <p:cSld>
+    <p:spTree>
+      <p:nvGrpSpPr>
+        <p:cNvPr id="1" name=""/>
+        <p:cNvGrpSpPr/>
+        <p:nvPr/>
+      </p:nvGrpSpPr>
+      <p:grpSpPr/>
+      <p:sp>
+        <p:nvSpPr>
+          <p:cNvPr id="2" name="Rectangle 1"/>
+          <p:cNvSpPr/>
+          <p:nvPr/>
+        </p:nvSpPr>
+        <p:spPr>
+          <a:xfrm>
+            <a:off x="0" y="0"/>
+            <a:ext cx="12191695" cy="6858000"/>
+          </a:xfrm>
+          <a:prstGeom prst="rect">
+            <a:avLst/>
+          </a:prstGeom>
+          <a:solidFill>
+            <a:srgbClr val="1E2761"/>
+          </a:solidFill>
+          <a:ln>
+            <a:noFill/>
+          </a:ln>
+          <a:effectLst/>
+        </p:spPr>
+        <p:style>
+          <a:lnRef idx="1">
+            <a:schemeClr val="accent1"/>
+          </a:lnRef>
+          <a:fillRef idx="3">
+            <a:schemeClr val="accent1"/>
+          </a:fillRef>
+          <a:effectRef idx="2">
+            <a:schemeClr val="accent1"/>
+          </a:effectRef>
+          <a:fontRef idx="minor">
+            <a:schemeClr val="lt1"/>
+          </a:fontRef>
+        </p:style>
+        <p:txBody>
+          <a:bodyPr rtlCol="0" anchor="ctr"/>
+          <a:lstStyle/>
+          <a:p>
+            <a:pPr algn="ctr"/>
+          </a:p>
+        </p:txBody>
+      </p:sp>
+      <p:sp>
+        <p:nvSpPr>
+          <p:cNvPr id="3" name="TextBox 2"/>
+          <p:cNvSpPr txBox="1"/>
+          <p:nvPr/>
+        </p:nvSpPr>
+        <p:spPr>
+          <a:xfrm>
+            <a:off x="822960" y="640080"/>
+            <a:ext cx="10515600" cy="457200"/>
+          </a:xfrm>
+          <a:prstGeom prst="rect">
+            <a:avLst/>
+          </a:prstGeom>
+          <a:noFill/>
+        </p:spPr>
+        <p:txBody>
+          <a:bodyPr wrap="square">
+            <a:spAutoFit/>
+          </a:bodyPr>
+          <a:lstStyle/>
+          <a:p>
+            <a:r>
+              <a:rPr sz="1400" b="1" i="0">
+                <a:solidFill>
+                  <a:srgbClr val="F4A24C"/>
+                </a:solidFill>
+                <a:latin typeface="Montserrat"/>
+              </a:rPr>
+              <a:t>LO QUE YA DOMINAS</a:t>
+            </a:r>
+          </a:p>
+        </p:txBody>
+      </p:sp>
+      <p:sp>
+        <p:nvSpPr>
+          <p:cNvPr id="4" name="Rectangle 3"/>
+          <p:cNvSpPr/>
+          <p:nvPr/>
+        </p:nvSpPr>
+        <p:spPr>
+          <a:xfrm>
+            <a:off x="868680" y="1051560"/>
+            <a:ext cx="1463040" cy="82296"/>
+          </a:xfrm>
+          <a:prstGeom prst="rect">
+            <a:avLst/>
+          </a:prstGeom>
+          <a:solidFill>
+            <a:srgbClr val="E8801A"/>
+          </a:solidFill>
+          <a:ln>
+            <a:noFill/>
+          </a:ln>
+          <a:effectLst/>
+        </p:spPr>
+        <p:style>
+          <a:lnRef idx="1">
+            <a:schemeClr val="accent1"/>
+          </a:lnRef>
+          <a:fillRef idx="3">
+            <a:schemeClr val="accent1"/>
+          </a:fillRef>
+          <a:effectRef idx="2">
+            <a:schemeClr val="accent1"/>
+          </a:effectRef>
+          <a:fontRef idx="minor">
+            <a:schemeClr val="lt1"/>
+          </a:fontRef>
+        </p:style>
+        <p:txBody>
+          <a:bodyPr rtlCol="0" anchor="ctr"/>
+          <a:lstStyle/>
+          <a:p>
+            <a:pPr algn="ctr"/>
+          </a:p>
+        </p:txBody>
+      </p:sp>
+      <p:sp>
+        <p:nvSpPr>
+          <p:cNvPr id="5" name="TextBox 4"/>
+          <p:cNvSpPr txBox="1"/>
+          <p:nvPr/>
+        </p:nvSpPr>
+        <p:spPr>
+          <a:xfrm>
+            <a:off x="822960" y="1234440"/>
+            <a:ext cx="10515600" cy="1097280"/>
+          </a:xfrm>
+          <a:prstGeom prst="rect">
+            <a:avLst/>
+          </a:prstGeom>
+          <a:noFill/>
+        </p:spPr>
+        <p:txBody>
+          <a:bodyPr wrap="square">
+            <a:spAutoFit/>
+          </a:bodyPr>
+          <a:lstStyle/>
+          <a:p>
+            <a:r>
+              <a:rPr sz="3400" b="1" i="0">
+                <a:solidFill>
+                  <a:srgbClr val="FFFFFF"/>
+                </a:solidFill>
+                <a:latin typeface="Montserrat"/>
+              </a:rPr>
+              <a:t>Ya conoces cada pieza del gas</a:t>
+            </a:r>
+          </a:p>
+        </p:txBody>
+      </p:sp>
+      <p:sp>
+        <p:nvSpPr>
+          <p:cNvPr id="6" name="TextBox 5"/>
+          <p:cNvSpPr txBox="1"/>
+          <p:nvPr/>
+        </p:nvSpPr>
+        <p:spPr>
+          <a:xfrm>
+            <a:off x="822960" y="2606040"/>
+            <a:ext cx="10515600" cy="2743200"/>
+          </a:xfrm>
+          <a:prstGeom prst="rect">
+            <a:avLst/>
+          </a:prstGeom>
+          <a:noFill/>
+        </p:spPr>
+        <p:txBody>
+          <a:bodyPr wrap="square">
+            <a:spAutoFit/>
+          </a:bodyPr>
+          <a:lstStyle/>
+          <a:p>
+            <a:pPr>
+              <a:spcAft>
+                <a:spcPts val="1200"/>
+              </a:spcAft>
+            </a:pPr>
+            <a:r>
+              <a:rPr sz="2000" b="1" i="0">
+                <a:solidFill>
+                  <a:srgbClr val="F4A24C"/>
+                </a:solidFill>
+                <a:latin typeface="Montserrat"/>
+              </a:rPr>
+              <a:t>✓  </a:t>
+            </a:r>
+            <a:r>
+              <a:rPr sz="1900" b="0" i="0">
+                <a:solidFill>
+                  <a:srgbClr val="FFFFFF"/>
+                </a:solidFill>
+                <a:latin typeface="Montserrat"/>
+              </a:rPr>
+              <a:t>Escalera 5 – 2 – 0,4 – 0,15 – 0,05 bar</a:t>
+            </a:r>
+          </a:p>
+          <a:p>
+            <a:pPr>
+              <a:spcAft>
+                <a:spcPts val="1200"/>
+              </a:spcAft>
+            </a:pPr>
+            <a:r>
+              <a:rPr sz="2000" b="1" i="0">
+                <a:solidFill>
+                  <a:srgbClr val="F4A24C"/>
+                </a:solidFill>
+                <a:latin typeface="Montserrat"/>
+              </a:rPr>
+              <a:t>✓  </a:t>
+            </a:r>
+            <a:r>
+              <a:rPr sz="1900" b="0" i="0">
+                <a:solidFill>
+                  <a:srgbClr val="FFFFFF"/>
+                </a:solidFill>
+                <a:latin typeface="Montserrat"/>
+              </a:rPr>
+              <a:t>Reguladores por escalón; GLP en los 15 kg</a:t>
+            </a:r>
+          </a:p>
+          <a:p>
+            <a:pPr>
+              <a:spcAft>
+                <a:spcPts val="1200"/>
+              </a:spcAft>
+            </a:pPr>
+            <a:r>
+              <a:rPr sz="2000" b="1" i="0">
+                <a:solidFill>
+                  <a:srgbClr val="F4A24C"/>
+                </a:solidFill>
+                <a:latin typeface="Montserrat"/>
+              </a:rPr>
+              <a:t>✓  </a:t>
+            </a:r>
+            <a:r>
+              <a:rPr sz="1900" b="0" i="0">
+                <a:solidFill>
+                  <a:srgbClr val="FFFFFF"/>
+                </a:solidFill>
+                <a:latin typeface="Montserrat"/>
+              </a:rPr>
+              <a:t>Dos guardianes: mínima y máxima</a:t>
+            </a:r>
+          </a:p>
+          <a:p>
+            <a:pPr>
+              <a:spcAft>
+                <a:spcPts val="1200"/>
+              </a:spcAft>
+            </a:pPr>
+            <a:r>
+              <a:rPr sz="2000" b="1" i="0">
+                <a:solidFill>
+                  <a:srgbClr val="F4A24C"/>
+                </a:solidFill>
+                <a:latin typeface="Montserrat"/>
+              </a:rPr>
+              <a:t>✓  </a:t>
+            </a:r>
+            <a:r>
+              <a:rPr sz="1900" b="0" i="0">
+                <a:solidFill>
+                  <a:srgbClr val="FFFFFF"/>
+                </a:solidFill>
+                <a:latin typeface="Montserrat"/>
+              </a:rPr>
+              <a:t>Contador: flexible de 0,80 m como mucho</a:t>
+            </a:r>
+          </a:p>
+        </p:txBody>
+      </p:sp>
+      <p:sp>
+        <p:nvSpPr>
+          <p:cNvPr id="7" name="Rounded Rectangle 6"/>
+          <p:cNvSpPr/>
+          <p:nvPr/>
+        </p:nvSpPr>
+        <p:spPr>
+          <a:xfrm>
+            <a:off x="822960" y="5532120"/>
+            <a:ext cx="10515600" cy="822960"/>
+          </a:xfrm>
+          <a:prstGeom prst="roundRect">
+            <a:avLst/>
+          </a:prstGeom>
+          <a:solidFill>
+            <a:srgbClr val="E8801A"/>
+          </a:solidFill>
+          <a:ln>
+            <a:noFill/>
+          </a:ln>
+          <a:effectLst/>
+        </p:spPr>
+        <p:style>
+          <a:lnRef idx="1">
+            <a:schemeClr val="accent1"/>
+          </a:lnRef>
+          <a:fillRef idx="3">
+            <a:schemeClr val="accent1"/>
+          </a:fillRef>
+          <a:effectRef idx="2">
+            <a:schemeClr val="accent1"/>
+          </a:effectRef>
+          <a:fontRef idx="minor">
+            <a:schemeClr val="lt1"/>
+          </a:fontRef>
+        </p:style>
+        <p:txBody>
+          <a:bodyPr rtlCol="0" anchor="ctr"/>
+          <a:lstStyle/>
+          <a:p>
+            <a:pPr algn="ctr"/>
+          </a:p>
+        </p:txBody>
+      </p:sp>
+      <p:sp>
+        <p:nvSpPr>
+          <p:cNvPr id="8" name="TextBox 7"/>
+          <p:cNvSpPr txBox="1"/>
+          <p:nvPr/>
+        </p:nvSpPr>
+        <p:spPr>
+          <a:xfrm>
+            <a:off x="1051560" y="5623560"/>
+            <a:ext cx="10058400" cy="640080"/>
+          </a:xfrm>
+          <a:prstGeom prst="rect">
+            <a:avLst/>
+          </a:prstGeom>
+          <a:noFill/>
+        </p:spPr>
+        <p:txBody>
+          <a:bodyPr wrap="square">
+            <a:spAutoFit/>
+          </a:bodyPr>
+          <a:lstStyle/>
+          <a:p>
+            <a:r>
+              <a:rPr sz="1500" b="1" i="1">
+                <a:solidFill>
+                  <a:srgbClr val="1E2761"/>
+                </a:solidFill>
+                <a:latin typeface="Montserrat"/>
+              </a:rPr>
+              <a:t>Con los elementos dominados, solo falta lo que los mantiene sin fugas: las uniones.</a:t>
+            </a:r>
+          </a:p>
+        </p:txBody>
+      </p:sp>
+    </p:spTree>
+  </p:cSld>
+  <p:clrMapOvr>
+    <a:masterClrMapping/>
+  </p:clrMapOvr>
+  <mc:AlternateContent xmlns:mc="http://schemas.openxmlformats.org/markup-compatibility/2006">
+    <mc:Choice xmlns:p14="http://schemas.microsoft.com/office/powerpoint/2010/main" Requires="p14">
+      <p:transition spd="med" p14:dur="700">
+        <p14:cube dir="l"/>
+      </p:transition>
+    </mc:Choice>
+    <mc:Fallback>
+      <p:transition spd="med">
+        <p:push dir="l"/>
+      </p:transition>
+    </mc:Fallback>
+  </mc:AlternateContent>
 </p:sld>
 </file>
 
@@ -8633,7 +13374,7 @@
                 </a:solidFill>
                 <a:latin typeface="Montserrat"/>
               </a:rPr>
-              <a:t>003 / 016</a:t>
+              <a:t>003 / 023</a:t>
             </a:r>
           </a:p>
         </p:txBody>
@@ -8742,7 +13483,7 @@
       </p:sp>
       <p:sp>
         <p:nvSpPr>
-          <p:cNvPr id="7" name="Rounded Rectangle 6"/>
+          <p:cNvPr id="7" name="Rectangle 6"/>
           <p:cNvSpPr/>
           <p:nvPr/>
         </p:nvSpPr>
@@ -8751,7 +13492,7 @@
             <a:off x="868680" y="1673352"/>
             <a:ext cx="2011680" cy="73152"/>
           </a:xfrm>
-          <a:prstGeom prst="roundRect">
+          <a:prstGeom prst="rect">
             <a:avLst/>
           </a:prstGeom>
           <a:solidFill>
@@ -8937,6 +13678,18 @@
   <p:clrMapOvr>
     <a:masterClrMapping/>
   </p:clrMapOvr>
+  <mc:AlternateContent xmlns:mc="http://schemas.openxmlformats.org/markup-compatibility/2006">
+    <mc:Choice xmlns:p14="http://schemas.microsoft.com/office/powerpoint/2010/main" Requires="p14">
+      <p:transition spd="med" p14:dur="700">
+        <p14:cube dir="l"/>
+      </p:transition>
+    </mc:Choice>
+    <mc:Fallback>
+      <p:transition spd="med">
+        <p:push dir="l"/>
+      </p:transition>
+    </mc:Fallback>
+  </mc:AlternateContent>
 </p:sld>
 </file>
 
@@ -9024,7 +13777,7 @@
                 </a:solidFill>
                 <a:latin typeface="Montserrat"/>
               </a:rPr>
-              <a:t>004 / 016</a:t>
+              <a:t>004 / 023</a:t>
             </a:r>
           </a:p>
         </p:txBody>
@@ -9133,7 +13886,7 @@
       </p:sp>
       <p:sp>
         <p:nvSpPr>
-          <p:cNvPr id="7" name="Rounded Rectangle 6"/>
+          <p:cNvPr id="7" name="Rectangle 6"/>
           <p:cNvSpPr/>
           <p:nvPr/>
         </p:nvSpPr>
@@ -9142,7 +13895,7 @@
             <a:off x="868680" y="1627632"/>
             <a:ext cx="2011680" cy="73152"/>
           </a:xfrm>
-          <a:prstGeom prst="roundRect">
+          <a:prstGeom prst="rect">
             <a:avLst/>
           </a:prstGeom>
           <a:solidFill>
@@ -9184,7 +13937,7 @@
         <p:spPr>
           <a:xfrm>
             <a:off x="822960" y="1965960"/>
-            <a:ext cx="4983480" cy="4206240"/>
+            <a:ext cx="5029200" cy="4206240"/>
           </a:xfrm>
           <a:prstGeom prst="rect">
             <a:avLst/>
@@ -9306,8 +14059,8 @@
         </p:nvSpPr>
         <p:spPr>
           <a:xfrm>
-            <a:off x="5806440" y="1051560"/>
-            <a:ext cx="5298947" cy="4629150"/>
+            <a:off x="6080760" y="1965960"/>
+            <a:ext cx="5303520" cy="4572000"/>
           </a:xfrm>
           <a:prstGeom prst="roundRect">
             <a:avLst/>
@@ -9352,8 +14105,8 @@
         </p:nvSpPr>
         <p:spPr>
           <a:xfrm>
-            <a:off x="6080760" y="2726055"/>
-            <a:ext cx="4750307" cy="1280160"/>
+            <a:off x="6355080" y="3611880"/>
+            <a:ext cx="4754880" cy="1280160"/>
           </a:xfrm>
           <a:prstGeom prst="rect">
             <a:avLst/>
@@ -9374,7 +14127,7 @@
                 </a:solidFill>
                 <a:latin typeface="Montserrat"/>
               </a:rPr>
-              <a:t>IMAGEN REALISTA</a:t>
+              <a:t>IMAGEN</a:t>
             </a:r>
           </a:p>
           <a:p>
@@ -9396,6 +14149,18 @@
   <p:clrMapOvr>
     <a:masterClrMapping/>
   </p:clrMapOvr>
+  <mc:AlternateContent xmlns:mc="http://schemas.openxmlformats.org/markup-compatibility/2006">
+    <mc:Choice xmlns:p14="http://schemas.microsoft.com/office/powerpoint/2010/main" Requires="p14">
+      <p:transition spd="med" p14:dur="700">
+        <p14:cube dir="r"/>
+      </p:transition>
+    </mc:Choice>
+    <mc:Fallback>
+      <p:transition spd="med">
+        <p:push dir="r"/>
+      </p:transition>
+    </mc:Fallback>
+  </mc:AlternateContent>
 </p:sld>
 </file>
 
@@ -9483,7 +14248,7 @@
                 </a:solidFill>
                 <a:latin typeface="Montserrat"/>
               </a:rPr>
-              <a:t>005 / 016</a:t>
+              <a:t>005 / 023</a:t>
             </a:r>
           </a:p>
         </p:txBody>
@@ -9530,7 +14295,7 @@
         </p:nvSpPr>
         <p:spPr>
           <a:xfrm>
-            <a:off x="822960" y="457200"/>
+            <a:off x="822960" y="411480"/>
             <a:ext cx="10058400" cy="365760"/>
           </a:xfrm>
           <a:prstGeom prst="rect">
@@ -9551,7 +14316,7 @@
                 </a:solidFill>
                 <a:latin typeface="Montserrat"/>
               </a:rPr>
-              <a:t>ELEMENTOS · TALLOS</a:t>
+              <a:t>DISEÑO · TRAMOS DE PRESIÓN</a:t>
             </a:r>
           </a:p>
         </p:txBody>
@@ -9564,8 +14329,8 @@
         </p:nvSpPr>
         <p:spPr>
           <a:xfrm>
-            <a:off x="822960" y="868680"/>
-            <a:ext cx="10515600" cy="914400"/>
+            <a:off x="822960" y="777240"/>
+            <a:ext cx="10515600" cy="822960"/>
           </a:xfrm>
           <a:prstGeom prst="rect">
             <a:avLst/>
@@ -9579,29 +14344,29 @@
           <a:lstStyle/>
           <a:p>
             <a:r>
-              <a:rPr sz="2800" b="1" i="0">
+              <a:rPr sz="2600" b="1" i="0">
                 <a:solidFill>
                   <a:srgbClr val="1E2761"/>
                 </a:solidFill>
                 <a:latin typeface="Montserrat"/>
               </a:rPr>
-              <a:t>El tallo: de la calle a la casa</a:t>
-            </a:r>
-          </a:p>
-        </p:txBody>
-      </p:sp>
-      <p:sp>
-        <p:nvSpPr>
-          <p:cNvPr id="7" name="Rounded Rectangle 6"/>
+              <a:t>Denominación de los tramos por su MOP</a:t>
+            </a:r>
+          </a:p>
+        </p:txBody>
+      </p:sp>
+      <p:sp>
+        <p:nvSpPr>
+          <p:cNvPr id="7" name="Rectangle 6"/>
           <p:cNvSpPr/>
           <p:nvPr/>
         </p:nvSpPr>
         <p:spPr>
           <a:xfrm>
-            <a:off x="868680" y="1627632"/>
+            <a:off x="868680" y="1481328"/>
             <a:ext cx="2011680" cy="73152"/>
           </a:xfrm>
-          <a:prstGeom prst="roundRect">
+          <a:prstGeom prst="rect">
             <a:avLst/>
           </a:prstGeom>
           <a:solidFill>
@@ -9634,139 +14399,318 @@
           </a:p>
         </p:txBody>
       </p:sp>
-      <p:sp>
-        <p:nvSpPr>
-          <p:cNvPr id="8" name="TextBox 7"/>
-          <p:cNvSpPr txBox="1"/>
-          <p:nvPr/>
-        </p:nvSpPr>
-        <p:spPr>
-          <a:xfrm>
-            <a:off x="822960" y="1965960"/>
-            <a:ext cx="4983480" cy="4206240"/>
-          </a:xfrm>
-          <a:prstGeom prst="rect">
-            <a:avLst/>
-          </a:prstGeom>
-          <a:noFill/>
-        </p:spPr>
-        <p:txBody>
-          <a:bodyPr wrap="square">
-            <a:spAutoFit/>
-          </a:bodyPr>
-          <a:lstStyle/>
-          <a:p>
-            <a:pPr>
-              <a:spcAft>
-                <a:spcPts val="1100"/>
-              </a:spcAft>
-            </a:pPr>
-            <a:r>
-              <a:rPr sz="1600" b="1" i="0">
-                <a:solidFill>
-                  <a:srgbClr val="E8801A"/>
-                </a:solidFill>
-                <a:latin typeface="Montserrat"/>
-              </a:rPr>
-              <a:t>▸  </a:t>
-            </a:r>
-            <a:r>
-              <a:rPr sz="1600" b="0" i="0">
-                <a:solidFill>
-                  <a:srgbClr val="1B2330"/>
-                </a:solidFill>
-                <a:latin typeface="Montserrat"/>
-              </a:rPr>
-              <a:t>Une el PE enterrado con el metal visto</a:t>
-            </a:r>
-          </a:p>
-          <a:p>
-            <a:pPr>
-              <a:spcAft>
-                <a:spcPts val="1100"/>
-              </a:spcAft>
-            </a:pPr>
-            <a:r>
-              <a:rPr sz="1600" b="1" i="0">
-                <a:solidFill>
-                  <a:srgbClr val="E8801A"/>
-                </a:solidFill>
-                <a:latin typeface="Montserrat"/>
-              </a:rPr>
-              <a:t>▸  </a:t>
-            </a:r>
-            <a:r>
-              <a:rPr sz="1600" b="0" i="0">
-                <a:solidFill>
-                  <a:srgbClr val="1B2330"/>
-                </a:solidFill>
-                <a:latin typeface="Montserrat"/>
-              </a:rPr>
-              <a:t>Norma UNE 60405</a:t>
-            </a:r>
-          </a:p>
-          <a:p>
-            <a:pPr>
-              <a:spcAft>
-                <a:spcPts val="1100"/>
-              </a:spcAft>
-            </a:pPr>
-            <a:r>
-              <a:rPr sz="1600" b="1" i="0">
-                <a:solidFill>
-                  <a:srgbClr val="E8801A"/>
-                </a:solidFill>
-                <a:latin typeface="Montserrat"/>
-              </a:rPr>
-              <a:t>▸  </a:t>
-            </a:r>
-            <a:r>
-              <a:rPr sz="1600" b="0" i="0">
-                <a:solidFill>
-                  <a:srgbClr val="1B2330"/>
-                </a:solidFill>
-                <a:latin typeface="Montserrat"/>
-              </a:rPr>
-              <a:t>PE-cobre, -acero, -inox o -multicapa</a:t>
-            </a:r>
-          </a:p>
-          <a:p>
-            <a:pPr>
-              <a:spcAft>
-                <a:spcPts val="1100"/>
-              </a:spcAft>
-            </a:pPr>
-            <a:r>
-              <a:rPr sz="1600" b="1" i="0">
-                <a:solidFill>
-                  <a:srgbClr val="E8801A"/>
-                </a:solidFill>
-                <a:latin typeface="Montserrat"/>
-              </a:rPr>
-              <a:t>▸  </a:t>
-            </a:r>
-            <a:r>
-              <a:rPr sz="1600" b="0" i="0">
-                <a:solidFill>
-                  <a:srgbClr val="1B2330"/>
-                </a:solidFill>
-                <a:latin typeface="Montserrat"/>
-              </a:rPr>
-              <a:t>El PE, siempre protegido del sol</a:t>
-            </a:r>
-          </a:p>
-        </p:txBody>
-      </p:sp>
-      <p:sp>
-        <p:nvSpPr>
-          <p:cNvPr id="9" name="imgph" descr="IMGQ:gas service pipe transition fitting ground"/>
+      <p:graphicFrame>
+        <p:nvGraphicFramePr>
+          <p:cNvPr id="8" name="Table 7"/>
+          <p:cNvGraphicFramePr>
+            <a:graphicFrameLocks noGrp="1"/>
+          </p:cNvGraphicFramePr>
+          <p:nvPr/>
+        </p:nvGraphicFramePr>
+        <p:xfrm>
+          <a:off x="548640" y="1783080"/>
+          <a:ext cx="11091672" cy="4023360"/>
+        </p:xfrm>
+        <a:graphic>
+          <a:graphicData uri="http://schemas.openxmlformats.org/drawingml/2006/table">
+            <a:tbl>
+              <a:tblPr firstRow="1" bandRow="1">
+                <a:tableStyleId>{5C22544A-7EE6-4342-B048-85BDC9FD1C3A}</a:tableStyleId>
+              </a:tblPr>
+              <a:tblGrid>
+                <a:gridCol w="5545836"/>
+                <a:gridCol w="5545836"/>
+              </a:tblGrid>
+              <a:tr h="670560">
+                <a:tc>
+                  <a:txBody>
+                    <a:bodyPr/>
+                    <a:lstStyle/>
+                    <a:p>
+                      <a:r>
+                        <a:rPr sz="1200" b="1" i="0">
+                          <a:solidFill>
+                            <a:srgbClr val="FFFFFF"/>
+                          </a:solidFill>
+                          <a:latin typeface="Montserrat"/>
+                        </a:rPr>
+                        <a:t>Presión del tramo (bar)</a:t>
+                      </a:r>
+                    </a:p>
+                  </a:txBody>
+                  <a:tcPr>
+                    <a:solidFill>
+                      <a:srgbClr val="1E2761"/>
+                    </a:solidFill>
+                  </a:tcPr>
+                </a:tc>
+                <a:tc>
+                  <a:txBody>
+                    <a:bodyPr/>
+                    <a:lstStyle/>
+                    <a:p>
+                      <a:r>
+                        <a:rPr sz="1200" b="1" i="0">
+                          <a:solidFill>
+                            <a:srgbClr val="FFFFFF"/>
+                          </a:solidFill>
+                          <a:latin typeface="Montserrat"/>
+                        </a:rPr>
+                        <a:t>Denominación</a:t>
+                      </a:r>
+                    </a:p>
+                  </a:txBody>
+                  <a:tcPr>
+                    <a:solidFill>
+                      <a:srgbClr val="1E2761"/>
+                    </a:solidFill>
+                  </a:tcPr>
+                </a:tc>
+              </a:tr>
+              <a:tr h="670560">
+                <a:tc>
+                  <a:txBody>
+                    <a:bodyPr/>
+                    <a:lstStyle/>
+                    <a:p>
+                      <a:r>
+                        <a:rPr sz="1200" b="0" i="0">
+                          <a:solidFill>
+                            <a:srgbClr val="1B2330"/>
+                          </a:solidFill>
+                          <a:latin typeface="Montserrat"/>
+                        </a:rPr>
+                        <a:t>2 &lt; MOP ≤ 5</a:t>
+                      </a:r>
+                    </a:p>
+                  </a:txBody>
+                  <a:tcPr>
+                    <a:solidFill>
+                      <a:srgbClr val="F6F8FC"/>
+                    </a:solidFill>
+                  </a:tcPr>
+                </a:tc>
+                <a:tc>
+                  <a:txBody>
+                    <a:bodyPr/>
+                    <a:lstStyle/>
+                    <a:p>
+                      <a:r>
+                        <a:rPr sz="1200" b="0" i="0">
+                          <a:solidFill>
+                            <a:srgbClr val="1B2330"/>
+                          </a:solidFill>
+                          <a:latin typeface="Montserrat"/>
+                        </a:rPr>
+                        <a:t>MOP 5</a:t>
+                      </a:r>
+                    </a:p>
+                  </a:txBody>
+                  <a:tcPr>
+                    <a:solidFill>
+                      <a:srgbClr val="F6F8FC"/>
+                    </a:solidFill>
+                  </a:tcPr>
+                </a:tc>
+              </a:tr>
+              <a:tr h="670560">
+                <a:tc>
+                  <a:txBody>
+                    <a:bodyPr/>
+                    <a:lstStyle/>
+                    <a:p>
+                      <a:r>
+                        <a:rPr sz="1200" b="0" i="0">
+                          <a:solidFill>
+                            <a:srgbClr val="1B2330"/>
+                          </a:solidFill>
+                          <a:latin typeface="Montserrat"/>
+                        </a:rPr>
+                        <a:t>0,4 &lt; MOP ≤ 2</a:t>
+                      </a:r>
+                    </a:p>
+                  </a:txBody>
+                  <a:tcPr>
+                    <a:solidFill>
+                      <a:srgbClr val="FFFFFF"/>
+                    </a:solidFill>
+                  </a:tcPr>
+                </a:tc>
+                <a:tc>
+                  <a:txBody>
+                    <a:bodyPr/>
+                    <a:lstStyle/>
+                    <a:p>
+                      <a:r>
+                        <a:rPr sz="1200" b="0" i="0">
+                          <a:solidFill>
+                            <a:srgbClr val="1B2330"/>
+                          </a:solidFill>
+                          <a:latin typeface="Montserrat"/>
+                        </a:rPr>
+                        <a:t>MOP 2</a:t>
+                      </a:r>
+                    </a:p>
+                  </a:txBody>
+                  <a:tcPr>
+                    <a:solidFill>
+                      <a:srgbClr val="FFFFFF"/>
+                    </a:solidFill>
+                  </a:tcPr>
+                </a:tc>
+              </a:tr>
+              <a:tr h="670560">
+                <a:tc>
+                  <a:txBody>
+                    <a:bodyPr/>
+                    <a:lstStyle/>
+                    <a:p>
+                      <a:r>
+                        <a:rPr sz="1200" b="0" i="0">
+                          <a:solidFill>
+                            <a:srgbClr val="1B2330"/>
+                          </a:solidFill>
+                          <a:latin typeface="Montserrat"/>
+                        </a:rPr>
+                        <a:t>0,15 &lt; MOP ≤ 0,4</a:t>
+                      </a:r>
+                    </a:p>
+                  </a:txBody>
+                  <a:tcPr>
+                    <a:solidFill>
+                      <a:srgbClr val="F6F8FC"/>
+                    </a:solidFill>
+                  </a:tcPr>
+                </a:tc>
+                <a:tc>
+                  <a:txBody>
+                    <a:bodyPr/>
+                    <a:lstStyle/>
+                    <a:p>
+                      <a:r>
+                        <a:rPr sz="1200" b="0" i="0">
+                          <a:solidFill>
+                            <a:srgbClr val="1B2330"/>
+                          </a:solidFill>
+                          <a:latin typeface="Montserrat"/>
+                        </a:rPr>
+                        <a:t>MOP 0,4</a:t>
+                      </a:r>
+                    </a:p>
+                  </a:txBody>
+                  <a:tcPr>
+                    <a:solidFill>
+                      <a:srgbClr val="F6F8FC"/>
+                    </a:solidFill>
+                  </a:tcPr>
+                </a:tc>
+              </a:tr>
+              <a:tr h="670560">
+                <a:tc>
+                  <a:txBody>
+                    <a:bodyPr/>
+                    <a:lstStyle/>
+                    <a:p>
+                      <a:r>
+                        <a:rPr sz="1200" b="0" i="0">
+                          <a:solidFill>
+                            <a:srgbClr val="1B2330"/>
+                          </a:solidFill>
+                          <a:latin typeface="Montserrat"/>
+                        </a:rPr>
+                        <a:t>0,05 &lt; MOP ≤ 0,15</a:t>
+                      </a:r>
+                    </a:p>
+                  </a:txBody>
+                  <a:tcPr>
+                    <a:solidFill>
+                      <a:srgbClr val="FFFFFF"/>
+                    </a:solidFill>
+                  </a:tcPr>
+                </a:tc>
+                <a:tc>
+                  <a:txBody>
+                    <a:bodyPr/>
+                    <a:lstStyle/>
+                    <a:p>
+                      <a:r>
+                        <a:rPr sz="1200" b="0" i="0">
+                          <a:solidFill>
+                            <a:srgbClr val="1B2330"/>
+                          </a:solidFill>
+                          <a:latin typeface="Montserrat"/>
+                        </a:rPr>
+                        <a:t>MOP 0,15</a:t>
+                      </a:r>
+                    </a:p>
+                  </a:txBody>
+                  <a:tcPr>
+                    <a:solidFill>
+                      <a:srgbClr val="FFFFFF"/>
+                    </a:solidFill>
+                  </a:tcPr>
+                </a:tc>
+              </a:tr>
+              <a:tr h="670560">
+                <a:tc>
+                  <a:txBody>
+                    <a:bodyPr/>
+                    <a:lstStyle/>
+                    <a:p>
+                      <a:r>
+                        <a:rPr sz="1200" b="0" i="0">
+                          <a:solidFill>
+                            <a:srgbClr val="1B2330"/>
+                          </a:solidFill>
+                          <a:latin typeface="Montserrat"/>
+                        </a:rPr>
+                        <a:t>MOP ≤ 0,05</a:t>
+                      </a:r>
+                    </a:p>
+                  </a:txBody>
+                  <a:tcPr>
+                    <a:solidFill>
+                      <a:srgbClr val="F6F8FC"/>
+                    </a:solidFill>
+                  </a:tcPr>
+                </a:tc>
+                <a:tc>
+                  <a:txBody>
+                    <a:bodyPr/>
+                    <a:lstStyle/>
+                    <a:p>
+                      <a:r>
+                        <a:rPr sz="1200" b="0" i="0">
+                          <a:solidFill>
+                            <a:srgbClr val="1B2330"/>
+                          </a:solidFill>
+                          <a:latin typeface="Montserrat"/>
+                        </a:rPr>
+                        <a:t>MOP 0,05</a:t>
+                      </a:r>
+                    </a:p>
+                  </a:txBody>
+                  <a:tcPr>
+                    <a:solidFill>
+                      <a:srgbClr val="F6F8FC"/>
+                    </a:solidFill>
+                  </a:tcPr>
+                </a:tc>
+              </a:tr>
+            </a:tbl>
+          </a:graphicData>
+        </a:graphic>
+      </p:graphicFrame>
+      <p:sp>
+        <p:nvSpPr>
+          <p:cNvPr id="9" name="Rounded Rectangle 8"/>
           <p:cNvSpPr/>
           <p:nvPr/>
         </p:nvSpPr>
         <p:spPr>
           <a:xfrm>
-            <a:off x="5806440" y="1051560"/>
-            <a:ext cx="5298947" cy="4629150"/>
+            <a:off x="548640" y="5943600"/>
+            <a:ext cx="11091672" cy="384048"/>
           </a:xfrm>
           <a:prstGeom prst="roundRect">
             <a:avLst/>
@@ -9776,7 +14720,7 @@
           </a:solidFill>
           <a:ln w="12700">
             <a:solidFill>
-              <a:srgbClr val="C7D2E6"/>
+              <a:srgbClr val="D7DEEA"/>
             </a:solidFill>
           </a:ln>
           <a:effectLst/>
@@ -9811,8 +14755,8 @@
         </p:nvSpPr>
         <p:spPr>
           <a:xfrm>
-            <a:off x="6080760" y="2726055"/>
-            <a:ext cx="4750307" cy="1280160"/>
+            <a:off x="731520" y="5961888"/>
+            <a:ext cx="10789920" cy="365760"/>
           </a:xfrm>
           <a:prstGeom prst="rect">
             <a:avLst/>
@@ -9825,27 +14769,23 @@
           </a:bodyPr>
           <a:lstStyle/>
           <a:p>
-            <a:pPr algn="ctr"/>
-            <a:r>
-              <a:rPr sz="1400" b="1" i="0">
-                <a:solidFill>
-                  <a:srgbClr val="64748B"/>
-                </a:solidFill>
-                <a:latin typeface="Montserrat"/>
-              </a:rPr>
-              <a:t>IMAGEN REALISTA</a:t>
-            </a:r>
-          </a:p>
-          <a:p>
-            <a:pPr algn="ctr"/>
-            <a:r>
-              <a:rPr sz="1100" b="0" i="1">
-                <a:solidFill>
-                  <a:srgbClr val="64748B"/>
-                </a:solidFill>
-                <a:latin typeface="Montserrat"/>
-              </a:rPr>
-              <a:t>gas service pipe transition fitting ground</a:t>
+            <a:r>
+              <a:rPr sz="1100" b="1" i="0">
+                <a:solidFill>
+                  <a:srgbClr val="E8801A"/>
+                </a:solidFill>
+                <a:latin typeface="Montserrat"/>
+              </a:rPr>
+              <a:t>Qué significa:  </a:t>
+            </a:r>
+            <a:r>
+              <a:rPr sz="1100" b="0" i="0">
+                <a:solidFill>
+                  <a:srgbClr val="1B2330"/>
+                </a:solidFill>
+                <a:latin typeface="Montserrat"/>
+              </a:rPr>
+              <a:t>La MOP es la presión máxima de operación del tramo; cada escalón se nombra por su valor superior.</a:t>
             </a:r>
           </a:p>
         </p:txBody>
@@ -9855,6 +14795,18 @@
   <p:clrMapOvr>
     <a:masterClrMapping/>
   </p:clrMapOvr>
+  <mc:AlternateContent xmlns:mc="http://schemas.openxmlformats.org/markup-compatibility/2006">
+    <mc:Choice xmlns:p14="http://schemas.microsoft.com/office/powerpoint/2010/main" Requires="p14">
+      <p:transition spd="med" p14:dur="700">
+        <p14:cube dir="l"/>
+      </p:transition>
+    </mc:Choice>
+    <mc:Fallback>
+      <p:transition spd="med">
+        <p:push dir="l"/>
+      </p:transition>
+    </mc:Fallback>
+  </mc:AlternateContent>
 </p:sld>
 </file>
 
@@ -9942,7 +14894,7 @@
                 </a:solidFill>
                 <a:latin typeface="Montserrat"/>
               </a:rPr>
-              <a:t>006 / 016</a:t>
+              <a:t>006 / 023</a:t>
             </a:r>
           </a:p>
         </p:txBody>
@@ -9983,84 +14935,16 @@
       </p:sp>
       <p:sp>
         <p:nvSpPr>
-          <p:cNvPr id="5" name="TextBox 4"/>
-          <p:cNvSpPr txBox="1"/>
-          <p:nvPr/>
-        </p:nvSpPr>
-        <p:spPr>
-          <a:xfrm>
-            <a:off x="822960" y="457200"/>
-            <a:ext cx="10058400" cy="365760"/>
-          </a:xfrm>
-          <a:prstGeom prst="rect">
-            <a:avLst/>
-          </a:prstGeom>
-          <a:noFill/>
-        </p:spPr>
-        <p:txBody>
-          <a:bodyPr wrap="square">
-            <a:spAutoFit/>
-          </a:bodyPr>
-          <a:lstStyle/>
-          <a:p>
-            <a:r>
-              <a:rPr sz="1300" b="1" i="0">
-                <a:solidFill>
-                  <a:srgbClr val="E8801A"/>
-                </a:solidFill>
-                <a:latin typeface="Montserrat"/>
-              </a:rPr>
-              <a:t>REGULACIÓN · 2ª FAMILIA</a:t>
-            </a:r>
-          </a:p>
-        </p:txBody>
-      </p:sp>
-      <p:sp>
-        <p:nvSpPr>
-          <p:cNvPr id="6" name="TextBox 5"/>
-          <p:cNvSpPr txBox="1"/>
-          <p:nvPr/>
-        </p:nvSpPr>
-        <p:spPr>
-          <a:xfrm>
-            <a:off x="822960" y="868680"/>
-            <a:ext cx="10515600" cy="914400"/>
-          </a:xfrm>
-          <a:prstGeom prst="rect">
-            <a:avLst/>
-          </a:prstGeom>
-          <a:noFill/>
-        </p:spPr>
-        <p:txBody>
-          <a:bodyPr wrap="square">
-            <a:spAutoFit/>
-          </a:bodyPr>
-          <a:lstStyle/>
-          <a:p>
-            <a:r>
-              <a:rPr sz="2800" b="1" i="0">
-                <a:solidFill>
-                  <a:srgbClr val="1E2761"/>
-                </a:solidFill>
-                <a:latin typeface="Montserrat"/>
-              </a:rPr>
-              <a:t>Regular el gas natural</a:t>
-            </a:r>
-          </a:p>
-        </p:txBody>
-      </p:sp>
-      <p:sp>
-        <p:nvSpPr>
-          <p:cNvPr id="7" name="Rounded Rectangle 6"/>
+          <p:cNvPr id="5" name="Rectangle 4"/>
           <p:cNvSpPr/>
           <p:nvPr/>
         </p:nvSpPr>
         <p:spPr>
           <a:xfrm>
-            <a:off x="868680" y="1627632"/>
-            <a:ext cx="2011680" cy="73152"/>
-          </a:xfrm>
-          <a:prstGeom prst="roundRect">
+            <a:off x="0" y="0"/>
+            <a:ext cx="12191695" cy="1143000"/>
+          </a:xfrm>
+          <a:prstGeom prst="rect">
             <a:avLst/>
           </a:prstGeom>
           <a:solidFill>
@@ -10095,14 +14979,14 @@
       </p:sp>
       <p:sp>
         <p:nvSpPr>
-          <p:cNvPr id="8" name="TextBox 7"/>
+          <p:cNvPr id="6" name="TextBox 5"/>
           <p:cNvSpPr txBox="1"/>
           <p:nvPr/>
         </p:nvSpPr>
         <p:spPr>
           <a:xfrm>
-            <a:off x="822960" y="1965960"/>
-            <a:ext cx="4983480" cy="4206240"/>
+            <a:off x="822960" y="274320"/>
+            <a:ext cx="10515600" cy="640080"/>
           </a:xfrm>
           <a:prstGeom prst="rect">
             <a:avLst/>
@@ -10115,117 +14999,62 @@
           </a:bodyPr>
           <a:lstStyle/>
           <a:p>
-            <a:pPr>
-              <a:spcAft>
-                <a:spcPts val="1100"/>
-              </a:spcAft>
-            </a:pPr>
-            <a:r>
-              <a:rPr sz="1600" b="1" i="0">
-                <a:solidFill>
-                  <a:srgbClr val="E8801A"/>
-                </a:solidFill>
-                <a:latin typeface="Montserrat"/>
-              </a:rPr>
-              <a:t>▸  </a:t>
-            </a:r>
-            <a:r>
-              <a:rPr sz="1600" b="0" i="0">
-                <a:solidFill>
-                  <a:srgbClr val="1B2330"/>
-                </a:solidFill>
-                <a:latin typeface="Montserrat"/>
-              </a:rPr>
-              <a:t>Aplica al gas natural (2ª familia)</a:t>
-            </a:r>
-          </a:p>
-          <a:p>
-            <a:pPr>
-              <a:spcAft>
-                <a:spcPts val="1100"/>
-              </a:spcAft>
-            </a:pPr>
-            <a:r>
-              <a:rPr sz="1600" b="1" i="0">
-                <a:solidFill>
-                  <a:srgbClr val="E8801A"/>
-                </a:solidFill>
-                <a:latin typeface="Montserrat"/>
-              </a:rPr>
-              <a:t>▸  </a:t>
-            </a:r>
-            <a:r>
-              <a:rPr sz="1600" b="0" i="0">
-                <a:solidFill>
-                  <a:srgbClr val="1B2330"/>
-                </a:solidFill>
-                <a:latin typeface="Montserrat"/>
-              </a:rPr>
-              <a:t>Estaciones: UNE 60620-3</a:t>
-            </a:r>
-          </a:p>
-          <a:p>
-            <a:pPr>
-              <a:spcAft>
-                <a:spcPts val="1100"/>
-              </a:spcAft>
-            </a:pPr>
-            <a:r>
-              <a:rPr sz="1600" b="1" i="0">
-                <a:solidFill>
-                  <a:srgbClr val="E8801A"/>
-                </a:solidFill>
-                <a:latin typeface="Montserrat"/>
-              </a:rPr>
-              <a:t>▸  </a:t>
-            </a:r>
-            <a:r>
-              <a:rPr sz="1600" b="0" i="0">
-                <a:solidFill>
-                  <a:srgbClr val="1B2330"/>
-                </a:solidFill>
-                <a:latin typeface="Montserrat"/>
-              </a:rPr>
-              <a:t>Conjuntos, por su presión de entrada</a:t>
-            </a:r>
-          </a:p>
-          <a:p>
-            <a:pPr>
-              <a:spcAft>
-                <a:spcPts val="1100"/>
-              </a:spcAft>
-            </a:pPr>
-            <a:r>
-              <a:rPr sz="1600" b="1" i="0">
-                <a:solidFill>
-                  <a:srgbClr val="E8801A"/>
-                </a:solidFill>
-                <a:latin typeface="Montserrat"/>
-              </a:rPr>
-              <a:t>▸  </a:t>
-            </a:r>
-            <a:r>
-              <a:rPr sz="1600" b="0" i="0">
-                <a:solidFill>
-                  <a:srgbClr val="1B2330"/>
-                </a:solidFill>
-                <a:latin typeface="Montserrat"/>
-              </a:rPr>
-              <a:t>MOPe 5, MOPe 0,4 o MOPe 0,15</a:t>
-            </a:r>
-          </a:p>
-        </p:txBody>
-      </p:sp>
-      <p:sp>
-        <p:nvSpPr>
-          <p:cNvPr id="9" name="imgph" descr="IMGQ:gas pressure regulator cabinet outdoor"/>
+            <a:r>
+              <a:rPr sz="2400" b="1" i="0">
+                <a:solidFill>
+                  <a:srgbClr val="FFFFFF"/>
+                </a:solidFill>
+                <a:latin typeface="Montserrat"/>
+              </a:rPr>
+              <a:t>⚡  PREGUNTA RÁPIDA</a:t>
+            </a:r>
+          </a:p>
+        </p:txBody>
+      </p:sp>
+      <p:sp>
+        <p:nvSpPr>
+          <p:cNvPr id="7" name="TextBox 6"/>
+          <p:cNvSpPr txBox="1"/>
+          <p:nvPr/>
+        </p:nvSpPr>
+        <p:spPr>
+          <a:xfrm>
+            <a:off x="822960" y="1508760"/>
+            <a:ext cx="10515600" cy="1371600"/>
+          </a:xfrm>
+          <a:prstGeom prst="rect">
+            <a:avLst/>
+          </a:prstGeom>
+          <a:noFill/>
+        </p:spPr>
+        <p:txBody>
+          <a:bodyPr wrap="square">
+            <a:spAutoFit/>
+          </a:bodyPr>
+          <a:lstStyle/>
+          <a:p>
+            <a:r>
+              <a:rPr sz="2400" b="1" i="0">
+                <a:solidFill>
+                  <a:srgbClr val="1E2761"/>
+                </a:solidFill>
+                <a:latin typeface="Montserrat"/>
+              </a:rPr>
+              <a:t>Un tramo que trabaja a una MOP de 1,5 bar, ¿cómo se denomina a efectos de diseño?</a:t>
+            </a:r>
+          </a:p>
+        </p:txBody>
+      </p:sp>
+      <p:sp>
+        <p:nvSpPr>
+          <p:cNvPr id="8" name="Rounded Rectangle 7"/>
           <p:cNvSpPr/>
           <p:nvPr/>
         </p:nvSpPr>
         <p:spPr>
           <a:xfrm>
-            <a:off x="5806440" y="1051560"/>
-            <a:ext cx="5298947" cy="4629150"/>
+            <a:off x="822960" y="3291840"/>
+            <a:ext cx="4983480" cy="1143000"/>
           </a:xfrm>
           <a:prstGeom prst="roundRect">
             <a:avLst/>
@@ -10264,14 +15093,58 @@
       </p:sp>
       <p:sp>
         <p:nvSpPr>
+          <p:cNvPr id="9" name="Rectangle 8"/>
+          <p:cNvSpPr/>
+          <p:nvPr/>
+        </p:nvSpPr>
+        <p:spPr>
+          <a:xfrm>
+            <a:off x="822960" y="3291840"/>
+            <a:ext cx="640080" cy="1143000"/>
+          </a:xfrm>
+          <a:prstGeom prst="rect">
+            <a:avLst/>
+          </a:prstGeom>
+          <a:solidFill>
+            <a:srgbClr val="1E2761"/>
+          </a:solidFill>
+          <a:ln>
+            <a:noFill/>
+          </a:ln>
+          <a:effectLst/>
+        </p:spPr>
+        <p:style>
+          <a:lnRef idx="1">
+            <a:schemeClr val="accent1"/>
+          </a:lnRef>
+          <a:fillRef idx="3">
+            <a:schemeClr val="accent1"/>
+          </a:fillRef>
+          <a:effectRef idx="2">
+            <a:schemeClr val="accent1"/>
+          </a:effectRef>
+          <a:fontRef idx="minor">
+            <a:schemeClr val="lt1"/>
+          </a:fontRef>
+        </p:style>
+        <p:txBody>
+          <a:bodyPr rtlCol="0" anchor="ctr"/>
+          <a:lstStyle/>
+          <a:p>
+            <a:pPr algn="ctr"/>
+          </a:p>
+        </p:txBody>
+      </p:sp>
+      <p:sp>
+        <p:nvSpPr>
           <p:cNvPr id="10" name="TextBox 9"/>
           <p:cNvSpPr txBox="1"/>
           <p:nvPr/>
         </p:nvSpPr>
         <p:spPr>
           <a:xfrm>
-            <a:off x="6080760" y="2726055"/>
-            <a:ext cx="4750307" cy="1280160"/>
+            <a:off x="822960" y="3611880"/>
+            <a:ext cx="640080" cy="548640"/>
           </a:xfrm>
           <a:prstGeom prst="rect">
             <a:avLst/>
@@ -10286,25 +15159,524 @@
           <a:p>
             <a:pPr algn="ctr"/>
             <a:r>
-              <a:rPr sz="1400" b="1" i="0">
-                <a:solidFill>
-                  <a:srgbClr val="64748B"/>
-                </a:solidFill>
-                <a:latin typeface="Montserrat"/>
-              </a:rPr>
-              <a:t>IMAGEN REALISTA</a:t>
-            </a:r>
-          </a:p>
+              <a:rPr sz="2200" b="1" i="0">
+                <a:solidFill>
+                  <a:srgbClr val="FFFFFF"/>
+                </a:solidFill>
+                <a:latin typeface="Montserrat"/>
+              </a:rPr>
+              <a:t>A</a:t>
+            </a:r>
+          </a:p>
+        </p:txBody>
+      </p:sp>
+      <p:sp>
+        <p:nvSpPr>
+          <p:cNvPr id="11" name="TextBox 10"/>
+          <p:cNvSpPr txBox="1"/>
+          <p:nvPr/>
+        </p:nvSpPr>
+        <p:spPr>
+          <a:xfrm>
+            <a:off x="1600200" y="3474720"/>
+            <a:ext cx="4114800" cy="868680"/>
+          </a:xfrm>
+          <a:prstGeom prst="rect">
+            <a:avLst/>
+          </a:prstGeom>
+          <a:noFill/>
+        </p:spPr>
+        <p:txBody>
+          <a:bodyPr wrap="square">
+            <a:spAutoFit/>
+          </a:bodyPr>
+          <a:lstStyle/>
+          <a:p>
+            <a:r>
+              <a:rPr sz="1400" b="0" i="0">
+                <a:solidFill>
+                  <a:srgbClr val="1B2330"/>
+                </a:solidFill>
+                <a:latin typeface="Montserrat"/>
+              </a:rPr>
+              <a:t>MOP 0,4</a:t>
+            </a:r>
+          </a:p>
+        </p:txBody>
+      </p:sp>
+      <p:sp>
+        <p:nvSpPr>
+          <p:cNvPr id="12" name="Rounded Rectangle 11"/>
+          <p:cNvSpPr/>
+          <p:nvPr/>
+        </p:nvSpPr>
+        <p:spPr>
+          <a:xfrm>
+            <a:off x="6355080" y="3291840"/>
+            <a:ext cx="4983480" cy="1143000"/>
+          </a:xfrm>
+          <a:prstGeom prst="roundRect">
+            <a:avLst/>
+          </a:prstGeom>
+          <a:solidFill>
+            <a:srgbClr val="F3F6FB"/>
+          </a:solidFill>
+          <a:ln w="12700">
+            <a:solidFill>
+              <a:srgbClr val="C7D2E6"/>
+            </a:solidFill>
+          </a:ln>
+          <a:effectLst/>
+        </p:spPr>
+        <p:style>
+          <a:lnRef idx="1">
+            <a:schemeClr val="accent1"/>
+          </a:lnRef>
+          <a:fillRef idx="3">
+            <a:schemeClr val="accent1"/>
+          </a:fillRef>
+          <a:effectRef idx="2">
+            <a:schemeClr val="accent1"/>
+          </a:effectRef>
+          <a:fontRef idx="minor">
+            <a:schemeClr val="lt1"/>
+          </a:fontRef>
+        </p:style>
+        <p:txBody>
+          <a:bodyPr rtlCol="0" anchor="ctr"/>
+          <a:lstStyle/>
           <a:p>
             <a:pPr algn="ctr"/>
-            <a:r>
-              <a:rPr sz="1100" b="0" i="1">
-                <a:solidFill>
-                  <a:srgbClr val="64748B"/>
-                </a:solidFill>
-                <a:latin typeface="Montserrat"/>
-              </a:rPr>
-              <a:t>gas pressure regulator cabinet outdoor</a:t>
+          </a:p>
+        </p:txBody>
+      </p:sp>
+      <p:sp>
+        <p:nvSpPr>
+          <p:cNvPr id="13" name="Rectangle 12"/>
+          <p:cNvSpPr/>
+          <p:nvPr/>
+        </p:nvSpPr>
+        <p:spPr>
+          <a:xfrm>
+            <a:off x="6355080" y="3291840"/>
+            <a:ext cx="640080" cy="1143000"/>
+          </a:xfrm>
+          <a:prstGeom prst="rect">
+            <a:avLst/>
+          </a:prstGeom>
+          <a:solidFill>
+            <a:srgbClr val="1E2761"/>
+          </a:solidFill>
+          <a:ln>
+            <a:noFill/>
+          </a:ln>
+          <a:effectLst/>
+        </p:spPr>
+        <p:style>
+          <a:lnRef idx="1">
+            <a:schemeClr val="accent1"/>
+          </a:lnRef>
+          <a:fillRef idx="3">
+            <a:schemeClr val="accent1"/>
+          </a:fillRef>
+          <a:effectRef idx="2">
+            <a:schemeClr val="accent1"/>
+          </a:effectRef>
+          <a:fontRef idx="minor">
+            <a:schemeClr val="lt1"/>
+          </a:fontRef>
+        </p:style>
+        <p:txBody>
+          <a:bodyPr rtlCol="0" anchor="ctr"/>
+          <a:lstStyle/>
+          <a:p>
+            <a:pPr algn="ctr"/>
+          </a:p>
+        </p:txBody>
+      </p:sp>
+      <p:sp>
+        <p:nvSpPr>
+          <p:cNvPr id="14" name="TextBox 13"/>
+          <p:cNvSpPr txBox="1"/>
+          <p:nvPr/>
+        </p:nvSpPr>
+        <p:spPr>
+          <a:xfrm>
+            <a:off x="6355080" y="3611880"/>
+            <a:ext cx="640080" cy="548640"/>
+          </a:xfrm>
+          <a:prstGeom prst="rect">
+            <a:avLst/>
+          </a:prstGeom>
+          <a:noFill/>
+        </p:spPr>
+        <p:txBody>
+          <a:bodyPr wrap="square">
+            <a:spAutoFit/>
+          </a:bodyPr>
+          <a:lstStyle/>
+          <a:p>
+            <a:pPr algn="ctr"/>
+            <a:r>
+              <a:rPr sz="2200" b="1" i="0">
+                <a:solidFill>
+                  <a:srgbClr val="FFFFFF"/>
+                </a:solidFill>
+                <a:latin typeface="Montserrat"/>
+              </a:rPr>
+              <a:t>B</a:t>
+            </a:r>
+          </a:p>
+        </p:txBody>
+      </p:sp>
+      <p:sp>
+        <p:nvSpPr>
+          <p:cNvPr id="15" name="TextBox 14"/>
+          <p:cNvSpPr txBox="1"/>
+          <p:nvPr/>
+        </p:nvSpPr>
+        <p:spPr>
+          <a:xfrm>
+            <a:off x="7132320" y="3474720"/>
+            <a:ext cx="4114800" cy="868680"/>
+          </a:xfrm>
+          <a:prstGeom prst="rect">
+            <a:avLst/>
+          </a:prstGeom>
+          <a:noFill/>
+        </p:spPr>
+        <p:txBody>
+          <a:bodyPr wrap="square">
+            <a:spAutoFit/>
+          </a:bodyPr>
+          <a:lstStyle/>
+          <a:p>
+            <a:r>
+              <a:rPr sz="1400" b="0" i="0">
+                <a:solidFill>
+                  <a:srgbClr val="1B2330"/>
+                </a:solidFill>
+                <a:latin typeface="Montserrat"/>
+              </a:rPr>
+              <a:t>MOP 2</a:t>
+            </a:r>
+          </a:p>
+        </p:txBody>
+      </p:sp>
+      <p:sp>
+        <p:nvSpPr>
+          <p:cNvPr id="16" name="Rounded Rectangle 15"/>
+          <p:cNvSpPr/>
+          <p:nvPr/>
+        </p:nvSpPr>
+        <p:spPr>
+          <a:xfrm>
+            <a:off x="822960" y="4617720"/>
+            <a:ext cx="4983480" cy="1143000"/>
+          </a:xfrm>
+          <a:prstGeom prst="roundRect">
+            <a:avLst/>
+          </a:prstGeom>
+          <a:solidFill>
+            <a:srgbClr val="F3F6FB"/>
+          </a:solidFill>
+          <a:ln w="12700">
+            <a:solidFill>
+              <a:srgbClr val="C7D2E6"/>
+            </a:solidFill>
+          </a:ln>
+          <a:effectLst/>
+        </p:spPr>
+        <p:style>
+          <a:lnRef idx="1">
+            <a:schemeClr val="accent1"/>
+          </a:lnRef>
+          <a:fillRef idx="3">
+            <a:schemeClr val="accent1"/>
+          </a:fillRef>
+          <a:effectRef idx="2">
+            <a:schemeClr val="accent1"/>
+          </a:effectRef>
+          <a:fontRef idx="minor">
+            <a:schemeClr val="lt1"/>
+          </a:fontRef>
+        </p:style>
+        <p:txBody>
+          <a:bodyPr rtlCol="0" anchor="ctr"/>
+          <a:lstStyle/>
+          <a:p>
+            <a:pPr algn="ctr"/>
+          </a:p>
+        </p:txBody>
+      </p:sp>
+      <p:sp>
+        <p:nvSpPr>
+          <p:cNvPr id="17" name="Rectangle 16"/>
+          <p:cNvSpPr/>
+          <p:nvPr/>
+        </p:nvSpPr>
+        <p:spPr>
+          <a:xfrm>
+            <a:off x="822960" y="4617720"/>
+            <a:ext cx="640080" cy="1143000"/>
+          </a:xfrm>
+          <a:prstGeom prst="rect">
+            <a:avLst/>
+          </a:prstGeom>
+          <a:solidFill>
+            <a:srgbClr val="1E2761"/>
+          </a:solidFill>
+          <a:ln>
+            <a:noFill/>
+          </a:ln>
+          <a:effectLst/>
+        </p:spPr>
+        <p:style>
+          <a:lnRef idx="1">
+            <a:schemeClr val="accent1"/>
+          </a:lnRef>
+          <a:fillRef idx="3">
+            <a:schemeClr val="accent1"/>
+          </a:fillRef>
+          <a:effectRef idx="2">
+            <a:schemeClr val="accent1"/>
+          </a:effectRef>
+          <a:fontRef idx="minor">
+            <a:schemeClr val="lt1"/>
+          </a:fontRef>
+        </p:style>
+        <p:txBody>
+          <a:bodyPr rtlCol="0" anchor="ctr"/>
+          <a:lstStyle/>
+          <a:p>
+            <a:pPr algn="ctr"/>
+          </a:p>
+        </p:txBody>
+      </p:sp>
+      <p:sp>
+        <p:nvSpPr>
+          <p:cNvPr id="18" name="TextBox 17"/>
+          <p:cNvSpPr txBox="1"/>
+          <p:nvPr/>
+        </p:nvSpPr>
+        <p:spPr>
+          <a:xfrm>
+            <a:off x="822960" y="4937760"/>
+            <a:ext cx="640080" cy="548640"/>
+          </a:xfrm>
+          <a:prstGeom prst="rect">
+            <a:avLst/>
+          </a:prstGeom>
+          <a:noFill/>
+        </p:spPr>
+        <p:txBody>
+          <a:bodyPr wrap="square">
+            <a:spAutoFit/>
+          </a:bodyPr>
+          <a:lstStyle/>
+          <a:p>
+            <a:pPr algn="ctr"/>
+            <a:r>
+              <a:rPr sz="2200" b="1" i="0">
+                <a:solidFill>
+                  <a:srgbClr val="FFFFFF"/>
+                </a:solidFill>
+                <a:latin typeface="Montserrat"/>
+              </a:rPr>
+              <a:t>C</a:t>
+            </a:r>
+          </a:p>
+        </p:txBody>
+      </p:sp>
+      <p:sp>
+        <p:nvSpPr>
+          <p:cNvPr id="19" name="TextBox 18"/>
+          <p:cNvSpPr txBox="1"/>
+          <p:nvPr/>
+        </p:nvSpPr>
+        <p:spPr>
+          <a:xfrm>
+            <a:off x="1600200" y="4800600"/>
+            <a:ext cx="4114800" cy="868680"/>
+          </a:xfrm>
+          <a:prstGeom prst="rect">
+            <a:avLst/>
+          </a:prstGeom>
+          <a:noFill/>
+        </p:spPr>
+        <p:txBody>
+          <a:bodyPr wrap="square">
+            <a:spAutoFit/>
+          </a:bodyPr>
+          <a:lstStyle/>
+          <a:p>
+            <a:r>
+              <a:rPr sz="1400" b="0" i="0">
+                <a:solidFill>
+                  <a:srgbClr val="1B2330"/>
+                </a:solidFill>
+                <a:latin typeface="Montserrat"/>
+              </a:rPr>
+              <a:t>MOP 5</a:t>
+            </a:r>
+          </a:p>
+        </p:txBody>
+      </p:sp>
+      <p:sp>
+        <p:nvSpPr>
+          <p:cNvPr id="20" name="Rounded Rectangle 19"/>
+          <p:cNvSpPr/>
+          <p:nvPr/>
+        </p:nvSpPr>
+        <p:spPr>
+          <a:xfrm>
+            <a:off x="6355080" y="4617720"/>
+            <a:ext cx="4983480" cy="1143000"/>
+          </a:xfrm>
+          <a:prstGeom prst="roundRect">
+            <a:avLst/>
+          </a:prstGeom>
+          <a:solidFill>
+            <a:srgbClr val="F3F6FB"/>
+          </a:solidFill>
+          <a:ln w="12700">
+            <a:solidFill>
+              <a:srgbClr val="C7D2E6"/>
+            </a:solidFill>
+          </a:ln>
+          <a:effectLst/>
+        </p:spPr>
+        <p:style>
+          <a:lnRef idx="1">
+            <a:schemeClr val="accent1"/>
+          </a:lnRef>
+          <a:fillRef idx="3">
+            <a:schemeClr val="accent1"/>
+          </a:fillRef>
+          <a:effectRef idx="2">
+            <a:schemeClr val="accent1"/>
+          </a:effectRef>
+          <a:fontRef idx="minor">
+            <a:schemeClr val="lt1"/>
+          </a:fontRef>
+        </p:style>
+        <p:txBody>
+          <a:bodyPr rtlCol="0" anchor="ctr"/>
+          <a:lstStyle/>
+          <a:p>
+            <a:pPr algn="ctr"/>
+          </a:p>
+        </p:txBody>
+      </p:sp>
+      <p:sp>
+        <p:nvSpPr>
+          <p:cNvPr id="21" name="Rectangle 20"/>
+          <p:cNvSpPr/>
+          <p:nvPr/>
+        </p:nvSpPr>
+        <p:spPr>
+          <a:xfrm>
+            <a:off x="6355080" y="4617720"/>
+            <a:ext cx="640080" cy="1143000"/>
+          </a:xfrm>
+          <a:prstGeom prst="rect">
+            <a:avLst/>
+          </a:prstGeom>
+          <a:solidFill>
+            <a:srgbClr val="1E2761"/>
+          </a:solidFill>
+          <a:ln>
+            <a:noFill/>
+          </a:ln>
+          <a:effectLst/>
+        </p:spPr>
+        <p:style>
+          <a:lnRef idx="1">
+            <a:schemeClr val="accent1"/>
+          </a:lnRef>
+          <a:fillRef idx="3">
+            <a:schemeClr val="accent1"/>
+          </a:fillRef>
+          <a:effectRef idx="2">
+            <a:schemeClr val="accent1"/>
+          </a:effectRef>
+          <a:fontRef idx="minor">
+            <a:schemeClr val="lt1"/>
+          </a:fontRef>
+        </p:style>
+        <p:txBody>
+          <a:bodyPr rtlCol="0" anchor="ctr"/>
+          <a:lstStyle/>
+          <a:p>
+            <a:pPr algn="ctr"/>
+          </a:p>
+        </p:txBody>
+      </p:sp>
+      <p:sp>
+        <p:nvSpPr>
+          <p:cNvPr id="22" name="TextBox 21"/>
+          <p:cNvSpPr txBox="1"/>
+          <p:nvPr/>
+        </p:nvSpPr>
+        <p:spPr>
+          <a:xfrm>
+            <a:off x="6355080" y="4937760"/>
+            <a:ext cx="640080" cy="548640"/>
+          </a:xfrm>
+          <a:prstGeom prst="rect">
+            <a:avLst/>
+          </a:prstGeom>
+          <a:noFill/>
+        </p:spPr>
+        <p:txBody>
+          <a:bodyPr wrap="square">
+            <a:spAutoFit/>
+          </a:bodyPr>
+          <a:lstStyle/>
+          <a:p>
+            <a:pPr algn="ctr"/>
+            <a:r>
+              <a:rPr sz="2200" b="1" i="0">
+                <a:solidFill>
+                  <a:srgbClr val="FFFFFF"/>
+                </a:solidFill>
+                <a:latin typeface="Montserrat"/>
+              </a:rPr>
+              <a:t>D</a:t>
+            </a:r>
+          </a:p>
+        </p:txBody>
+      </p:sp>
+      <p:sp>
+        <p:nvSpPr>
+          <p:cNvPr id="23" name="TextBox 22"/>
+          <p:cNvSpPr txBox="1"/>
+          <p:nvPr/>
+        </p:nvSpPr>
+        <p:spPr>
+          <a:xfrm>
+            <a:off x="7132320" y="4800600"/>
+            <a:ext cx="4114800" cy="868680"/>
+          </a:xfrm>
+          <a:prstGeom prst="rect">
+            <a:avLst/>
+          </a:prstGeom>
+          <a:noFill/>
+        </p:spPr>
+        <p:txBody>
+          <a:bodyPr wrap="square">
+            <a:spAutoFit/>
+          </a:bodyPr>
+          <a:lstStyle/>
+          <a:p>
+            <a:r>
+              <a:rPr sz="1400" b="0" i="0">
+                <a:solidFill>
+                  <a:srgbClr val="1B2330"/>
+                </a:solidFill>
+                <a:latin typeface="Montserrat"/>
+              </a:rPr>
+              <a:t>MOP 1,5</a:t>
             </a:r>
           </a:p>
         </p:txBody>
@@ -10314,6 +15686,18 @@
   <p:clrMapOvr>
     <a:masterClrMapping/>
   </p:clrMapOvr>
+  <mc:AlternateContent xmlns:mc="http://schemas.openxmlformats.org/markup-compatibility/2006">
+    <mc:Choice xmlns:p14="http://schemas.microsoft.com/office/powerpoint/2010/main" Requires="p14">
+      <p:transition spd="med" p14:dur="700">
+        <p14:cube dir="r"/>
+      </p:transition>
+    </mc:Choice>
+    <mc:Fallback>
+      <p:transition spd="med">
+        <p:push dir="r"/>
+      </p:transition>
+    </mc:Fallback>
+  </mc:AlternateContent>
 </p:sld>
 </file>
 
@@ -10401,7 +15785,7 @@
                 </a:solidFill>
                 <a:latin typeface="Montserrat"/>
               </a:rPr>
-              <a:t>007 / 016</a:t>
+              <a:t>007 / 023</a:t>
             </a:r>
           </a:p>
         </p:txBody>
@@ -10442,88 +15826,20 @@
       </p:sp>
       <p:sp>
         <p:nvSpPr>
-          <p:cNvPr id="5" name="TextBox 4"/>
-          <p:cNvSpPr txBox="1"/>
-          <p:nvPr/>
-        </p:nvSpPr>
-        <p:spPr>
-          <a:xfrm>
-            <a:off x="822960" y="457200"/>
-            <a:ext cx="10058400" cy="365760"/>
-          </a:xfrm>
-          <a:prstGeom prst="rect">
-            <a:avLst/>
-          </a:prstGeom>
-          <a:noFill/>
-        </p:spPr>
-        <p:txBody>
-          <a:bodyPr wrap="square">
-            <a:spAutoFit/>
-          </a:bodyPr>
-          <a:lstStyle/>
-          <a:p>
-            <a:r>
-              <a:rPr sz="1300" b="1" i="0">
-                <a:solidFill>
-                  <a:srgbClr val="E8801A"/>
-                </a:solidFill>
-                <a:latin typeface="Montserrat"/>
-              </a:rPr>
-              <a:t>REGULACIÓN · 2ª FAMILIA</a:t>
-            </a:r>
-          </a:p>
-        </p:txBody>
-      </p:sp>
-      <p:sp>
-        <p:nvSpPr>
-          <p:cNvPr id="6" name="TextBox 5"/>
-          <p:cNvSpPr txBox="1"/>
-          <p:nvPr/>
-        </p:nvSpPr>
-        <p:spPr>
-          <a:xfrm>
-            <a:off x="822960" y="868680"/>
-            <a:ext cx="10515600" cy="914400"/>
-          </a:xfrm>
-          <a:prstGeom prst="rect">
-            <a:avLst/>
-          </a:prstGeom>
-          <a:noFill/>
-        </p:spPr>
-        <p:txBody>
-          <a:bodyPr wrap="square">
-            <a:spAutoFit/>
-          </a:bodyPr>
-          <a:lstStyle/>
-          <a:p>
-            <a:r>
-              <a:rPr sz="2800" b="1" i="0">
-                <a:solidFill>
-                  <a:srgbClr val="1E2761"/>
-                </a:solidFill>
-                <a:latin typeface="Montserrat"/>
-              </a:rPr>
-              <a:t>Elegir el regulador por su escalón</a:t>
-            </a:r>
-          </a:p>
-        </p:txBody>
-      </p:sp>
-      <p:sp>
-        <p:nvSpPr>
-          <p:cNvPr id="7" name="Rounded Rectangle 6"/>
+          <p:cNvPr id="5" name="Rectangle 4"/>
           <p:cNvSpPr/>
           <p:nvPr/>
         </p:nvSpPr>
         <p:spPr>
           <a:xfrm>
-            <a:off x="868680" y="1627632"/>
-            <a:ext cx="2011680" cy="73152"/>
-          </a:xfrm>
-          <a:prstGeom prst="roundRect">
+            <a:off x="0" y="0"/>
+            <a:ext cx="12191695" cy="1143000"/>
+          </a:xfrm>
+          <a:prstGeom prst="rect">
             <a:avLst/>
           </a:prstGeom>
           <a:solidFill>
-            <a:srgbClr val="E8801A"/>
+            <a:srgbClr val="1E8E4B"/>
           </a:solidFill>
           <a:ln>
             <a:noFill/>
@@ -10554,14 +15870,14 @@
       </p:sp>
       <p:sp>
         <p:nvSpPr>
-          <p:cNvPr id="8" name="TextBox 7"/>
+          <p:cNvPr id="6" name="TextBox 5"/>
           <p:cNvSpPr txBox="1"/>
           <p:nvPr/>
         </p:nvSpPr>
         <p:spPr>
           <a:xfrm>
-            <a:off x="822960" y="1965960"/>
-            <a:ext cx="4983480" cy="4206240"/>
+            <a:off x="822960" y="274320"/>
+            <a:ext cx="10515600" cy="640080"/>
           </a:xfrm>
           <a:prstGeom prst="rect">
             <a:avLst/>
@@ -10574,127 +15890,72 @@
           </a:bodyPr>
           <a:lstStyle/>
           <a:p>
-            <a:pPr>
-              <a:spcAft>
-                <a:spcPts val="1100"/>
-              </a:spcAft>
-            </a:pPr>
-            <a:r>
-              <a:rPr sz="1600" b="1" i="0">
-                <a:solidFill>
-                  <a:srgbClr val="E8801A"/>
-                </a:solidFill>
-                <a:latin typeface="Montserrat"/>
-              </a:rPr>
-              <a:t>▸  </a:t>
-            </a:r>
-            <a:r>
-              <a:rPr sz="1600" b="0" i="0">
-                <a:solidFill>
-                  <a:srgbClr val="1B2330"/>
-                </a:solidFill>
-                <a:latin typeface="Montserrat"/>
-              </a:rPr>
-              <a:t>Entrada 0,4 / salida 0,1 → UNE 60402-1</a:t>
-            </a:r>
-          </a:p>
-          <a:p>
-            <a:pPr>
-              <a:spcAft>
-                <a:spcPts val="1100"/>
-              </a:spcAft>
-            </a:pPr>
-            <a:r>
-              <a:rPr sz="1600" b="1" i="0">
-                <a:solidFill>
-                  <a:srgbClr val="E8801A"/>
-                </a:solidFill>
-                <a:latin typeface="Montserrat"/>
-              </a:rPr>
-              <a:t>▸  </a:t>
-            </a:r>
-            <a:r>
-              <a:rPr sz="1600" b="0" i="0">
-                <a:solidFill>
-                  <a:srgbClr val="1B2330"/>
-                </a:solidFill>
-                <a:latin typeface="Montserrat"/>
-              </a:rPr>
-              <a:t>Entrada 0,15–0,4 / salida 0,15 → UNE 60402-2</a:t>
-            </a:r>
-          </a:p>
-          <a:p>
-            <a:pPr>
-              <a:spcAft>
-                <a:spcPts val="1100"/>
-              </a:spcAft>
-            </a:pPr>
-            <a:r>
-              <a:rPr sz="1600" b="1" i="0">
-                <a:solidFill>
-                  <a:srgbClr val="E8801A"/>
-                </a:solidFill>
-                <a:latin typeface="Montserrat"/>
-              </a:rPr>
-              <a:t>▸  </a:t>
-            </a:r>
-            <a:r>
-              <a:rPr sz="1600" b="0" i="0">
-                <a:solidFill>
-                  <a:srgbClr val="1B2330"/>
-                </a:solidFill>
-                <a:latin typeface="Montserrat"/>
-              </a:rPr>
-              <a:t>Entrada 0,4–5 / salida ≤ 0,4 → UNE 60411</a:t>
-            </a:r>
-          </a:p>
-          <a:p>
-            <a:pPr>
-              <a:spcAft>
-                <a:spcPts val="1100"/>
-              </a:spcAft>
-            </a:pPr>
-            <a:r>
-              <a:rPr sz="1600" b="1" i="0">
-                <a:solidFill>
-                  <a:srgbClr val="E8801A"/>
-                </a:solidFill>
-                <a:latin typeface="Montserrat"/>
-              </a:rPr>
-              <a:t>▸  </a:t>
-            </a:r>
-            <a:r>
-              <a:rPr sz="1600" b="0" i="0">
-                <a:solidFill>
-                  <a:srgbClr val="1B2330"/>
-                </a:solidFill>
-                <a:latin typeface="Montserrat"/>
-              </a:rPr>
-              <a:t>Se elige por lo que entra y lo que sale</a:t>
-            </a:r>
-          </a:p>
-        </p:txBody>
-      </p:sp>
-      <p:sp>
-        <p:nvSpPr>
-          <p:cNvPr id="9" name="imgph" descr="IMGQ:gas pressure regulator close up device"/>
+            <a:r>
+              <a:rPr sz="2400" b="1" i="0">
+                <a:solidFill>
+                  <a:srgbClr val="FFFFFF"/>
+                </a:solidFill>
+                <a:latin typeface="Montserrat"/>
+              </a:rPr>
+              <a:t>✔  RESPUESTA:  B</a:t>
+            </a:r>
+          </a:p>
+        </p:txBody>
+      </p:sp>
+      <p:sp>
+        <p:nvSpPr>
+          <p:cNvPr id="7" name="TextBox 6"/>
+          <p:cNvSpPr txBox="1"/>
+          <p:nvPr/>
+        </p:nvSpPr>
+        <p:spPr>
+          <a:xfrm>
+            <a:off x="822960" y="1417320"/>
+            <a:ext cx="10515600" cy="914400"/>
+          </a:xfrm>
+          <a:prstGeom prst="rect">
+            <a:avLst/>
+          </a:prstGeom>
+          <a:noFill/>
+        </p:spPr>
+        <p:txBody>
+          <a:bodyPr wrap="square">
+            <a:spAutoFit/>
+          </a:bodyPr>
+          <a:lstStyle/>
+          <a:p>
+            <a:r>
+              <a:rPr sz="1800" b="1" i="0">
+                <a:solidFill>
+                  <a:srgbClr val="64748B"/>
+                </a:solidFill>
+                <a:latin typeface="Montserrat"/>
+              </a:rPr>
+              <a:t>Un tramo que trabaja a una MOP de 1,5 bar, ¿cómo se denomina a efectos de diseño?</a:t>
+            </a:r>
+          </a:p>
+        </p:txBody>
+      </p:sp>
+      <p:sp>
+        <p:nvSpPr>
+          <p:cNvPr id="8" name="Rounded Rectangle 7"/>
           <p:cNvSpPr/>
           <p:nvPr/>
         </p:nvSpPr>
         <p:spPr>
           <a:xfrm>
-            <a:off x="5806440" y="1051560"/>
-            <a:ext cx="5298947" cy="4629150"/>
+            <a:off x="822960" y="2514600"/>
+            <a:ext cx="10515600" cy="914400"/>
           </a:xfrm>
           <a:prstGeom prst="roundRect">
             <a:avLst/>
           </a:prstGeom>
           <a:solidFill>
-            <a:srgbClr val="F3F6FB"/>
+            <a:srgbClr val="E9F6EE"/>
           </a:solidFill>
           <a:ln w="12700">
             <a:solidFill>
-              <a:srgbClr val="C7D2E6"/>
+              <a:srgbClr val="1E8E4B"/>
             </a:solidFill>
           </a:ln>
           <a:effectLst/>
@@ -10723,14 +15984,14 @@
       </p:sp>
       <p:sp>
         <p:nvSpPr>
-          <p:cNvPr id="10" name="TextBox 9"/>
+          <p:cNvPr id="9" name="TextBox 8"/>
           <p:cNvSpPr txBox="1"/>
           <p:nvPr/>
         </p:nvSpPr>
         <p:spPr>
           <a:xfrm>
-            <a:off x="6080760" y="2726055"/>
-            <a:ext cx="4750307" cy="1280160"/>
+            <a:off x="1097280" y="2697480"/>
+            <a:ext cx="10058400" cy="640080"/>
           </a:xfrm>
           <a:prstGeom prst="rect">
             <a:avLst/>
@@ -10743,27 +16004,66 @@
           </a:bodyPr>
           <a:lstStyle/>
           <a:p>
-            <a:pPr algn="ctr"/>
-            <a:r>
-              <a:rPr sz="1400" b="1" i="0">
-                <a:solidFill>
-                  <a:srgbClr val="64748B"/>
-                </a:solidFill>
-                <a:latin typeface="Montserrat"/>
-              </a:rPr>
-              <a:t>IMAGEN REALISTA</a:t>
-            </a:r>
-          </a:p>
-          <a:p>
-            <a:pPr algn="ctr"/>
-            <a:r>
-              <a:rPr sz="1100" b="0" i="1">
-                <a:solidFill>
-                  <a:srgbClr val="64748B"/>
-                </a:solidFill>
-                <a:latin typeface="Montserrat"/>
-              </a:rPr>
-              <a:t>gas pressure regulator close up device</a:t>
+            <a:r>
+              <a:rPr sz="1800" b="1" i="0">
+                <a:solidFill>
+                  <a:srgbClr val="1E8E4B"/>
+                </a:solidFill>
+                <a:latin typeface="Montserrat"/>
+              </a:rPr>
+              <a:t>B.  </a:t>
+            </a:r>
+            <a:r>
+              <a:rPr sz="1800" b="1" i="0">
+                <a:solidFill>
+                  <a:srgbClr val="1E2761"/>
+                </a:solidFill>
+                <a:latin typeface="Montserrat"/>
+              </a:rPr>
+              <a:t>MOP 2</a:t>
+            </a:r>
+          </a:p>
+        </p:txBody>
+      </p:sp>
+      <p:sp>
+        <p:nvSpPr>
+          <p:cNvPr id="10" name="TextBox 9"/>
+          <p:cNvSpPr txBox="1"/>
+          <p:nvPr/>
+        </p:nvSpPr>
+        <p:spPr>
+          <a:xfrm>
+            <a:off x="822960" y="3749039"/>
+            <a:ext cx="10515600" cy="2194560"/>
+          </a:xfrm>
+          <a:prstGeom prst="rect">
+            <a:avLst/>
+          </a:prstGeom>
+          <a:noFill/>
+        </p:spPr>
+        <p:txBody>
+          <a:bodyPr wrap="square">
+            <a:spAutoFit/>
+          </a:bodyPr>
+          <a:lstStyle/>
+          <a:p>
+            <a:r>
+              <a:rPr sz="1500" b="1" i="0">
+                <a:solidFill>
+                  <a:srgbClr val="E8801A"/>
+                </a:solidFill>
+                <a:latin typeface="Montserrat"/>
+              </a:rPr>
+              <a:t>Por qué:  </a:t>
+            </a:r>
+            <a:r>
+              <a:rPr sz="1500" b="0" i="0">
+                <a:solidFill>
+                  <a:srgbClr val="1B2330"/>
+                </a:solidFill>
+                <a:latin typeface="Montserrat"/>
+              </a:rPr>
+              <a:t>1,5 bar cae en el escalón 0,4 &lt; MOP ≤ 2, que se nombra por su valor superior: MOP 2. El nombre no es la presión exacta del tramo, sino el techo del escalón.</a:t>
             </a:r>
           </a:p>
         </p:txBody>
@@ -10773,6 +16073,18 @@
   <p:clrMapOvr>
     <a:masterClrMapping/>
   </p:clrMapOvr>
+  <mc:AlternateContent xmlns:mc="http://schemas.openxmlformats.org/markup-compatibility/2006">
+    <mc:Choice xmlns:p14="http://schemas.microsoft.com/office/powerpoint/2010/main" Requires="p14">
+      <p:transition spd="med" p14:dur="700">
+        <p14:cube dir="l"/>
+      </p:transition>
+    </mc:Choice>
+    <mc:Fallback>
+      <p:transition spd="med">
+        <p:push dir="l"/>
+      </p:transition>
+    </mc:Fallback>
+  </mc:AlternateContent>
 </p:sld>
 </file>
 
@@ -10860,7 +16172,7 @@
                 </a:solidFill>
                 <a:latin typeface="Montserrat"/>
               </a:rPr>
-              <a:t>008 / 016</a:t>
+              <a:t>008 / 023</a:t>
             </a:r>
           </a:p>
         </p:txBody>
@@ -10928,7 +16240,7 @@
                 </a:solidFill>
                 <a:latin typeface="Montserrat"/>
               </a:rPr>
-              <a:t>REGULACIÓN · 3ª FAMILIA (GLP)</a:t>
+              <a:t>ELEMENTOS · TALLOS</a:t>
             </a:r>
           </a:p>
         </p:txBody>
@@ -10962,14 +16274,14 @@
                 </a:solidFill>
                 <a:latin typeface="Montserrat"/>
               </a:rPr>
-              <a:t>Butano y propano: la frontera de 15 kg</a:t>
-            </a:r>
-          </a:p>
-        </p:txBody>
-      </p:sp>
-      <p:sp>
-        <p:nvSpPr>
-          <p:cNvPr id="7" name="Rounded Rectangle 6"/>
+              <a:t>El tallo: de la calle a la casa</a:t>
+            </a:r>
+          </a:p>
+        </p:txBody>
+      </p:sp>
+      <p:sp>
+        <p:nvSpPr>
+          <p:cNvPr id="7" name="Rectangle 6"/>
           <p:cNvSpPr/>
           <p:nvPr/>
         </p:nvSpPr>
@@ -10978,7 +16290,7 @@
             <a:off x="868680" y="1627632"/>
             <a:ext cx="2011680" cy="73152"/>
           </a:xfrm>
-          <a:prstGeom prst="roundRect">
+          <a:prstGeom prst="rect">
             <a:avLst/>
           </a:prstGeom>
           <a:solidFill>
@@ -11019,8 +16331,8 @@
         </p:nvSpPr>
         <p:spPr>
           <a:xfrm>
-            <a:off x="822960" y="1965960"/>
-            <a:ext cx="4983480" cy="4206240"/>
+            <a:off x="6355080" y="1965960"/>
+            <a:ext cx="5029200" cy="4206240"/>
           </a:xfrm>
           <a:prstGeom prst="rect">
             <a:avLst/>
@@ -11054,7 +16366,7 @@
                 </a:solidFill>
                 <a:latin typeface="Montserrat"/>
               </a:rPr>
-              <a:t>Conjuntos MOPe 5 → UNE 60404-1</a:t>
+              <a:t>Une el PE enterrado con el metal visto</a:t>
             </a:r>
           </a:p>
           <a:p>
@@ -11079,7 +16391,7 @@
                 </a:solidFill>
                 <a:latin typeface="Montserrat"/>
               </a:rPr>
-              <a:t>Reguladores de GLP → UNE-EN 16129</a:t>
+              <a:t>Norma UNE 60405</a:t>
             </a:r>
           </a:p>
           <a:p>
@@ -11104,7 +16416,7 @@
                 </a:solidFill>
                 <a:latin typeface="Montserrat"/>
               </a:rPr>
-              <a:t>Por encima y por debajo de 15 kg</a:t>
+              <a:t>PE-cobre, -acero, -inox o -multicapa</a:t>
             </a:r>
           </a:p>
           <a:p>
@@ -11129,21 +16441,21 @@
                 </a:solidFill>
                 <a:latin typeface="Montserrat"/>
               </a:rPr>
-              <a:t>Adaptador de salida libre ≤ 15 kg → UNE 60408</a:t>
-            </a:r>
-          </a:p>
-        </p:txBody>
-      </p:sp>
-      <p:sp>
-        <p:nvSpPr>
-          <p:cNvPr id="9" name="imgph" descr="IMGQ:propane gas cylinder pressure regulator"/>
+              <a:t>El PE, siempre protegido del sol</a:t>
+            </a:r>
+          </a:p>
+        </p:txBody>
+      </p:sp>
+      <p:sp>
+        <p:nvSpPr>
+          <p:cNvPr id="9" name="imgph" descr="IMGQ:gas service pipe transition fitting ground"/>
           <p:cNvSpPr/>
           <p:nvPr/>
         </p:nvSpPr>
         <p:spPr>
           <a:xfrm>
-            <a:off x="5806440" y="1051560"/>
-            <a:ext cx="5298947" cy="4629150"/>
+            <a:off x="822960" y="1965960"/>
+            <a:ext cx="5303520" cy="4572000"/>
           </a:xfrm>
           <a:prstGeom prst="roundRect">
             <a:avLst/>
@@ -11188,8 +16500,8 @@
         </p:nvSpPr>
         <p:spPr>
           <a:xfrm>
-            <a:off x="6080760" y="2726055"/>
-            <a:ext cx="4750307" cy="1280160"/>
+            <a:off x="1097280" y="3611880"/>
+            <a:ext cx="4754880" cy="1280160"/>
           </a:xfrm>
           <a:prstGeom prst="rect">
             <a:avLst/>
@@ -11210,7 +16522,7 @@
                 </a:solidFill>
                 <a:latin typeface="Montserrat"/>
               </a:rPr>
-              <a:t>IMAGEN REALISTA</a:t>
+              <a:t>IMAGEN</a:t>
             </a:r>
           </a:p>
           <a:p>
@@ -11222,7 +16534,7 @@
                 </a:solidFill>
                 <a:latin typeface="Montserrat"/>
               </a:rPr>
-              <a:t>propane gas cylinder pressure regulator</a:t>
+              <a:t>gas service pipe transition fitting ground</a:t>
             </a:r>
           </a:p>
         </p:txBody>
@@ -11232,6 +16544,18 @@
   <p:clrMapOvr>
     <a:masterClrMapping/>
   </p:clrMapOvr>
+  <mc:AlternateContent xmlns:mc="http://schemas.openxmlformats.org/markup-compatibility/2006">
+    <mc:Choice xmlns:p14="http://schemas.microsoft.com/office/powerpoint/2010/main" Requires="p14">
+      <p:transition spd="med" p14:dur="700">
+        <p14:cube dir="r"/>
+      </p:transition>
+    </mc:Choice>
+    <mc:Fallback>
+      <p:transition spd="med">
+        <p:push dir="r"/>
+      </p:transition>
+    </mc:Fallback>
+  </mc:AlternateContent>
 </p:sld>
 </file>
 
@@ -11319,7 +16643,7 @@
                 </a:solidFill>
                 <a:latin typeface="Montserrat"/>
               </a:rPr>
-              <a:t>009 / 016</a:t>
+              <a:t>009 / 023</a:t>
             </a:r>
           </a:p>
         </p:txBody>
@@ -11387,7 +16711,7 @@
                 </a:solidFill>
                 <a:latin typeface="Montserrat"/>
               </a:rPr>
-              <a:t>SEGURIDAD · VÁLVULAS</a:t>
+              <a:t>REGULACIÓN · 2ª FAMILIA</a:t>
             </a:r>
           </a:p>
         </p:txBody>
@@ -11421,14 +16745,14 @@
                 </a:solidFill>
                 <a:latin typeface="Montserrat"/>
               </a:rPr>
-              <a:t>Los dos guardianes de la presión</a:t>
-            </a:r>
-          </a:p>
-        </p:txBody>
-      </p:sp>
-      <p:sp>
-        <p:nvSpPr>
-          <p:cNvPr id="7" name="Rounded Rectangle 6"/>
+              <a:t>Regular el gas natural</a:t>
+            </a:r>
+          </a:p>
+        </p:txBody>
+      </p:sp>
+      <p:sp>
+        <p:nvSpPr>
+          <p:cNvPr id="7" name="Rectangle 6"/>
           <p:cNvSpPr/>
           <p:nvPr/>
         </p:nvSpPr>
@@ -11437,7 +16761,7 @@
             <a:off x="868680" y="1627632"/>
             <a:ext cx="2011680" cy="73152"/>
           </a:xfrm>
-          <a:prstGeom prst="roundRect">
+          <a:prstGeom prst="rect">
             <a:avLst/>
           </a:prstGeom>
           <a:solidFill>
@@ -11479,7 +16803,7 @@
         <p:spPr>
           <a:xfrm>
             <a:off x="822960" y="1965960"/>
-            <a:ext cx="4983480" cy="4206240"/>
+            <a:ext cx="5029200" cy="4206240"/>
           </a:xfrm>
           <a:prstGeom prst="rect">
             <a:avLst/>
@@ -11513,7 +16837,7 @@
                 </a:solidFill>
                 <a:latin typeface="Montserrat"/>
               </a:rPr>
-              <a:t>VIS de mínima: corta si la presión baja</a:t>
+              <a:t>Aplica al gas natural (2ª familia)</a:t>
             </a:r>
           </a:p>
           <a:p>
@@ -11538,7 +16862,7 @@
                 </a:solidFill>
                 <a:latin typeface="Montserrat"/>
               </a:rPr>
-              <a:t>VIS ≤ 4,8 m³/h → UNE 60403</a:t>
+              <a:t>Estaciones: UNE 60620-3</a:t>
             </a:r>
           </a:p>
           <a:p>
@@ -11563,7 +16887,7 @@
                 </a:solidFill>
                 <a:latin typeface="Montserrat"/>
               </a:rPr>
-              <a:t>Máxima: corta si la presión sube</a:t>
+              <a:t>Conjuntos, por su presión de entrada</a:t>
             </a:r>
           </a:p>
           <a:p>
@@ -11588,21 +16912,21 @@
                 </a:solidFill>
                 <a:latin typeface="Montserrat"/>
               </a:rPr>
-              <a:t>Máxima: rearme manual y tarado precintado</a:t>
-            </a:r>
-          </a:p>
-        </p:txBody>
-      </p:sp>
-      <p:sp>
-        <p:nvSpPr>
-          <p:cNvPr id="9" name="imgph" descr="IMGQ:gas safety shut off valve close up"/>
+              <a:t>MOPe 5, MOPe 0,4 o MOPe 0,15</a:t>
+            </a:r>
+          </a:p>
+        </p:txBody>
+      </p:sp>
+      <p:sp>
+        <p:nvSpPr>
+          <p:cNvPr id="9" name="imgph" descr="IMGQ:gas pressure regulator cabinet outdoor"/>
           <p:cNvSpPr/>
           <p:nvPr/>
         </p:nvSpPr>
         <p:spPr>
           <a:xfrm>
-            <a:off x="5806440" y="1051560"/>
-            <a:ext cx="5298947" cy="4629150"/>
+            <a:off x="6080760" y="1965960"/>
+            <a:ext cx="5303520" cy="4572000"/>
           </a:xfrm>
           <a:prstGeom prst="roundRect">
             <a:avLst/>
@@ -11647,8 +16971,8 @@
         </p:nvSpPr>
         <p:spPr>
           <a:xfrm>
-            <a:off x="6080760" y="2726055"/>
-            <a:ext cx="4750307" cy="1280160"/>
+            <a:off x="6355080" y="3611880"/>
+            <a:ext cx="4754880" cy="1280160"/>
           </a:xfrm>
           <a:prstGeom prst="rect">
             <a:avLst/>
@@ -11669,7 +16993,7 @@
                 </a:solidFill>
                 <a:latin typeface="Montserrat"/>
               </a:rPr>
-              <a:t>IMAGEN REALISTA</a:t>
+              <a:t>IMAGEN</a:t>
             </a:r>
           </a:p>
           <a:p>
@@ -11681,7 +17005,7 @@
                 </a:solidFill>
                 <a:latin typeface="Montserrat"/>
               </a:rPr>
-              <a:t>gas safety shut off valve close up</a:t>
+              <a:t>gas pressure regulator cabinet outdoor</a:t>
             </a:r>
           </a:p>
         </p:txBody>
@@ -11691,6 +17015,18 @@
   <p:clrMapOvr>
     <a:masterClrMapping/>
   </p:clrMapOvr>
+  <mc:AlternateContent xmlns:mc="http://schemas.openxmlformats.org/markup-compatibility/2006">
+    <mc:Choice xmlns:p14="http://schemas.microsoft.com/office/powerpoint/2010/main" Requires="p14">
+      <p:transition spd="med" p14:dur="700">
+        <p14:cube dir="l"/>
+      </p:transition>
+    </mc:Choice>
+    <mc:Fallback>
+      <p:transition spd="med">
+        <p:push dir="l"/>
+      </p:transition>
+    </mc:Fallback>
+  </mc:AlternateContent>
 </p:sld>
 </file>
 

--- a/Curso Gas B/10 - UNE 60670 - Tuberias, accesorios y uniones/10 - UNE 60670 - Tuberias, accesorios y uniones - Vídeo 2.pptx
+++ b/Curso Gas B/10 - UNE 60670 - Tuberias, accesorios y uniones/10 - UNE 60670 - Tuberias, accesorios y uniones - Vídeo 2.pptx
@@ -824,12 +824,12 @@
           <a:lstStyle/>
           <a:p>
             <a:r>
-              <a:t>N1: Hablemos de los dos guardianes. La válvula de máxima presión, ¿cómo se rearma cuando salta?</a:t>
-            </a:r>
-          </a:p>
-          <a:p>
-            <a:r>
-              <a:t>N2: Piensa en para qué salta: si la presión ha subido de más, ¿te interesa que se reponga sola sin que nadie mire qué ha pasado?</a:t>
+              <a:t>N1: Hablemos de los dos guardianes de la presión. Pregunta: la válvula de seguridad por máxima presión debe ser siempre... ¿cómo? Escucha las cuatro opciones. Opción A, de rearme automático. Opción B, de rearme manual. Opción C, de accionamiento eléctrico. Opción D, de tarado sin precintar. Párate a pensarlo.</a:t>
+            </a:r>
+          </a:p>
+          <a:p>
+            <a:r>
+              <a:t>N2: Una pista: piensa para qué salta esa válvula; si la presión ha subido de más, ¿te interesa que se reponga sola sin que nadie mire qué ha pasado?</a:t>
             </a:r>
           </a:p>
         </p:txBody>
@@ -899,12 +899,12 @@
           <a:lstStyle/>
           <a:p>
             <a:r>
-              <a:t>N1: ¿Por qué manual y no automática?</a:t>
-            </a:r>
-          </a:p>
-          <a:p>
-            <a:r>
-              <a:t>N2: Porque si se rearmara sola, nadie se enteraría de que hubo un problema de presión. Al ser de rearme manual, obliga a que alguien vaya, mire por qué saltó y lo resuelva. Y sus tornillos de tarado van precintados para que nadie los toque.</a:t>
+              <a:t>N2: La respuesta correcta es la opción B: de rearme manual. ¿Por qué manual y no automática? Porque si se rearmara sola, nadie se enteraría de que hubo un problema de presión. Al ser de rearme manual, obliga a que alguien vaya, mire por qué saltó y lo resuelva. Y ojo al detalle de la opción D: sus tornillos de tarado van precintados justamente para que nadie los toque, así que 'sin precintar' también es falso.</a:t>
+            </a:r>
+          </a:p>
+          <a:p>
+            <a:r>
+              <a:t>N1: Máxima presión, siempre rearme manual y tarado precintado.</a:t>
             </a:r>
           </a:p>
         </p:txBody>
@@ -1424,12 +1424,12 @@
           <a:lstStyle/>
           <a:p>
             <a:r>
-              <a:t>N1: Dato de cifra exacta, de los que valen un punto entero. ¿Cuánto puede medir como mucho el flexible del contador?</a:t>
-            </a:r>
-          </a:p>
-          <a:p>
-            <a:r>
-              <a:t>N2: Es un número redondo por debajo del metro; piensa en ochenta centímetros.</a:t>
+              <a:t>N1: Dato de cifra exacta, de los que valen un punto entero. La pregunta: ¿cuál es la longitud máxima del tubo flexible que conecta el contador de gas? Aquí van las opciones. Opción A, cero coma cincuenta metros. Opción B, cero coma ochenta metros. Opción C, un metro. Opción D, uno coma cincuenta metros. Piensa un momento antes de seguir.</a:t>
+            </a:r>
+          </a:p>
+          <a:p>
+            <a:r>
+              <a:t>N2: Una pista: es un número redondo por debajo del metro; piensa en ochenta centímetros.</a:t>
             </a:r>
           </a:p>
         </p:txBody>
@@ -1499,12 +1499,12 @@
           <a:lstStyle/>
           <a:p>
             <a:r>
-              <a:t>N1: ¿Por qué se limita esa longitud?</a:t>
-            </a:r>
-          </a:p>
-          <a:p>
-            <a:r>
-              <a:t>N2: Porque un flexible largo cuelga, se mueve, sufre y termina fallando; cuanto más corto, más seguro. El tope es cero coma ochenta metros. Y no lo confundas con los flexibles de aparato o de bombona, que tienen sus propias longitudes en la parte siete.</a:t>
+              <a:t>N2: La respuesta correcta es la opción B: cero coma ochenta metros. ¿Por qué se limita esa longitud? Porque un flexible largo cuelga, se mueve, sufre y termina fallando; cuanto más corto, más seguro. El flexible del contador es de acero inoxidable corrugado y no puede pasar de cero coma ochenta metros, ochenta centímetros. El truco para no fallar: no lo confundas con los flexibles de aparato o de bombona, que tienen sus propias longitudes en la parte siete.</a:t>
+            </a:r>
+          </a:p>
+          <a:p>
+            <a:r>
+              <a:t>N1: Contador, ochenta centímetros como mucho.</a:t>
             </a:r>
           </a:p>
         </p:txBody>
@@ -1950,12 +1950,12 @@
           <a:lstStyle/>
           <a:p>
             <a:r>
-              <a:t>N1: Recién vista la tabla, vamos a estrenarla. Un tramo que trabaja a uno coma cinco bar, ¿qué denominación le toca?</a:t>
-            </a:r>
-          </a:p>
-          <a:p>
-            <a:r>
-              <a:t>N2: Busca en qué peldaño de la escalera cae ese valor, y recuerda que el escalón se nombra por su número de arriba.</a:t>
+              <a:t>N1: Recién vista la tabla de presiones, vamos a estrenarla. Atento: un tramo que trabaja a una MOP de uno coma cinco bar, ¿cómo se denomina a efectos de diseño? Te leo las opciones. Opción A, eme-o-pe cero coma cuatro. Opción B, eme-o-pe dos. Opción C, eme-o-pe cinco. Opción D, eme-o-pe uno coma cinco. Piensa en qué peldaño de la escalera cae ese valor.</a:t>
+            </a:r>
+          </a:p>
+          <a:p>
+            <a:r>
+              <a:t>N2: Recuerda que cada escalón se nombra por su número de arriba, no por la presión exacta del tramo.</a:t>
             </a:r>
           </a:p>
         </p:txBody>
@@ -2025,12 +2025,12 @@
           <a:lstStyle/>
           <a:p>
             <a:r>
-              <a:t>N1: ¿Por qué eme-o-pe dos y no eme-o-pe uno coma cinco?</a:t>
-            </a:r>
-          </a:p>
-          <a:p>
-            <a:r>
-              <a:t>N2: Porque uno coma cinco está entre cero coma cuatro y dos, y ese escalón se llama por su techo, que es dos. El nombre nunca es la presión exacta del tramo, sino el valor superior del peldaño. Por eso 'eme-o-pe uno coma cinco' ni siquiera existe.</a:t>
+              <a:t>N2: La respuesta correcta es la opción B: eme-o-pe dos. ¿Por qué eme-o-pe dos y no eme-o-pe uno coma cinco? Porque uno coma cinco cae en el escalón que va de cero coma cuatro a dos bar, y ese peldaño se nombra por su techo, que es dos. El nombre nunca es la presión exacta del tramo, sino el valor superior del escalón. El truco: 'eme-o-pe uno coma cinco' ni siquiera existe, así que esa opción descártala de entrada.</a:t>
+            </a:r>
+          </a:p>
+          <a:p>
+            <a:r>
+              <a:t>N1: Localiza el peldaño y quédate con su número de arriba.</a:t>
             </a:r>
           </a:p>
         </p:txBody>
